--- a/slides/ut.pptx
+++ b/slides/ut.pptx
@@ -5,7 +5,7 @@
     <p:sldMasterId id="2147483708" r:id="rId1"/>
   </p:sldMasterIdLst>
   <p:notesMasterIdLst>
-    <p:notesMasterId r:id="rId46"/>
+    <p:notesMasterId r:id="rId48"/>
   </p:notesMasterIdLst>
   <p:sldIdLst>
     <p:sldId id="256" r:id="rId2"/>
@@ -41,17 +41,19 @@
     <p:sldId id="316" r:id="rId32"/>
     <p:sldId id="317" r:id="rId33"/>
     <p:sldId id="318" r:id="rId34"/>
-    <p:sldId id="307" r:id="rId35"/>
-    <p:sldId id="272" r:id="rId36"/>
-    <p:sldId id="334" r:id="rId37"/>
-    <p:sldId id="335" r:id="rId38"/>
-    <p:sldId id="333" r:id="rId39"/>
-    <p:sldId id="324" r:id="rId40"/>
-    <p:sldId id="269" r:id="rId41"/>
-    <p:sldId id="305" r:id="rId42"/>
-    <p:sldId id="274" r:id="rId43"/>
-    <p:sldId id="321" r:id="rId44"/>
-    <p:sldId id="306" r:id="rId45"/>
+    <p:sldId id="324" r:id="rId35"/>
+    <p:sldId id="269" r:id="rId36"/>
+    <p:sldId id="305" r:id="rId37"/>
+    <p:sldId id="274" r:id="rId38"/>
+    <p:sldId id="343" r:id="rId39"/>
+    <p:sldId id="344" r:id="rId40"/>
+    <p:sldId id="321" r:id="rId41"/>
+    <p:sldId id="306" r:id="rId42"/>
+    <p:sldId id="307" r:id="rId43"/>
+    <p:sldId id="272" r:id="rId44"/>
+    <p:sldId id="334" r:id="rId45"/>
+    <p:sldId id="335" r:id="rId46"/>
+    <p:sldId id="333" r:id="rId47"/>
   </p:sldIdLst>
   <p:sldSz cx="9144000" cy="6858000" type="screen4x3"/>
   <p:notesSz cx="6858000" cy="9144000"/>
@@ -308,7 +310,7 @@
               <a:pPr>
                 <a:defRPr/>
               </a:pPr>
-              <a:t>21-04-2025</a:t>
+              <a:t>10-04-2026</a:t>
             </a:fld>
             <a:endParaRPr lang="en-US"/>
           </a:p>
@@ -744,29 +746,19 @@
       </p:grpSpPr>
       <p:sp>
         <p:nvSpPr>
-          <p:cNvPr id="55298" name="Slide Image Placeholder 1"/>
+          <p:cNvPr id="2" name="Slide Image Placeholder 1"/>
           <p:cNvSpPr>
-            <a:spLocks noGrp="1" noRot="1" noChangeAspect="1" noTextEdit="1"/>
+            <a:spLocks noGrp="1" noRot="1" noChangeAspect="1"/>
           </p:cNvSpPr>
           <p:nvPr>
             <p:ph type="sldImg"/>
           </p:nvPr>
         </p:nvSpPr>
-        <p:spPr bwMode="auto">
-          <a:noFill/>
-          <a:ln>
-            <a:solidFill>
-              <a:srgbClr val="000000"/>
-            </a:solidFill>
-            <a:miter lim="800000"/>
-            <a:headEnd/>
-            <a:tailEnd/>
-          </a:ln>
-        </p:spPr>
-      </p:sp>
-      <p:sp>
-        <p:nvSpPr>
-          <p:cNvPr id="55299" name="Notes Placeholder 2"/>
+        <p:spPr/>
+      </p:sp>
+      <p:sp>
+        <p:nvSpPr>
+          <p:cNvPr id="3" name="Notes Placeholder 2"/>
           <p:cNvSpPr>
             <a:spLocks noGrp="1"/>
           </p:cNvSpPr>
@@ -774,19 +766,10 @@
             <p:ph type="body" idx="1"/>
           </p:nvPr>
         </p:nvSpPr>
-        <p:spPr bwMode="auto">
-          <a:noFill/>
-        </p:spPr>
-        <p:txBody>
-          <a:bodyPr wrap="square" numCol="1" anchor="t" anchorCtr="0" compatLnSpc="1">
-            <a:prstTxWarp prst="textNoShape">
-              <a:avLst/>
-            </a:prstTxWarp>
-          </a:bodyPr>
-          <a:lstStyle/>
-          <a:p>
-            <a:endParaRPr lang="en-US" dirty="0"/>
-          </a:p>
+        <p:spPr/>
+        <p:txBody>
+          <a:bodyPr/>
+          <a:lstStyle/>
           <a:p>
             <a:endParaRPr lang="en-US" dirty="0"/>
           </a:p>
@@ -799,7 +782,7 @@
             <a:spLocks noGrp="1"/>
           </p:cNvSpPr>
           <p:nvPr>
-            <p:ph type="sldNum" sz="quarter" idx="5"/>
+            <p:ph type="sldNum" sz="quarter" idx="10"/>
           </p:nvPr>
         </p:nvSpPr>
         <p:spPr/>
@@ -810,12 +793,12 @@
             <a:pPr>
               <a:defRPr/>
             </a:pPr>
-            <a:fld id="{EC5B1458-9BA2-4FCA-B083-2E2B2AD6D16B}" type="slidenum">
+            <a:fld id="{F84EA20E-9838-494E-B9DD-2C988F7E650A}" type="slidenum">
               <a:rPr lang="en-US" smtClean="0"/>
               <a:pPr>
                 <a:defRPr/>
               </a:pPr>
-              <a:t>35</a:t>
+              <a:t>33</a:t>
             </a:fld>
             <a:endParaRPr lang="en-US"/>
           </a:p>
@@ -824,7 +807,7 @@
     </p:spTree>
     <p:extLst>
       <p:ext uri="{BB962C8B-B14F-4D97-AF65-F5344CB8AC3E}">
-        <p14:creationId xmlns:p14="http://schemas.microsoft.com/office/powerpoint/2010/main" val="1763036822"/>
+        <p14:creationId xmlns:p14="http://schemas.microsoft.com/office/powerpoint/2010/main" val="1375514086"/>
       </p:ext>
     </p:extLst>
   </p:cSld>
@@ -853,29 +836,19 @@
       </p:grpSpPr>
       <p:sp>
         <p:nvSpPr>
-          <p:cNvPr id="55298" name="Slide Image Placeholder 1"/>
+          <p:cNvPr id="2" name="Slide Image Placeholder 1"/>
           <p:cNvSpPr>
-            <a:spLocks noGrp="1" noRot="1" noChangeAspect="1" noTextEdit="1"/>
+            <a:spLocks noGrp="1" noRot="1" noChangeAspect="1"/>
           </p:cNvSpPr>
           <p:nvPr>
             <p:ph type="sldImg"/>
           </p:nvPr>
         </p:nvSpPr>
-        <p:spPr bwMode="auto">
-          <a:noFill/>
-          <a:ln>
-            <a:solidFill>
-              <a:srgbClr val="000000"/>
-            </a:solidFill>
-            <a:miter lim="800000"/>
-            <a:headEnd/>
-            <a:tailEnd/>
-          </a:ln>
-        </p:spPr>
-      </p:sp>
-      <p:sp>
-        <p:nvSpPr>
-          <p:cNvPr id="55299" name="Notes Placeholder 2"/>
+        <p:spPr/>
+      </p:sp>
+      <p:sp>
+        <p:nvSpPr>
+          <p:cNvPr id="3" name="Notes Placeholder 2"/>
           <p:cNvSpPr>
             <a:spLocks noGrp="1"/>
           </p:cNvSpPr>
@@ -883,60 +856,12 @@
             <p:ph type="body" idx="1"/>
           </p:nvPr>
         </p:nvSpPr>
-        <p:spPr bwMode="auto">
-          <a:noFill/>
-        </p:spPr>
-        <p:txBody>
-          <a:bodyPr wrap="square" numCol="1" anchor="t" anchorCtr="0" compatLnSpc="1">
-            <a:prstTxWarp prst="textNoShape">
-              <a:avLst/>
-            </a:prstTxWarp>
-          </a:bodyPr>
-          <a:lstStyle/>
-          <a:p>
-            <a:pPr marL="0" marR="0" lvl="0" indent="0" algn="l" defTabSz="914400" rtl="0" eaLnBrk="0" fontAlgn="base" latinLnBrk="0" hangingPunct="0">
-              <a:lnSpc>
-                <a:spcPct val="100000"/>
-              </a:lnSpc>
-              <a:spcBef>
-                <a:spcPct val="30000"/>
-              </a:spcBef>
-              <a:spcAft>
-                <a:spcPct val="0"/>
-              </a:spcAft>
-              <a:buClrTx/>
-              <a:buSzTx/>
-              <a:buFontTx/>
-              <a:buNone/>
-              <a:tabLst/>
-              <a:defRPr/>
-            </a:pPr>
-            <a:r>
-              <a:rPr lang="en-US" dirty="0"/>
-              <a:t>There are other mock framework for .NET, e.g. </a:t>
-            </a:r>
-            <a:r>
-              <a:rPr lang="en-US" dirty="0" err="1"/>
-              <a:t>Moq</a:t>
-            </a:r>
-            <a:r>
-              <a:rPr lang="en-US" dirty="0"/>
-              <a:t>, rhino, </a:t>
-            </a:r>
-            <a:r>
-              <a:rPr lang="en-US" dirty="0" err="1"/>
-              <a:t>easymock</a:t>
-            </a:r>
-            <a:r>
-              <a:rPr lang="en-US" dirty="0"/>
-              <a:t>, etc. </a:t>
-            </a:r>
-          </a:p>
-          <a:p>
-            <a:endParaRPr lang="en-US" dirty="0"/>
-          </a:p>
-          <a:p>
-            <a:endParaRPr lang="en-US" dirty="0"/>
+        <p:spPr/>
+        <p:txBody>
+          <a:bodyPr/>
+          <a:lstStyle/>
+          <a:p>
+            <a:endParaRPr lang="en-NL" dirty="0"/>
           </a:p>
         </p:txBody>
       </p:sp>
@@ -958,7 +883,7 @@
             <a:pPr>
               <a:defRPr/>
             </a:pPr>
-            <a:fld id="{EC5B1458-9BA2-4FCA-B083-2E2B2AD6D16B}" type="slidenum">
+            <a:fld id="{F84EA20E-9838-494E-B9DD-2C988F7E650A}" type="slidenum">
               <a:rPr lang="en-US" smtClean="0"/>
               <a:pPr>
                 <a:defRPr/>
@@ -972,7 +897,7 @@
     </p:spTree>
     <p:extLst>
       <p:ext uri="{BB962C8B-B14F-4D97-AF65-F5344CB8AC3E}">
-        <p14:creationId xmlns:p14="http://schemas.microsoft.com/office/powerpoint/2010/main" val="791692650"/>
+        <p14:creationId xmlns:p14="http://schemas.microsoft.com/office/powerpoint/2010/main" val="3120005148"/>
       </p:ext>
     </p:extLst>
   </p:cSld>
@@ -1023,671 +948,10 @@
         </p:nvSpPr>
         <p:spPr/>
         <p:txBody>
-          <a:bodyPr>
-            <a:normAutofit fontScale="77500" lnSpcReduction="20000"/>
-          </a:bodyPr>
-          <a:lstStyle/>
-          <a:p>
-            <a:r>
-              <a:rPr lang="en-US" dirty="0"/>
-              <a:t>Note:</a:t>
-            </a:r>
-          </a:p>
-          <a:p>
-            <a:endParaRPr lang="en-US" dirty="0"/>
-          </a:p>
-          <a:p>
-            <a:r>
-              <a:rPr lang="en-US" dirty="0"/>
-              <a:t>The method “For&lt;I&gt;()” creates an instance of I. </a:t>
-            </a:r>
-          </a:p>
-          <a:p>
-            <a:endParaRPr lang="en-US" dirty="0"/>
-          </a:p>
-          <a:p>
-            <a:r>
-              <a:rPr lang="en-US" dirty="0"/>
-              <a:t>The method “Returns” is probably more magical, especially for Java programmer. E.g. in the above example the method “value(x)” of </a:t>
-            </a:r>
-            <a:r>
-              <a:rPr lang="en-US" dirty="0" err="1"/>
-              <a:t>IThremometer</a:t>
-            </a:r>
-            <a:r>
-              <a:rPr lang="en-US" dirty="0"/>
-              <a:t> returns a “double”. Now, in C# primitives like double are also objects. </a:t>
-            </a:r>
-          </a:p>
-          <a:p>
-            <a:endParaRPr lang="en-US" dirty="0"/>
-          </a:p>
-          <a:p>
-            <a:r>
-              <a:rPr lang="en-US" dirty="0"/>
-              <a:t>Furthermore C# allows a class, including primitives, to be “method-extended”. Normal class can be sub-classed. But primitives and sealed classes cannot be sub-classed. However, C# allows a syntactic sugar called “extension method”. Example with extending string:</a:t>
-            </a:r>
-          </a:p>
-          <a:p>
-            <a:endParaRPr lang="en-US" dirty="0"/>
-          </a:p>
-          <a:p>
-            <a:r>
-              <a:rPr lang="en-US" sz="1200" b="1" i="0" kern="1200" dirty="0">
-                <a:solidFill>
-                  <a:schemeClr val="tx1"/>
-                </a:solidFill>
-                <a:effectLst/>
-                <a:latin typeface="+mn-lt"/>
-                <a:ea typeface="+mn-ea"/>
-                <a:cs typeface="+mn-cs"/>
-              </a:rPr>
-              <a:t>static</a:t>
-            </a:r>
-            <a:r>
-              <a:rPr lang="en-US" sz="1200" b="0" i="0" kern="1200" dirty="0">
-                <a:solidFill>
-                  <a:schemeClr val="tx1"/>
-                </a:solidFill>
-                <a:effectLst/>
-                <a:latin typeface="+mn-lt"/>
-                <a:ea typeface="+mn-ea"/>
-                <a:cs typeface="+mn-cs"/>
-              </a:rPr>
-              <a:t> </a:t>
-            </a:r>
-            <a:r>
-              <a:rPr lang="en-US" sz="1200" b="1" i="0" kern="1200" dirty="0">
-                <a:solidFill>
-                  <a:schemeClr val="tx1"/>
-                </a:solidFill>
-                <a:effectLst/>
-                <a:latin typeface="+mn-lt"/>
-                <a:ea typeface="+mn-ea"/>
-                <a:cs typeface="+mn-cs"/>
-              </a:rPr>
-              <a:t>class</a:t>
-            </a:r>
-            <a:r>
-              <a:rPr lang="en-US" sz="1200" b="0" i="0" kern="1200" dirty="0">
-                <a:solidFill>
-                  <a:schemeClr val="tx1"/>
-                </a:solidFill>
-                <a:effectLst/>
-                <a:latin typeface="+mn-lt"/>
-                <a:ea typeface="+mn-ea"/>
-                <a:cs typeface="+mn-cs"/>
-              </a:rPr>
-              <a:t>  Extensions  </a:t>
-            </a:r>
-          </a:p>
-          <a:p>
-            <a:r>
-              <a:rPr lang="en-US" sz="1200" b="0" i="0" kern="1200" dirty="0">
-                <a:solidFill>
-                  <a:schemeClr val="tx1"/>
-                </a:solidFill>
-                <a:effectLst/>
-                <a:latin typeface="+mn-lt"/>
-                <a:ea typeface="+mn-ea"/>
-                <a:cs typeface="+mn-cs"/>
-              </a:rPr>
-              <a:t>    {  </a:t>
-            </a:r>
-          </a:p>
-          <a:p>
-            <a:r>
-              <a:rPr lang="en-US" sz="1200" b="0" i="0" kern="1200" dirty="0">
-                <a:solidFill>
-                  <a:schemeClr val="tx1"/>
-                </a:solidFill>
-                <a:effectLst/>
-                <a:latin typeface="+mn-lt"/>
-                <a:ea typeface="+mn-ea"/>
-                <a:cs typeface="+mn-cs"/>
-              </a:rPr>
-              <a:t>        </a:t>
-            </a:r>
-            <a:r>
-              <a:rPr lang="en-US" sz="1200" b="1" i="0" kern="1200" dirty="0">
-                <a:solidFill>
-                  <a:schemeClr val="tx1"/>
-                </a:solidFill>
-                <a:effectLst/>
-                <a:latin typeface="+mn-lt"/>
-                <a:ea typeface="+mn-ea"/>
-                <a:cs typeface="+mn-cs"/>
-              </a:rPr>
-              <a:t>public</a:t>
-            </a:r>
-            <a:r>
-              <a:rPr lang="en-US" sz="1200" b="0" i="0" kern="1200" dirty="0">
-                <a:solidFill>
-                  <a:schemeClr val="tx1"/>
-                </a:solidFill>
-                <a:effectLst/>
-                <a:latin typeface="+mn-lt"/>
-                <a:ea typeface="+mn-ea"/>
-                <a:cs typeface="+mn-cs"/>
-              </a:rPr>
-              <a:t> </a:t>
-            </a:r>
-            <a:r>
-              <a:rPr lang="en-US" sz="1200" b="1" i="0" kern="1200" dirty="0">
-                <a:solidFill>
-                  <a:schemeClr val="tx1"/>
-                </a:solidFill>
-                <a:effectLst/>
-                <a:latin typeface="+mn-lt"/>
-                <a:ea typeface="+mn-ea"/>
-                <a:cs typeface="+mn-cs"/>
-              </a:rPr>
-              <a:t>static</a:t>
-            </a:r>
-            <a:r>
-              <a:rPr lang="en-US" sz="1200" b="0" i="0" kern="1200" dirty="0">
-                <a:solidFill>
-                  <a:schemeClr val="tx1"/>
-                </a:solidFill>
-                <a:effectLst/>
-                <a:latin typeface="+mn-lt"/>
-                <a:ea typeface="+mn-ea"/>
-                <a:cs typeface="+mn-cs"/>
-              </a:rPr>
-              <a:t> </a:t>
-            </a:r>
-            <a:r>
-              <a:rPr lang="en-US" sz="1200" b="1" i="0" kern="1200" dirty="0">
-                <a:solidFill>
-                  <a:schemeClr val="tx1"/>
-                </a:solidFill>
-                <a:effectLst/>
-                <a:latin typeface="+mn-lt"/>
-                <a:ea typeface="+mn-ea"/>
-                <a:cs typeface="+mn-cs"/>
-              </a:rPr>
-              <a:t>string</a:t>
-            </a:r>
-            <a:r>
-              <a:rPr lang="en-US" sz="1200" b="0" i="0" kern="1200" dirty="0">
-                <a:solidFill>
-                  <a:schemeClr val="tx1"/>
-                </a:solidFill>
-                <a:effectLst/>
-                <a:latin typeface="+mn-lt"/>
-                <a:ea typeface="+mn-ea"/>
-                <a:cs typeface="+mn-cs"/>
-              </a:rPr>
-              <a:t> </a:t>
-            </a:r>
-            <a:r>
-              <a:rPr lang="en-US" sz="1200" b="0" i="0" kern="1200" dirty="0" err="1">
-                <a:solidFill>
-                  <a:schemeClr val="tx1"/>
-                </a:solidFill>
-                <a:effectLst/>
-                <a:latin typeface="+mn-lt"/>
-                <a:ea typeface="+mn-ea"/>
-                <a:cs typeface="+mn-cs"/>
-              </a:rPr>
-              <a:t>UpperFirst</a:t>
-            </a:r>
-            <a:r>
-              <a:rPr lang="en-US" sz="1200" b="0" i="0" kern="1200" dirty="0">
-                <a:solidFill>
-                  <a:schemeClr val="tx1"/>
-                </a:solidFill>
-                <a:effectLst/>
-                <a:latin typeface="+mn-lt"/>
-                <a:ea typeface="+mn-ea"/>
-                <a:cs typeface="+mn-cs"/>
-              </a:rPr>
-              <a:t>(</a:t>
-            </a:r>
-            <a:r>
-              <a:rPr lang="en-US" sz="1200" b="1" i="0" kern="1200" dirty="0">
-                <a:solidFill>
-                  <a:schemeClr val="tx1"/>
-                </a:solidFill>
-                <a:effectLst/>
-                <a:latin typeface="+mn-lt"/>
-                <a:ea typeface="+mn-ea"/>
-                <a:cs typeface="+mn-cs"/>
-              </a:rPr>
-              <a:t>this</a:t>
-            </a:r>
-            <a:r>
-              <a:rPr lang="en-US" sz="1200" b="0" i="0" kern="1200" dirty="0">
-                <a:solidFill>
-                  <a:schemeClr val="tx1"/>
-                </a:solidFill>
-                <a:effectLst/>
-                <a:latin typeface="+mn-lt"/>
-                <a:ea typeface="+mn-ea"/>
-                <a:cs typeface="+mn-cs"/>
-              </a:rPr>
-              <a:t> String </a:t>
-            </a:r>
-            <a:r>
-              <a:rPr lang="en-US" sz="1200" b="0" i="0" kern="1200" dirty="0" err="1">
-                <a:solidFill>
-                  <a:schemeClr val="tx1"/>
-                </a:solidFill>
-                <a:effectLst/>
-                <a:latin typeface="+mn-lt"/>
-                <a:ea typeface="+mn-ea"/>
-                <a:cs typeface="+mn-cs"/>
-              </a:rPr>
-              <a:t>str</a:t>
-            </a:r>
-            <a:r>
-              <a:rPr lang="en-US" sz="1200" b="0" i="0" kern="1200" dirty="0">
-                <a:solidFill>
-                  <a:schemeClr val="tx1"/>
-                </a:solidFill>
-                <a:effectLst/>
-                <a:latin typeface="+mn-lt"/>
-                <a:ea typeface="+mn-ea"/>
-                <a:cs typeface="+mn-cs"/>
-              </a:rPr>
-              <a:t>)  </a:t>
-            </a:r>
-          </a:p>
-          <a:p>
-            <a:r>
-              <a:rPr lang="en-US" sz="1200" b="0" i="0" kern="1200" dirty="0">
-                <a:solidFill>
-                  <a:schemeClr val="tx1"/>
-                </a:solidFill>
-                <a:effectLst/>
-                <a:latin typeface="+mn-lt"/>
-                <a:ea typeface="+mn-ea"/>
-                <a:cs typeface="+mn-cs"/>
-              </a:rPr>
-              <a:t>        {  </a:t>
-            </a:r>
-          </a:p>
-          <a:p>
-            <a:r>
-              <a:rPr lang="en-US" sz="1200" b="0" i="0" kern="1200" dirty="0">
-                <a:solidFill>
-                  <a:schemeClr val="tx1"/>
-                </a:solidFill>
-                <a:effectLst/>
-                <a:latin typeface="+mn-lt"/>
-                <a:ea typeface="+mn-ea"/>
-                <a:cs typeface="+mn-cs"/>
-              </a:rPr>
-              <a:t>            </a:t>
-            </a:r>
-            <a:r>
-              <a:rPr lang="en-US" sz="1200" b="1" i="0" kern="1200" dirty="0">
-                <a:solidFill>
-                  <a:schemeClr val="tx1"/>
-                </a:solidFill>
-                <a:effectLst/>
-                <a:latin typeface="+mn-lt"/>
-                <a:ea typeface="+mn-ea"/>
-                <a:cs typeface="+mn-cs"/>
-              </a:rPr>
-              <a:t>if</a:t>
-            </a:r>
-            <a:r>
-              <a:rPr lang="en-US" sz="1200" b="0" i="0" kern="1200" dirty="0">
-                <a:solidFill>
-                  <a:schemeClr val="tx1"/>
-                </a:solidFill>
-                <a:effectLst/>
-                <a:latin typeface="+mn-lt"/>
-                <a:ea typeface="+mn-ea"/>
-                <a:cs typeface="+mn-cs"/>
-              </a:rPr>
-              <a:t> (</a:t>
-            </a:r>
-            <a:r>
-              <a:rPr lang="en-US" sz="1200" b="0" i="0" kern="1200" dirty="0" err="1">
-                <a:solidFill>
-                  <a:schemeClr val="tx1"/>
-                </a:solidFill>
-                <a:effectLst/>
-                <a:latin typeface="+mn-lt"/>
-                <a:ea typeface="+mn-ea"/>
-                <a:cs typeface="+mn-cs"/>
-              </a:rPr>
-              <a:t>String.IsNullOrEmpty</a:t>
-            </a:r>
-            <a:r>
-              <a:rPr lang="en-US" sz="1200" b="0" i="0" kern="1200" dirty="0">
-                <a:solidFill>
-                  <a:schemeClr val="tx1"/>
-                </a:solidFill>
-                <a:effectLst/>
-                <a:latin typeface="+mn-lt"/>
-                <a:ea typeface="+mn-ea"/>
-                <a:cs typeface="+mn-cs"/>
-              </a:rPr>
-              <a:t>(</a:t>
-            </a:r>
-            <a:r>
-              <a:rPr lang="en-US" sz="1200" b="0" i="0" kern="1200" dirty="0" err="1">
-                <a:solidFill>
-                  <a:schemeClr val="tx1"/>
-                </a:solidFill>
-                <a:effectLst/>
-                <a:latin typeface="+mn-lt"/>
-                <a:ea typeface="+mn-ea"/>
-                <a:cs typeface="+mn-cs"/>
-              </a:rPr>
-              <a:t>str</a:t>
-            </a:r>
-            <a:r>
-              <a:rPr lang="en-US" sz="1200" b="0" i="0" kern="1200" dirty="0">
-                <a:solidFill>
-                  <a:schemeClr val="tx1"/>
-                </a:solidFill>
-                <a:effectLst/>
-                <a:latin typeface="+mn-lt"/>
-                <a:ea typeface="+mn-ea"/>
-                <a:cs typeface="+mn-cs"/>
-              </a:rPr>
-              <a:t>))  </a:t>
-            </a:r>
-          </a:p>
-          <a:p>
-            <a:r>
-              <a:rPr lang="en-US" sz="1200" b="0" i="0" kern="1200" dirty="0">
-                <a:solidFill>
-                  <a:schemeClr val="tx1"/>
-                </a:solidFill>
-                <a:effectLst/>
-                <a:latin typeface="+mn-lt"/>
-                <a:ea typeface="+mn-ea"/>
-                <a:cs typeface="+mn-cs"/>
-              </a:rPr>
-              <a:t>                </a:t>
-            </a:r>
-            <a:r>
-              <a:rPr lang="en-US" sz="1200" b="1" i="0" kern="1200" dirty="0">
-                <a:solidFill>
-                  <a:schemeClr val="tx1"/>
-                </a:solidFill>
-                <a:effectLst/>
-                <a:latin typeface="+mn-lt"/>
-                <a:ea typeface="+mn-ea"/>
-                <a:cs typeface="+mn-cs"/>
-              </a:rPr>
-              <a:t>return</a:t>
-            </a:r>
-            <a:r>
-              <a:rPr lang="en-US" sz="1200" b="0" i="0" kern="1200" dirty="0">
-                <a:solidFill>
-                  <a:schemeClr val="tx1"/>
-                </a:solidFill>
-                <a:effectLst/>
-                <a:latin typeface="+mn-lt"/>
-                <a:ea typeface="+mn-ea"/>
-                <a:cs typeface="+mn-cs"/>
-              </a:rPr>
-              <a:t> </a:t>
-            </a:r>
-            <a:r>
-              <a:rPr lang="en-US" sz="1200" b="0" i="0" kern="1200" dirty="0" err="1">
-                <a:solidFill>
-                  <a:schemeClr val="tx1"/>
-                </a:solidFill>
-                <a:effectLst/>
-                <a:latin typeface="+mn-lt"/>
-                <a:ea typeface="+mn-ea"/>
-                <a:cs typeface="+mn-cs"/>
-              </a:rPr>
-              <a:t>String.Empty</a:t>
-            </a:r>
-            <a:r>
-              <a:rPr lang="en-US" sz="1200" b="0" i="0" kern="1200" dirty="0">
-                <a:solidFill>
-                  <a:schemeClr val="tx1"/>
-                </a:solidFill>
-                <a:effectLst/>
-                <a:latin typeface="+mn-lt"/>
-                <a:ea typeface="+mn-ea"/>
-                <a:cs typeface="+mn-cs"/>
-              </a:rPr>
-              <a:t>;  </a:t>
-            </a:r>
-          </a:p>
-          <a:p>
-            <a:r>
-              <a:rPr lang="en-US" sz="1200" b="0" i="0" kern="1200" dirty="0">
-                <a:solidFill>
-                  <a:schemeClr val="tx1"/>
-                </a:solidFill>
-                <a:effectLst/>
-                <a:latin typeface="+mn-lt"/>
-                <a:ea typeface="+mn-ea"/>
-                <a:cs typeface="+mn-cs"/>
-              </a:rPr>
-              <a:t>  </a:t>
-            </a:r>
-          </a:p>
-          <a:p>
-            <a:r>
-              <a:rPr lang="en-US" sz="1200" b="0" i="0" kern="1200" dirty="0">
-                <a:solidFill>
-                  <a:schemeClr val="tx1"/>
-                </a:solidFill>
-                <a:effectLst/>
-                <a:latin typeface="+mn-lt"/>
-                <a:ea typeface="+mn-ea"/>
-                <a:cs typeface="+mn-cs"/>
-              </a:rPr>
-              <a:t>            </a:t>
-            </a:r>
-            <a:r>
-              <a:rPr lang="en-US" sz="1200" b="1" i="0" kern="1200" dirty="0">
-                <a:solidFill>
-                  <a:schemeClr val="tx1"/>
-                </a:solidFill>
-                <a:effectLst/>
-                <a:latin typeface="+mn-lt"/>
-                <a:ea typeface="+mn-ea"/>
-                <a:cs typeface="+mn-cs"/>
-              </a:rPr>
-              <a:t>return</a:t>
-            </a:r>
-            <a:r>
-              <a:rPr lang="en-US" sz="1200" b="0" i="0" kern="1200" dirty="0">
-                <a:solidFill>
-                  <a:schemeClr val="tx1"/>
-                </a:solidFill>
-                <a:effectLst/>
-                <a:latin typeface="+mn-lt"/>
-                <a:ea typeface="+mn-ea"/>
-                <a:cs typeface="+mn-cs"/>
-              </a:rPr>
-              <a:t> </a:t>
-            </a:r>
-            <a:r>
-              <a:rPr lang="en-US" sz="1200" b="0" i="0" kern="1200" dirty="0" err="1">
-                <a:solidFill>
-                  <a:schemeClr val="tx1"/>
-                </a:solidFill>
-                <a:effectLst/>
-                <a:latin typeface="+mn-lt"/>
-                <a:ea typeface="+mn-ea"/>
-                <a:cs typeface="+mn-cs"/>
-              </a:rPr>
-              <a:t>str.Substring</a:t>
-            </a:r>
-            <a:r>
-              <a:rPr lang="en-US" sz="1200" b="0" i="0" kern="1200" dirty="0">
-                <a:solidFill>
-                  <a:schemeClr val="tx1"/>
-                </a:solidFill>
-                <a:effectLst/>
-                <a:latin typeface="+mn-lt"/>
-                <a:ea typeface="+mn-ea"/>
-                <a:cs typeface="+mn-cs"/>
-              </a:rPr>
-              <a:t>(0, 1).</a:t>
-            </a:r>
-            <a:r>
-              <a:rPr lang="en-US" sz="1200" b="0" i="0" kern="1200" dirty="0" err="1">
-                <a:solidFill>
-                  <a:schemeClr val="tx1"/>
-                </a:solidFill>
-                <a:effectLst/>
-                <a:latin typeface="+mn-lt"/>
-                <a:ea typeface="+mn-ea"/>
-                <a:cs typeface="+mn-cs"/>
-              </a:rPr>
-              <a:t>ToUpper</a:t>
-            </a:r>
-            <a:r>
-              <a:rPr lang="en-US" sz="1200" b="0" i="0" kern="1200" dirty="0">
-                <a:solidFill>
-                  <a:schemeClr val="tx1"/>
-                </a:solidFill>
-                <a:effectLst/>
-                <a:latin typeface="+mn-lt"/>
-                <a:ea typeface="+mn-ea"/>
-                <a:cs typeface="+mn-cs"/>
-              </a:rPr>
-              <a:t>() + </a:t>
-            </a:r>
-            <a:r>
-              <a:rPr lang="en-US" sz="1200" b="0" i="0" kern="1200" dirty="0" err="1">
-                <a:solidFill>
-                  <a:schemeClr val="tx1"/>
-                </a:solidFill>
-                <a:effectLst/>
-                <a:latin typeface="+mn-lt"/>
-                <a:ea typeface="+mn-ea"/>
-                <a:cs typeface="+mn-cs"/>
-              </a:rPr>
-              <a:t>str.Substring</a:t>
-            </a:r>
-            <a:r>
-              <a:rPr lang="en-US" sz="1200" b="0" i="0" kern="1200" dirty="0">
-                <a:solidFill>
-                  <a:schemeClr val="tx1"/>
-                </a:solidFill>
-                <a:effectLst/>
-                <a:latin typeface="+mn-lt"/>
-                <a:ea typeface="+mn-ea"/>
-                <a:cs typeface="+mn-cs"/>
-              </a:rPr>
-              <a:t>(1, str.Length-1).</a:t>
-            </a:r>
-            <a:r>
-              <a:rPr lang="en-US" sz="1200" b="0" i="0" kern="1200" dirty="0" err="1">
-                <a:solidFill>
-                  <a:schemeClr val="tx1"/>
-                </a:solidFill>
-                <a:effectLst/>
-                <a:latin typeface="+mn-lt"/>
-                <a:ea typeface="+mn-ea"/>
-                <a:cs typeface="+mn-cs"/>
-              </a:rPr>
-              <a:t>ToLower</a:t>
-            </a:r>
-            <a:r>
-              <a:rPr lang="en-US" sz="1200" b="0" i="0" kern="1200" dirty="0">
-                <a:solidFill>
-                  <a:schemeClr val="tx1"/>
-                </a:solidFill>
-                <a:effectLst/>
-                <a:latin typeface="+mn-lt"/>
-                <a:ea typeface="+mn-ea"/>
-                <a:cs typeface="+mn-cs"/>
-              </a:rPr>
-              <a:t>();  </a:t>
-            </a:r>
-          </a:p>
-          <a:p>
-            <a:r>
-              <a:rPr lang="en-US" sz="1200" b="0" i="0" kern="1200" dirty="0">
-                <a:solidFill>
-                  <a:schemeClr val="tx1"/>
-                </a:solidFill>
-                <a:effectLst/>
-                <a:latin typeface="+mn-lt"/>
-                <a:ea typeface="+mn-ea"/>
-                <a:cs typeface="+mn-cs"/>
-              </a:rPr>
-              <a:t>        }  </a:t>
-            </a:r>
-          </a:p>
-          <a:p>
-            <a:r>
-              <a:rPr lang="en-US" sz="1200" b="0" i="0" kern="1200" dirty="0">
-                <a:solidFill>
-                  <a:schemeClr val="tx1"/>
-                </a:solidFill>
-                <a:effectLst/>
-                <a:latin typeface="+mn-lt"/>
-                <a:ea typeface="+mn-ea"/>
-                <a:cs typeface="+mn-cs"/>
-              </a:rPr>
-              <a:t>    }  </a:t>
-            </a:r>
-          </a:p>
-          <a:p>
-            <a:endParaRPr lang="en-US" dirty="0"/>
-          </a:p>
-          <a:p>
-            <a:r>
-              <a:rPr lang="en-US" dirty="0"/>
-              <a:t>Having this in the scope, we can now write:</a:t>
-            </a:r>
-            <a:br>
-              <a:rPr lang="en-US" dirty="0"/>
-            </a:br>
-            <a:br>
-              <a:rPr lang="en-US" dirty="0"/>
-            </a:br>
-            <a:r>
-              <a:rPr lang="en-US" dirty="0"/>
-              <a:t>   String z = “hello”</a:t>
-            </a:r>
-            <a:br>
-              <a:rPr lang="en-US" dirty="0"/>
-            </a:br>
-            <a:r>
-              <a:rPr lang="en-US" dirty="0"/>
-              <a:t>    z = </a:t>
-            </a:r>
-            <a:r>
-              <a:rPr lang="en-US" dirty="0" err="1"/>
-              <a:t>z.UpperFirst</a:t>
-            </a:r>
-            <a:r>
-              <a:rPr lang="en-US" dirty="0"/>
-              <a:t>()</a:t>
-            </a:r>
-            <a:br>
-              <a:rPr lang="en-US" dirty="0"/>
-            </a:br>
-            <a:br>
-              <a:rPr lang="en-US" dirty="0"/>
-            </a:br>
-            <a:r>
-              <a:rPr lang="en-US" dirty="0"/>
-              <a:t>So what </a:t>
-            </a:r>
-            <a:r>
-              <a:rPr lang="en-US" dirty="0" err="1"/>
-              <a:t>NSubstutute</a:t>
-            </a:r>
-            <a:r>
-              <a:rPr lang="en-US" dirty="0"/>
-              <a:t> does is likely to extend return types of mocked methods, including primitives, with the method “Returns”.</a:t>
-            </a:r>
-          </a:p>
-          <a:p>
-            <a:endParaRPr lang="en-US" dirty="0"/>
-          </a:p>
-          <a:p>
-            <a:endParaRPr lang="en-US" dirty="0"/>
+          <a:bodyPr/>
+          <a:lstStyle/>
+          <a:p>
+            <a:endParaRPr lang="en-NL" dirty="0"/>
           </a:p>
         </p:txBody>
       </p:sp>
@@ -1723,7 +987,7 @@
     </p:spTree>
     <p:extLst>
       <p:ext uri="{BB962C8B-B14F-4D97-AF65-F5344CB8AC3E}">
-        <p14:creationId xmlns:p14="http://schemas.microsoft.com/office/powerpoint/2010/main" val="812723745"/>
+        <p14:creationId xmlns:p14="http://schemas.microsoft.com/office/powerpoint/2010/main" val="468100708"/>
       </p:ext>
     </p:extLst>
   </p:cSld>
@@ -1752,29 +1016,19 @@
       </p:grpSpPr>
       <p:sp>
         <p:nvSpPr>
-          <p:cNvPr id="55298" name="Slide Image Placeholder 1"/>
+          <p:cNvPr id="2" name="Slide Image Placeholder 1"/>
           <p:cNvSpPr>
-            <a:spLocks noGrp="1" noRot="1" noChangeAspect="1" noTextEdit="1"/>
+            <a:spLocks noGrp="1" noRot="1" noChangeAspect="1"/>
           </p:cNvSpPr>
           <p:nvPr>
             <p:ph type="sldImg"/>
           </p:nvPr>
         </p:nvSpPr>
-        <p:spPr bwMode="auto">
-          <a:noFill/>
-          <a:ln>
-            <a:solidFill>
-              <a:srgbClr val="000000"/>
-            </a:solidFill>
-            <a:miter lim="800000"/>
-            <a:headEnd/>
-            <a:tailEnd/>
-          </a:ln>
-        </p:spPr>
-      </p:sp>
-      <p:sp>
-        <p:nvSpPr>
-          <p:cNvPr id="55299" name="Notes Placeholder 2"/>
+        <p:spPr/>
+      </p:sp>
+      <p:sp>
+        <p:nvSpPr>
+          <p:cNvPr id="3" name="Notes Placeholder 2"/>
           <p:cNvSpPr>
             <a:spLocks noGrp="1"/>
           </p:cNvSpPr>
@@ -1782,40 +1036,12 @@
             <p:ph type="body" idx="1"/>
           </p:nvPr>
         </p:nvSpPr>
-        <p:spPr bwMode="auto">
-          <a:noFill/>
-        </p:spPr>
-        <p:txBody>
-          <a:bodyPr wrap="square" numCol="1" anchor="t" anchorCtr="0" compatLnSpc="1">
-            <a:prstTxWarp prst="textNoShape">
-              <a:avLst/>
-            </a:prstTxWarp>
-          </a:bodyPr>
-          <a:lstStyle/>
-          <a:p>
-            <a:r>
-              <a:rPr lang="en-US" dirty="0"/>
-              <a:t>There are other mock framework for .NET, e.g. </a:t>
-            </a:r>
-            <a:r>
-              <a:rPr lang="en-US" dirty="0" err="1"/>
-              <a:t>Moq</a:t>
-            </a:r>
-            <a:r>
-              <a:rPr lang="en-US" dirty="0"/>
-              <a:t>, rhino, </a:t>
-            </a:r>
-            <a:r>
-              <a:rPr lang="en-US" dirty="0" err="1"/>
-              <a:t>easymock</a:t>
-            </a:r>
-            <a:r>
-              <a:rPr lang="en-US" dirty="0"/>
-              <a:t>, etc. </a:t>
-            </a:r>
-          </a:p>
-          <a:p>
-            <a:endParaRPr lang="en-US" dirty="0"/>
+        <p:spPr/>
+        <p:txBody>
+          <a:bodyPr/>
+          <a:lstStyle/>
+          <a:p>
+            <a:endParaRPr lang="en-NL" dirty="0"/>
           </a:p>
         </p:txBody>
       </p:sp>
@@ -1837,12 +1063,12 @@
             <a:pPr>
               <a:defRPr/>
             </a:pPr>
-            <a:fld id="{EC5B1458-9BA2-4FCA-B083-2E2B2AD6D16B}" type="slidenum">
+            <a:fld id="{F84EA20E-9838-494E-B9DD-2C988F7E650A}" type="slidenum">
               <a:rPr lang="en-US" smtClean="0"/>
               <a:pPr>
                 <a:defRPr/>
               </a:pPr>
-              <a:t>38</a:t>
+              <a:t>39</a:t>
             </a:fld>
             <a:endParaRPr lang="en-US"/>
           </a:p>
@@ -1851,7 +1077,7 @@
     </p:spTree>
     <p:extLst>
       <p:ext uri="{BB962C8B-B14F-4D97-AF65-F5344CB8AC3E}">
-        <p14:creationId xmlns:p14="http://schemas.microsoft.com/office/powerpoint/2010/main" val="4226131157"/>
+        <p14:creationId xmlns:p14="http://schemas.microsoft.com/office/powerpoint/2010/main" val="3726015562"/>
       </p:ext>
     </p:extLst>
   </p:cSld>
@@ -1905,7 +1131,7 @@
           <a:bodyPr/>
           <a:lstStyle/>
           <a:p>
-            <a:endParaRPr lang="en-NL" dirty="0"/>
+            <a:endParaRPr lang="en-US" dirty="0"/>
           </a:p>
         </p:txBody>
       </p:sp>
@@ -1916,7 +1142,7 @@
             <a:spLocks noGrp="1"/>
           </p:cNvSpPr>
           <p:nvPr>
-            <p:ph type="sldNum" sz="quarter" idx="5"/>
+            <p:ph type="sldNum" sz="quarter" idx="10"/>
           </p:nvPr>
         </p:nvSpPr>
         <p:spPr/>
@@ -1932,7 +1158,7 @@
               <a:pPr>
                 <a:defRPr/>
               </a:pPr>
-              <a:t>42</a:t>
+              <a:t>40</a:t>
             </a:fld>
             <a:endParaRPr lang="en-US"/>
           </a:p>
@@ -1941,7 +1167,7 @@
     </p:spTree>
     <p:extLst>
       <p:ext uri="{BB962C8B-B14F-4D97-AF65-F5344CB8AC3E}">
-        <p14:creationId xmlns:p14="http://schemas.microsoft.com/office/powerpoint/2010/main" val="468100708"/>
+        <p14:creationId xmlns:p14="http://schemas.microsoft.com/office/powerpoint/2010/main" val="640978486"/>
       </p:ext>
     </p:extLst>
   </p:cSld>
@@ -1995,10 +1221,30 @@
           <a:bodyPr/>
           <a:lstStyle/>
           <a:p>
+            <a:pPr marL="0" marR="0" lvl="0" indent="0" algn="l" defTabSz="914400" rtl="0" eaLnBrk="0" fontAlgn="base" latinLnBrk="0" hangingPunct="0">
+              <a:lnSpc>
+                <a:spcPct val="100000"/>
+              </a:lnSpc>
+              <a:spcBef>
+                <a:spcPct val="30000"/>
+              </a:spcBef>
+              <a:spcAft>
+                <a:spcPct val="0"/>
+              </a:spcAft>
+              <a:buClrTx/>
+              <a:buSzTx/>
+              <a:buFontTx/>
+              <a:buNone/>
+              <a:tabLst/>
+              <a:defRPr/>
+            </a:pPr>
             <a:r>
               <a:rPr lang="en-US" dirty="0"/>
               <a:t>In the literature, testing a program by exploiting relations of multiple methods/operations like in the example above is also called “metamorphic testing”</a:t>
             </a:r>
+          </a:p>
+          <a:p>
+            <a:endParaRPr lang="en-NL" dirty="0"/>
           </a:p>
         </p:txBody>
       </p:sp>
@@ -2009,7 +1255,7 @@
             <a:spLocks noGrp="1"/>
           </p:cNvSpPr>
           <p:nvPr>
-            <p:ph type="sldNum" sz="quarter" idx="10"/>
+            <p:ph type="sldNum" sz="quarter" idx="5"/>
           </p:nvPr>
         </p:nvSpPr>
         <p:spPr/>
@@ -2021,6 +1267,115 @@
               <a:defRPr/>
             </a:pPr>
             <a:fld id="{F84EA20E-9838-494E-B9DD-2C988F7E650A}" type="slidenum">
+              <a:rPr lang="en-US" smtClean="0"/>
+              <a:pPr>
+                <a:defRPr/>
+              </a:pPr>
+              <a:t>41</a:t>
+            </a:fld>
+            <a:endParaRPr lang="en-US"/>
+          </a:p>
+        </p:txBody>
+      </p:sp>
+    </p:spTree>
+    <p:extLst>
+      <p:ext uri="{BB962C8B-B14F-4D97-AF65-F5344CB8AC3E}">
+        <p14:creationId xmlns:p14="http://schemas.microsoft.com/office/powerpoint/2010/main" val="3478692827"/>
+      </p:ext>
+    </p:extLst>
+  </p:cSld>
+  <p:clrMapOvr>
+    <a:masterClrMapping/>
+  </p:clrMapOvr>
+</p:notes>
+</file>
+
+<file path=ppt/notesSlides/notesSlide16.xml><?xml version="1.0" encoding="utf-8"?>
+<p:notes xmlns:a="http://schemas.openxmlformats.org/drawingml/2006/main" xmlns:r="http://schemas.openxmlformats.org/officeDocument/2006/relationships" xmlns:p="http://schemas.openxmlformats.org/presentationml/2006/main">
+  <p:cSld>
+    <p:spTree>
+      <p:nvGrpSpPr>
+        <p:cNvPr id="1" name=""/>
+        <p:cNvGrpSpPr/>
+        <p:nvPr/>
+      </p:nvGrpSpPr>
+      <p:grpSpPr>
+        <a:xfrm>
+          <a:off x="0" y="0"/>
+          <a:ext cx="0" cy="0"/>
+          <a:chOff x="0" y="0"/>
+          <a:chExt cx="0" cy="0"/>
+        </a:xfrm>
+      </p:grpSpPr>
+      <p:sp>
+        <p:nvSpPr>
+          <p:cNvPr id="55298" name="Slide Image Placeholder 1"/>
+          <p:cNvSpPr>
+            <a:spLocks noGrp="1" noRot="1" noChangeAspect="1" noTextEdit="1"/>
+          </p:cNvSpPr>
+          <p:nvPr>
+            <p:ph type="sldImg"/>
+          </p:nvPr>
+        </p:nvSpPr>
+        <p:spPr bwMode="auto">
+          <a:noFill/>
+          <a:ln>
+            <a:solidFill>
+              <a:srgbClr val="000000"/>
+            </a:solidFill>
+            <a:miter lim="800000"/>
+            <a:headEnd/>
+            <a:tailEnd/>
+          </a:ln>
+        </p:spPr>
+      </p:sp>
+      <p:sp>
+        <p:nvSpPr>
+          <p:cNvPr id="55299" name="Notes Placeholder 2"/>
+          <p:cNvSpPr>
+            <a:spLocks noGrp="1"/>
+          </p:cNvSpPr>
+          <p:nvPr>
+            <p:ph type="body" idx="1"/>
+          </p:nvPr>
+        </p:nvSpPr>
+        <p:spPr bwMode="auto">
+          <a:noFill/>
+        </p:spPr>
+        <p:txBody>
+          <a:bodyPr wrap="square" numCol="1" anchor="t" anchorCtr="0" compatLnSpc="1">
+            <a:prstTxWarp prst="textNoShape">
+              <a:avLst/>
+            </a:prstTxWarp>
+          </a:bodyPr>
+          <a:lstStyle/>
+          <a:p>
+            <a:endParaRPr lang="en-US" dirty="0"/>
+          </a:p>
+          <a:p>
+            <a:endParaRPr lang="en-US" dirty="0"/>
+          </a:p>
+        </p:txBody>
+      </p:sp>
+      <p:sp>
+        <p:nvSpPr>
+          <p:cNvPr id="4" name="Slide Number Placeholder 3"/>
+          <p:cNvSpPr>
+            <a:spLocks noGrp="1"/>
+          </p:cNvSpPr>
+          <p:nvPr>
+            <p:ph type="sldNum" sz="quarter" idx="5"/>
+          </p:nvPr>
+        </p:nvSpPr>
+        <p:spPr/>
+        <p:txBody>
+          <a:bodyPr/>
+          <a:lstStyle/>
+          <a:p>
+            <a:pPr>
+              <a:defRPr/>
+            </a:pPr>
+            <a:fld id="{EC5B1458-9BA2-4FCA-B083-2E2B2AD6D16B}" type="slidenum">
               <a:rPr lang="en-US" smtClean="0"/>
               <a:pPr>
                 <a:defRPr/>
@@ -2034,7 +1389,1034 @@
     </p:spTree>
     <p:extLst>
       <p:ext uri="{BB962C8B-B14F-4D97-AF65-F5344CB8AC3E}">
-        <p14:creationId xmlns:p14="http://schemas.microsoft.com/office/powerpoint/2010/main" val="640978486"/>
+        <p14:creationId xmlns:p14="http://schemas.microsoft.com/office/powerpoint/2010/main" val="1763036822"/>
+      </p:ext>
+    </p:extLst>
+  </p:cSld>
+  <p:clrMapOvr>
+    <a:masterClrMapping/>
+  </p:clrMapOvr>
+</p:notes>
+</file>
+
+<file path=ppt/notesSlides/notesSlide17.xml><?xml version="1.0" encoding="utf-8"?>
+<p:notes xmlns:a="http://schemas.openxmlformats.org/drawingml/2006/main" xmlns:r="http://schemas.openxmlformats.org/officeDocument/2006/relationships" xmlns:p="http://schemas.openxmlformats.org/presentationml/2006/main">
+  <p:cSld>
+    <p:spTree>
+      <p:nvGrpSpPr>
+        <p:cNvPr id="1" name=""/>
+        <p:cNvGrpSpPr/>
+        <p:nvPr/>
+      </p:nvGrpSpPr>
+      <p:grpSpPr>
+        <a:xfrm>
+          <a:off x="0" y="0"/>
+          <a:ext cx="0" cy="0"/>
+          <a:chOff x="0" y="0"/>
+          <a:chExt cx="0" cy="0"/>
+        </a:xfrm>
+      </p:grpSpPr>
+      <p:sp>
+        <p:nvSpPr>
+          <p:cNvPr id="55298" name="Slide Image Placeholder 1"/>
+          <p:cNvSpPr>
+            <a:spLocks noGrp="1" noRot="1" noChangeAspect="1" noTextEdit="1"/>
+          </p:cNvSpPr>
+          <p:nvPr>
+            <p:ph type="sldImg"/>
+          </p:nvPr>
+        </p:nvSpPr>
+        <p:spPr bwMode="auto">
+          <a:noFill/>
+          <a:ln>
+            <a:solidFill>
+              <a:srgbClr val="000000"/>
+            </a:solidFill>
+            <a:miter lim="800000"/>
+            <a:headEnd/>
+            <a:tailEnd/>
+          </a:ln>
+        </p:spPr>
+      </p:sp>
+      <p:sp>
+        <p:nvSpPr>
+          <p:cNvPr id="55299" name="Notes Placeholder 2"/>
+          <p:cNvSpPr>
+            <a:spLocks noGrp="1"/>
+          </p:cNvSpPr>
+          <p:nvPr>
+            <p:ph type="body" idx="1"/>
+          </p:nvPr>
+        </p:nvSpPr>
+        <p:spPr bwMode="auto">
+          <a:noFill/>
+        </p:spPr>
+        <p:txBody>
+          <a:bodyPr wrap="square" numCol="1" anchor="t" anchorCtr="0" compatLnSpc="1">
+            <a:prstTxWarp prst="textNoShape">
+              <a:avLst/>
+            </a:prstTxWarp>
+          </a:bodyPr>
+          <a:lstStyle/>
+          <a:p>
+            <a:pPr marL="0" marR="0" lvl="0" indent="0" algn="l" defTabSz="914400" rtl="0" eaLnBrk="0" fontAlgn="base" latinLnBrk="0" hangingPunct="0">
+              <a:lnSpc>
+                <a:spcPct val="100000"/>
+              </a:lnSpc>
+              <a:spcBef>
+                <a:spcPct val="30000"/>
+              </a:spcBef>
+              <a:spcAft>
+                <a:spcPct val="0"/>
+              </a:spcAft>
+              <a:buClrTx/>
+              <a:buSzTx/>
+              <a:buFontTx/>
+              <a:buNone/>
+              <a:tabLst/>
+              <a:defRPr/>
+            </a:pPr>
+            <a:r>
+              <a:rPr lang="en-US" dirty="0"/>
+              <a:t>There are other mock framework for .NET, e.g. </a:t>
+            </a:r>
+            <a:r>
+              <a:rPr lang="en-US" dirty="0" err="1"/>
+              <a:t>Moq</a:t>
+            </a:r>
+            <a:r>
+              <a:rPr lang="en-US" dirty="0"/>
+              <a:t>, rhino, </a:t>
+            </a:r>
+            <a:r>
+              <a:rPr lang="en-US" dirty="0" err="1"/>
+              <a:t>easymock</a:t>
+            </a:r>
+            <a:r>
+              <a:rPr lang="en-US" dirty="0"/>
+              <a:t>, etc. </a:t>
+            </a:r>
+          </a:p>
+          <a:p>
+            <a:endParaRPr lang="en-US" dirty="0"/>
+          </a:p>
+          <a:p>
+            <a:endParaRPr lang="en-US" dirty="0"/>
+          </a:p>
+        </p:txBody>
+      </p:sp>
+      <p:sp>
+        <p:nvSpPr>
+          <p:cNvPr id="4" name="Slide Number Placeholder 3"/>
+          <p:cNvSpPr>
+            <a:spLocks noGrp="1"/>
+          </p:cNvSpPr>
+          <p:nvPr>
+            <p:ph type="sldNum" sz="quarter" idx="5"/>
+          </p:nvPr>
+        </p:nvSpPr>
+        <p:spPr/>
+        <p:txBody>
+          <a:bodyPr/>
+          <a:lstStyle/>
+          <a:p>
+            <a:pPr>
+              <a:defRPr/>
+            </a:pPr>
+            <a:fld id="{EC5B1458-9BA2-4FCA-B083-2E2B2AD6D16B}" type="slidenum">
+              <a:rPr lang="en-US" smtClean="0"/>
+              <a:pPr>
+                <a:defRPr/>
+              </a:pPr>
+              <a:t>44</a:t>
+            </a:fld>
+            <a:endParaRPr lang="en-US"/>
+          </a:p>
+        </p:txBody>
+      </p:sp>
+    </p:spTree>
+    <p:extLst>
+      <p:ext uri="{BB962C8B-B14F-4D97-AF65-F5344CB8AC3E}">
+        <p14:creationId xmlns:p14="http://schemas.microsoft.com/office/powerpoint/2010/main" val="791692650"/>
+      </p:ext>
+    </p:extLst>
+  </p:cSld>
+  <p:clrMapOvr>
+    <a:masterClrMapping/>
+  </p:clrMapOvr>
+</p:notes>
+</file>
+
+<file path=ppt/notesSlides/notesSlide18.xml><?xml version="1.0" encoding="utf-8"?>
+<p:notes xmlns:a="http://schemas.openxmlformats.org/drawingml/2006/main" xmlns:r="http://schemas.openxmlformats.org/officeDocument/2006/relationships" xmlns:p="http://schemas.openxmlformats.org/presentationml/2006/main">
+  <p:cSld>
+    <p:spTree>
+      <p:nvGrpSpPr>
+        <p:cNvPr id="1" name=""/>
+        <p:cNvGrpSpPr/>
+        <p:nvPr/>
+      </p:nvGrpSpPr>
+      <p:grpSpPr>
+        <a:xfrm>
+          <a:off x="0" y="0"/>
+          <a:ext cx="0" cy="0"/>
+          <a:chOff x="0" y="0"/>
+          <a:chExt cx="0" cy="0"/>
+        </a:xfrm>
+      </p:grpSpPr>
+      <p:sp>
+        <p:nvSpPr>
+          <p:cNvPr id="2" name="Slide Image Placeholder 1"/>
+          <p:cNvSpPr>
+            <a:spLocks noGrp="1" noRot="1" noChangeAspect="1"/>
+          </p:cNvSpPr>
+          <p:nvPr>
+            <p:ph type="sldImg"/>
+          </p:nvPr>
+        </p:nvSpPr>
+        <p:spPr/>
+      </p:sp>
+      <p:sp>
+        <p:nvSpPr>
+          <p:cNvPr id="3" name="Notes Placeholder 2"/>
+          <p:cNvSpPr>
+            <a:spLocks noGrp="1"/>
+          </p:cNvSpPr>
+          <p:nvPr>
+            <p:ph type="body" idx="1"/>
+          </p:nvPr>
+        </p:nvSpPr>
+        <p:spPr/>
+        <p:txBody>
+          <a:bodyPr>
+            <a:normAutofit fontScale="77500" lnSpcReduction="20000"/>
+          </a:bodyPr>
+          <a:lstStyle/>
+          <a:p>
+            <a:r>
+              <a:rPr lang="en-US" dirty="0"/>
+              <a:t>Note:</a:t>
+            </a:r>
+          </a:p>
+          <a:p>
+            <a:endParaRPr lang="en-US" dirty="0"/>
+          </a:p>
+          <a:p>
+            <a:r>
+              <a:rPr lang="en-US" dirty="0"/>
+              <a:t>The method “For&lt;I&gt;()” creates an instance of I. </a:t>
+            </a:r>
+          </a:p>
+          <a:p>
+            <a:endParaRPr lang="en-US" dirty="0"/>
+          </a:p>
+          <a:p>
+            <a:r>
+              <a:rPr lang="en-US" dirty="0"/>
+              <a:t>The method “Returns” is probably more magical, especially for Java programmer. E.g. in the above example the method “value(x)” of </a:t>
+            </a:r>
+            <a:r>
+              <a:rPr lang="en-US" dirty="0" err="1"/>
+              <a:t>IThremometer</a:t>
+            </a:r>
+            <a:r>
+              <a:rPr lang="en-US" dirty="0"/>
+              <a:t> returns a “double”. Now, in C# primitives like double are also objects. </a:t>
+            </a:r>
+          </a:p>
+          <a:p>
+            <a:endParaRPr lang="en-US" dirty="0"/>
+          </a:p>
+          <a:p>
+            <a:r>
+              <a:rPr lang="en-US" dirty="0"/>
+              <a:t>Furthermore C# allows a class, including primitives, to be “method-extended”. Normal class can be sub-classed. But primitives and sealed classes cannot be sub-classed. However, C# allows a syntactic sugar called “extension method”. Example with extending string:</a:t>
+            </a:r>
+          </a:p>
+          <a:p>
+            <a:endParaRPr lang="en-US" dirty="0"/>
+          </a:p>
+          <a:p>
+            <a:r>
+              <a:rPr lang="en-US" sz="1200" b="1" i="0" kern="1200" dirty="0">
+                <a:solidFill>
+                  <a:schemeClr val="tx1"/>
+                </a:solidFill>
+                <a:effectLst/>
+                <a:latin typeface="+mn-lt"/>
+                <a:ea typeface="+mn-ea"/>
+                <a:cs typeface="+mn-cs"/>
+              </a:rPr>
+              <a:t>static</a:t>
+            </a:r>
+            <a:r>
+              <a:rPr lang="en-US" sz="1200" b="0" i="0" kern="1200" dirty="0">
+                <a:solidFill>
+                  <a:schemeClr val="tx1"/>
+                </a:solidFill>
+                <a:effectLst/>
+                <a:latin typeface="+mn-lt"/>
+                <a:ea typeface="+mn-ea"/>
+                <a:cs typeface="+mn-cs"/>
+              </a:rPr>
+              <a:t> </a:t>
+            </a:r>
+            <a:r>
+              <a:rPr lang="en-US" sz="1200" b="1" i="0" kern="1200" dirty="0">
+                <a:solidFill>
+                  <a:schemeClr val="tx1"/>
+                </a:solidFill>
+                <a:effectLst/>
+                <a:latin typeface="+mn-lt"/>
+                <a:ea typeface="+mn-ea"/>
+                <a:cs typeface="+mn-cs"/>
+              </a:rPr>
+              <a:t>class</a:t>
+            </a:r>
+            <a:r>
+              <a:rPr lang="en-US" sz="1200" b="0" i="0" kern="1200" dirty="0">
+                <a:solidFill>
+                  <a:schemeClr val="tx1"/>
+                </a:solidFill>
+                <a:effectLst/>
+                <a:latin typeface="+mn-lt"/>
+                <a:ea typeface="+mn-ea"/>
+                <a:cs typeface="+mn-cs"/>
+              </a:rPr>
+              <a:t>  Extensions  </a:t>
+            </a:r>
+          </a:p>
+          <a:p>
+            <a:r>
+              <a:rPr lang="en-US" sz="1200" b="0" i="0" kern="1200" dirty="0">
+                <a:solidFill>
+                  <a:schemeClr val="tx1"/>
+                </a:solidFill>
+                <a:effectLst/>
+                <a:latin typeface="+mn-lt"/>
+                <a:ea typeface="+mn-ea"/>
+                <a:cs typeface="+mn-cs"/>
+              </a:rPr>
+              <a:t>    {  </a:t>
+            </a:r>
+          </a:p>
+          <a:p>
+            <a:r>
+              <a:rPr lang="en-US" sz="1200" b="0" i="0" kern="1200" dirty="0">
+                <a:solidFill>
+                  <a:schemeClr val="tx1"/>
+                </a:solidFill>
+                <a:effectLst/>
+                <a:latin typeface="+mn-lt"/>
+                <a:ea typeface="+mn-ea"/>
+                <a:cs typeface="+mn-cs"/>
+              </a:rPr>
+              <a:t>        </a:t>
+            </a:r>
+            <a:r>
+              <a:rPr lang="en-US" sz="1200" b="1" i="0" kern="1200" dirty="0">
+                <a:solidFill>
+                  <a:schemeClr val="tx1"/>
+                </a:solidFill>
+                <a:effectLst/>
+                <a:latin typeface="+mn-lt"/>
+                <a:ea typeface="+mn-ea"/>
+                <a:cs typeface="+mn-cs"/>
+              </a:rPr>
+              <a:t>public</a:t>
+            </a:r>
+            <a:r>
+              <a:rPr lang="en-US" sz="1200" b="0" i="0" kern="1200" dirty="0">
+                <a:solidFill>
+                  <a:schemeClr val="tx1"/>
+                </a:solidFill>
+                <a:effectLst/>
+                <a:latin typeface="+mn-lt"/>
+                <a:ea typeface="+mn-ea"/>
+                <a:cs typeface="+mn-cs"/>
+              </a:rPr>
+              <a:t> </a:t>
+            </a:r>
+            <a:r>
+              <a:rPr lang="en-US" sz="1200" b="1" i="0" kern="1200" dirty="0">
+                <a:solidFill>
+                  <a:schemeClr val="tx1"/>
+                </a:solidFill>
+                <a:effectLst/>
+                <a:latin typeface="+mn-lt"/>
+                <a:ea typeface="+mn-ea"/>
+                <a:cs typeface="+mn-cs"/>
+              </a:rPr>
+              <a:t>static</a:t>
+            </a:r>
+            <a:r>
+              <a:rPr lang="en-US" sz="1200" b="0" i="0" kern="1200" dirty="0">
+                <a:solidFill>
+                  <a:schemeClr val="tx1"/>
+                </a:solidFill>
+                <a:effectLst/>
+                <a:latin typeface="+mn-lt"/>
+                <a:ea typeface="+mn-ea"/>
+                <a:cs typeface="+mn-cs"/>
+              </a:rPr>
+              <a:t> </a:t>
+            </a:r>
+            <a:r>
+              <a:rPr lang="en-US" sz="1200" b="1" i="0" kern="1200" dirty="0">
+                <a:solidFill>
+                  <a:schemeClr val="tx1"/>
+                </a:solidFill>
+                <a:effectLst/>
+                <a:latin typeface="+mn-lt"/>
+                <a:ea typeface="+mn-ea"/>
+                <a:cs typeface="+mn-cs"/>
+              </a:rPr>
+              <a:t>string</a:t>
+            </a:r>
+            <a:r>
+              <a:rPr lang="en-US" sz="1200" b="0" i="0" kern="1200" dirty="0">
+                <a:solidFill>
+                  <a:schemeClr val="tx1"/>
+                </a:solidFill>
+                <a:effectLst/>
+                <a:latin typeface="+mn-lt"/>
+                <a:ea typeface="+mn-ea"/>
+                <a:cs typeface="+mn-cs"/>
+              </a:rPr>
+              <a:t> </a:t>
+            </a:r>
+            <a:r>
+              <a:rPr lang="en-US" sz="1200" b="0" i="0" kern="1200" dirty="0" err="1">
+                <a:solidFill>
+                  <a:schemeClr val="tx1"/>
+                </a:solidFill>
+                <a:effectLst/>
+                <a:latin typeface="+mn-lt"/>
+                <a:ea typeface="+mn-ea"/>
+                <a:cs typeface="+mn-cs"/>
+              </a:rPr>
+              <a:t>UpperFirst</a:t>
+            </a:r>
+            <a:r>
+              <a:rPr lang="en-US" sz="1200" b="0" i="0" kern="1200" dirty="0">
+                <a:solidFill>
+                  <a:schemeClr val="tx1"/>
+                </a:solidFill>
+                <a:effectLst/>
+                <a:latin typeface="+mn-lt"/>
+                <a:ea typeface="+mn-ea"/>
+                <a:cs typeface="+mn-cs"/>
+              </a:rPr>
+              <a:t>(</a:t>
+            </a:r>
+            <a:r>
+              <a:rPr lang="en-US" sz="1200" b="1" i="0" kern="1200" dirty="0">
+                <a:solidFill>
+                  <a:schemeClr val="tx1"/>
+                </a:solidFill>
+                <a:effectLst/>
+                <a:latin typeface="+mn-lt"/>
+                <a:ea typeface="+mn-ea"/>
+                <a:cs typeface="+mn-cs"/>
+              </a:rPr>
+              <a:t>this</a:t>
+            </a:r>
+            <a:r>
+              <a:rPr lang="en-US" sz="1200" b="0" i="0" kern="1200" dirty="0">
+                <a:solidFill>
+                  <a:schemeClr val="tx1"/>
+                </a:solidFill>
+                <a:effectLst/>
+                <a:latin typeface="+mn-lt"/>
+                <a:ea typeface="+mn-ea"/>
+                <a:cs typeface="+mn-cs"/>
+              </a:rPr>
+              <a:t> String </a:t>
+            </a:r>
+            <a:r>
+              <a:rPr lang="en-US" sz="1200" b="0" i="0" kern="1200" dirty="0" err="1">
+                <a:solidFill>
+                  <a:schemeClr val="tx1"/>
+                </a:solidFill>
+                <a:effectLst/>
+                <a:latin typeface="+mn-lt"/>
+                <a:ea typeface="+mn-ea"/>
+                <a:cs typeface="+mn-cs"/>
+              </a:rPr>
+              <a:t>str</a:t>
+            </a:r>
+            <a:r>
+              <a:rPr lang="en-US" sz="1200" b="0" i="0" kern="1200" dirty="0">
+                <a:solidFill>
+                  <a:schemeClr val="tx1"/>
+                </a:solidFill>
+                <a:effectLst/>
+                <a:latin typeface="+mn-lt"/>
+                <a:ea typeface="+mn-ea"/>
+                <a:cs typeface="+mn-cs"/>
+              </a:rPr>
+              <a:t>)  </a:t>
+            </a:r>
+          </a:p>
+          <a:p>
+            <a:r>
+              <a:rPr lang="en-US" sz="1200" b="0" i="0" kern="1200" dirty="0">
+                <a:solidFill>
+                  <a:schemeClr val="tx1"/>
+                </a:solidFill>
+                <a:effectLst/>
+                <a:latin typeface="+mn-lt"/>
+                <a:ea typeface="+mn-ea"/>
+                <a:cs typeface="+mn-cs"/>
+              </a:rPr>
+              <a:t>        {  </a:t>
+            </a:r>
+          </a:p>
+          <a:p>
+            <a:r>
+              <a:rPr lang="en-US" sz="1200" b="0" i="0" kern="1200" dirty="0">
+                <a:solidFill>
+                  <a:schemeClr val="tx1"/>
+                </a:solidFill>
+                <a:effectLst/>
+                <a:latin typeface="+mn-lt"/>
+                <a:ea typeface="+mn-ea"/>
+                <a:cs typeface="+mn-cs"/>
+              </a:rPr>
+              <a:t>            </a:t>
+            </a:r>
+            <a:r>
+              <a:rPr lang="en-US" sz="1200" b="1" i="0" kern="1200" dirty="0">
+                <a:solidFill>
+                  <a:schemeClr val="tx1"/>
+                </a:solidFill>
+                <a:effectLst/>
+                <a:latin typeface="+mn-lt"/>
+                <a:ea typeface="+mn-ea"/>
+                <a:cs typeface="+mn-cs"/>
+              </a:rPr>
+              <a:t>if</a:t>
+            </a:r>
+            <a:r>
+              <a:rPr lang="en-US" sz="1200" b="0" i="0" kern="1200" dirty="0">
+                <a:solidFill>
+                  <a:schemeClr val="tx1"/>
+                </a:solidFill>
+                <a:effectLst/>
+                <a:latin typeface="+mn-lt"/>
+                <a:ea typeface="+mn-ea"/>
+                <a:cs typeface="+mn-cs"/>
+              </a:rPr>
+              <a:t> (</a:t>
+            </a:r>
+            <a:r>
+              <a:rPr lang="en-US" sz="1200" b="0" i="0" kern="1200" dirty="0" err="1">
+                <a:solidFill>
+                  <a:schemeClr val="tx1"/>
+                </a:solidFill>
+                <a:effectLst/>
+                <a:latin typeface="+mn-lt"/>
+                <a:ea typeface="+mn-ea"/>
+                <a:cs typeface="+mn-cs"/>
+              </a:rPr>
+              <a:t>String.IsNullOrEmpty</a:t>
+            </a:r>
+            <a:r>
+              <a:rPr lang="en-US" sz="1200" b="0" i="0" kern="1200" dirty="0">
+                <a:solidFill>
+                  <a:schemeClr val="tx1"/>
+                </a:solidFill>
+                <a:effectLst/>
+                <a:latin typeface="+mn-lt"/>
+                <a:ea typeface="+mn-ea"/>
+                <a:cs typeface="+mn-cs"/>
+              </a:rPr>
+              <a:t>(</a:t>
+            </a:r>
+            <a:r>
+              <a:rPr lang="en-US" sz="1200" b="0" i="0" kern="1200" dirty="0" err="1">
+                <a:solidFill>
+                  <a:schemeClr val="tx1"/>
+                </a:solidFill>
+                <a:effectLst/>
+                <a:latin typeface="+mn-lt"/>
+                <a:ea typeface="+mn-ea"/>
+                <a:cs typeface="+mn-cs"/>
+              </a:rPr>
+              <a:t>str</a:t>
+            </a:r>
+            <a:r>
+              <a:rPr lang="en-US" sz="1200" b="0" i="0" kern="1200" dirty="0">
+                <a:solidFill>
+                  <a:schemeClr val="tx1"/>
+                </a:solidFill>
+                <a:effectLst/>
+                <a:latin typeface="+mn-lt"/>
+                <a:ea typeface="+mn-ea"/>
+                <a:cs typeface="+mn-cs"/>
+              </a:rPr>
+              <a:t>))  </a:t>
+            </a:r>
+          </a:p>
+          <a:p>
+            <a:r>
+              <a:rPr lang="en-US" sz="1200" b="0" i="0" kern="1200" dirty="0">
+                <a:solidFill>
+                  <a:schemeClr val="tx1"/>
+                </a:solidFill>
+                <a:effectLst/>
+                <a:latin typeface="+mn-lt"/>
+                <a:ea typeface="+mn-ea"/>
+                <a:cs typeface="+mn-cs"/>
+              </a:rPr>
+              <a:t>                </a:t>
+            </a:r>
+            <a:r>
+              <a:rPr lang="en-US" sz="1200" b="1" i="0" kern="1200" dirty="0">
+                <a:solidFill>
+                  <a:schemeClr val="tx1"/>
+                </a:solidFill>
+                <a:effectLst/>
+                <a:latin typeface="+mn-lt"/>
+                <a:ea typeface="+mn-ea"/>
+                <a:cs typeface="+mn-cs"/>
+              </a:rPr>
+              <a:t>return</a:t>
+            </a:r>
+            <a:r>
+              <a:rPr lang="en-US" sz="1200" b="0" i="0" kern="1200" dirty="0">
+                <a:solidFill>
+                  <a:schemeClr val="tx1"/>
+                </a:solidFill>
+                <a:effectLst/>
+                <a:latin typeface="+mn-lt"/>
+                <a:ea typeface="+mn-ea"/>
+                <a:cs typeface="+mn-cs"/>
+              </a:rPr>
+              <a:t> </a:t>
+            </a:r>
+            <a:r>
+              <a:rPr lang="en-US" sz="1200" b="0" i="0" kern="1200" dirty="0" err="1">
+                <a:solidFill>
+                  <a:schemeClr val="tx1"/>
+                </a:solidFill>
+                <a:effectLst/>
+                <a:latin typeface="+mn-lt"/>
+                <a:ea typeface="+mn-ea"/>
+                <a:cs typeface="+mn-cs"/>
+              </a:rPr>
+              <a:t>String.Empty</a:t>
+            </a:r>
+            <a:r>
+              <a:rPr lang="en-US" sz="1200" b="0" i="0" kern="1200" dirty="0">
+                <a:solidFill>
+                  <a:schemeClr val="tx1"/>
+                </a:solidFill>
+                <a:effectLst/>
+                <a:latin typeface="+mn-lt"/>
+                <a:ea typeface="+mn-ea"/>
+                <a:cs typeface="+mn-cs"/>
+              </a:rPr>
+              <a:t>;  </a:t>
+            </a:r>
+          </a:p>
+          <a:p>
+            <a:r>
+              <a:rPr lang="en-US" sz="1200" b="0" i="0" kern="1200" dirty="0">
+                <a:solidFill>
+                  <a:schemeClr val="tx1"/>
+                </a:solidFill>
+                <a:effectLst/>
+                <a:latin typeface="+mn-lt"/>
+                <a:ea typeface="+mn-ea"/>
+                <a:cs typeface="+mn-cs"/>
+              </a:rPr>
+              <a:t>  </a:t>
+            </a:r>
+          </a:p>
+          <a:p>
+            <a:r>
+              <a:rPr lang="en-US" sz="1200" b="0" i="0" kern="1200" dirty="0">
+                <a:solidFill>
+                  <a:schemeClr val="tx1"/>
+                </a:solidFill>
+                <a:effectLst/>
+                <a:latin typeface="+mn-lt"/>
+                <a:ea typeface="+mn-ea"/>
+                <a:cs typeface="+mn-cs"/>
+              </a:rPr>
+              <a:t>            </a:t>
+            </a:r>
+            <a:r>
+              <a:rPr lang="en-US" sz="1200" b="1" i="0" kern="1200" dirty="0">
+                <a:solidFill>
+                  <a:schemeClr val="tx1"/>
+                </a:solidFill>
+                <a:effectLst/>
+                <a:latin typeface="+mn-lt"/>
+                <a:ea typeface="+mn-ea"/>
+                <a:cs typeface="+mn-cs"/>
+              </a:rPr>
+              <a:t>return</a:t>
+            </a:r>
+            <a:r>
+              <a:rPr lang="en-US" sz="1200" b="0" i="0" kern="1200" dirty="0">
+                <a:solidFill>
+                  <a:schemeClr val="tx1"/>
+                </a:solidFill>
+                <a:effectLst/>
+                <a:latin typeface="+mn-lt"/>
+                <a:ea typeface="+mn-ea"/>
+                <a:cs typeface="+mn-cs"/>
+              </a:rPr>
+              <a:t> </a:t>
+            </a:r>
+            <a:r>
+              <a:rPr lang="en-US" sz="1200" b="0" i="0" kern="1200" dirty="0" err="1">
+                <a:solidFill>
+                  <a:schemeClr val="tx1"/>
+                </a:solidFill>
+                <a:effectLst/>
+                <a:latin typeface="+mn-lt"/>
+                <a:ea typeface="+mn-ea"/>
+                <a:cs typeface="+mn-cs"/>
+              </a:rPr>
+              <a:t>str.Substring</a:t>
+            </a:r>
+            <a:r>
+              <a:rPr lang="en-US" sz="1200" b="0" i="0" kern="1200" dirty="0">
+                <a:solidFill>
+                  <a:schemeClr val="tx1"/>
+                </a:solidFill>
+                <a:effectLst/>
+                <a:latin typeface="+mn-lt"/>
+                <a:ea typeface="+mn-ea"/>
+                <a:cs typeface="+mn-cs"/>
+              </a:rPr>
+              <a:t>(0, 1).</a:t>
+            </a:r>
+            <a:r>
+              <a:rPr lang="en-US" sz="1200" b="0" i="0" kern="1200" dirty="0" err="1">
+                <a:solidFill>
+                  <a:schemeClr val="tx1"/>
+                </a:solidFill>
+                <a:effectLst/>
+                <a:latin typeface="+mn-lt"/>
+                <a:ea typeface="+mn-ea"/>
+                <a:cs typeface="+mn-cs"/>
+              </a:rPr>
+              <a:t>ToUpper</a:t>
+            </a:r>
+            <a:r>
+              <a:rPr lang="en-US" sz="1200" b="0" i="0" kern="1200" dirty="0">
+                <a:solidFill>
+                  <a:schemeClr val="tx1"/>
+                </a:solidFill>
+                <a:effectLst/>
+                <a:latin typeface="+mn-lt"/>
+                <a:ea typeface="+mn-ea"/>
+                <a:cs typeface="+mn-cs"/>
+              </a:rPr>
+              <a:t>() + </a:t>
+            </a:r>
+            <a:r>
+              <a:rPr lang="en-US" sz="1200" b="0" i="0" kern="1200" dirty="0" err="1">
+                <a:solidFill>
+                  <a:schemeClr val="tx1"/>
+                </a:solidFill>
+                <a:effectLst/>
+                <a:latin typeface="+mn-lt"/>
+                <a:ea typeface="+mn-ea"/>
+                <a:cs typeface="+mn-cs"/>
+              </a:rPr>
+              <a:t>str.Substring</a:t>
+            </a:r>
+            <a:r>
+              <a:rPr lang="en-US" sz="1200" b="0" i="0" kern="1200" dirty="0">
+                <a:solidFill>
+                  <a:schemeClr val="tx1"/>
+                </a:solidFill>
+                <a:effectLst/>
+                <a:latin typeface="+mn-lt"/>
+                <a:ea typeface="+mn-ea"/>
+                <a:cs typeface="+mn-cs"/>
+              </a:rPr>
+              <a:t>(1, str.Length-1).</a:t>
+            </a:r>
+            <a:r>
+              <a:rPr lang="en-US" sz="1200" b="0" i="0" kern="1200" dirty="0" err="1">
+                <a:solidFill>
+                  <a:schemeClr val="tx1"/>
+                </a:solidFill>
+                <a:effectLst/>
+                <a:latin typeface="+mn-lt"/>
+                <a:ea typeface="+mn-ea"/>
+                <a:cs typeface="+mn-cs"/>
+              </a:rPr>
+              <a:t>ToLower</a:t>
+            </a:r>
+            <a:r>
+              <a:rPr lang="en-US" sz="1200" b="0" i="0" kern="1200" dirty="0">
+                <a:solidFill>
+                  <a:schemeClr val="tx1"/>
+                </a:solidFill>
+                <a:effectLst/>
+                <a:latin typeface="+mn-lt"/>
+                <a:ea typeface="+mn-ea"/>
+                <a:cs typeface="+mn-cs"/>
+              </a:rPr>
+              <a:t>();  </a:t>
+            </a:r>
+          </a:p>
+          <a:p>
+            <a:r>
+              <a:rPr lang="en-US" sz="1200" b="0" i="0" kern="1200" dirty="0">
+                <a:solidFill>
+                  <a:schemeClr val="tx1"/>
+                </a:solidFill>
+                <a:effectLst/>
+                <a:latin typeface="+mn-lt"/>
+                <a:ea typeface="+mn-ea"/>
+                <a:cs typeface="+mn-cs"/>
+              </a:rPr>
+              <a:t>        }  </a:t>
+            </a:r>
+          </a:p>
+          <a:p>
+            <a:r>
+              <a:rPr lang="en-US" sz="1200" b="0" i="0" kern="1200" dirty="0">
+                <a:solidFill>
+                  <a:schemeClr val="tx1"/>
+                </a:solidFill>
+                <a:effectLst/>
+                <a:latin typeface="+mn-lt"/>
+                <a:ea typeface="+mn-ea"/>
+                <a:cs typeface="+mn-cs"/>
+              </a:rPr>
+              <a:t>    }  </a:t>
+            </a:r>
+          </a:p>
+          <a:p>
+            <a:endParaRPr lang="en-US" dirty="0"/>
+          </a:p>
+          <a:p>
+            <a:r>
+              <a:rPr lang="en-US" dirty="0"/>
+              <a:t>Having this in the scope, we can now write:</a:t>
+            </a:r>
+            <a:br>
+              <a:rPr lang="en-US" dirty="0"/>
+            </a:br>
+            <a:br>
+              <a:rPr lang="en-US" dirty="0"/>
+            </a:br>
+            <a:r>
+              <a:rPr lang="en-US" dirty="0"/>
+              <a:t>   String z = “hello”</a:t>
+            </a:r>
+            <a:br>
+              <a:rPr lang="en-US" dirty="0"/>
+            </a:br>
+            <a:r>
+              <a:rPr lang="en-US" dirty="0"/>
+              <a:t>    z = </a:t>
+            </a:r>
+            <a:r>
+              <a:rPr lang="en-US" dirty="0" err="1"/>
+              <a:t>z.UpperFirst</a:t>
+            </a:r>
+            <a:r>
+              <a:rPr lang="en-US" dirty="0"/>
+              <a:t>()</a:t>
+            </a:r>
+            <a:br>
+              <a:rPr lang="en-US" dirty="0"/>
+            </a:br>
+            <a:br>
+              <a:rPr lang="en-US" dirty="0"/>
+            </a:br>
+            <a:r>
+              <a:rPr lang="en-US" dirty="0"/>
+              <a:t>So what </a:t>
+            </a:r>
+            <a:r>
+              <a:rPr lang="en-US" dirty="0" err="1"/>
+              <a:t>NSubstutute</a:t>
+            </a:r>
+            <a:r>
+              <a:rPr lang="en-US" dirty="0"/>
+              <a:t> does is likely to extend return types of mocked methods, including primitives, with the method “Returns”.</a:t>
+            </a:r>
+          </a:p>
+          <a:p>
+            <a:endParaRPr lang="en-US" dirty="0"/>
+          </a:p>
+          <a:p>
+            <a:endParaRPr lang="en-US" dirty="0"/>
+          </a:p>
+        </p:txBody>
+      </p:sp>
+      <p:sp>
+        <p:nvSpPr>
+          <p:cNvPr id="4" name="Slide Number Placeholder 3"/>
+          <p:cNvSpPr>
+            <a:spLocks noGrp="1"/>
+          </p:cNvSpPr>
+          <p:nvPr>
+            <p:ph type="sldNum" sz="quarter" idx="5"/>
+          </p:nvPr>
+        </p:nvSpPr>
+        <p:spPr/>
+        <p:txBody>
+          <a:bodyPr/>
+          <a:lstStyle/>
+          <a:p>
+            <a:pPr>
+              <a:defRPr/>
+            </a:pPr>
+            <a:fld id="{F84EA20E-9838-494E-B9DD-2C988F7E650A}" type="slidenum">
+              <a:rPr lang="en-US" smtClean="0"/>
+              <a:pPr>
+                <a:defRPr/>
+              </a:pPr>
+              <a:t>45</a:t>
+            </a:fld>
+            <a:endParaRPr lang="en-US"/>
+          </a:p>
+        </p:txBody>
+      </p:sp>
+    </p:spTree>
+    <p:extLst>
+      <p:ext uri="{BB962C8B-B14F-4D97-AF65-F5344CB8AC3E}">
+        <p14:creationId xmlns:p14="http://schemas.microsoft.com/office/powerpoint/2010/main" val="812723745"/>
+      </p:ext>
+    </p:extLst>
+  </p:cSld>
+  <p:clrMapOvr>
+    <a:masterClrMapping/>
+  </p:clrMapOvr>
+</p:notes>
+</file>
+
+<file path=ppt/notesSlides/notesSlide19.xml><?xml version="1.0" encoding="utf-8"?>
+<p:notes xmlns:a="http://schemas.openxmlformats.org/drawingml/2006/main" xmlns:r="http://schemas.openxmlformats.org/officeDocument/2006/relationships" xmlns:p="http://schemas.openxmlformats.org/presentationml/2006/main">
+  <p:cSld>
+    <p:spTree>
+      <p:nvGrpSpPr>
+        <p:cNvPr id="1" name=""/>
+        <p:cNvGrpSpPr/>
+        <p:nvPr/>
+      </p:nvGrpSpPr>
+      <p:grpSpPr>
+        <a:xfrm>
+          <a:off x="0" y="0"/>
+          <a:ext cx="0" cy="0"/>
+          <a:chOff x="0" y="0"/>
+          <a:chExt cx="0" cy="0"/>
+        </a:xfrm>
+      </p:grpSpPr>
+      <p:sp>
+        <p:nvSpPr>
+          <p:cNvPr id="55298" name="Slide Image Placeholder 1"/>
+          <p:cNvSpPr>
+            <a:spLocks noGrp="1" noRot="1" noChangeAspect="1" noTextEdit="1"/>
+          </p:cNvSpPr>
+          <p:nvPr>
+            <p:ph type="sldImg"/>
+          </p:nvPr>
+        </p:nvSpPr>
+        <p:spPr bwMode="auto">
+          <a:noFill/>
+          <a:ln>
+            <a:solidFill>
+              <a:srgbClr val="000000"/>
+            </a:solidFill>
+            <a:miter lim="800000"/>
+            <a:headEnd/>
+            <a:tailEnd/>
+          </a:ln>
+        </p:spPr>
+      </p:sp>
+      <p:sp>
+        <p:nvSpPr>
+          <p:cNvPr id="55299" name="Notes Placeholder 2"/>
+          <p:cNvSpPr>
+            <a:spLocks noGrp="1"/>
+          </p:cNvSpPr>
+          <p:nvPr>
+            <p:ph type="body" idx="1"/>
+          </p:nvPr>
+        </p:nvSpPr>
+        <p:spPr bwMode="auto">
+          <a:noFill/>
+        </p:spPr>
+        <p:txBody>
+          <a:bodyPr wrap="square" numCol="1" anchor="t" anchorCtr="0" compatLnSpc="1">
+            <a:prstTxWarp prst="textNoShape">
+              <a:avLst/>
+            </a:prstTxWarp>
+          </a:bodyPr>
+          <a:lstStyle/>
+          <a:p>
+            <a:r>
+              <a:rPr lang="en-US" dirty="0"/>
+              <a:t>There are other mock framework for .NET, e.g. </a:t>
+            </a:r>
+            <a:r>
+              <a:rPr lang="en-US" dirty="0" err="1"/>
+              <a:t>Moq</a:t>
+            </a:r>
+            <a:r>
+              <a:rPr lang="en-US" dirty="0"/>
+              <a:t>, rhino, </a:t>
+            </a:r>
+            <a:r>
+              <a:rPr lang="en-US" dirty="0" err="1"/>
+              <a:t>easymock</a:t>
+            </a:r>
+            <a:r>
+              <a:rPr lang="en-US" dirty="0"/>
+              <a:t>, etc. </a:t>
+            </a:r>
+          </a:p>
+          <a:p>
+            <a:endParaRPr lang="en-US" dirty="0"/>
+          </a:p>
+        </p:txBody>
+      </p:sp>
+      <p:sp>
+        <p:nvSpPr>
+          <p:cNvPr id="4" name="Slide Number Placeholder 3"/>
+          <p:cNvSpPr>
+            <a:spLocks noGrp="1"/>
+          </p:cNvSpPr>
+          <p:nvPr>
+            <p:ph type="sldNum" sz="quarter" idx="5"/>
+          </p:nvPr>
+        </p:nvSpPr>
+        <p:spPr/>
+        <p:txBody>
+          <a:bodyPr/>
+          <a:lstStyle/>
+          <a:p>
+            <a:pPr>
+              <a:defRPr/>
+            </a:pPr>
+            <a:fld id="{EC5B1458-9BA2-4FCA-B083-2E2B2AD6D16B}" type="slidenum">
+              <a:rPr lang="en-US" smtClean="0"/>
+              <a:pPr>
+                <a:defRPr/>
+              </a:pPr>
+              <a:t>46</a:t>
+            </a:fld>
+            <a:endParaRPr lang="en-US"/>
+          </a:p>
+        </p:txBody>
+      </p:sp>
+    </p:spTree>
+    <p:extLst>
+      <p:ext uri="{BB962C8B-B14F-4D97-AF65-F5344CB8AC3E}">
+        <p14:creationId xmlns:p14="http://schemas.microsoft.com/office/powerpoint/2010/main" val="4226131157"/>
       </p:ext>
     </p:extLst>
   </p:cSld>
@@ -2766,7 +3148,17 @@
           <a:bodyPr/>
           <a:lstStyle/>
           <a:p>
-            <a:endParaRPr lang="en-US" dirty="0"/>
+            <a:r>
+              <a:rPr lang="en-NL" dirty="0"/>
+              <a:t>(a=b /\ a!=c) \/ (a=c /\ a!=b) \/ (b=c /\ b!=a)  </a:t>
+            </a:r>
+            <a:r>
+              <a:rPr lang="en-NL" dirty="0">
+                <a:sym typeface="Wingdings" pitchFamily="2" charset="2"/>
+              </a:rPr>
+              <a:t>&lt;==&gt;  retval=isosceles</a:t>
+            </a:r>
+            <a:endParaRPr lang="en-NL" dirty="0"/>
           </a:p>
         </p:txBody>
       </p:sp>
@@ -2793,7 +3185,7 @@
               <a:pPr>
                 <a:defRPr/>
               </a:pPr>
-              <a:t>29</a:t>
+              <a:t>24</a:t>
             </a:fld>
             <a:endParaRPr lang="en-US"/>
           </a:p>
@@ -2802,7 +3194,7 @@
     </p:spTree>
     <p:extLst>
       <p:ext uri="{BB962C8B-B14F-4D97-AF65-F5344CB8AC3E}">
-        <p14:creationId xmlns:p14="http://schemas.microsoft.com/office/powerpoint/2010/main" val="208245241"/>
+        <p14:creationId xmlns:p14="http://schemas.microsoft.com/office/powerpoint/2010/main" val="573767759"/>
       </p:ext>
     </p:extLst>
   </p:cSld>
@@ -2856,7 +3248,7 @@
           <a:bodyPr/>
           <a:lstStyle/>
           <a:p>
-            <a:endParaRPr lang="en-NL" dirty="0"/>
+            <a:endParaRPr lang="en-US" dirty="0"/>
           </a:p>
         </p:txBody>
       </p:sp>
@@ -2883,7 +3275,7 @@
               <a:pPr>
                 <a:defRPr/>
               </a:pPr>
-              <a:t>31</a:t>
+              <a:t>29</a:t>
             </a:fld>
             <a:endParaRPr lang="en-US"/>
           </a:p>
@@ -2892,7 +3284,7 @@
     </p:spTree>
     <p:extLst>
       <p:ext uri="{BB962C8B-B14F-4D97-AF65-F5344CB8AC3E}">
-        <p14:creationId xmlns:p14="http://schemas.microsoft.com/office/powerpoint/2010/main" val="1863108249"/>
+        <p14:creationId xmlns:p14="http://schemas.microsoft.com/office/powerpoint/2010/main" val="208245241"/>
       </p:ext>
     </p:extLst>
   </p:cSld>
@@ -2946,7 +3338,7 @@
           <a:bodyPr/>
           <a:lstStyle/>
           <a:p>
-            <a:endParaRPr lang="en-US" dirty="0"/>
+            <a:endParaRPr lang="en-NL" dirty="0"/>
           </a:p>
         </p:txBody>
       </p:sp>
@@ -2957,7 +3349,7 @@
             <a:spLocks noGrp="1"/>
           </p:cNvSpPr>
           <p:nvPr>
-            <p:ph type="sldNum" sz="quarter" idx="10"/>
+            <p:ph type="sldNum" sz="quarter" idx="5"/>
           </p:nvPr>
         </p:nvSpPr>
         <p:spPr/>
@@ -2973,7 +3365,7 @@
               <a:pPr>
                 <a:defRPr/>
               </a:pPr>
-              <a:t>33</a:t>
+              <a:t>31</a:t>
             </a:fld>
             <a:endParaRPr lang="en-US"/>
           </a:p>
@@ -2982,7 +3374,7 @@
     </p:spTree>
     <p:extLst>
       <p:ext uri="{BB962C8B-B14F-4D97-AF65-F5344CB8AC3E}">
-        <p14:creationId xmlns:p14="http://schemas.microsoft.com/office/powerpoint/2010/main" val="1375514086"/>
+        <p14:creationId xmlns:p14="http://schemas.microsoft.com/office/powerpoint/2010/main" val="1863108249"/>
       </p:ext>
     </p:extLst>
   </p:cSld>
@@ -3188,7 +3580,7 @@
               <a:pPr>
                 <a:defRPr/>
               </a:pPr>
-              <a:t>21-04-2025</a:t>
+              <a:t>10-04-2026</a:t>
             </a:fld>
             <a:endParaRPr lang="en-US"/>
           </a:p>
@@ -3378,7 +3770,7 @@
               <a:pPr>
                 <a:defRPr/>
               </a:pPr>
-              <a:t>21-04-2025</a:t>
+              <a:t>10-04-2026</a:t>
             </a:fld>
             <a:endParaRPr lang="en-US"/>
           </a:p>
@@ -3578,7 +3970,7 @@
               <a:pPr>
                 <a:defRPr/>
               </a:pPr>
-              <a:t>21-04-2025</a:t>
+              <a:t>10-04-2026</a:t>
             </a:fld>
             <a:endParaRPr lang="en-US"/>
           </a:p>
@@ -3774,7 +4166,7 @@
               <a:pPr>
                 <a:defRPr/>
               </a:pPr>
-              <a:t>21-04-2025</a:t>
+              <a:t>10-04-2026</a:t>
             </a:fld>
             <a:endParaRPr lang="en-US"/>
           </a:p>
@@ -4041,7 +4433,7 @@
               <a:pPr>
                 <a:defRPr/>
               </a:pPr>
-              <a:t>21-04-2025</a:t>
+              <a:t>10-04-2026</a:t>
             </a:fld>
             <a:endParaRPr lang="en-US"/>
           </a:p>
@@ -4348,7 +4740,7 @@
               <a:pPr>
                 <a:defRPr/>
               </a:pPr>
-              <a:t>21-04-2025</a:t>
+              <a:t>10-04-2026</a:t>
             </a:fld>
             <a:endParaRPr lang="en-US"/>
           </a:p>
@@ -4789,7 +5181,7 @@
               <a:pPr>
                 <a:defRPr/>
               </a:pPr>
-              <a:t>21-04-2025</a:t>
+              <a:t>10-04-2026</a:t>
             </a:fld>
             <a:endParaRPr lang="en-US"/>
           </a:p>
@@ -4934,7 +5326,7 @@
               <a:pPr>
                 <a:defRPr/>
               </a:pPr>
-              <a:t>21-04-2025</a:t>
+              <a:t>10-04-2026</a:t>
             </a:fld>
             <a:endParaRPr lang="en-US"/>
           </a:p>
@@ -5051,7 +5443,7 @@
               <a:pPr>
                 <a:defRPr/>
               </a:pPr>
-              <a:t>21-04-2025</a:t>
+              <a:t>10-04-2026</a:t>
             </a:fld>
             <a:endParaRPr lang="en-US"/>
           </a:p>
@@ -5348,7 +5740,7 @@
               <a:pPr>
                 <a:defRPr/>
               </a:pPr>
-              <a:t>21-04-2025</a:t>
+              <a:t>10-04-2026</a:t>
             </a:fld>
             <a:endParaRPr lang="en-US"/>
           </a:p>
@@ -5628,7 +6020,7 @@
               <a:pPr>
                 <a:defRPr/>
               </a:pPr>
-              <a:t>21-04-2025</a:t>
+              <a:t>10-04-2026</a:t>
             </a:fld>
             <a:endParaRPr lang="en-US"/>
           </a:p>
@@ -5884,7 +6276,7 @@
               <a:pPr>
                 <a:defRPr/>
               </a:pPr>
-              <a:t>21-04-2025</a:t>
+              <a:t>10-04-2026</a:t>
             </a:fld>
             <a:endParaRPr lang="en-US"/>
           </a:p>
@@ -6484,7 +6876,7 @@
             </a:pPr>
             <a:r>
               <a:rPr lang="en-US" dirty="0"/>
-              <a:t>2024/25</a:t>
+              <a:t>2025/26</a:t>
             </a:r>
           </a:p>
           <a:p>
@@ -6497,20 +6889,8 @@
               <a:defRPr/>
             </a:pPr>
             <a:r>
-              <a:rPr lang="en-US" sz="2600" dirty="0" err="1"/>
-              <a:t>Wishnu</a:t>
-            </a:r>
-            <a:r>
               <a:rPr lang="en-US" sz="2600" dirty="0"/>
-              <a:t> </a:t>
-            </a:r>
-            <a:r>
-              <a:rPr lang="en-US" sz="2600" dirty="0" err="1"/>
-              <a:t>Prasetya</a:t>
-            </a:r>
-            <a:r>
-              <a:rPr lang="en-US" sz="2600" dirty="0"/>
-              <a:t> &amp; Gabriele Keller</a:t>
+              <a:t>Wishnu Prasetya &amp; Paige North</a:t>
             </a:r>
           </a:p>
           <a:p>
@@ -6955,47 +7335,47 @@
               <a:defRPr/>
             </a:pPr>
             <a:r>
-              <a:rPr lang="en-US" sz="1600" dirty="0" err="1"/>
+              <a:rPr lang="en-US" sz="1800" dirty="0" err="1"/>
               <a:t>NUnit</a:t>
             </a:r>
             <a:r>
-              <a:rPr lang="en-US" sz="1600" dirty="0"/>
+              <a:rPr lang="en-US" sz="1800" dirty="0"/>
               <a:t> Quick Start (older version, but will do for a tutorial): </a:t>
             </a:r>
             <a:r>
-              <a:rPr lang="en-US" sz="1600" dirty="0">
+              <a:rPr lang="en-US" sz="1800" dirty="0">
                 <a:hlinkClick r:id="rId3"/>
               </a:rPr>
               <a:t>https://nunit.org/docs/2.5.9/quickStart.html</a:t>
             </a:r>
-            <a:endParaRPr lang="en-US" sz="1600" dirty="0"/>
+            <a:endParaRPr lang="en-US" sz="1800" dirty="0"/>
           </a:p>
           <a:p>
             <a:pPr lvl="1" eaLnBrk="1" hangingPunct="1">
               <a:defRPr/>
             </a:pPr>
             <a:r>
-              <a:rPr lang="en-US" sz="1600" dirty="0" err="1"/>
+              <a:rPr lang="en-US" sz="1800" dirty="0" err="1"/>
               <a:t>NUnit</a:t>
             </a:r>
             <a:r>
-              <a:rPr lang="en-US" sz="1600" dirty="0"/>
+              <a:rPr lang="en-US" sz="1800" dirty="0"/>
               <a:t> doc: </a:t>
             </a:r>
             <a:r>
-              <a:rPr lang="en-GB" sz="1600" dirty="0">
+              <a:rPr lang="en-GB" sz="1800" dirty="0">
                 <a:hlinkClick r:id="rId4"/>
               </a:rPr>
               <a:t>https://github.com/nunit/docs/wiki/NUnit-Documentation</a:t>
             </a:r>
-            <a:endParaRPr lang="en-GB" sz="1600" dirty="0"/>
+            <a:endParaRPr lang="en-GB" sz="1800" dirty="0"/>
           </a:p>
           <a:p>
             <a:pPr lvl="1" eaLnBrk="1" hangingPunct="1">
               <a:defRPr/>
             </a:pPr>
             <a:r>
-              <a:rPr lang="en-GB" sz="1600" dirty="0"/>
+              <a:rPr lang="en-GB" sz="1800" dirty="0"/>
               <a:t>Testing from your IDE (Rider): </a:t>
             </a:r>
           </a:p>
@@ -7004,13 +7384,13 @@
               <a:defRPr/>
             </a:pPr>
             <a:r>
-              <a:rPr lang="en-GB" sz="1600" dirty="0">
+              <a:rPr lang="en-GB" sz="1800" dirty="0">
                 <a:hlinkClick r:id="rId5"/>
               </a:rPr>
               <a:t>https://www.jetbrains.com/help/rider/Introduction.html</a:t>
             </a:r>
             <a:r>
-              <a:rPr lang="en-GB" sz="1600" dirty="0"/>
+              <a:rPr lang="en-GB" sz="1800" dirty="0"/>
               <a:t>, check the entry on “Get Started with Unit Testing”.</a:t>
             </a:r>
           </a:p>
@@ -7019,16 +7399,16 @@
               <a:defRPr/>
             </a:pPr>
             <a:r>
-              <a:rPr lang="en-GB" sz="1600" dirty="0"/>
+              <a:rPr lang="en-GB" sz="1800" dirty="0"/>
               <a:t>Obtaining test coverage information: </a:t>
             </a:r>
             <a:r>
-              <a:rPr lang="en-GB" sz="1600" dirty="0">
+              <a:rPr lang="en-GB" sz="1800" dirty="0">
                 <a:hlinkClick r:id="rId6"/>
               </a:rPr>
               <a:t>https://www.jetbrains.com/help/dotcover/Getting_Started_with_dotCover.html</a:t>
             </a:r>
-            <a:endParaRPr lang="en-US" sz="1600" dirty="0"/>
+            <a:endParaRPr lang="en-US" sz="1800" dirty="0"/>
           </a:p>
           <a:p>
             <a:pPr eaLnBrk="1" hangingPunct="1">
@@ -7036,7 +7416,7 @@
             </a:pPr>
             <a:r>
               <a:rPr lang="en-US" sz="2400" dirty="0"/>
-              <a:t>In this lecture we will just go through the underlying concepts.</a:t>
+              <a:t>In this lecture we focus on the underlying concepts.</a:t>
             </a:r>
           </a:p>
         </p:txBody>
@@ -8240,7 +8620,7 @@
               <a:rPr lang="en-US" dirty="0">
                 <a:latin typeface="+mn-lt"/>
               </a:rPr>
-              <a:t>    public static void Init() ...     </a:t>
+              <a:t>    public void Init() ...     </a:t>
             </a:r>
           </a:p>
           <a:p>
@@ -8274,7 +8654,7 @@
               <a:rPr lang="en-US" dirty="0">
                 <a:latin typeface="+mn-lt"/>
               </a:rPr>
-              <a:t>    //public static void Cleanup() ...</a:t>
+              <a:t>    //public void Cleanup() ...</a:t>
             </a:r>
           </a:p>
           <a:p>
@@ -10041,13 +10421,6 @@
             <a:pPr lvl="1"/>
             <a:r>
               <a:rPr lang="en-US" dirty="0"/>
-              <a:t>Mocking</a:t>
-            </a:r>
-          </a:p>
-          <a:p>
-            <a:pPr lvl="1"/>
-            <a:r>
-              <a:rPr lang="en-US" dirty="0"/>
               <a:t>Other types of specifications: </a:t>
             </a:r>
             <a:r>
@@ -10057,6 +10430,13 @@
             <a:r>
               <a:rPr lang="en-US" dirty="0"/>
               <a:t>, ADT, FSM.</a:t>
+            </a:r>
+          </a:p>
+          <a:p>
+            <a:pPr lvl="1"/>
+            <a:r>
+              <a:rPr lang="en-US" dirty="0"/>
+              <a:t>Mocking</a:t>
             </a:r>
           </a:p>
           <a:p>
@@ -11185,8 +11565,8 @@
           <a:lstStyle/>
           <a:p>
             <a:r>
-              <a:rPr lang="en-US" sz="3600" dirty="0"/>
-              <a:t>Formalizing specification with a pre- and post-conditions</a:t>
+              <a:rPr lang="en-US" sz="2800" dirty="0"/>
+              <a:t>Formalizing specification with a pre- and post-conditions (in Pred. Logic)</a:t>
             </a:r>
           </a:p>
         </p:txBody>
@@ -11745,25 +12125,25 @@
           <a:lstStyle/>
           <a:p>
             <a:r>
-              <a:rPr lang="en-US" sz="4000" dirty="0"/>
+              <a:rPr lang="en-US" sz="3600" dirty="0"/>
               <a:t>Turning it to an in-code specification</a:t>
             </a:r>
             <a:br>
-              <a:rPr lang="en-US" sz="4000" dirty="0"/>
+              <a:rPr lang="en-US" sz="3600" dirty="0"/>
             </a:br>
             <a:r>
-              <a:rPr lang="en-US" sz="2400" dirty="0"/>
+              <a:rPr lang="en-US" sz="2000" dirty="0"/>
               <a:t>(here, encoded as a parameterized </a:t>
             </a:r>
             <a:r>
-              <a:rPr lang="en-US" sz="2400" dirty="0" err="1"/>
+              <a:rPr lang="en-US" sz="2000" dirty="0" err="1"/>
               <a:t>NUnit</a:t>
             </a:r>
             <a:r>
-              <a:rPr lang="en-US" sz="2400" dirty="0"/>
+              <a:rPr lang="en-US" sz="2000" dirty="0"/>
               <a:t>-test)</a:t>
             </a:r>
-            <a:endParaRPr lang="en-US" sz="4000" dirty="0"/>
+            <a:endParaRPr lang="en-US" sz="3600" dirty="0"/>
           </a:p>
         </p:txBody>
       </p:sp>
@@ -12022,7 +12402,7 @@
         <p:spPr>
           <a:xfrm>
             <a:off x="238408" y="5401782"/>
-            <a:ext cx="8667183" cy="1015663"/>
+            <a:ext cx="8667183" cy="646331"/>
           </a:xfrm>
           <a:prstGeom prst="rect">
             <a:avLst/>
@@ -12037,7 +12417,7 @@
           <a:p>
             <a:pPr algn="ctr"/>
             <a:r>
-              <a:rPr lang="en-US" sz="2000" b="1" dirty="0">
+              <a:rPr lang="en-US" b="1" dirty="0">
                 <a:solidFill>
                   <a:schemeClr val="accent1">
                     <a:lumMod val="50000"/>
@@ -12047,11 +12427,11 @@
               <a:t>In-code specifications </a:t>
             </a:r>
             <a:r>
-              <a:rPr lang="en-US" sz="2000" dirty="0"/>
+              <a:rPr lang="en-US" dirty="0"/>
               <a:t>are specifications expressed in a </a:t>
             </a:r>
             <a:r>
-              <a:rPr lang="en-US" sz="2000" b="1" dirty="0">
+              <a:rPr lang="en-US" b="1" dirty="0">
                 <a:solidFill>
                   <a:schemeClr val="accent2">
                     <a:lumMod val="50000"/>
@@ -12061,11 +12441,11 @@
               <a:t>programming</a:t>
             </a:r>
             <a:r>
-              <a:rPr lang="en-US" sz="2000" dirty="0"/>
+              <a:rPr lang="en-US" dirty="0"/>
               <a:t> </a:t>
             </a:r>
             <a:r>
-              <a:rPr lang="en-US" sz="2000" b="1" dirty="0">
+              <a:rPr lang="en-US" b="1" dirty="0">
                 <a:solidFill>
                   <a:schemeClr val="accent2">
                     <a:lumMod val="50000"/>
@@ -12075,11 +12455,11 @@
               <a:t>language</a:t>
             </a:r>
             <a:r>
-              <a:rPr lang="en-US" sz="2000" dirty="0"/>
+              <a:rPr lang="en-US" dirty="0"/>
               <a:t>.  It is less clean, but it is </a:t>
             </a:r>
             <a:r>
-              <a:rPr lang="en-US" sz="2000" b="1" dirty="0">
+              <a:rPr lang="en-US" b="1" dirty="0">
                 <a:solidFill>
                   <a:schemeClr val="accent1">
                     <a:lumMod val="50000"/>
@@ -12089,7 +12469,7 @@
               <a:t>executable</a:t>
             </a:r>
             <a:r>
-              <a:rPr lang="en-US" sz="2000" dirty="0"/>
+              <a:rPr lang="en-US" dirty="0"/>
               <a:t>, so you can invoke them from your tests.</a:t>
             </a:r>
           </a:p>
@@ -12109,8 +12489,8 @@
         </p:nvSpPr>
         <p:spPr>
           <a:xfrm>
-            <a:off x="3816186" y="4435893"/>
-            <a:ext cx="2737014" cy="738664"/>
+            <a:off x="4164961" y="4496137"/>
+            <a:ext cx="2737014" cy="646331"/>
           </a:xfrm>
           <a:prstGeom prst="rect">
             <a:avLst/>
@@ -12135,15 +12515,15 @@
           <a:p>
             <a:pPr algn="ctr"/>
             <a:r>
-              <a:rPr lang="en-US" sz="1400" dirty="0"/>
+              <a:rPr lang="en-US" sz="1200" dirty="0"/>
               <a:t>Check that the method throws the right exception when the pre-</a:t>
             </a:r>
             <a:r>
-              <a:rPr lang="en-US" sz="1400" dirty="0" err="1"/>
+              <a:rPr lang="en-US" sz="1200" dirty="0" err="1"/>
               <a:t>cond</a:t>
             </a:r>
             <a:r>
-              <a:rPr lang="en-US" sz="1400" dirty="0"/>
+              <a:rPr lang="en-US" sz="1200" dirty="0"/>
               <a:t> is violated.</a:t>
             </a:r>
           </a:p>
@@ -12999,7 +13379,7 @@
         <p:spPr>
           <a:xfrm>
             <a:off x="935596" y="5157192"/>
-            <a:ext cx="7272807" cy="1477328"/>
+            <a:ext cx="7272807" cy="1169551"/>
           </a:xfrm>
           <a:prstGeom prst="rect">
             <a:avLst/>
@@ -13014,69 +13394,69 @@
           <a:p>
             <a:pPr algn="ctr"/>
             <a:r>
-              <a:rPr lang="en-US" dirty="0"/>
+              <a:rPr lang="en-US" sz="1400" dirty="0"/>
               <a:t>Important observation:  this approach also opens a way for you to “</a:t>
             </a:r>
             <a:r>
-              <a:rPr lang="en-US" b="1" dirty="0"/>
+              <a:rPr lang="en-US" sz="1400" b="1" dirty="0"/>
               <a:t>generate</a:t>
             </a:r>
             <a:r>
-              <a:rPr lang="en-US" dirty="0"/>
+              <a:rPr lang="en-US" sz="1400" dirty="0"/>
               <a:t>” the tests, e.g. using a </a:t>
             </a:r>
             <a:r>
-              <a:rPr lang="en-US" dirty="0" err="1"/>
+              <a:rPr lang="en-US" sz="1400" dirty="0" err="1"/>
               <a:t>QuickCheck</a:t>
             </a:r>
             <a:r>
-              <a:rPr lang="en-US" dirty="0"/>
+              <a:rPr lang="en-US" sz="1400" dirty="0"/>
               <a:t>-like tool.</a:t>
             </a:r>
           </a:p>
           <a:p>
             <a:pPr algn="ctr"/>
-            <a:endParaRPr lang="en-US" dirty="0"/>
+            <a:endParaRPr lang="en-US" sz="1400" dirty="0"/>
           </a:p>
           <a:p>
             <a:pPr algn="ctr"/>
             <a:r>
-              <a:rPr lang="en-US" dirty="0"/>
+              <a:rPr lang="en-US" sz="1400" dirty="0"/>
               <a:t>Note: “</a:t>
             </a:r>
             <a:r>
-              <a:rPr lang="en-US" dirty="0" err="1"/>
+              <a:rPr lang="en-US" sz="1400" dirty="0" err="1"/>
               <a:t>TestCase</a:t>
             </a:r>
             <a:r>
-              <a:rPr lang="en-US" dirty="0"/>
+              <a:rPr lang="en-US" sz="1400" dirty="0"/>
               <a:t>” </a:t>
             </a:r>
             <a:r>
-              <a:rPr lang="en-US" dirty="0" err="1"/>
+              <a:rPr lang="en-US" sz="1400" dirty="0" err="1"/>
               <a:t>Nunit</a:t>
             </a:r>
             <a:r>
-              <a:rPr lang="en-US" dirty="0"/>
+              <a:rPr lang="en-US" sz="1400" dirty="0"/>
               <a:t> attribute can only handle simple types. See also the doc. for ‘</a:t>
             </a:r>
             <a:r>
-              <a:rPr lang="en-GB" b="1" dirty="0" err="1"/>
+              <a:rPr lang="en-GB" sz="1400" b="1" dirty="0" err="1"/>
               <a:t>TestCaseSource</a:t>
             </a:r>
             <a:r>
-              <a:rPr lang="en-US" dirty="0"/>
+              <a:rPr lang="en-US" sz="1400" dirty="0"/>
               <a:t>” </a:t>
             </a:r>
             <a:r>
-              <a:rPr lang="en-US" dirty="0" err="1"/>
+              <a:rPr lang="en-US" sz="1400" dirty="0" err="1"/>
               <a:t>Nunit</a:t>
             </a:r>
             <a:r>
-              <a:rPr lang="en-US" dirty="0"/>
+              <a:rPr lang="en-US" sz="1400" dirty="0"/>
               <a:t> attribute.</a:t>
             </a:r>
-            <a:endParaRPr lang="en-GB" dirty="0"/>
+            <a:endParaRPr lang="en-GB" sz="1400" dirty="0"/>
           </a:p>
         </p:txBody>
       </p:sp>
@@ -13190,8 +13570,8 @@
           <a:lstStyle/>
           <a:p>
             <a:r>
-              <a:rPr lang="en-US" sz="4000" dirty="0"/>
-              <a:t>Example specifications for methods on arrays or collections</a:t>
+              <a:rPr lang="en-US" sz="3200" dirty="0"/>
+              <a:t>Example2: specification for a method on array/collection</a:t>
             </a:r>
           </a:p>
         </p:txBody>
@@ -15648,6 +16028,2979 @@
       </p:grpSpPr>
       <p:sp>
         <p:nvSpPr>
+          <p:cNvPr id="17410" name="Title 1"/>
+          <p:cNvSpPr>
+            <a:spLocks noGrp="1"/>
+          </p:cNvSpPr>
+          <p:nvPr>
+            <p:ph type="title"/>
+          </p:nvPr>
+        </p:nvSpPr>
+        <p:spPr/>
+        <p:txBody>
+          <a:bodyPr/>
+          <a:lstStyle/>
+          <a:p>
+            <a:pPr eaLnBrk="1" hangingPunct="1"/>
+            <a:r>
+              <a:rPr lang="en-US" dirty="0"/>
+              <a:t>Specifying a “class”</a:t>
+            </a:r>
+            <a:endParaRPr lang="en-US" i="1" dirty="0"/>
+          </a:p>
+        </p:txBody>
+      </p:sp>
+      <p:sp>
+        <p:nvSpPr>
+          <p:cNvPr id="17411" name="Content Placeholder 2"/>
+          <p:cNvSpPr>
+            <a:spLocks noGrp="1"/>
+          </p:cNvSpPr>
+          <p:nvPr>
+            <p:ph idx="1"/>
+          </p:nvPr>
+        </p:nvSpPr>
+        <p:spPr>
+          <a:xfrm>
+            <a:off x="457200" y="1844824"/>
+            <a:ext cx="8229600" cy="4281339"/>
+          </a:xfrm>
+        </p:spPr>
+        <p:txBody>
+          <a:bodyPr/>
+          <a:lstStyle/>
+          <a:p>
+            <a:pPr eaLnBrk="1" hangingPunct="1"/>
+            <a:r>
+              <a:rPr lang="en-US" sz="2800" dirty="0"/>
+              <a:t>Many classes have methods that </a:t>
+            </a:r>
+            <a:r>
+              <a:rPr lang="en-US" sz="2800" i="1" dirty="0"/>
+              <a:t>interact with each other</a:t>
+            </a:r>
+            <a:r>
+              <a:rPr lang="en-US" sz="2800" dirty="0"/>
+              <a:t> (e.g. as in Stack).  How to specify (and test) these interactions? </a:t>
+            </a:r>
+          </a:p>
+          <a:p>
+            <a:pPr eaLnBrk="1" hangingPunct="1"/>
+            <a:r>
+              <a:rPr lang="en-US" sz="2800" dirty="0"/>
+              <a:t>Option-1: </a:t>
+            </a:r>
+            <a:r>
+              <a:rPr lang="en-US" sz="2800" dirty="0">
+                <a:sym typeface="Symbol" pitchFamily="18" charset="2"/>
+              </a:rPr>
+              <a:t>specify every method with pre- and post-conditions (we discussed this).</a:t>
+            </a:r>
+            <a:br>
+              <a:rPr lang="en-US" sz="2800" dirty="0">
+                <a:sym typeface="Symbol" pitchFamily="18" charset="2"/>
+              </a:rPr>
+            </a:br>
+            <a:r>
+              <a:rPr lang="en-US" sz="2800" dirty="0">
+                <a:sym typeface="Symbol" pitchFamily="18" charset="2"/>
+              </a:rPr>
+              <a:t>This is expressive enough, tough pre- and post-conditions do not, arguably, naturally capture inter-method interactions.</a:t>
+            </a:r>
+          </a:p>
+        </p:txBody>
+      </p:sp>
+      <p:sp>
+        <p:nvSpPr>
+          <p:cNvPr id="4" name="Slide Number Placeholder 3"/>
+          <p:cNvSpPr>
+            <a:spLocks noGrp="1"/>
+          </p:cNvSpPr>
+          <p:nvPr>
+            <p:ph type="sldNum" sz="quarter" idx="12"/>
+          </p:nvPr>
+        </p:nvSpPr>
+        <p:spPr/>
+        <p:txBody>
+          <a:bodyPr/>
+          <a:lstStyle/>
+          <a:p>
+            <a:pPr>
+              <a:defRPr/>
+            </a:pPr>
+            <a:fld id="{4D00519D-647D-4135-80EB-ECBDAE25E06C}" type="slidenum">
+              <a:rPr lang="en-US" smtClean="0"/>
+              <a:pPr>
+                <a:defRPr/>
+              </a:pPr>
+              <a:t>34</a:t>
+            </a:fld>
+            <a:endParaRPr lang="en-US"/>
+          </a:p>
+        </p:txBody>
+      </p:sp>
+    </p:spTree>
+    <p:extLst>
+      <p:ext uri="{BB962C8B-B14F-4D97-AF65-F5344CB8AC3E}">
+        <p14:creationId xmlns:p14="http://schemas.microsoft.com/office/powerpoint/2010/main" val="2083278437"/>
+      </p:ext>
+    </p:extLst>
+  </p:cSld>
+  <p:clrMapOvr>
+    <a:masterClrMapping/>
+  </p:clrMapOvr>
+</p:sld>
+</file>
+
+<file path=ppt/slides/slide35.xml><?xml version="1.0" encoding="utf-8"?>
+<p:sld xmlns:a="http://schemas.openxmlformats.org/drawingml/2006/main" xmlns:r="http://schemas.openxmlformats.org/officeDocument/2006/relationships" xmlns:p="http://schemas.openxmlformats.org/presentationml/2006/main">
+  <p:cSld>
+    <p:spTree>
+      <p:nvGrpSpPr>
+        <p:cNvPr id="1" name=""/>
+        <p:cNvGrpSpPr/>
+        <p:nvPr/>
+      </p:nvGrpSpPr>
+      <p:grpSpPr>
+        <a:xfrm>
+          <a:off x="0" y="0"/>
+          <a:ext cx="0" cy="0"/>
+          <a:chOff x="0" y="0"/>
+          <a:chExt cx="0" cy="0"/>
+        </a:xfrm>
+      </p:grpSpPr>
+      <p:sp>
+        <p:nvSpPr>
+          <p:cNvPr id="17410" name="Title 1"/>
+          <p:cNvSpPr>
+            <a:spLocks noGrp="1"/>
+          </p:cNvSpPr>
+          <p:nvPr>
+            <p:ph type="title"/>
+          </p:nvPr>
+        </p:nvSpPr>
+        <p:spPr/>
+        <p:txBody>
+          <a:bodyPr/>
+          <a:lstStyle/>
+          <a:p>
+            <a:pPr eaLnBrk="1" hangingPunct="1"/>
+            <a:r>
+              <a:rPr lang="en-US" dirty="0"/>
+              <a:t>Specifying a “class”</a:t>
+            </a:r>
+            <a:endParaRPr lang="en-US" i="1" dirty="0"/>
+          </a:p>
+        </p:txBody>
+      </p:sp>
+      <p:sp>
+        <p:nvSpPr>
+          <p:cNvPr id="17411" name="Content Placeholder 2"/>
+          <p:cNvSpPr>
+            <a:spLocks noGrp="1"/>
+          </p:cNvSpPr>
+          <p:nvPr>
+            <p:ph idx="1"/>
+          </p:nvPr>
+        </p:nvSpPr>
+        <p:spPr>
+          <a:xfrm>
+            <a:off x="457200" y="1844824"/>
+            <a:ext cx="8229600" cy="4281339"/>
+          </a:xfrm>
+        </p:spPr>
+        <p:txBody>
+          <a:bodyPr/>
+          <a:lstStyle/>
+          <a:p>
+            <a:pPr eaLnBrk="1" hangingPunct="1"/>
+            <a:r>
+              <a:rPr lang="en-US" sz="2400" dirty="0"/>
+              <a:t>Other options, which can be user either as alternatives or in conjunction with pre/post-conditions:</a:t>
+            </a:r>
+          </a:p>
+          <a:p>
+            <a:pPr lvl="1" eaLnBrk="1" hangingPunct="1"/>
+            <a:r>
+              <a:rPr lang="en-US" sz="2400" dirty="0">
+                <a:sym typeface="Symbol" pitchFamily="18" charset="2"/>
+              </a:rPr>
+              <a:t>class invariant</a:t>
+            </a:r>
+          </a:p>
+          <a:p>
+            <a:pPr lvl="1" eaLnBrk="1" hangingPunct="1"/>
+            <a:r>
+              <a:rPr lang="en-US" sz="2400" dirty="0">
+                <a:sym typeface="Symbol" pitchFamily="18" charset="2"/>
+              </a:rPr>
+              <a:t>Abstract Data Type (ADT)</a:t>
+            </a:r>
+          </a:p>
+          <a:p>
+            <a:pPr marL="457200" lvl="1" indent="0" eaLnBrk="1" hangingPunct="1">
+              <a:buNone/>
+            </a:pPr>
+            <a:endParaRPr lang="en-US" sz="2400" dirty="0">
+              <a:sym typeface="Symbol" pitchFamily="18" charset="2"/>
+            </a:endParaRPr>
+          </a:p>
+        </p:txBody>
+      </p:sp>
+      <p:sp>
+        <p:nvSpPr>
+          <p:cNvPr id="4" name="Slide Number Placeholder 3"/>
+          <p:cNvSpPr>
+            <a:spLocks noGrp="1"/>
+          </p:cNvSpPr>
+          <p:nvPr>
+            <p:ph type="sldNum" sz="quarter" idx="12"/>
+          </p:nvPr>
+        </p:nvSpPr>
+        <p:spPr/>
+        <p:txBody>
+          <a:bodyPr/>
+          <a:lstStyle/>
+          <a:p>
+            <a:pPr>
+              <a:defRPr/>
+            </a:pPr>
+            <a:fld id="{4D00519D-647D-4135-80EB-ECBDAE25E06C}" type="slidenum">
+              <a:rPr lang="en-US" smtClean="0"/>
+              <a:pPr>
+                <a:defRPr/>
+              </a:pPr>
+              <a:t>35</a:t>
+            </a:fld>
+            <a:endParaRPr lang="en-US"/>
+          </a:p>
+        </p:txBody>
+      </p:sp>
+    </p:spTree>
+  </p:cSld>
+  <p:clrMapOvr>
+    <a:masterClrMapping/>
+  </p:clrMapOvr>
+</p:sld>
+</file>
+
+<file path=ppt/slides/slide36.xml><?xml version="1.0" encoding="utf-8"?>
+<p:sld xmlns:a="http://schemas.openxmlformats.org/drawingml/2006/main" xmlns:r="http://schemas.openxmlformats.org/officeDocument/2006/relationships" xmlns:p="http://schemas.openxmlformats.org/presentationml/2006/main">
+  <p:cSld>
+    <p:spTree>
+      <p:nvGrpSpPr>
+        <p:cNvPr id="1" name=""/>
+        <p:cNvGrpSpPr/>
+        <p:nvPr/>
+      </p:nvGrpSpPr>
+      <p:grpSpPr>
+        <a:xfrm>
+          <a:off x="0" y="0"/>
+          <a:ext cx="0" cy="0"/>
+          <a:chOff x="0" y="0"/>
+          <a:chExt cx="0" cy="0"/>
+        </a:xfrm>
+      </p:grpSpPr>
+      <p:sp>
+        <p:nvSpPr>
+          <p:cNvPr id="18434" name="Title 1"/>
+          <p:cNvSpPr>
+            <a:spLocks noGrp="1"/>
+          </p:cNvSpPr>
+          <p:nvPr>
+            <p:ph type="title"/>
+          </p:nvPr>
+        </p:nvSpPr>
+        <p:spPr>
+          <a:xfrm>
+            <a:off x="457200" y="274638"/>
+            <a:ext cx="8229600" cy="706090"/>
+          </a:xfrm>
+        </p:spPr>
+        <p:txBody>
+          <a:bodyPr/>
+          <a:lstStyle/>
+          <a:p>
+            <a:pPr eaLnBrk="1" hangingPunct="1"/>
+            <a:r>
+              <a:rPr lang="en-US"/>
+              <a:t>Specifying with class invariant</a:t>
+            </a:r>
+            <a:endParaRPr lang="en-US" i="1"/>
+          </a:p>
+        </p:txBody>
+      </p:sp>
+      <p:sp>
+        <p:nvSpPr>
+          <p:cNvPr id="18435" name="Content Placeholder 2"/>
+          <p:cNvSpPr>
+            <a:spLocks noGrp="1"/>
+          </p:cNvSpPr>
+          <p:nvPr>
+            <p:ph idx="1"/>
+          </p:nvPr>
+        </p:nvSpPr>
+        <p:spPr>
+          <a:xfrm>
+            <a:off x="457200" y="4132846"/>
+            <a:ext cx="8383960" cy="2193107"/>
+          </a:xfrm>
+        </p:spPr>
+        <p:txBody>
+          <a:bodyPr/>
+          <a:lstStyle/>
+          <a:p>
+            <a:pPr marL="0" indent="0" eaLnBrk="1" hangingPunct="1">
+              <a:buNone/>
+            </a:pPr>
+            <a:r>
+              <a:rPr lang="en-US" sz="2400" dirty="0"/>
+              <a:t>A </a:t>
+            </a:r>
+            <a:r>
+              <a:rPr lang="en-US" sz="2400" b="1" dirty="0"/>
+              <a:t>class invariant </a:t>
+            </a:r>
+            <a:r>
+              <a:rPr lang="en-US" sz="2400" dirty="0"/>
+              <a:t>of a class C specifies valid states of instances of C. When an instance is created, it must have a valid state. All operations/methods of C are expected to restore the state of their target instance to a valid state.</a:t>
+            </a:r>
+          </a:p>
+          <a:p>
+            <a:pPr marL="0" indent="0" eaLnBrk="1" hangingPunct="1">
+              <a:buNone/>
+            </a:pPr>
+            <a:endParaRPr lang="en-US" sz="2400" dirty="0"/>
+          </a:p>
+          <a:p>
+            <a:pPr marL="0" indent="0" eaLnBrk="1" hangingPunct="1">
+              <a:buNone/>
+            </a:pPr>
+            <a:r>
+              <a:rPr lang="en-US" sz="2400" dirty="0"/>
+              <a:t>Example: </a:t>
+            </a:r>
+            <a:r>
+              <a:rPr lang="en-US" sz="2400" dirty="0">
+                <a:highlight>
+                  <a:srgbClr val="FFFF00"/>
+                </a:highlight>
+              </a:rPr>
+              <a:t>class inv</a:t>
+            </a:r>
+            <a:r>
+              <a:rPr lang="en-US" sz="2400" dirty="0"/>
+              <a:t>  for Thermometer:  temperature ≥ -273.15</a:t>
+            </a:r>
+          </a:p>
+        </p:txBody>
+      </p:sp>
+      <p:sp>
+        <p:nvSpPr>
+          <p:cNvPr id="4" name="Slide Number Placeholder 3"/>
+          <p:cNvSpPr>
+            <a:spLocks noGrp="1"/>
+          </p:cNvSpPr>
+          <p:nvPr>
+            <p:ph type="sldNum" sz="quarter" idx="12"/>
+          </p:nvPr>
+        </p:nvSpPr>
+        <p:spPr/>
+        <p:txBody>
+          <a:bodyPr/>
+          <a:lstStyle/>
+          <a:p>
+            <a:pPr>
+              <a:defRPr/>
+            </a:pPr>
+            <a:fld id="{2A57B2AA-917E-49FC-B415-E530F668AFC6}" type="slidenum">
+              <a:rPr lang="en-US" smtClean="0"/>
+              <a:pPr>
+                <a:defRPr/>
+              </a:pPr>
+              <a:t>36</a:t>
+            </a:fld>
+            <a:endParaRPr lang="en-US"/>
+          </a:p>
+        </p:txBody>
+      </p:sp>
+      <p:sp>
+        <p:nvSpPr>
+          <p:cNvPr id="2" name="TextBox 1">
+            <a:extLst>
+              <a:ext uri="{FF2B5EF4-FFF2-40B4-BE49-F238E27FC236}">
+                <a16:creationId xmlns:a16="http://schemas.microsoft.com/office/drawing/2014/main" id="{EC3B59C0-D1CA-6A4A-979D-F37CBD7C7320}"/>
+              </a:ext>
+            </a:extLst>
+          </p:cNvPr>
+          <p:cNvSpPr txBox="1"/>
+          <p:nvPr/>
+        </p:nvSpPr>
+        <p:spPr>
+          <a:xfrm>
+            <a:off x="2177755" y="1340768"/>
+            <a:ext cx="4788490" cy="2308324"/>
+          </a:xfrm>
+          <a:prstGeom prst="rect">
+            <a:avLst/>
+          </a:prstGeom>
+          <a:noFill/>
+          <a:ln>
+            <a:solidFill>
+              <a:schemeClr val="tx1"/>
+            </a:solidFill>
+          </a:ln>
+        </p:spPr>
+        <p:txBody>
+          <a:bodyPr wrap="none" rtlCol="0">
+            <a:spAutoFit/>
+          </a:bodyPr>
+          <a:lstStyle/>
+          <a:p>
+            <a:r>
+              <a:rPr lang="en-US" sz="2400" b="1" dirty="0"/>
+              <a:t>class</a:t>
+            </a:r>
+            <a:r>
+              <a:rPr lang="en-US" sz="2400" dirty="0"/>
+              <a:t> Thermometer {</a:t>
+            </a:r>
+            <a:br>
+              <a:rPr lang="en-US" sz="2400" dirty="0"/>
+            </a:br>
+            <a:r>
+              <a:rPr lang="en-US" sz="2400" dirty="0"/>
+              <a:t>   double temperature // in </a:t>
+            </a:r>
+            <a:r>
+              <a:rPr lang="en-US" sz="2400" dirty="0" err="1"/>
+              <a:t>Celcius</a:t>
+            </a:r>
+            <a:br>
+              <a:rPr lang="en-US" sz="2400" dirty="0"/>
+            </a:br>
+            <a:r>
+              <a:rPr lang="en-US" sz="2400" dirty="0"/>
+              <a:t>   Value()</a:t>
+            </a:r>
+            <a:br>
+              <a:rPr lang="en-US" sz="2400" dirty="0"/>
+            </a:br>
+            <a:r>
+              <a:rPr lang="en-US" sz="2400" dirty="0"/>
+              <a:t>   </a:t>
+            </a:r>
+            <a:r>
+              <a:rPr lang="en-US" sz="2400" dirty="0" err="1"/>
+              <a:t>Incr</a:t>
+            </a:r>
+            <a:r>
+              <a:rPr lang="en-US" sz="2400" dirty="0"/>
+              <a:t>(t)</a:t>
+            </a:r>
+            <a:br>
+              <a:rPr lang="en-US" sz="2400" dirty="0"/>
+            </a:br>
+            <a:r>
+              <a:rPr lang="en-US" sz="2400" dirty="0"/>
+              <a:t>   </a:t>
+            </a:r>
+            <a:r>
+              <a:rPr lang="en-US" sz="2400" dirty="0" err="1"/>
+              <a:t>Decr</a:t>
+            </a:r>
+            <a:r>
+              <a:rPr lang="en-US" sz="2400" dirty="0"/>
+              <a:t>(t)</a:t>
+            </a:r>
+            <a:br>
+              <a:rPr lang="en-US" sz="2400" dirty="0"/>
+            </a:br>
+            <a:r>
+              <a:rPr lang="en-US" sz="2400" dirty="0"/>
+              <a:t>}</a:t>
+            </a:r>
+          </a:p>
+        </p:txBody>
+      </p:sp>
+      <p:sp>
+        <p:nvSpPr>
+          <p:cNvPr id="3" name="Rounded Rectangle 2">
+            <a:extLst>
+              <a:ext uri="{FF2B5EF4-FFF2-40B4-BE49-F238E27FC236}">
+                <a16:creationId xmlns:a16="http://schemas.microsoft.com/office/drawing/2014/main" id="{5414027C-08B1-1FED-7F23-BB657D6EFA65}"/>
+              </a:ext>
+            </a:extLst>
+          </p:cNvPr>
+          <p:cNvSpPr/>
+          <p:nvPr/>
+        </p:nvSpPr>
+        <p:spPr>
+          <a:xfrm>
+            <a:off x="278880" y="4009132"/>
+            <a:ext cx="8685608" cy="1796132"/>
+          </a:xfrm>
+          <a:prstGeom prst="roundRect">
+            <a:avLst/>
+          </a:prstGeom>
+          <a:solidFill>
+            <a:srgbClr val="FFC000">
+              <a:alpha val="25000"/>
+            </a:srgbClr>
+          </a:solidFill>
+          <a:ln>
+            <a:solidFill>
+              <a:srgbClr val="FFC000"/>
+            </a:solidFill>
+          </a:ln>
+        </p:spPr>
+        <p:style>
+          <a:lnRef idx="2">
+            <a:schemeClr val="accent1">
+              <a:shade val="50000"/>
+            </a:schemeClr>
+          </a:lnRef>
+          <a:fillRef idx="1">
+            <a:schemeClr val="accent1"/>
+          </a:fillRef>
+          <a:effectRef idx="0">
+            <a:schemeClr val="accent1"/>
+          </a:effectRef>
+          <a:fontRef idx="minor">
+            <a:schemeClr val="lt1"/>
+          </a:fontRef>
+        </p:style>
+        <p:txBody>
+          <a:bodyPr rtlCol="0" anchor="ctr"/>
+          <a:lstStyle/>
+          <a:p>
+            <a:pPr algn="ctr"/>
+            <a:endParaRPr lang="en-US"/>
+          </a:p>
+        </p:txBody>
+      </p:sp>
+    </p:spTree>
+  </p:cSld>
+  <p:clrMapOvr>
+    <a:masterClrMapping/>
+  </p:clrMapOvr>
+</p:sld>
+</file>
+
+<file path=ppt/slides/slide37.xml><?xml version="1.0" encoding="utf-8"?>
+<p:sld xmlns:a="http://schemas.openxmlformats.org/drawingml/2006/main" xmlns:r="http://schemas.openxmlformats.org/officeDocument/2006/relationships" xmlns:p="http://schemas.openxmlformats.org/presentationml/2006/main">
+  <p:cSld>
+    <p:spTree>
+      <p:nvGrpSpPr>
+        <p:cNvPr id="1" name=""/>
+        <p:cNvGrpSpPr/>
+        <p:nvPr/>
+      </p:nvGrpSpPr>
+      <p:grpSpPr>
+        <a:xfrm>
+          <a:off x="0" y="0"/>
+          <a:ext cx="0" cy="0"/>
+          <a:chOff x="0" y="0"/>
+          <a:chExt cx="0" cy="0"/>
+        </a:xfrm>
+      </p:grpSpPr>
+      <p:sp>
+        <p:nvSpPr>
+          <p:cNvPr id="5" name="Rounded Rectangle 4">
+            <a:extLst>
+              <a:ext uri="{FF2B5EF4-FFF2-40B4-BE49-F238E27FC236}">
+                <a16:creationId xmlns:a16="http://schemas.microsoft.com/office/drawing/2014/main" id="{DF273161-B41E-644D-97E9-453CC6AE190E}"/>
+              </a:ext>
+            </a:extLst>
+          </p:cNvPr>
+          <p:cNvSpPr/>
+          <p:nvPr/>
+        </p:nvSpPr>
+        <p:spPr>
+          <a:xfrm>
+            <a:off x="457200" y="1923844"/>
+            <a:ext cx="8229600" cy="2585276"/>
+          </a:xfrm>
+          <a:prstGeom prst="roundRect">
+            <a:avLst/>
+          </a:prstGeom>
+          <a:solidFill>
+            <a:srgbClr val="FFC000">
+              <a:alpha val="25000"/>
+            </a:srgbClr>
+          </a:solidFill>
+          <a:ln>
+            <a:solidFill>
+              <a:srgbClr val="FFC000"/>
+            </a:solidFill>
+          </a:ln>
+        </p:spPr>
+        <p:style>
+          <a:lnRef idx="2">
+            <a:schemeClr val="accent1">
+              <a:shade val="50000"/>
+            </a:schemeClr>
+          </a:lnRef>
+          <a:fillRef idx="1">
+            <a:schemeClr val="accent1"/>
+          </a:fillRef>
+          <a:effectRef idx="0">
+            <a:schemeClr val="accent1"/>
+          </a:effectRef>
+          <a:fontRef idx="minor">
+            <a:schemeClr val="lt1"/>
+          </a:fontRef>
+        </p:style>
+        <p:txBody>
+          <a:bodyPr rtlCol="0" anchor="ctr"/>
+          <a:lstStyle/>
+          <a:p>
+            <a:pPr algn="ctr"/>
+            <a:endParaRPr lang="en-US"/>
+          </a:p>
+        </p:txBody>
+      </p:sp>
+      <p:sp>
+        <p:nvSpPr>
+          <p:cNvPr id="20482" name="Title 3"/>
+          <p:cNvSpPr>
+            <a:spLocks noGrp="1"/>
+          </p:cNvSpPr>
+          <p:nvPr>
+            <p:ph type="title"/>
+          </p:nvPr>
+        </p:nvSpPr>
+        <p:spPr/>
+        <p:txBody>
+          <a:bodyPr/>
+          <a:lstStyle/>
+          <a:p>
+            <a:r>
+              <a:rPr lang="en-US"/>
+              <a:t>Specifying a class as an ADT</a:t>
+            </a:r>
+          </a:p>
+        </p:txBody>
+      </p:sp>
+      <p:sp>
+        <p:nvSpPr>
+          <p:cNvPr id="20483" name="Content Placeholder 4"/>
+          <p:cNvSpPr>
+            <a:spLocks noGrp="1"/>
+          </p:cNvSpPr>
+          <p:nvPr>
+            <p:ph idx="1"/>
+          </p:nvPr>
+        </p:nvSpPr>
+        <p:spPr>
+          <a:xfrm>
+            <a:off x="755576" y="2132856"/>
+            <a:ext cx="7704856" cy="3993307"/>
+          </a:xfrm>
+        </p:spPr>
+        <p:txBody>
+          <a:bodyPr/>
+          <a:lstStyle/>
+          <a:p>
+            <a:pPr marL="0" indent="0" algn="just">
+              <a:buNone/>
+            </a:pPr>
+            <a:r>
+              <a:rPr lang="en-US" sz="2800" dirty="0"/>
+              <a:t>An </a:t>
+            </a:r>
+            <a:r>
+              <a:rPr lang="en-US" sz="2800" i="1" u="sng" dirty="0"/>
+              <a:t>Abstract Data Type </a:t>
+            </a:r>
+            <a:r>
+              <a:rPr lang="en-US" sz="2800" dirty="0"/>
+              <a:t>(ADT) is a model of a (stateful) data structure. The data structure is modeled abstractly by only describing a set of </a:t>
+            </a:r>
+            <a:r>
+              <a:rPr lang="en-US" sz="2800" i="1" dirty="0"/>
+              <a:t>operations</a:t>
+            </a:r>
+            <a:r>
+              <a:rPr lang="en-US" sz="2800" dirty="0"/>
+              <a:t> (</a:t>
+            </a:r>
+            <a:r>
+              <a:rPr lang="en-US" sz="2800" dirty="0">
+                <a:solidFill>
+                  <a:srgbClr val="C00000"/>
+                </a:solidFill>
+              </a:rPr>
+              <a:t>without exposing underlying data structure implementing the state</a:t>
+            </a:r>
+            <a:r>
+              <a:rPr lang="en-US" sz="2800" dirty="0"/>
+              <a:t>).</a:t>
+            </a:r>
+          </a:p>
+          <a:p>
+            <a:pPr algn="just"/>
+            <a:endParaRPr lang="en-US" sz="2800" dirty="0"/>
+          </a:p>
+          <a:p>
+            <a:pPr marL="0" indent="0" algn="ctr">
+              <a:buNone/>
+            </a:pPr>
+            <a:r>
+              <a:rPr lang="en-US" sz="2800" dirty="0"/>
+              <a:t>The semantic is described in terms of “logical properties” (also called the ADT’s </a:t>
+            </a:r>
+            <a:r>
+              <a:rPr lang="en-US" sz="2800" i="1" dirty="0"/>
+              <a:t>axioms</a:t>
+            </a:r>
+            <a:r>
+              <a:rPr lang="en-US" sz="2800" dirty="0"/>
+              <a:t>) over those operations. </a:t>
+            </a:r>
+          </a:p>
+          <a:p>
+            <a:pPr algn="just"/>
+            <a:endParaRPr lang="en-US" sz="2800" dirty="0"/>
+          </a:p>
+        </p:txBody>
+      </p:sp>
+      <p:sp>
+        <p:nvSpPr>
+          <p:cNvPr id="3" name="Slide Number Placeholder 2"/>
+          <p:cNvSpPr>
+            <a:spLocks noGrp="1"/>
+          </p:cNvSpPr>
+          <p:nvPr>
+            <p:ph type="sldNum" sz="quarter" idx="12"/>
+          </p:nvPr>
+        </p:nvSpPr>
+        <p:spPr/>
+        <p:txBody>
+          <a:bodyPr/>
+          <a:lstStyle/>
+          <a:p>
+            <a:pPr>
+              <a:defRPr/>
+            </a:pPr>
+            <a:fld id="{5956FD8A-12AF-4F7B-B4D1-C45409423FB7}" type="slidenum">
+              <a:rPr lang="en-US" smtClean="0"/>
+              <a:pPr>
+                <a:defRPr/>
+              </a:pPr>
+              <a:t>37</a:t>
+            </a:fld>
+            <a:endParaRPr lang="en-US"/>
+          </a:p>
+        </p:txBody>
+      </p:sp>
+    </p:spTree>
+  </p:cSld>
+  <p:clrMapOvr>
+    <a:masterClrMapping/>
+  </p:clrMapOvr>
+</p:sld>
+</file>
+
+<file path=ppt/slides/slide38.xml><?xml version="1.0" encoding="utf-8"?>
+<p:sld xmlns:a="http://schemas.openxmlformats.org/drawingml/2006/main" xmlns:r="http://schemas.openxmlformats.org/officeDocument/2006/relationships" xmlns:p="http://schemas.openxmlformats.org/presentationml/2006/main">
+  <p:cSld>
+    <p:spTree>
+      <p:nvGrpSpPr>
+        <p:cNvPr id="1" name=""/>
+        <p:cNvGrpSpPr/>
+        <p:nvPr/>
+      </p:nvGrpSpPr>
+      <p:grpSpPr>
+        <a:xfrm>
+          <a:off x="0" y="0"/>
+          <a:ext cx="0" cy="0"/>
+          <a:chOff x="0" y="0"/>
+          <a:chExt cx="0" cy="0"/>
+        </a:xfrm>
+      </p:grpSpPr>
+      <p:sp>
+        <p:nvSpPr>
+          <p:cNvPr id="18434" name="Title 1"/>
+          <p:cNvSpPr>
+            <a:spLocks noGrp="1"/>
+          </p:cNvSpPr>
+          <p:nvPr>
+            <p:ph type="title"/>
+          </p:nvPr>
+        </p:nvSpPr>
+        <p:spPr>
+          <a:xfrm>
+            <a:off x="457200" y="274638"/>
+            <a:ext cx="8229600" cy="773668"/>
+          </a:xfrm>
+        </p:spPr>
+        <p:txBody>
+          <a:bodyPr/>
+          <a:lstStyle/>
+          <a:p>
+            <a:pPr eaLnBrk="1" hangingPunct="1"/>
+            <a:r>
+              <a:rPr lang="en-US" sz="3600" dirty="0"/>
+              <a:t>ADT specification for Thermometer</a:t>
+            </a:r>
+          </a:p>
+        </p:txBody>
+      </p:sp>
+      <p:sp>
+        <p:nvSpPr>
+          <p:cNvPr id="18435" name="Content Placeholder 2"/>
+          <p:cNvSpPr>
+            <a:spLocks noGrp="1"/>
+          </p:cNvSpPr>
+          <p:nvPr>
+            <p:ph idx="1"/>
+          </p:nvPr>
+        </p:nvSpPr>
+        <p:spPr>
+          <a:xfrm>
+            <a:off x="457200" y="3429000"/>
+            <a:ext cx="8383960" cy="2773909"/>
+          </a:xfrm>
+        </p:spPr>
+        <p:txBody>
+          <a:bodyPr/>
+          <a:lstStyle/>
+          <a:p>
+            <a:pPr marL="0" indent="0" eaLnBrk="1" hangingPunct="1">
+              <a:buNone/>
+            </a:pPr>
+            <a:r>
+              <a:rPr lang="en-US" sz="2400" b="1" dirty="0"/>
+              <a:t>Axioms</a:t>
+            </a:r>
+            <a:r>
+              <a:rPr lang="en-US" sz="2400" dirty="0"/>
+              <a:t>:</a:t>
+            </a:r>
+          </a:p>
+          <a:p>
+            <a:pPr marL="457200" indent="-457200" eaLnBrk="1" hangingPunct="1">
+              <a:buFont typeface="+mj-lt"/>
+              <a:buAutoNum type="arabicPeriod"/>
+            </a:pPr>
+            <a:r>
+              <a:rPr lang="en-US" sz="2400" dirty="0"/>
+              <a:t>For any t</a:t>
+            </a:r>
+            <a:r>
+              <a:rPr lang="en-US" sz="2400" baseline="-25000" dirty="0"/>
+              <a:t>0</a:t>
+            </a:r>
+            <a:r>
+              <a:rPr lang="en-US" sz="2400" dirty="0"/>
+              <a:t> and t&gt;0: after </a:t>
+            </a:r>
+            <a:r>
+              <a:rPr lang="en-US" sz="2400" dirty="0" err="1"/>
+              <a:t>Incr</a:t>
+            </a:r>
+            <a:r>
+              <a:rPr lang="en-US" sz="2400" dirty="0"/>
+              <a:t>(t), Value() should be t</a:t>
+            </a:r>
+            <a:r>
+              <a:rPr lang="en-US" sz="2400" baseline="-25000" dirty="0"/>
+              <a:t>0</a:t>
+            </a:r>
+            <a:r>
+              <a:rPr lang="en-US" sz="2400" dirty="0"/>
+              <a:t>+t, if t</a:t>
+            </a:r>
+            <a:r>
+              <a:rPr lang="en-US" sz="2400" baseline="-25000" dirty="0"/>
+              <a:t>0</a:t>
+            </a:r>
+            <a:r>
+              <a:rPr lang="en-US" sz="2400" dirty="0"/>
+              <a:t> was Value() before.</a:t>
+            </a:r>
+          </a:p>
+          <a:p>
+            <a:pPr marL="457200" indent="-457200" eaLnBrk="1" hangingPunct="1">
+              <a:buFont typeface="+mj-lt"/>
+              <a:buAutoNum type="arabicPeriod"/>
+            </a:pPr>
+            <a:r>
+              <a:rPr lang="en-US" sz="2400" dirty="0"/>
+              <a:t>For any t</a:t>
+            </a:r>
+            <a:r>
+              <a:rPr lang="en-US" sz="2400" baseline="-25000" dirty="0"/>
+              <a:t>0</a:t>
+            </a:r>
+            <a:r>
+              <a:rPr lang="en-US" sz="2400" dirty="0"/>
+              <a:t> and t&gt;0: after </a:t>
+            </a:r>
+            <a:r>
+              <a:rPr lang="en-US" sz="2400" dirty="0" err="1"/>
+              <a:t>Decr</a:t>
+            </a:r>
+            <a:r>
+              <a:rPr lang="en-US" sz="2400" dirty="0"/>
+              <a:t>(t), Value() should be max(t</a:t>
+            </a:r>
+            <a:r>
+              <a:rPr lang="en-US" sz="2400" baseline="-25000" dirty="0"/>
+              <a:t>0</a:t>
+            </a:r>
+            <a:r>
+              <a:rPr lang="en-US" sz="2400" dirty="0"/>
+              <a:t>-t, -273.15), if t</a:t>
+            </a:r>
+            <a:r>
+              <a:rPr lang="en-US" sz="2400" baseline="-25000" dirty="0"/>
+              <a:t>0</a:t>
+            </a:r>
+            <a:r>
+              <a:rPr lang="en-US" sz="2400" dirty="0"/>
+              <a:t> was Value() before.</a:t>
+            </a:r>
+          </a:p>
+          <a:p>
+            <a:pPr eaLnBrk="1" hangingPunct="1"/>
+            <a:endParaRPr lang="en-US" sz="2400" dirty="0"/>
+          </a:p>
+        </p:txBody>
+      </p:sp>
+      <p:sp>
+        <p:nvSpPr>
+          <p:cNvPr id="4" name="Slide Number Placeholder 3"/>
+          <p:cNvSpPr>
+            <a:spLocks noGrp="1"/>
+          </p:cNvSpPr>
+          <p:nvPr>
+            <p:ph type="sldNum" sz="quarter" idx="12"/>
+          </p:nvPr>
+        </p:nvSpPr>
+        <p:spPr/>
+        <p:txBody>
+          <a:bodyPr/>
+          <a:lstStyle/>
+          <a:p>
+            <a:pPr>
+              <a:defRPr/>
+            </a:pPr>
+            <a:fld id="{2A57B2AA-917E-49FC-B415-E530F668AFC6}" type="slidenum">
+              <a:rPr lang="en-US" smtClean="0"/>
+              <a:pPr>
+                <a:defRPr/>
+              </a:pPr>
+              <a:t>38</a:t>
+            </a:fld>
+            <a:endParaRPr lang="en-US"/>
+          </a:p>
+        </p:txBody>
+      </p:sp>
+      <p:sp>
+        <p:nvSpPr>
+          <p:cNvPr id="2" name="TextBox 1">
+            <a:extLst>
+              <a:ext uri="{FF2B5EF4-FFF2-40B4-BE49-F238E27FC236}">
+                <a16:creationId xmlns:a16="http://schemas.microsoft.com/office/drawing/2014/main" id="{EC3B59C0-D1CA-6A4A-979D-F37CBD7C7320}"/>
+              </a:ext>
+            </a:extLst>
+          </p:cNvPr>
+          <p:cNvSpPr txBox="1"/>
+          <p:nvPr/>
+        </p:nvSpPr>
+        <p:spPr>
+          <a:xfrm>
+            <a:off x="2267744" y="1366965"/>
+            <a:ext cx="4014240" cy="1938992"/>
+          </a:xfrm>
+          <a:prstGeom prst="rect">
+            <a:avLst/>
+          </a:prstGeom>
+          <a:noFill/>
+          <a:ln>
+            <a:solidFill>
+              <a:schemeClr val="tx1"/>
+            </a:solidFill>
+          </a:ln>
+        </p:spPr>
+        <p:txBody>
+          <a:bodyPr wrap="none" rtlCol="0">
+            <a:spAutoFit/>
+          </a:bodyPr>
+          <a:lstStyle/>
+          <a:p>
+            <a:r>
+              <a:rPr lang="en-US" sz="2000" b="1" dirty="0"/>
+              <a:t>class</a:t>
+            </a:r>
+            <a:r>
+              <a:rPr lang="en-US" sz="2000" dirty="0"/>
+              <a:t> Thermometer {</a:t>
+            </a:r>
+            <a:br>
+              <a:rPr lang="en-US" sz="2000" dirty="0"/>
+            </a:br>
+            <a:r>
+              <a:rPr lang="en-US" sz="2000" dirty="0"/>
+              <a:t>   double temperature // in </a:t>
+            </a:r>
+            <a:r>
+              <a:rPr lang="en-US" sz="2000" dirty="0" err="1"/>
+              <a:t>Celcius</a:t>
+            </a:r>
+            <a:br>
+              <a:rPr lang="en-US" sz="2000" dirty="0"/>
+            </a:br>
+            <a:r>
+              <a:rPr lang="en-US" sz="2000" dirty="0"/>
+              <a:t>   Value()</a:t>
+            </a:r>
+            <a:br>
+              <a:rPr lang="en-US" sz="2000" dirty="0"/>
+            </a:br>
+            <a:r>
+              <a:rPr lang="en-US" sz="2000" dirty="0"/>
+              <a:t>   </a:t>
+            </a:r>
+            <a:r>
+              <a:rPr lang="en-US" sz="2000" dirty="0" err="1"/>
+              <a:t>Incr</a:t>
+            </a:r>
+            <a:r>
+              <a:rPr lang="en-US" sz="2000" dirty="0"/>
+              <a:t>(t)</a:t>
+            </a:r>
+            <a:br>
+              <a:rPr lang="en-US" sz="2000" dirty="0"/>
+            </a:br>
+            <a:r>
+              <a:rPr lang="en-US" sz="2000" dirty="0"/>
+              <a:t>   </a:t>
+            </a:r>
+            <a:r>
+              <a:rPr lang="en-US" sz="2000" dirty="0" err="1"/>
+              <a:t>Decr</a:t>
+            </a:r>
+            <a:r>
+              <a:rPr lang="en-US" sz="2000" dirty="0"/>
+              <a:t>(t)</a:t>
+            </a:r>
+            <a:br>
+              <a:rPr lang="en-US" sz="2000" dirty="0"/>
+            </a:br>
+            <a:r>
+              <a:rPr lang="en-US" sz="2000" dirty="0"/>
+              <a:t>}</a:t>
+            </a:r>
+          </a:p>
+        </p:txBody>
+      </p:sp>
+      <p:sp>
+        <p:nvSpPr>
+          <p:cNvPr id="3" name="TextBox 2">
+            <a:extLst>
+              <a:ext uri="{FF2B5EF4-FFF2-40B4-BE49-F238E27FC236}">
+                <a16:creationId xmlns:a16="http://schemas.microsoft.com/office/drawing/2014/main" id="{AF106253-E3D8-0E0F-4BB4-68C315B7C999}"/>
+              </a:ext>
+            </a:extLst>
+          </p:cNvPr>
+          <p:cNvSpPr txBox="1"/>
+          <p:nvPr/>
+        </p:nvSpPr>
+        <p:spPr>
+          <a:xfrm>
+            <a:off x="971600" y="5864355"/>
+            <a:ext cx="6984776" cy="338554"/>
+          </a:xfrm>
+          <a:prstGeom prst="rect">
+            <a:avLst/>
+          </a:prstGeom>
+          <a:noFill/>
+          <a:ln>
+            <a:solidFill>
+              <a:schemeClr val="accent1"/>
+            </a:solidFill>
+          </a:ln>
+        </p:spPr>
+        <p:txBody>
+          <a:bodyPr wrap="square" rtlCol="0">
+            <a:spAutoFit/>
+          </a:bodyPr>
+          <a:lstStyle/>
+          <a:p>
+            <a:pPr algn="ctr"/>
+            <a:r>
+              <a:rPr lang="en-NL" sz="1600" dirty="0"/>
+              <a:t>Notice that the ADT axioms never refer to the class state variables.</a:t>
+            </a:r>
+          </a:p>
+        </p:txBody>
+      </p:sp>
+    </p:spTree>
+    <p:extLst>
+      <p:ext uri="{BB962C8B-B14F-4D97-AF65-F5344CB8AC3E}">
+        <p14:creationId xmlns:p14="http://schemas.microsoft.com/office/powerpoint/2010/main" val="1046716748"/>
+      </p:ext>
+    </p:extLst>
+  </p:cSld>
+  <p:clrMapOvr>
+    <a:masterClrMapping/>
+  </p:clrMapOvr>
+</p:sld>
+</file>
+
+<file path=ppt/slides/slide39.xml><?xml version="1.0" encoding="utf-8"?>
+<p:sld xmlns:a="http://schemas.openxmlformats.org/drawingml/2006/main" xmlns:r="http://schemas.openxmlformats.org/officeDocument/2006/relationships" xmlns:p="http://schemas.openxmlformats.org/presentationml/2006/main">
+  <p:cSld>
+    <p:spTree>
+      <p:nvGrpSpPr>
+        <p:cNvPr id="1" name=""/>
+        <p:cNvGrpSpPr/>
+        <p:nvPr/>
+      </p:nvGrpSpPr>
+      <p:grpSpPr>
+        <a:xfrm>
+          <a:off x="0" y="0"/>
+          <a:ext cx="0" cy="0"/>
+          <a:chOff x="0" y="0"/>
+          <a:chExt cx="0" cy="0"/>
+        </a:xfrm>
+      </p:grpSpPr>
+      <p:sp>
+        <p:nvSpPr>
+          <p:cNvPr id="22530" name="Title 1"/>
+          <p:cNvSpPr>
+            <a:spLocks noGrp="1"/>
+          </p:cNvSpPr>
+          <p:nvPr>
+            <p:ph type="title"/>
+          </p:nvPr>
+        </p:nvSpPr>
+        <p:spPr>
+          <a:xfrm>
+            <a:off x="457200" y="274638"/>
+            <a:ext cx="8229600" cy="850106"/>
+          </a:xfrm>
+        </p:spPr>
+        <p:txBody>
+          <a:bodyPr/>
+          <a:lstStyle/>
+          <a:p>
+            <a:r>
+              <a:rPr lang="en-US" sz="4000" dirty="0"/>
+              <a:t>Testing ADT</a:t>
+            </a:r>
+          </a:p>
+        </p:txBody>
+      </p:sp>
+      <p:sp>
+        <p:nvSpPr>
+          <p:cNvPr id="3" name="Slide Number Placeholder 2"/>
+          <p:cNvSpPr>
+            <a:spLocks noGrp="1"/>
+          </p:cNvSpPr>
+          <p:nvPr>
+            <p:ph type="sldNum" sz="quarter" idx="12"/>
+          </p:nvPr>
+        </p:nvSpPr>
+        <p:spPr/>
+        <p:txBody>
+          <a:bodyPr/>
+          <a:lstStyle/>
+          <a:p>
+            <a:pPr>
+              <a:defRPr/>
+            </a:pPr>
+            <a:fld id="{A396C40A-8632-4362-9BC0-7DC1524AF9EA}" type="slidenum">
+              <a:rPr lang="en-US" smtClean="0"/>
+              <a:pPr>
+                <a:defRPr/>
+              </a:pPr>
+              <a:t>39</a:t>
+            </a:fld>
+            <a:endParaRPr lang="en-US"/>
+          </a:p>
+        </p:txBody>
+      </p:sp>
+      <p:sp>
+        <p:nvSpPr>
+          <p:cNvPr id="4" name="TextBox 3"/>
+          <p:cNvSpPr txBox="1"/>
+          <p:nvPr/>
+        </p:nvSpPr>
+        <p:spPr>
+          <a:xfrm>
+            <a:off x="1043608" y="3933056"/>
+            <a:ext cx="7056784" cy="1200329"/>
+          </a:xfrm>
+          <a:prstGeom prst="rect">
+            <a:avLst/>
+          </a:prstGeom>
+        </p:spPr>
+        <p:style>
+          <a:lnRef idx="2">
+            <a:schemeClr val="dk1"/>
+          </a:lnRef>
+          <a:fillRef idx="1">
+            <a:schemeClr val="lt1"/>
+          </a:fillRef>
+          <a:effectRef idx="0">
+            <a:schemeClr val="dk1"/>
+          </a:effectRef>
+          <a:fontRef idx="minor">
+            <a:schemeClr val="dk1"/>
+          </a:fontRef>
+        </p:style>
+        <p:txBody>
+          <a:bodyPr wrap="square">
+            <a:spAutoFit/>
+          </a:bodyPr>
+          <a:lstStyle/>
+          <a:p>
+            <a:pPr marL="0" lvl="1">
+              <a:defRPr/>
+            </a:pPr>
+            <a:r>
+              <a:rPr lang="en-US" sz="2400" dirty="0">
+                <a:highlight>
+                  <a:srgbClr val="FFFF00"/>
+                </a:highlight>
+                <a:sym typeface="Symbol"/>
+              </a:rPr>
+              <a:t>Axiom1</a:t>
+            </a:r>
+            <a:r>
+              <a:rPr lang="en-US" sz="2400" dirty="0">
+                <a:sym typeface="Symbol"/>
+              </a:rPr>
+              <a:t>(Thermometer s, double t) {</a:t>
+            </a:r>
+            <a:br>
+              <a:rPr lang="en-US" sz="2400" dirty="0">
+                <a:sym typeface="Symbol"/>
+              </a:rPr>
+            </a:br>
+            <a:r>
+              <a:rPr lang="en-US" sz="2400" dirty="0">
+                <a:sym typeface="Symbol"/>
+              </a:rPr>
+              <a:t>     </a:t>
+            </a:r>
+            <a:r>
+              <a:rPr lang="en-US" sz="2400" dirty="0" err="1">
+                <a:sym typeface="Symbol"/>
+              </a:rPr>
+              <a:t>assumeThat</a:t>
+            </a:r>
+            <a:r>
+              <a:rPr lang="en-US" sz="2400" dirty="0">
+                <a:sym typeface="Symbol"/>
+              </a:rPr>
+              <a:t>(t &gt; 0) ;      </a:t>
+            </a:r>
+          </a:p>
+          <a:p>
+            <a:pPr marL="0" lvl="1">
+              <a:defRPr/>
+            </a:pPr>
+            <a:r>
+              <a:rPr lang="en-US" sz="2400" dirty="0">
+                <a:sym typeface="Symbol"/>
+              </a:rPr>
+              <a:t>     t</a:t>
+            </a:r>
+            <a:r>
+              <a:rPr lang="en-US" sz="2400" baseline="-25000" dirty="0">
+                <a:sym typeface="Symbol"/>
+              </a:rPr>
+              <a:t>0</a:t>
+            </a:r>
+            <a:r>
+              <a:rPr lang="en-US" sz="2400" dirty="0">
+                <a:sym typeface="Symbol"/>
+              </a:rPr>
+              <a:t>=</a:t>
+            </a:r>
+            <a:r>
+              <a:rPr lang="en-US" sz="2400" dirty="0" err="1">
+                <a:sym typeface="Symbol"/>
+              </a:rPr>
+              <a:t>s.Value</a:t>
+            </a:r>
+            <a:r>
+              <a:rPr lang="en-US" sz="2400" dirty="0">
+                <a:sym typeface="Symbol"/>
+              </a:rPr>
+              <a:t>() ; s. </a:t>
+            </a:r>
+            <a:r>
+              <a:rPr lang="en-US" sz="2400" dirty="0" err="1">
+                <a:sym typeface="Symbol"/>
+              </a:rPr>
+              <a:t>Incr</a:t>
+            </a:r>
+            <a:r>
+              <a:rPr lang="en-US" sz="2400" dirty="0">
+                <a:sym typeface="Symbol"/>
+              </a:rPr>
+              <a:t>(t) ; </a:t>
+            </a:r>
+            <a:r>
+              <a:rPr lang="en-US" sz="2400" dirty="0" err="1">
+                <a:highlight>
+                  <a:srgbClr val="FFFF00"/>
+                </a:highlight>
+                <a:sym typeface="Symbol"/>
+              </a:rPr>
+              <a:t>assertEqual</a:t>
+            </a:r>
+            <a:r>
+              <a:rPr lang="en-US" sz="2400" dirty="0">
+                <a:sym typeface="Symbol"/>
+              </a:rPr>
+              <a:t>(t</a:t>
+            </a:r>
+            <a:r>
+              <a:rPr lang="en-US" sz="2400" baseline="-25000" dirty="0">
+                <a:sym typeface="Symbol"/>
+              </a:rPr>
+              <a:t>0</a:t>
+            </a:r>
+            <a:r>
+              <a:rPr lang="en-US" sz="2400" dirty="0">
+                <a:sym typeface="Symbol"/>
+              </a:rPr>
+              <a:t>+t, </a:t>
+            </a:r>
+            <a:r>
+              <a:rPr lang="en-US" sz="2400" dirty="0" err="1">
+                <a:sym typeface="Symbol"/>
+              </a:rPr>
+              <a:t>s.Value</a:t>
+            </a:r>
+            <a:r>
+              <a:rPr lang="en-US" sz="2400" dirty="0">
+                <a:sym typeface="Symbol"/>
+              </a:rPr>
+              <a:t>()) ; }</a:t>
+            </a:r>
+          </a:p>
+        </p:txBody>
+      </p:sp>
+      <p:sp>
+        <p:nvSpPr>
+          <p:cNvPr id="6" name="TextBox 5"/>
+          <p:cNvSpPr txBox="1"/>
+          <p:nvPr/>
+        </p:nvSpPr>
+        <p:spPr>
+          <a:xfrm>
+            <a:off x="575556" y="3281729"/>
+            <a:ext cx="7992888" cy="3539430"/>
+          </a:xfrm>
+          <a:prstGeom prst="rect">
+            <a:avLst/>
+          </a:prstGeom>
+          <a:noFill/>
+        </p:spPr>
+        <p:txBody>
+          <a:bodyPr wrap="square">
+            <a:spAutoFit/>
+          </a:bodyPr>
+          <a:lstStyle/>
+          <a:p>
+            <a:pPr>
+              <a:defRPr/>
+            </a:pPr>
+            <a:r>
+              <a:rPr lang="en-US" sz="2400" dirty="0"/>
+              <a:t>For example, to test Thermometer’s Axiom-1:</a:t>
+            </a:r>
+            <a:br>
+              <a:rPr lang="en-US" sz="2400" dirty="0"/>
+            </a:br>
+            <a:endParaRPr lang="en-US" sz="2400" dirty="0"/>
+          </a:p>
+          <a:p>
+            <a:pPr>
+              <a:defRPr/>
+            </a:pPr>
+            <a:endParaRPr lang="en-US" sz="2400" dirty="0"/>
+          </a:p>
+          <a:p>
+            <a:pPr>
+              <a:defRPr/>
+            </a:pPr>
+            <a:r>
+              <a:rPr lang="en-US" sz="2400" dirty="0"/>
+              <a:t> </a:t>
+            </a:r>
+          </a:p>
+          <a:p>
+            <a:pPr>
+              <a:defRPr/>
+            </a:pPr>
+            <a:endParaRPr lang="en-US" sz="2400" dirty="0"/>
+          </a:p>
+          <a:p>
+            <a:pPr>
+              <a:defRPr/>
+            </a:pPr>
+            <a:endParaRPr lang="en-US" sz="2400" dirty="0"/>
+          </a:p>
+          <a:p>
+            <a:pPr>
+              <a:defRPr/>
+            </a:pPr>
+            <a:r>
+              <a:rPr lang="en-US" sz="2000" dirty="0"/>
+              <a:t>We can imagine e.g. these test cases :</a:t>
+            </a:r>
+          </a:p>
+          <a:p>
+            <a:pPr marL="800100" lvl="1" indent="-342900">
+              <a:buFont typeface="+mj-lt"/>
+              <a:buAutoNum type="arabicPeriod"/>
+              <a:defRPr/>
+            </a:pPr>
+            <a:r>
+              <a:rPr lang="en-US" sz="2000" i="1" dirty="0"/>
+              <a:t>s</a:t>
+            </a:r>
+            <a:r>
+              <a:rPr lang="en-US" sz="2000" dirty="0"/>
+              <a:t> such that </a:t>
+            </a:r>
+            <a:r>
+              <a:rPr lang="en-US" sz="2000" dirty="0" err="1"/>
+              <a:t>s.temperature</a:t>
+            </a:r>
+            <a:r>
+              <a:rPr lang="en-US" sz="2000" dirty="0"/>
+              <a:t> is -273.15</a:t>
+            </a:r>
+            <a:r>
+              <a:rPr lang="en-US" sz="2000" i="1" dirty="0"/>
+              <a:t> </a:t>
+            </a:r>
+          </a:p>
+          <a:p>
+            <a:pPr marL="800100" lvl="1" indent="-342900">
+              <a:buFont typeface="+mj-lt"/>
+              <a:buAutoNum type="arabicPeriod"/>
+              <a:defRPr/>
+            </a:pPr>
+            <a:r>
+              <a:rPr lang="en-US" sz="2000" i="1" dirty="0"/>
+              <a:t>s</a:t>
+            </a:r>
+            <a:r>
+              <a:rPr lang="en-US" sz="2000" dirty="0"/>
+              <a:t> such that </a:t>
+            </a:r>
+            <a:r>
+              <a:rPr lang="en-US" sz="2000" dirty="0" err="1"/>
+              <a:t>s.temperature</a:t>
+            </a:r>
+            <a:r>
+              <a:rPr lang="en-US" sz="2000" dirty="0"/>
+              <a:t> &gt; -273.15</a:t>
+            </a:r>
+          </a:p>
+          <a:p>
+            <a:pPr marL="800100" lvl="1" indent="-342900">
+              <a:buFont typeface="+mj-lt"/>
+              <a:buAutoNum type="arabicPeriod"/>
+              <a:defRPr/>
+            </a:pPr>
+            <a:r>
+              <a:rPr lang="en-US" sz="2000" dirty="0"/>
+              <a:t>very small t and normally large t</a:t>
+            </a:r>
+          </a:p>
+        </p:txBody>
+      </p:sp>
+      <p:sp>
+        <p:nvSpPr>
+          <p:cNvPr id="2" name="TextBox 1">
+            <a:extLst>
+              <a:ext uri="{FF2B5EF4-FFF2-40B4-BE49-F238E27FC236}">
+                <a16:creationId xmlns:a16="http://schemas.microsoft.com/office/drawing/2014/main" id="{0B62E271-A623-3946-96AA-067473559C09}"/>
+              </a:ext>
+            </a:extLst>
+          </p:cNvPr>
+          <p:cNvSpPr txBox="1"/>
+          <p:nvPr/>
+        </p:nvSpPr>
+        <p:spPr>
+          <a:xfrm>
+            <a:off x="945940" y="1608430"/>
+            <a:ext cx="7488832" cy="1384995"/>
+          </a:xfrm>
+          <a:prstGeom prst="rect">
+            <a:avLst/>
+          </a:prstGeom>
+          <a:noFill/>
+        </p:spPr>
+        <p:txBody>
+          <a:bodyPr wrap="square" rtlCol="0">
+            <a:spAutoFit/>
+          </a:bodyPr>
+          <a:lstStyle/>
+          <a:p>
+            <a:pPr algn="ctr"/>
+            <a:r>
+              <a:rPr lang="en-US" sz="2800" dirty="0"/>
+              <a:t>Testing an ADT amounts to verifying each of its axioms, each can be formulated as a </a:t>
+            </a:r>
+            <a:r>
+              <a:rPr lang="en-US" sz="2800" b="1" dirty="0"/>
+              <a:t>parameterized test.</a:t>
+            </a:r>
+          </a:p>
+        </p:txBody>
+      </p:sp>
+      <p:sp>
+        <p:nvSpPr>
+          <p:cNvPr id="7" name="Rounded Rectangle 6">
+            <a:extLst>
+              <a:ext uri="{FF2B5EF4-FFF2-40B4-BE49-F238E27FC236}">
+                <a16:creationId xmlns:a16="http://schemas.microsoft.com/office/drawing/2014/main" id="{08133769-1F89-9448-B585-CEE8C2C4FF70}"/>
+              </a:ext>
+            </a:extLst>
+          </p:cNvPr>
+          <p:cNvSpPr/>
+          <p:nvPr/>
+        </p:nvSpPr>
+        <p:spPr>
+          <a:xfrm>
+            <a:off x="457200" y="1482380"/>
+            <a:ext cx="8229600" cy="1615851"/>
+          </a:xfrm>
+          <a:prstGeom prst="roundRect">
+            <a:avLst/>
+          </a:prstGeom>
+          <a:solidFill>
+            <a:srgbClr val="FFC000">
+              <a:alpha val="25000"/>
+            </a:srgbClr>
+          </a:solidFill>
+          <a:ln>
+            <a:solidFill>
+              <a:srgbClr val="FFC000"/>
+            </a:solidFill>
+          </a:ln>
+        </p:spPr>
+        <p:style>
+          <a:lnRef idx="2">
+            <a:schemeClr val="accent1">
+              <a:shade val="50000"/>
+            </a:schemeClr>
+          </a:lnRef>
+          <a:fillRef idx="1">
+            <a:schemeClr val="accent1"/>
+          </a:fillRef>
+          <a:effectRef idx="0">
+            <a:schemeClr val="accent1"/>
+          </a:effectRef>
+          <a:fontRef idx="minor">
+            <a:schemeClr val="lt1"/>
+          </a:fontRef>
+        </p:style>
+        <p:txBody>
+          <a:bodyPr rtlCol="0" anchor="ctr"/>
+          <a:lstStyle/>
+          <a:p>
+            <a:pPr algn="ctr"/>
+            <a:endParaRPr lang="en-US" dirty="0"/>
+          </a:p>
+        </p:txBody>
+      </p:sp>
+    </p:spTree>
+    <p:extLst>
+      <p:ext uri="{BB962C8B-B14F-4D97-AF65-F5344CB8AC3E}">
+        <p14:creationId xmlns:p14="http://schemas.microsoft.com/office/powerpoint/2010/main" val="2815078552"/>
+      </p:ext>
+    </p:extLst>
+  </p:cSld>
+  <p:clrMapOvr>
+    <a:masterClrMapping/>
+  </p:clrMapOvr>
+</p:sld>
+</file>
+
+<file path=ppt/slides/slide4.xml><?xml version="1.0" encoding="utf-8"?>
+<p:sld xmlns:a="http://schemas.openxmlformats.org/drawingml/2006/main" xmlns:r="http://schemas.openxmlformats.org/officeDocument/2006/relationships" xmlns:p="http://schemas.openxmlformats.org/presentationml/2006/main">
+  <p:cSld>
+    <p:spTree>
+      <p:nvGrpSpPr>
+        <p:cNvPr id="1" name=""/>
+        <p:cNvGrpSpPr/>
+        <p:nvPr/>
+      </p:nvGrpSpPr>
+      <p:grpSpPr>
+        <a:xfrm>
+          <a:off x="0" y="0"/>
+          <a:ext cx="0" cy="0"/>
+          <a:chOff x="0" y="0"/>
+          <a:chExt cx="0" cy="0"/>
+        </a:xfrm>
+      </p:grpSpPr>
+      <p:sp>
+        <p:nvSpPr>
+          <p:cNvPr id="8" name="Rounded Rectangle 7">
+            <a:extLst>
+              <a:ext uri="{FF2B5EF4-FFF2-40B4-BE49-F238E27FC236}">
+                <a16:creationId xmlns:a16="http://schemas.microsoft.com/office/drawing/2014/main" id="{0C799402-5D1F-7147-BB7B-DF7EC41BB5E5}"/>
+              </a:ext>
+            </a:extLst>
+          </p:cNvPr>
+          <p:cNvSpPr/>
+          <p:nvPr/>
+        </p:nvSpPr>
+        <p:spPr>
+          <a:xfrm>
+            <a:off x="321633" y="3573016"/>
+            <a:ext cx="8500734" cy="1338898"/>
+          </a:xfrm>
+          <a:prstGeom prst="roundRect">
+            <a:avLst>
+              <a:gd name="adj" fmla="val 31222"/>
+            </a:avLst>
+          </a:prstGeom>
+          <a:solidFill>
+            <a:srgbClr val="FFC000">
+              <a:alpha val="25000"/>
+            </a:srgbClr>
+          </a:solidFill>
+          <a:ln>
+            <a:solidFill>
+              <a:srgbClr val="FFC000"/>
+            </a:solidFill>
+          </a:ln>
+        </p:spPr>
+        <p:style>
+          <a:lnRef idx="2">
+            <a:schemeClr val="accent1">
+              <a:shade val="50000"/>
+            </a:schemeClr>
+          </a:lnRef>
+          <a:fillRef idx="1">
+            <a:schemeClr val="accent1"/>
+          </a:fillRef>
+          <a:effectRef idx="0">
+            <a:schemeClr val="accent1"/>
+          </a:effectRef>
+          <a:fontRef idx="minor">
+            <a:schemeClr val="lt1"/>
+          </a:fontRef>
+        </p:style>
+        <p:txBody>
+          <a:bodyPr rtlCol="0" anchor="ctr"/>
+          <a:lstStyle/>
+          <a:p>
+            <a:pPr algn="ctr"/>
+            <a:endParaRPr lang="en-US"/>
+          </a:p>
+        </p:txBody>
+      </p:sp>
+      <p:sp>
+        <p:nvSpPr>
+          <p:cNvPr id="2" name="Title 1">
+            <a:extLst>
+              <a:ext uri="{FF2B5EF4-FFF2-40B4-BE49-F238E27FC236}">
+                <a16:creationId xmlns:a16="http://schemas.microsoft.com/office/drawing/2014/main" id="{3E1F776B-81F4-BB41-9178-472DC4878699}"/>
+              </a:ext>
+            </a:extLst>
+          </p:cNvPr>
+          <p:cNvSpPr>
+            <a:spLocks noGrp="1"/>
+          </p:cNvSpPr>
+          <p:nvPr>
+            <p:ph type="title"/>
+          </p:nvPr>
+        </p:nvSpPr>
+        <p:spPr/>
+        <p:txBody>
+          <a:bodyPr/>
+          <a:lstStyle/>
+          <a:p>
+            <a:r>
+              <a:rPr lang="en-US" dirty="0"/>
+              <a:t>Example: determining triangle type</a:t>
+            </a:r>
+          </a:p>
+        </p:txBody>
+      </p:sp>
+      <p:sp>
+        <p:nvSpPr>
+          <p:cNvPr id="4" name="Slide Number Placeholder 3">
+            <a:extLst>
+              <a:ext uri="{FF2B5EF4-FFF2-40B4-BE49-F238E27FC236}">
+                <a16:creationId xmlns:a16="http://schemas.microsoft.com/office/drawing/2014/main" id="{3BB5884F-6023-EC45-A7CA-03584A7CAEE2}"/>
+              </a:ext>
+            </a:extLst>
+          </p:cNvPr>
+          <p:cNvSpPr>
+            <a:spLocks noGrp="1"/>
+          </p:cNvSpPr>
+          <p:nvPr>
+            <p:ph type="sldNum" sz="quarter" idx="12"/>
+          </p:nvPr>
+        </p:nvSpPr>
+        <p:spPr/>
+        <p:txBody>
+          <a:bodyPr/>
+          <a:lstStyle/>
+          <a:p>
+            <a:pPr>
+              <a:defRPr/>
+            </a:pPr>
+            <a:fld id="{F7C0A3F7-46F3-44CF-95B7-0304031AA6EA}" type="slidenum">
+              <a:rPr lang="en-US" smtClean="0"/>
+              <a:pPr>
+                <a:defRPr/>
+              </a:pPr>
+              <a:t>4</a:t>
+            </a:fld>
+            <a:endParaRPr lang="en-US"/>
+          </a:p>
+        </p:txBody>
+      </p:sp>
+      <p:sp>
+        <p:nvSpPr>
+          <p:cNvPr id="6" name="TextBox 5">
+            <a:extLst>
+              <a:ext uri="{FF2B5EF4-FFF2-40B4-BE49-F238E27FC236}">
+                <a16:creationId xmlns:a16="http://schemas.microsoft.com/office/drawing/2014/main" id="{B8D24658-CEAD-494D-8DD1-5C3B078597E4}"/>
+              </a:ext>
+            </a:extLst>
+          </p:cNvPr>
+          <p:cNvSpPr txBox="1"/>
+          <p:nvPr/>
+        </p:nvSpPr>
+        <p:spPr>
+          <a:xfrm>
+            <a:off x="457200" y="3980855"/>
+            <a:ext cx="8456674" cy="523220"/>
+          </a:xfrm>
+          <a:prstGeom prst="rect">
+            <a:avLst/>
+          </a:prstGeom>
+          <a:noFill/>
+          <a:ln>
+            <a:noFill/>
+          </a:ln>
+        </p:spPr>
+        <p:txBody>
+          <a:bodyPr wrap="none" rtlCol="0">
+            <a:spAutoFit/>
+          </a:bodyPr>
+          <a:lstStyle/>
+          <a:p>
+            <a:r>
+              <a:rPr lang="en-US" sz="2800" dirty="0" err="1"/>
+              <a:t>TriangleType</a:t>
+            </a:r>
+            <a:r>
+              <a:rPr lang="en-US" sz="2800" dirty="0"/>
+              <a:t> </a:t>
+            </a:r>
+            <a:r>
+              <a:rPr lang="en-US" sz="2800" b="1" dirty="0" err="1">
+                <a:solidFill>
+                  <a:schemeClr val="accent5">
+                    <a:lumMod val="75000"/>
+                  </a:schemeClr>
+                </a:solidFill>
+              </a:rPr>
+              <a:t>TriType</a:t>
+            </a:r>
+            <a:r>
+              <a:rPr lang="en-US" sz="2800" dirty="0"/>
+              <a:t>(Float a, Float b, Float c) { ... } </a:t>
+            </a:r>
+          </a:p>
+        </p:txBody>
+      </p:sp>
+      <p:sp>
+        <p:nvSpPr>
+          <p:cNvPr id="7" name="TextBox 6">
+            <a:extLst>
+              <a:ext uri="{FF2B5EF4-FFF2-40B4-BE49-F238E27FC236}">
+                <a16:creationId xmlns:a16="http://schemas.microsoft.com/office/drawing/2014/main" id="{733AF20E-76B8-3B4F-8F02-C4A062D48533}"/>
+              </a:ext>
+            </a:extLst>
+          </p:cNvPr>
+          <p:cNvSpPr txBox="1"/>
+          <p:nvPr/>
+        </p:nvSpPr>
+        <p:spPr>
+          <a:xfrm>
+            <a:off x="645021" y="5260461"/>
+            <a:ext cx="7856384" cy="830997"/>
+          </a:xfrm>
+          <a:prstGeom prst="rect">
+            <a:avLst/>
+          </a:prstGeom>
+          <a:noFill/>
+        </p:spPr>
+        <p:txBody>
+          <a:bodyPr wrap="square" rtlCol="0">
+            <a:spAutoFit/>
+          </a:bodyPr>
+          <a:lstStyle/>
+          <a:p>
+            <a:pPr algn="ctr"/>
+            <a:r>
+              <a:rPr lang="en-US" sz="2400" i="1" dirty="0"/>
+              <a:t>If a, b, c represent the sides of a triangle, this methods determines the type of the triangle.</a:t>
+            </a:r>
+          </a:p>
+        </p:txBody>
+      </p:sp>
+      <p:sp>
+        <p:nvSpPr>
+          <p:cNvPr id="3" name="Triangle 2">
+            <a:extLst>
+              <a:ext uri="{FF2B5EF4-FFF2-40B4-BE49-F238E27FC236}">
+                <a16:creationId xmlns:a16="http://schemas.microsoft.com/office/drawing/2014/main" id="{9B0178CC-2B6E-5341-AD59-215B4EB08D59}"/>
+              </a:ext>
+            </a:extLst>
+          </p:cNvPr>
+          <p:cNvSpPr/>
+          <p:nvPr/>
+        </p:nvSpPr>
+        <p:spPr>
+          <a:xfrm rot="20044802">
+            <a:off x="1045341" y="1516512"/>
+            <a:ext cx="1584176" cy="1224136"/>
+          </a:xfrm>
+          <a:prstGeom prst="triangle">
+            <a:avLst/>
+          </a:prstGeom>
+        </p:spPr>
+        <p:style>
+          <a:lnRef idx="2">
+            <a:schemeClr val="accent1">
+              <a:shade val="50000"/>
+            </a:schemeClr>
+          </a:lnRef>
+          <a:fillRef idx="1">
+            <a:schemeClr val="accent1"/>
+          </a:fillRef>
+          <a:effectRef idx="0">
+            <a:schemeClr val="accent1"/>
+          </a:effectRef>
+          <a:fontRef idx="minor">
+            <a:schemeClr val="lt1"/>
+          </a:fontRef>
+        </p:style>
+        <p:txBody>
+          <a:bodyPr rtlCol="0" anchor="ctr"/>
+          <a:lstStyle/>
+          <a:p>
+            <a:pPr algn="ctr"/>
+            <a:endParaRPr lang="en-NL"/>
+          </a:p>
+        </p:txBody>
+      </p:sp>
+      <p:sp>
+        <p:nvSpPr>
+          <p:cNvPr id="5" name="TextBox 4">
+            <a:extLst>
+              <a:ext uri="{FF2B5EF4-FFF2-40B4-BE49-F238E27FC236}">
+                <a16:creationId xmlns:a16="http://schemas.microsoft.com/office/drawing/2014/main" id="{B4CDFFB8-7898-0147-8775-B833CF9A152F}"/>
+              </a:ext>
+            </a:extLst>
+          </p:cNvPr>
+          <p:cNvSpPr txBox="1"/>
+          <p:nvPr/>
+        </p:nvSpPr>
+        <p:spPr>
+          <a:xfrm>
+            <a:off x="1731917" y="2647803"/>
+            <a:ext cx="1641796" cy="461665"/>
+          </a:xfrm>
+          <a:prstGeom prst="rect">
+            <a:avLst/>
+          </a:prstGeom>
+          <a:noFill/>
+        </p:spPr>
+        <p:txBody>
+          <a:bodyPr wrap="none" rtlCol="0">
+            <a:spAutoFit/>
+          </a:bodyPr>
+          <a:lstStyle/>
+          <a:p>
+            <a:r>
+              <a:rPr lang="en-NL" sz="2400" dirty="0"/>
+              <a:t>Equilateral</a:t>
+            </a:r>
+          </a:p>
+        </p:txBody>
+      </p:sp>
+      <p:sp>
+        <p:nvSpPr>
+          <p:cNvPr id="9" name="Triangle 8">
+            <a:extLst>
+              <a:ext uri="{FF2B5EF4-FFF2-40B4-BE49-F238E27FC236}">
+                <a16:creationId xmlns:a16="http://schemas.microsoft.com/office/drawing/2014/main" id="{99E04C14-265B-6844-979D-B4563C57F781}"/>
+              </a:ext>
+            </a:extLst>
+          </p:cNvPr>
+          <p:cNvSpPr/>
+          <p:nvPr/>
+        </p:nvSpPr>
+        <p:spPr>
+          <a:xfrm>
+            <a:off x="4139088" y="1570110"/>
+            <a:ext cx="834874" cy="1224136"/>
+          </a:xfrm>
+          <a:prstGeom prst="triangle">
+            <a:avLst/>
+          </a:prstGeom>
+        </p:spPr>
+        <p:style>
+          <a:lnRef idx="2">
+            <a:schemeClr val="accent1">
+              <a:shade val="50000"/>
+            </a:schemeClr>
+          </a:lnRef>
+          <a:fillRef idx="1">
+            <a:schemeClr val="accent1"/>
+          </a:fillRef>
+          <a:effectRef idx="0">
+            <a:schemeClr val="accent1"/>
+          </a:effectRef>
+          <a:fontRef idx="minor">
+            <a:schemeClr val="lt1"/>
+          </a:fontRef>
+        </p:style>
+        <p:txBody>
+          <a:bodyPr rtlCol="0" anchor="ctr"/>
+          <a:lstStyle/>
+          <a:p>
+            <a:pPr algn="ctr"/>
+            <a:endParaRPr lang="en-NL"/>
+          </a:p>
+        </p:txBody>
+      </p:sp>
+      <p:sp>
+        <p:nvSpPr>
+          <p:cNvPr id="10" name="TextBox 9">
+            <a:extLst>
+              <a:ext uri="{FF2B5EF4-FFF2-40B4-BE49-F238E27FC236}">
+                <a16:creationId xmlns:a16="http://schemas.microsoft.com/office/drawing/2014/main" id="{B4F38F47-F167-3C42-9D0B-07C8578E5464}"/>
+              </a:ext>
+            </a:extLst>
+          </p:cNvPr>
+          <p:cNvSpPr txBox="1"/>
+          <p:nvPr/>
+        </p:nvSpPr>
+        <p:spPr>
+          <a:xfrm>
+            <a:off x="3907148" y="2822835"/>
+            <a:ext cx="1468672" cy="461665"/>
+          </a:xfrm>
+          <a:prstGeom prst="rect">
+            <a:avLst/>
+          </a:prstGeom>
+          <a:noFill/>
+        </p:spPr>
+        <p:txBody>
+          <a:bodyPr wrap="none" rtlCol="0">
+            <a:spAutoFit/>
+          </a:bodyPr>
+          <a:lstStyle/>
+          <a:p>
+            <a:r>
+              <a:rPr lang="en-NL" sz="2400" dirty="0"/>
+              <a:t>Isosceles</a:t>
+            </a:r>
+          </a:p>
+        </p:txBody>
+      </p:sp>
+      <p:sp>
+        <p:nvSpPr>
+          <p:cNvPr id="11" name="Freeform 10">
+            <a:extLst>
+              <a:ext uri="{FF2B5EF4-FFF2-40B4-BE49-F238E27FC236}">
+                <a16:creationId xmlns:a16="http://schemas.microsoft.com/office/drawing/2014/main" id="{FC99E166-F515-684C-AC18-4F7A94735D5F}"/>
+              </a:ext>
+            </a:extLst>
+          </p:cNvPr>
+          <p:cNvSpPr/>
+          <p:nvPr/>
+        </p:nvSpPr>
+        <p:spPr>
+          <a:xfrm rot="18742393">
+            <a:off x="6140113" y="1796350"/>
+            <a:ext cx="2014779" cy="1430522"/>
+          </a:xfrm>
+          <a:custGeom>
+            <a:avLst/>
+            <a:gdLst>
+              <a:gd name="connsiteX0" fmla="*/ 0 w 2014779"/>
+              <a:gd name="connsiteY0" fmla="*/ 0 h 681926"/>
+              <a:gd name="connsiteX1" fmla="*/ 2014779 w 2014779"/>
+              <a:gd name="connsiteY1" fmla="*/ 681926 h 681926"/>
+              <a:gd name="connsiteX2" fmla="*/ 1828800 w 2014779"/>
+              <a:gd name="connsiteY2" fmla="*/ 170482 h 681926"/>
+              <a:gd name="connsiteX3" fmla="*/ 0 w 2014779"/>
+              <a:gd name="connsiteY3" fmla="*/ 0 h 681926"/>
+            </a:gdLst>
+            <a:ahLst/>
+            <a:cxnLst>
+              <a:cxn ang="0">
+                <a:pos x="connsiteX0" y="connsiteY0"/>
+              </a:cxn>
+              <a:cxn ang="0">
+                <a:pos x="connsiteX1" y="connsiteY1"/>
+              </a:cxn>
+              <a:cxn ang="0">
+                <a:pos x="connsiteX2" y="connsiteY2"/>
+              </a:cxn>
+              <a:cxn ang="0">
+                <a:pos x="connsiteX3" y="connsiteY3"/>
+              </a:cxn>
+            </a:cxnLst>
+            <a:rect l="l" t="t" r="r" b="b"/>
+            <a:pathLst>
+              <a:path w="2014779" h="681926">
+                <a:moveTo>
+                  <a:pt x="0" y="0"/>
+                </a:moveTo>
+                <a:lnTo>
+                  <a:pt x="2014779" y="681926"/>
+                </a:lnTo>
+                <a:lnTo>
+                  <a:pt x="1828800" y="170482"/>
+                </a:lnTo>
+                <a:lnTo>
+                  <a:pt x="0" y="0"/>
+                </a:lnTo>
+                <a:close/>
+              </a:path>
+            </a:pathLst>
+          </a:custGeom>
+        </p:spPr>
+        <p:style>
+          <a:lnRef idx="2">
+            <a:schemeClr val="accent1">
+              <a:shade val="50000"/>
+            </a:schemeClr>
+          </a:lnRef>
+          <a:fillRef idx="1">
+            <a:schemeClr val="accent1"/>
+          </a:fillRef>
+          <a:effectRef idx="0">
+            <a:schemeClr val="accent1"/>
+          </a:effectRef>
+          <a:fontRef idx="minor">
+            <a:schemeClr val="lt1"/>
+          </a:fontRef>
+        </p:style>
+        <p:txBody>
+          <a:bodyPr rtlCol="0" anchor="ctr"/>
+          <a:lstStyle/>
+          <a:p>
+            <a:pPr algn="ctr"/>
+            <a:endParaRPr lang="en-NL"/>
+          </a:p>
+        </p:txBody>
+      </p:sp>
+      <p:sp>
+        <p:nvSpPr>
+          <p:cNvPr id="12" name="TextBox 11">
+            <a:extLst>
+              <a:ext uri="{FF2B5EF4-FFF2-40B4-BE49-F238E27FC236}">
+                <a16:creationId xmlns:a16="http://schemas.microsoft.com/office/drawing/2014/main" id="{49AB0A5D-F12E-444E-8753-FCD137F05DB8}"/>
+              </a:ext>
+            </a:extLst>
+          </p:cNvPr>
+          <p:cNvSpPr txBox="1"/>
+          <p:nvPr/>
+        </p:nvSpPr>
+        <p:spPr>
+          <a:xfrm>
+            <a:off x="6479039" y="2717722"/>
+            <a:ext cx="1298753" cy="461665"/>
+          </a:xfrm>
+          <a:prstGeom prst="rect">
+            <a:avLst/>
+          </a:prstGeom>
+          <a:noFill/>
+        </p:spPr>
+        <p:txBody>
+          <a:bodyPr wrap="none" rtlCol="0">
+            <a:spAutoFit/>
+          </a:bodyPr>
+          <a:lstStyle/>
+          <a:p>
+            <a:r>
+              <a:rPr lang="en-NL" sz="2400" dirty="0"/>
+              <a:t>Scalene</a:t>
+            </a:r>
+          </a:p>
+        </p:txBody>
+      </p:sp>
+    </p:spTree>
+    <p:extLst>
+      <p:ext uri="{BB962C8B-B14F-4D97-AF65-F5344CB8AC3E}">
+        <p14:creationId xmlns:p14="http://schemas.microsoft.com/office/powerpoint/2010/main" val="452893855"/>
+      </p:ext>
+    </p:extLst>
+  </p:cSld>
+  <p:clrMapOvr>
+    <a:masterClrMapping/>
+  </p:clrMapOvr>
+</p:sld>
+</file>
+
+<file path=ppt/slides/slide40.xml><?xml version="1.0" encoding="utf-8"?>
+<p:sld xmlns:a="http://schemas.openxmlformats.org/drawingml/2006/main" xmlns:r="http://schemas.openxmlformats.org/officeDocument/2006/relationships" xmlns:p="http://schemas.openxmlformats.org/presentationml/2006/main">
+  <p:cSld>
+    <p:spTree>
+      <p:nvGrpSpPr>
+        <p:cNvPr id="1" name=""/>
+        <p:cNvGrpSpPr/>
+        <p:nvPr/>
+      </p:nvGrpSpPr>
+      <p:grpSpPr>
+        <a:xfrm>
+          <a:off x="0" y="0"/>
+          <a:ext cx="0" cy="0"/>
+          <a:chOff x="0" y="0"/>
+          <a:chExt cx="0" cy="0"/>
+        </a:xfrm>
+      </p:grpSpPr>
+      <p:sp>
+        <p:nvSpPr>
+          <p:cNvPr id="9" name="Rounded Rectangle 8">
+            <a:extLst>
+              <a:ext uri="{FF2B5EF4-FFF2-40B4-BE49-F238E27FC236}">
+                <a16:creationId xmlns:a16="http://schemas.microsoft.com/office/drawing/2014/main" id="{C385E2B8-2776-024C-B0FD-3487081A7E1F}"/>
+              </a:ext>
+            </a:extLst>
+          </p:cNvPr>
+          <p:cNvSpPr/>
+          <p:nvPr/>
+        </p:nvSpPr>
+        <p:spPr>
+          <a:xfrm>
+            <a:off x="7020272" y="3676287"/>
+            <a:ext cx="1787860" cy="1008113"/>
+          </a:xfrm>
+          <a:prstGeom prst="roundRect">
+            <a:avLst/>
+          </a:prstGeom>
+          <a:solidFill>
+            <a:srgbClr val="FFC000">
+              <a:alpha val="25000"/>
+            </a:srgbClr>
+          </a:solidFill>
+          <a:ln>
+            <a:solidFill>
+              <a:srgbClr val="FFC000"/>
+            </a:solidFill>
+          </a:ln>
+        </p:spPr>
+        <p:style>
+          <a:lnRef idx="2">
+            <a:schemeClr val="accent1">
+              <a:shade val="50000"/>
+            </a:schemeClr>
+          </a:lnRef>
+          <a:fillRef idx="1">
+            <a:schemeClr val="accent1"/>
+          </a:fillRef>
+          <a:effectRef idx="0">
+            <a:schemeClr val="accent1"/>
+          </a:effectRef>
+          <a:fontRef idx="minor">
+            <a:schemeClr val="lt1"/>
+          </a:fontRef>
+        </p:style>
+        <p:txBody>
+          <a:bodyPr rtlCol="0" anchor="ctr"/>
+          <a:lstStyle/>
+          <a:p>
+            <a:pPr algn="ctr"/>
+            <a:r>
+              <a:rPr lang="en-US" dirty="0">
+                <a:solidFill>
+                  <a:schemeClr val="tx1"/>
+                </a:solidFill>
+              </a:rPr>
+              <a:t>Do these look familiar?</a:t>
+            </a:r>
+          </a:p>
+        </p:txBody>
+      </p:sp>
+      <p:sp>
+        <p:nvSpPr>
+          <p:cNvPr id="21506" name="Title 1"/>
+          <p:cNvSpPr>
+            <a:spLocks noGrp="1"/>
+          </p:cNvSpPr>
+          <p:nvPr>
+            <p:ph type="title"/>
+          </p:nvPr>
+        </p:nvSpPr>
+        <p:spPr/>
+        <p:txBody>
+          <a:bodyPr/>
+          <a:lstStyle/>
+          <a:p>
+            <a:r>
+              <a:rPr lang="en-US" sz="4000" dirty="0"/>
+              <a:t>Example-2 : specifying my </a:t>
+            </a:r>
+            <a:r>
+              <a:rPr lang="en-US" sz="4000" dirty="0" err="1"/>
+              <a:t>ItemStore</a:t>
+            </a:r>
+            <a:endParaRPr lang="en-US" sz="4000" dirty="0"/>
+          </a:p>
+        </p:txBody>
+      </p:sp>
+      <p:sp>
+        <p:nvSpPr>
+          <p:cNvPr id="4" name="Slide Number Placeholder 3"/>
+          <p:cNvSpPr>
+            <a:spLocks noGrp="1"/>
+          </p:cNvSpPr>
+          <p:nvPr>
+            <p:ph type="sldNum" sz="quarter" idx="12"/>
+          </p:nvPr>
+        </p:nvSpPr>
+        <p:spPr/>
+        <p:txBody>
+          <a:bodyPr/>
+          <a:lstStyle/>
+          <a:p>
+            <a:pPr>
+              <a:defRPr/>
+            </a:pPr>
+            <a:fld id="{1098014A-8D35-4A73-A9AC-6AF2C47FFF52}" type="slidenum">
+              <a:rPr lang="en-US" smtClean="0"/>
+              <a:pPr>
+                <a:defRPr/>
+              </a:pPr>
+              <a:t>40</a:t>
+            </a:fld>
+            <a:endParaRPr lang="en-US"/>
+          </a:p>
+        </p:txBody>
+      </p:sp>
+      <p:sp>
+        <p:nvSpPr>
+          <p:cNvPr id="7" name="TextBox 6"/>
+          <p:cNvSpPr txBox="1"/>
+          <p:nvPr/>
+        </p:nvSpPr>
+        <p:spPr>
+          <a:xfrm>
+            <a:off x="457200" y="1675606"/>
+            <a:ext cx="3136500" cy="2246769"/>
+          </a:xfrm>
+          <a:prstGeom prst="rect">
+            <a:avLst/>
+          </a:prstGeom>
+          <a:noFill/>
+          <a:ln>
+            <a:solidFill>
+              <a:schemeClr val="tx1"/>
+            </a:solidFill>
+          </a:ln>
+        </p:spPr>
+        <p:txBody>
+          <a:bodyPr wrap="none">
+            <a:spAutoFit/>
+          </a:bodyPr>
+          <a:lstStyle/>
+          <a:p>
+            <a:pPr>
+              <a:defRPr/>
+            </a:pPr>
+            <a:r>
+              <a:rPr lang="en-US" sz="2800" b="1" dirty="0">
+                <a:latin typeface="+mn-lt"/>
+              </a:rPr>
+              <a:t>class </a:t>
+            </a:r>
+            <a:r>
+              <a:rPr lang="en-US" sz="2800" dirty="0" err="1">
+                <a:latin typeface="+mn-lt"/>
+              </a:rPr>
+              <a:t>ItemStore</a:t>
+            </a:r>
+            <a:r>
+              <a:rPr lang="en-US" sz="2800" dirty="0">
+                <a:latin typeface="+mn-lt"/>
+              </a:rPr>
+              <a:t>&lt;T&gt; {</a:t>
+            </a:r>
+          </a:p>
+          <a:p>
+            <a:pPr>
+              <a:defRPr/>
+            </a:pPr>
+            <a:r>
+              <a:rPr lang="en-US" sz="2800" i="1" dirty="0">
+                <a:latin typeface="+mn-lt"/>
+              </a:rPr>
+              <a:t>    Store</a:t>
+            </a:r>
+            <a:r>
+              <a:rPr lang="en-US" sz="2800" dirty="0">
+                <a:latin typeface="+mn-lt"/>
+              </a:rPr>
+              <a:t>(T  </a:t>
+            </a:r>
+            <a:r>
+              <a:rPr lang="en-US" sz="2800" i="1" dirty="0">
+                <a:latin typeface="+mn-lt"/>
+              </a:rPr>
+              <a:t>x</a:t>
+            </a:r>
+            <a:r>
+              <a:rPr lang="en-US" sz="2800" dirty="0">
+                <a:latin typeface="+mn-lt"/>
+              </a:rPr>
+              <a:t>)</a:t>
+            </a:r>
+          </a:p>
+          <a:p>
+            <a:pPr>
+              <a:defRPr/>
+            </a:pPr>
+            <a:r>
+              <a:rPr lang="en-US" sz="2800" dirty="0">
+                <a:latin typeface="+mn-lt"/>
+              </a:rPr>
+              <a:t>    T   </a:t>
+            </a:r>
+            <a:r>
+              <a:rPr lang="en-US" sz="2800" i="1" dirty="0">
+                <a:latin typeface="+mn-lt"/>
+              </a:rPr>
+              <a:t>Get</a:t>
+            </a:r>
+            <a:r>
+              <a:rPr lang="en-US" sz="2800" dirty="0">
+                <a:latin typeface="+mn-lt"/>
+              </a:rPr>
+              <a:t>()</a:t>
+            </a:r>
+            <a:br>
+              <a:rPr lang="en-US" sz="2800" dirty="0">
+                <a:latin typeface="+mn-lt"/>
+              </a:rPr>
+            </a:br>
+            <a:r>
+              <a:rPr lang="en-US" sz="2800" dirty="0">
+                <a:latin typeface="+mn-lt"/>
+              </a:rPr>
+              <a:t>     int </a:t>
+            </a:r>
+            <a:r>
+              <a:rPr lang="en-US" sz="2800" i="1" dirty="0">
+                <a:latin typeface="+mn-lt"/>
+              </a:rPr>
+              <a:t>Size</a:t>
+            </a:r>
+            <a:r>
+              <a:rPr lang="en-US" sz="2800" dirty="0">
+                <a:latin typeface="+mn-lt"/>
+              </a:rPr>
+              <a:t>()</a:t>
+            </a:r>
+            <a:br>
+              <a:rPr lang="en-US" sz="2800" dirty="0">
+                <a:latin typeface="+mn-lt"/>
+              </a:rPr>
+            </a:br>
+            <a:r>
+              <a:rPr lang="en-US" sz="2800" dirty="0">
+                <a:latin typeface="+mn-lt"/>
+              </a:rPr>
+              <a:t>}</a:t>
+            </a:r>
+          </a:p>
+        </p:txBody>
+      </p:sp>
+      <p:sp>
+        <p:nvSpPr>
+          <p:cNvPr id="8" name="TextBox 7"/>
+          <p:cNvSpPr txBox="1"/>
+          <p:nvPr/>
+        </p:nvSpPr>
+        <p:spPr>
+          <a:xfrm>
+            <a:off x="457200" y="4043819"/>
+            <a:ext cx="8494948" cy="2677656"/>
+          </a:xfrm>
+          <a:prstGeom prst="rect">
+            <a:avLst/>
+          </a:prstGeom>
+          <a:noFill/>
+        </p:spPr>
+        <p:txBody>
+          <a:bodyPr wrap="square">
+            <a:spAutoFit/>
+          </a:bodyPr>
+          <a:lstStyle/>
+          <a:p>
+            <a:pPr>
+              <a:defRPr/>
+            </a:pPr>
+            <a:r>
+              <a:rPr lang="en-US" sz="2800" b="1" dirty="0">
+                <a:latin typeface="+mj-lt"/>
+                <a:ea typeface="Arial" charset="0"/>
+                <a:sym typeface="Symbol"/>
+              </a:rPr>
+              <a:t>Axioms :</a:t>
+            </a:r>
+          </a:p>
+          <a:p>
+            <a:pPr marL="514350" indent="-514350">
+              <a:buFont typeface="+mj-lt"/>
+              <a:buAutoNum type="arabicPeriod"/>
+              <a:defRPr/>
+            </a:pPr>
+            <a:r>
+              <a:rPr lang="en-US" sz="2800" dirty="0">
+                <a:latin typeface="+mj-lt"/>
+                <a:ea typeface="Arial" charset="0"/>
+                <a:sym typeface="Symbol"/>
+              </a:rPr>
+              <a:t>The Size of a new </a:t>
+            </a:r>
+            <a:r>
+              <a:rPr lang="en-US" sz="2800" dirty="0" err="1">
+                <a:latin typeface="+mj-lt"/>
+                <a:ea typeface="Arial" charset="0"/>
+                <a:sym typeface="Symbol"/>
+              </a:rPr>
+              <a:t>ItemStore</a:t>
+            </a:r>
+            <a:r>
+              <a:rPr lang="en-US" sz="2800" dirty="0">
+                <a:latin typeface="+mj-lt"/>
+                <a:ea typeface="Arial" charset="0"/>
+                <a:sym typeface="Symbol"/>
+              </a:rPr>
+              <a:t> is 0.</a:t>
+            </a:r>
+          </a:p>
+          <a:p>
+            <a:pPr marL="514350" indent="-514350">
+              <a:buFont typeface="+mj-lt"/>
+              <a:buAutoNum type="arabicPeriod"/>
+              <a:defRPr/>
+            </a:pPr>
+            <a:r>
+              <a:rPr lang="en-US" sz="2800" dirty="0">
+                <a:latin typeface="+mj-lt"/>
+                <a:ea typeface="Arial" charset="0"/>
+                <a:sym typeface="Symbol"/>
+              </a:rPr>
+              <a:t>After Store(x), Size is 1 + the Size before.</a:t>
+            </a:r>
+          </a:p>
+          <a:p>
+            <a:pPr marL="514350" indent="-514350">
+              <a:buFont typeface="+mj-lt"/>
+              <a:buAutoNum type="arabicPeriod"/>
+              <a:defRPr/>
+            </a:pPr>
+            <a:r>
+              <a:rPr lang="en-US" sz="2800" dirty="0">
+                <a:latin typeface="+mj-lt"/>
+                <a:ea typeface="Arial" charset="0"/>
+                <a:sym typeface="Symbol"/>
+              </a:rPr>
+              <a:t>If Size&gt;0, after Get(), Size is the Size before - 1.</a:t>
+            </a:r>
+          </a:p>
+          <a:p>
+            <a:pPr marL="514350" indent="-514350">
+              <a:buFont typeface="+mj-lt"/>
+              <a:buAutoNum type="arabicPeriod"/>
+              <a:defRPr/>
+            </a:pPr>
+            <a:r>
+              <a:rPr lang="en-US" sz="2800" dirty="0">
+                <a:latin typeface="+mj-lt"/>
+                <a:ea typeface="Arial" charset="0"/>
+                <a:sym typeface="Symbol"/>
+              </a:rPr>
+              <a:t>After Store(x), followed by n-times Store(.) and Get(), in any order, Get() gives x.</a:t>
+            </a:r>
+          </a:p>
+        </p:txBody>
+      </p:sp>
+    </p:spTree>
+    <p:extLst>
+      <p:ext uri="{BB962C8B-B14F-4D97-AF65-F5344CB8AC3E}">
+        <p14:creationId xmlns:p14="http://schemas.microsoft.com/office/powerpoint/2010/main" val="2902104223"/>
+      </p:ext>
+    </p:extLst>
+  </p:cSld>
+  <p:clrMapOvr>
+    <a:masterClrMapping/>
+  </p:clrMapOvr>
+  <p:timing>
+    <p:tnLst>
+      <p:par>
+        <p:cTn id="1" dur="indefinite" restart="never" nodeType="tmRoot">
+          <p:childTnLst>
+            <p:seq concurrent="1" nextAc="seek">
+              <p:cTn id="2" dur="indefinite" nodeType="mainSeq">
+                <p:childTnLst>
+                  <p:par>
+                    <p:cTn id="3" fill="hold">
+                      <p:stCondLst>
+                        <p:cond delay="indefinite"/>
+                      </p:stCondLst>
+                      <p:childTnLst>
+                        <p:par>
+                          <p:cTn id="4" fill="hold">
+                            <p:stCondLst>
+                              <p:cond delay="0"/>
+                            </p:stCondLst>
+                            <p:childTnLst>
+                              <p:par>
+                                <p:cTn id="5" presetID="1" presetClass="entr" presetSubtype="0" fill="hold" grpId="0" nodeType="clickEffect">
+                                  <p:stCondLst>
+                                    <p:cond delay="0"/>
+                                  </p:stCondLst>
+                                  <p:childTnLst>
+                                    <p:set>
+                                      <p:cBhvr>
+                                        <p:cTn id="6" dur="1" fill="hold">
+                                          <p:stCondLst>
+                                            <p:cond delay="0"/>
+                                          </p:stCondLst>
+                                        </p:cTn>
+                                        <p:tgtEl>
+                                          <p:spTgt spid="9"/>
+                                        </p:tgtEl>
+                                        <p:attrNameLst>
+                                          <p:attrName>style.visibility</p:attrName>
+                                        </p:attrNameLst>
+                                      </p:cBhvr>
+                                      <p:to>
+                                        <p:strVal val="visible"/>
+                                      </p:to>
+                                    </p:set>
+                                  </p:childTnLst>
+                                </p:cTn>
+                              </p:par>
+                            </p:childTnLst>
+                          </p:cTn>
+                        </p:par>
+                      </p:childTnLst>
+                    </p:cTn>
+                  </p:par>
+                </p:childTnLst>
+              </p:cTn>
+              <p:prevCondLst>
+                <p:cond evt="onPrev" delay="0">
+                  <p:tgtEl>
+                    <p:sldTgt/>
+                  </p:tgtEl>
+                </p:cond>
+              </p:prevCondLst>
+              <p:nextCondLst>
+                <p:cond evt="onNext" delay="0">
+                  <p:tgtEl>
+                    <p:sldTgt/>
+                  </p:tgtEl>
+                </p:cond>
+              </p:nextCondLst>
+            </p:seq>
+          </p:childTnLst>
+        </p:cTn>
+      </p:par>
+    </p:tnLst>
+    <p:bldLst>
+      <p:bldP spid="9" grpId="0" animBg="1"/>
+    </p:bldLst>
+  </p:timing>
+</p:sld>
+</file>
+
+<file path=ppt/slides/slide41.xml><?xml version="1.0" encoding="utf-8"?>
+<p:sld xmlns:a="http://schemas.openxmlformats.org/drawingml/2006/main" xmlns:r="http://schemas.openxmlformats.org/officeDocument/2006/relationships" xmlns:p="http://schemas.openxmlformats.org/presentationml/2006/main">
+  <p:cSld>
+    <p:spTree>
+      <p:nvGrpSpPr>
+        <p:cNvPr id="1" name=""/>
+        <p:cNvGrpSpPr/>
+        <p:nvPr/>
+      </p:nvGrpSpPr>
+      <p:grpSpPr>
+        <a:xfrm>
+          <a:off x="0" y="0"/>
+          <a:ext cx="0" cy="0"/>
+          <a:chOff x="0" y="0"/>
+          <a:chExt cx="0" cy="0"/>
+        </a:xfrm>
+      </p:grpSpPr>
+      <p:sp>
+        <p:nvSpPr>
+          <p:cNvPr id="22530" name="Title 1"/>
+          <p:cNvSpPr>
+            <a:spLocks noGrp="1"/>
+          </p:cNvSpPr>
+          <p:nvPr>
+            <p:ph type="title"/>
+          </p:nvPr>
+        </p:nvSpPr>
+        <p:spPr>
+          <a:xfrm>
+            <a:off x="457200" y="274638"/>
+            <a:ext cx="8229600" cy="850106"/>
+          </a:xfrm>
+        </p:spPr>
+        <p:txBody>
+          <a:bodyPr/>
+          <a:lstStyle/>
+          <a:p>
+            <a:r>
+              <a:rPr lang="en-US" sz="4000" dirty="0"/>
+              <a:t>Testing ADT</a:t>
+            </a:r>
+          </a:p>
+        </p:txBody>
+      </p:sp>
+      <p:sp>
+        <p:nvSpPr>
+          <p:cNvPr id="3" name="Slide Number Placeholder 2"/>
+          <p:cNvSpPr>
+            <a:spLocks noGrp="1"/>
+          </p:cNvSpPr>
+          <p:nvPr>
+            <p:ph type="sldNum" sz="quarter" idx="12"/>
+          </p:nvPr>
+        </p:nvSpPr>
+        <p:spPr/>
+        <p:txBody>
+          <a:bodyPr/>
+          <a:lstStyle/>
+          <a:p>
+            <a:pPr>
+              <a:defRPr/>
+            </a:pPr>
+            <a:fld id="{A396C40A-8632-4362-9BC0-7DC1524AF9EA}" type="slidenum">
+              <a:rPr lang="en-US" smtClean="0"/>
+              <a:pPr>
+                <a:defRPr/>
+              </a:pPr>
+              <a:t>41</a:t>
+            </a:fld>
+            <a:endParaRPr lang="en-US"/>
+          </a:p>
+        </p:txBody>
+      </p:sp>
+      <p:sp>
+        <p:nvSpPr>
+          <p:cNvPr id="4" name="TextBox 3"/>
+          <p:cNvSpPr txBox="1"/>
+          <p:nvPr/>
+        </p:nvSpPr>
+        <p:spPr>
+          <a:xfrm>
+            <a:off x="863588" y="2204864"/>
+            <a:ext cx="7704856" cy="830997"/>
+          </a:xfrm>
+          <a:prstGeom prst="rect">
+            <a:avLst/>
+          </a:prstGeom>
+        </p:spPr>
+        <p:style>
+          <a:lnRef idx="2">
+            <a:schemeClr val="dk1"/>
+          </a:lnRef>
+          <a:fillRef idx="1">
+            <a:schemeClr val="lt1"/>
+          </a:fillRef>
+          <a:effectRef idx="0">
+            <a:schemeClr val="dk1"/>
+          </a:effectRef>
+          <a:fontRef idx="minor">
+            <a:schemeClr val="dk1"/>
+          </a:fontRef>
+        </p:style>
+        <p:txBody>
+          <a:bodyPr wrap="square">
+            <a:spAutoFit/>
+          </a:bodyPr>
+          <a:lstStyle/>
+          <a:p>
+            <a:pPr marL="0" lvl="1">
+              <a:defRPr/>
+            </a:pPr>
+            <a:r>
+              <a:rPr lang="en-US" sz="2400" dirty="0">
+                <a:highlight>
+                  <a:srgbClr val="FFFF00"/>
+                </a:highlight>
+                <a:sym typeface="Symbol"/>
+              </a:rPr>
+              <a:t>Axiom4</a:t>
+            </a:r>
+            <a:r>
+              <a:rPr lang="en-US" sz="2400" dirty="0">
+                <a:sym typeface="Symbol"/>
+              </a:rPr>
+              <a:t>(</a:t>
+            </a:r>
+            <a:r>
+              <a:rPr lang="en-US" sz="2400" dirty="0" err="1">
+                <a:sym typeface="Symbol"/>
+              </a:rPr>
+              <a:t>ItemStore</a:t>
+            </a:r>
+            <a:r>
+              <a:rPr lang="en-US" sz="2400" dirty="0">
+                <a:sym typeface="Symbol"/>
+              </a:rPr>
+              <a:t> s, T x) {</a:t>
+            </a:r>
+            <a:br>
+              <a:rPr lang="en-US" sz="2400" dirty="0">
+                <a:sym typeface="Symbol"/>
+              </a:rPr>
+            </a:br>
+            <a:r>
+              <a:rPr lang="en-US" sz="2400" dirty="0">
+                <a:sym typeface="Symbol"/>
+              </a:rPr>
+              <a:t>   </a:t>
+            </a:r>
+            <a:r>
+              <a:rPr lang="en-US" sz="2400" dirty="0" err="1">
+                <a:sym typeface="Symbol"/>
+              </a:rPr>
+              <a:t>s.Store</a:t>
+            </a:r>
+            <a:r>
+              <a:rPr lang="en-US" sz="2400" dirty="0">
+                <a:sym typeface="Symbol"/>
+              </a:rPr>
+              <a:t>(x) ; </a:t>
+            </a:r>
+            <a:r>
+              <a:rPr lang="en-US" sz="2400" dirty="0" err="1">
+                <a:sym typeface="Symbol"/>
+              </a:rPr>
+              <a:t>s.Store</a:t>
+            </a:r>
+            <a:r>
+              <a:rPr lang="en-US" sz="2400" dirty="0">
+                <a:sym typeface="Symbol"/>
+              </a:rPr>
+              <a:t>(null) ; </a:t>
+            </a:r>
+            <a:r>
+              <a:rPr lang="en-US" sz="2400" dirty="0" err="1">
+                <a:sym typeface="Symbol"/>
+              </a:rPr>
+              <a:t>s.Get</a:t>
+            </a:r>
+            <a:r>
+              <a:rPr lang="en-US" sz="2400" dirty="0">
+                <a:sym typeface="Symbol"/>
+              </a:rPr>
+              <a:t>() ;  </a:t>
+            </a:r>
+            <a:r>
+              <a:rPr lang="en-US" sz="2400" dirty="0" err="1">
+                <a:highlight>
+                  <a:srgbClr val="FFFF00"/>
+                </a:highlight>
+                <a:sym typeface="Symbol"/>
+              </a:rPr>
+              <a:t>assertEqual</a:t>
+            </a:r>
+            <a:r>
+              <a:rPr lang="en-US" sz="2400" dirty="0">
+                <a:sym typeface="Symbol"/>
+              </a:rPr>
+              <a:t>(x, </a:t>
+            </a:r>
+            <a:r>
+              <a:rPr lang="en-US" sz="2400" dirty="0" err="1">
+                <a:sym typeface="Symbol"/>
+              </a:rPr>
+              <a:t>s.Get</a:t>
+            </a:r>
+            <a:r>
+              <a:rPr lang="en-US" sz="2400" dirty="0">
+                <a:sym typeface="Symbol"/>
+              </a:rPr>
+              <a:t>()) ; }</a:t>
+            </a:r>
+          </a:p>
+        </p:txBody>
+      </p:sp>
+      <p:sp>
+        <p:nvSpPr>
+          <p:cNvPr id="6" name="TextBox 5"/>
+          <p:cNvSpPr txBox="1"/>
+          <p:nvPr/>
+        </p:nvSpPr>
+        <p:spPr>
+          <a:xfrm>
+            <a:off x="575556" y="1531972"/>
+            <a:ext cx="7992888" cy="3416320"/>
+          </a:xfrm>
+          <a:prstGeom prst="rect">
+            <a:avLst/>
+          </a:prstGeom>
+          <a:noFill/>
+        </p:spPr>
+        <p:txBody>
+          <a:bodyPr wrap="square">
+            <a:spAutoFit/>
+          </a:bodyPr>
+          <a:lstStyle/>
+          <a:p>
+            <a:pPr>
+              <a:defRPr/>
+            </a:pPr>
+            <a:r>
+              <a:rPr lang="en-US" sz="2400" dirty="0"/>
+              <a:t>For example, to test Ax-4:</a:t>
+            </a:r>
+            <a:br>
+              <a:rPr lang="en-US" sz="2400" dirty="0"/>
+            </a:br>
+            <a:endParaRPr lang="en-US" sz="2400" dirty="0"/>
+          </a:p>
+          <a:p>
+            <a:pPr>
+              <a:defRPr/>
+            </a:pPr>
+            <a:endParaRPr lang="en-US" sz="2400" dirty="0"/>
+          </a:p>
+          <a:p>
+            <a:pPr>
+              <a:defRPr/>
+            </a:pPr>
+            <a:r>
+              <a:rPr lang="en-US" sz="2400" dirty="0"/>
+              <a:t> </a:t>
+            </a:r>
+          </a:p>
+          <a:p>
+            <a:pPr>
+              <a:defRPr/>
+            </a:pPr>
+            <a:endParaRPr lang="en-US" sz="2400" dirty="0"/>
+          </a:p>
+          <a:p>
+            <a:pPr>
+              <a:defRPr/>
+            </a:pPr>
+            <a:r>
+              <a:rPr lang="en-US" sz="2400" dirty="0"/>
+              <a:t>We can imagine e.g. these test cases :</a:t>
+            </a:r>
+          </a:p>
+          <a:p>
+            <a:pPr marL="800100" lvl="1" indent="-342900">
+              <a:buFont typeface="+mj-lt"/>
+              <a:buAutoNum type="arabicPeriod"/>
+              <a:defRPr/>
+            </a:pPr>
+            <a:r>
+              <a:rPr lang="en-US" sz="2400" dirty="0"/>
+              <a:t>  empty </a:t>
+            </a:r>
+            <a:r>
+              <a:rPr lang="en-US" sz="2400" i="1" dirty="0"/>
+              <a:t>s</a:t>
+            </a:r>
+          </a:p>
+          <a:p>
+            <a:pPr marL="800100" lvl="1" indent="-342900">
+              <a:buFont typeface="+mj-lt"/>
+              <a:buAutoNum type="arabicPeriod"/>
+              <a:defRPr/>
+            </a:pPr>
+            <a:r>
+              <a:rPr lang="en-US" sz="2400" dirty="0"/>
+              <a:t>  a non-empty </a:t>
+            </a:r>
+            <a:r>
+              <a:rPr lang="en-US" sz="2400" i="1" dirty="0"/>
+              <a:t>s </a:t>
+            </a:r>
+            <a:r>
+              <a:rPr lang="en-US" sz="2400" dirty="0"/>
+              <a:t>that does not contain </a:t>
+            </a:r>
+            <a:r>
+              <a:rPr lang="en-US" sz="2400" i="1" dirty="0"/>
+              <a:t>x</a:t>
+            </a:r>
+          </a:p>
+          <a:p>
+            <a:pPr marL="800100" lvl="1" indent="-342900">
+              <a:buFont typeface="+mj-lt"/>
+              <a:buAutoNum type="arabicPeriod"/>
+              <a:defRPr/>
+            </a:pPr>
+            <a:r>
+              <a:rPr lang="en-US" sz="2400" dirty="0"/>
+              <a:t>  an </a:t>
+            </a:r>
+            <a:r>
+              <a:rPr lang="en-US" sz="2400" i="1" dirty="0"/>
+              <a:t>s</a:t>
+            </a:r>
+            <a:r>
+              <a:rPr lang="en-US" sz="2400" dirty="0"/>
+              <a:t> that already contains x</a:t>
+            </a:r>
+          </a:p>
+        </p:txBody>
+      </p:sp>
+    </p:spTree>
+  </p:cSld>
+  <p:clrMapOvr>
+    <a:masterClrMapping/>
+  </p:clrMapOvr>
+</p:sld>
+</file>
+
+<file path=ppt/slides/slide42.xml><?xml version="1.0" encoding="utf-8"?>
+<p:sld xmlns:a="http://schemas.openxmlformats.org/drawingml/2006/main" xmlns:r="http://schemas.openxmlformats.org/officeDocument/2006/relationships" xmlns:p="http://schemas.openxmlformats.org/presentationml/2006/main">
+  <p:cSld>
+    <p:spTree>
+      <p:nvGrpSpPr>
+        <p:cNvPr id="1" name=""/>
+        <p:cNvGrpSpPr/>
+        <p:nvPr/>
+      </p:nvGrpSpPr>
+      <p:grpSpPr>
+        <a:xfrm>
+          <a:off x="0" y="0"/>
+          <a:ext cx="0" cy="0"/>
+          <a:chOff x="0" y="0"/>
+          <a:chExt cx="0" cy="0"/>
+        </a:xfrm>
+      </p:grpSpPr>
+      <p:sp>
+        <p:nvSpPr>
           <p:cNvPr id="5" name="Rounded Rectangle 4">
             <a:extLst>
               <a:ext uri="{FF2B5EF4-FFF2-40B4-BE49-F238E27FC236}">
@@ -15854,7 +19207,7 @@
               <a:pPr>
                 <a:defRPr/>
               </a:pPr>
-              <a:t>34</a:t>
+              <a:t>42</a:t>
             </a:fld>
             <a:endParaRPr lang="en-US" dirty="0"/>
           </a:p>
@@ -15868,7 +19221,7 @@
 </p:sld>
 </file>
 
-<file path=ppt/slides/slide35.xml><?xml version="1.0" encoding="utf-8"?>
+<file path=ppt/slides/slide43.xml><?xml version="1.0" encoding="utf-8"?>
 <p:sld xmlns:a="http://schemas.openxmlformats.org/drawingml/2006/main" xmlns:r="http://schemas.openxmlformats.org/officeDocument/2006/relationships" xmlns:p="http://schemas.openxmlformats.org/presentationml/2006/main">
   <p:cSld>
     <p:spTree>
@@ -16044,7 +19397,7 @@
               <a:pPr>
                 <a:defRPr/>
               </a:pPr>
-              <a:t>35</a:t>
+              <a:t>43</a:t>
             </a:fld>
             <a:endParaRPr lang="en-US"/>
           </a:p>
@@ -16804,7 +20157,7 @@
 </p:sld>
 </file>
 
-<file path=ppt/slides/slide36.xml><?xml version="1.0" encoding="utf-8"?>
+<file path=ppt/slides/slide44.xml><?xml version="1.0" encoding="utf-8"?>
 <p:sld xmlns:a="http://schemas.openxmlformats.org/drawingml/2006/main" xmlns:r="http://schemas.openxmlformats.org/officeDocument/2006/relationships" xmlns:p="http://schemas.openxmlformats.org/presentationml/2006/main">
   <p:cSld>
     <p:spTree>
@@ -16867,7 +20220,7 @@
               <a:pPr>
                 <a:defRPr/>
               </a:pPr>
-              <a:t>36</a:t>
+              <a:t>44</a:t>
             </a:fld>
             <a:endParaRPr lang="en-US"/>
           </a:p>
@@ -17509,7 +20862,7 @@
 </p:sld>
 </file>
 
-<file path=ppt/slides/slide37.xml><?xml version="1.0" encoding="utf-8"?>
+<file path=ppt/slides/slide45.xml><?xml version="1.0" encoding="utf-8"?>
 <p:sld xmlns:a="http://schemas.openxmlformats.org/drawingml/2006/main" xmlns:r="http://schemas.openxmlformats.org/officeDocument/2006/relationships" xmlns:p="http://schemas.openxmlformats.org/presentationml/2006/main">
   <p:cSld>
     <p:spTree>
@@ -17851,7 +21204,7 @@
               <a:pPr>
                 <a:defRPr/>
               </a:pPr>
-              <a:t>37</a:t>
+              <a:t>45</a:t>
             </a:fld>
             <a:endParaRPr lang="en-US"/>
           </a:p>
@@ -17870,7 +21223,7 @@
 </p:sld>
 </file>
 
-<file path=ppt/slides/slide38.xml><?xml version="1.0" encoding="utf-8"?>
+<file path=ppt/slides/slide46.xml><?xml version="1.0" encoding="utf-8"?>
 <p:sld xmlns:a="http://schemas.openxmlformats.org/drawingml/2006/main" xmlns:r="http://schemas.openxmlformats.org/officeDocument/2006/relationships" xmlns:p="http://schemas.openxmlformats.org/presentationml/2006/main">
   <p:cSld>
     <p:spTree>
@@ -18098,7 +21451,7 @@
               <a:pPr>
                 <a:defRPr/>
               </a:pPr>
-              <a:t>38</a:t>
+              <a:t>46</a:t>
             </a:fld>
             <a:endParaRPr lang="en-US"/>
           </a:p>
@@ -18744,2136 +22097,6 @@
 </p:sld>
 </file>
 
-<file path=ppt/slides/slide39.xml><?xml version="1.0" encoding="utf-8"?>
-<p:sld xmlns:a="http://schemas.openxmlformats.org/drawingml/2006/main" xmlns:r="http://schemas.openxmlformats.org/officeDocument/2006/relationships" xmlns:p="http://schemas.openxmlformats.org/presentationml/2006/main">
-  <p:cSld>
-    <p:spTree>
-      <p:nvGrpSpPr>
-        <p:cNvPr id="1" name=""/>
-        <p:cNvGrpSpPr/>
-        <p:nvPr/>
-      </p:nvGrpSpPr>
-      <p:grpSpPr>
-        <a:xfrm>
-          <a:off x="0" y="0"/>
-          <a:ext cx="0" cy="0"/>
-          <a:chOff x="0" y="0"/>
-          <a:chExt cx="0" cy="0"/>
-        </a:xfrm>
-      </p:grpSpPr>
-      <p:sp>
-        <p:nvSpPr>
-          <p:cNvPr id="17410" name="Title 1"/>
-          <p:cNvSpPr>
-            <a:spLocks noGrp="1"/>
-          </p:cNvSpPr>
-          <p:nvPr>
-            <p:ph type="title"/>
-          </p:nvPr>
-        </p:nvSpPr>
-        <p:spPr/>
-        <p:txBody>
-          <a:bodyPr/>
-          <a:lstStyle/>
-          <a:p>
-            <a:pPr eaLnBrk="1" hangingPunct="1"/>
-            <a:r>
-              <a:rPr lang="en-US" dirty="0"/>
-              <a:t>Specifying a “class”</a:t>
-            </a:r>
-            <a:endParaRPr lang="en-US" i="1" dirty="0"/>
-          </a:p>
-        </p:txBody>
-      </p:sp>
-      <p:sp>
-        <p:nvSpPr>
-          <p:cNvPr id="17411" name="Content Placeholder 2"/>
-          <p:cNvSpPr>
-            <a:spLocks noGrp="1"/>
-          </p:cNvSpPr>
-          <p:nvPr>
-            <p:ph idx="1"/>
-          </p:nvPr>
-        </p:nvSpPr>
-        <p:spPr>
-          <a:xfrm>
-            <a:off x="457200" y="1844824"/>
-            <a:ext cx="8229600" cy="4281339"/>
-          </a:xfrm>
-        </p:spPr>
-        <p:txBody>
-          <a:bodyPr/>
-          <a:lstStyle/>
-          <a:p>
-            <a:pPr eaLnBrk="1" hangingPunct="1"/>
-            <a:r>
-              <a:rPr lang="en-US" sz="2800" dirty="0"/>
-              <a:t>Many classes have methods that </a:t>
-            </a:r>
-            <a:r>
-              <a:rPr lang="en-US" sz="2800" i="1" dirty="0"/>
-              <a:t>interact with each other</a:t>
-            </a:r>
-            <a:r>
-              <a:rPr lang="en-US" sz="2800" dirty="0"/>
-              <a:t> (e.g. as in Stack).  How to specify (and test) these interactions? </a:t>
-            </a:r>
-          </a:p>
-          <a:p>
-            <a:pPr eaLnBrk="1" hangingPunct="1"/>
-            <a:r>
-              <a:rPr lang="en-US" sz="2800" dirty="0"/>
-              <a:t>Option-1: </a:t>
-            </a:r>
-            <a:r>
-              <a:rPr lang="en-US" sz="2800" dirty="0">
-                <a:sym typeface="Symbol" pitchFamily="18" charset="2"/>
-              </a:rPr>
-              <a:t>specify every method with pre- and post-conditions (we discussed this).</a:t>
-            </a:r>
-            <a:br>
-              <a:rPr lang="en-US" sz="2800" dirty="0">
-                <a:sym typeface="Symbol" pitchFamily="18" charset="2"/>
-              </a:rPr>
-            </a:br>
-            <a:r>
-              <a:rPr lang="en-US" sz="2800" dirty="0">
-                <a:sym typeface="Symbol" pitchFamily="18" charset="2"/>
-              </a:rPr>
-              <a:t>This is expressive enough, tough pre- and post-conditions do not, arguably, naturally capture inter-method interactions.</a:t>
-            </a:r>
-          </a:p>
-        </p:txBody>
-      </p:sp>
-      <p:sp>
-        <p:nvSpPr>
-          <p:cNvPr id="4" name="Slide Number Placeholder 3"/>
-          <p:cNvSpPr>
-            <a:spLocks noGrp="1"/>
-          </p:cNvSpPr>
-          <p:nvPr>
-            <p:ph type="sldNum" sz="quarter" idx="12"/>
-          </p:nvPr>
-        </p:nvSpPr>
-        <p:spPr/>
-        <p:txBody>
-          <a:bodyPr/>
-          <a:lstStyle/>
-          <a:p>
-            <a:pPr>
-              <a:defRPr/>
-            </a:pPr>
-            <a:fld id="{4D00519D-647D-4135-80EB-ECBDAE25E06C}" type="slidenum">
-              <a:rPr lang="en-US" smtClean="0"/>
-              <a:pPr>
-                <a:defRPr/>
-              </a:pPr>
-              <a:t>39</a:t>
-            </a:fld>
-            <a:endParaRPr lang="en-US"/>
-          </a:p>
-        </p:txBody>
-      </p:sp>
-    </p:spTree>
-    <p:extLst>
-      <p:ext uri="{BB962C8B-B14F-4D97-AF65-F5344CB8AC3E}">
-        <p14:creationId xmlns:p14="http://schemas.microsoft.com/office/powerpoint/2010/main" val="2083278437"/>
-      </p:ext>
-    </p:extLst>
-  </p:cSld>
-  <p:clrMapOvr>
-    <a:masterClrMapping/>
-  </p:clrMapOvr>
-</p:sld>
-</file>
-
-<file path=ppt/slides/slide4.xml><?xml version="1.0" encoding="utf-8"?>
-<p:sld xmlns:a="http://schemas.openxmlformats.org/drawingml/2006/main" xmlns:r="http://schemas.openxmlformats.org/officeDocument/2006/relationships" xmlns:p="http://schemas.openxmlformats.org/presentationml/2006/main">
-  <p:cSld>
-    <p:spTree>
-      <p:nvGrpSpPr>
-        <p:cNvPr id="1" name=""/>
-        <p:cNvGrpSpPr/>
-        <p:nvPr/>
-      </p:nvGrpSpPr>
-      <p:grpSpPr>
-        <a:xfrm>
-          <a:off x="0" y="0"/>
-          <a:ext cx="0" cy="0"/>
-          <a:chOff x="0" y="0"/>
-          <a:chExt cx="0" cy="0"/>
-        </a:xfrm>
-      </p:grpSpPr>
-      <p:sp>
-        <p:nvSpPr>
-          <p:cNvPr id="8" name="Rounded Rectangle 7">
-            <a:extLst>
-              <a:ext uri="{FF2B5EF4-FFF2-40B4-BE49-F238E27FC236}">
-                <a16:creationId xmlns:a16="http://schemas.microsoft.com/office/drawing/2014/main" id="{0C799402-5D1F-7147-BB7B-DF7EC41BB5E5}"/>
-              </a:ext>
-            </a:extLst>
-          </p:cNvPr>
-          <p:cNvSpPr/>
-          <p:nvPr/>
-        </p:nvSpPr>
-        <p:spPr>
-          <a:xfrm>
-            <a:off x="321633" y="3573016"/>
-            <a:ext cx="8500734" cy="1338898"/>
-          </a:xfrm>
-          <a:prstGeom prst="roundRect">
-            <a:avLst>
-              <a:gd name="adj" fmla="val 31222"/>
-            </a:avLst>
-          </a:prstGeom>
-          <a:solidFill>
-            <a:srgbClr val="FFC000">
-              <a:alpha val="25000"/>
-            </a:srgbClr>
-          </a:solidFill>
-          <a:ln>
-            <a:solidFill>
-              <a:srgbClr val="FFC000"/>
-            </a:solidFill>
-          </a:ln>
-        </p:spPr>
-        <p:style>
-          <a:lnRef idx="2">
-            <a:schemeClr val="accent1">
-              <a:shade val="50000"/>
-            </a:schemeClr>
-          </a:lnRef>
-          <a:fillRef idx="1">
-            <a:schemeClr val="accent1"/>
-          </a:fillRef>
-          <a:effectRef idx="0">
-            <a:schemeClr val="accent1"/>
-          </a:effectRef>
-          <a:fontRef idx="minor">
-            <a:schemeClr val="lt1"/>
-          </a:fontRef>
-        </p:style>
-        <p:txBody>
-          <a:bodyPr rtlCol="0" anchor="ctr"/>
-          <a:lstStyle/>
-          <a:p>
-            <a:pPr algn="ctr"/>
-            <a:endParaRPr lang="en-US"/>
-          </a:p>
-        </p:txBody>
-      </p:sp>
-      <p:sp>
-        <p:nvSpPr>
-          <p:cNvPr id="2" name="Title 1">
-            <a:extLst>
-              <a:ext uri="{FF2B5EF4-FFF2-40B4-BE49-F238E27FC236}">
-                <a16:creationId xmlns:a16="http://schemas.microsoft.com/office/drawing/2014/main" id="{3E1F776B-81F4-BB41-9178-472DC4878699}"/>
-              </a:ext>
-            </a:extLst>
-          </p:cNvPr>
-          <p:cNvSpPr>
-            <a:spLocks noGrp="1"/>
-          </p:cNvSpPr>
-          <p:nvPr>
-            <p:ph type="title"/>
-          </p:nvPr>
-        </p:nvSpPr>
-        <p:spPr/>
-        <p:txBody>
-          <a:bodyPr/>
-          <a:lstStyle/>
-          <a:p>
-            <a:r>
-              <a:rPr lang="en-US" dirty="0"/>
-              <a:t>Example: determining triangle type</a:t>
-            </a:r>
-          </a:p>
-        </p:txBody>
-      </p:sp>
-      <p:sp>
-        <p:nvSpPr>
-          <p:cNvPr id="4" name="Slide Number Placeholder 3">
-            <a:extLst>
-              <a:ext uri="{FF2B5EF4-FFF2-40B4-BE49-F238E27FC236}">
-                <a16:creationId xmlns:a16="http://schemas.microsoft.com/office/drawing/2014/main" id="{3BB5884F-6023-EC45-A7CA-03584A7CAEE2}"/>
-              </a:ext>
-            </a:extLst>
-          </p:cNvPr>
-          <p:cNvSpPr>
-            <a:spLocks noGrp="1"/>
-          </p:cNvSpPr>
-          <p:nvPr>
-            <p:ph type="sldNum" sz="quarter" idx="12"/>
-          </p:nvPr>
-        </p:nvSpPr>
-        <p:spPr/>
-        <p:txBody>
-          <a:bodyPr/>
-          <a:lstStyle/>
-          <a:p>
-            <a:pPr>
-              <a:defRPr/>
-            </a:pPr>
-            <a:fld id="{F7C0A3F7-46F3-44CF-95B7-0304031AA6EA}" type="slidenum">
-              <a:rPr lang="en-US" smtClean="0"/>
-              <a:pPr>
-                <a:defRPr/>
-              </a:pPr>
-              <a:t>4</a:t>
-            </a:fld>
-            <a:endParaRPr lang="en-US"/>
-          </a:p>
-        </p:txBody>
-      </p:sp>
-      <p:sp>
-        <p:nvSpPr>
-          <p:cNvPr id="6" name="TextBox 5">
-            <a:extLst>
-              <a:ext uri="{FF2B5EF4-FFF2-40B4-BE49-F238E27FC236}">
-                <a16:creationId xmlns:a16="http://schemas.microsoft.com/office/drawing/2014/main" id="{B8D24658-CEAD-494D-8DD1-5C3B078597E4}"/>
-              </a:ext>
-            </a:extLst>
-          </p:cNvPr>
-          <p:cNvSpPr txBox="1"/>
-          <p:nvPr/>
-        </p:nvSpPr>
-        <p:spPr>
-          <a:xfrm>
-            <a:off x="457200" y="3980855"/>
-            <a:ext cx="8456674" cy="523220"/>
-          </a:xfrm>
-          <a:prstGeom prst="rect">
-            <a:avLst/>
-          </a:prstGeom>
-          <a:noFill/>
-          <a:ln>
-            <a:noFill/>
-          </a:ln>
-        </p:spPr>
-        <p:txBody>
-          <a:bodyPr wrap="none" rtlCol="0">
-            <a:spAutoFit/>
-          </a:bodyPr>
-          <a:lstStyle/>
-          <a:p>
-            <a:r>
-              <a:rPr lang="en-US" sz="2800" dirty="0" err="1"/>
-              <a:t>TriangleType</a:t>
-            </a:r>
-            <a:r>
-              <a:rPr lang="en-US" sz="2800" dirty="0"/>
-              <a:t> </a:t>
-            </a:r>
-            <a:r>
-              <a:rPr lang="en-US" sz="2800" b="1" dirty="0" err="1">
-                <a:solidFill>
-                  <a:schemeClr val="accent5">
-                    <a:lumMod val="75000"/>
-                  </a:schemeClr>
-                </a:solidFill>
-              </a:rPr>
-              <a:t>TriType</a:t>
-            </a:r>
-            <a:r>
-              <a:rPr lang="en-US" sz="2800" dirty="0"/>
-              <a:t>(Float a, Float b, Float c) { ... } </a:t>
-            </a:r>
-          </a:p>
-        </p:txBody>
-      </p:sp>
-      <p:sp>
-        <p:nvSpPr>
-          <p:cNvPr id="7" name="TextBox 6">
-            <a:extLst>
-              <a:ext uri="{FF2B5EF4-FFF2-40B4-BE49-F238E27FC236}">
-                <a16:creationId xmlns:a16="http://schemas.microsoft.com/office/drawing/2014/main" id="{733AF20E-76B8-3B4F-8F02-C4A062D48533}"/>
-              </a:ext>
-            </a:extLst>
-          </p:cNvPr>
-          <p:cNvSpPr txBox="1"/>
-          <p:nvPr/>
-        </p:nvSpPr>
-        <p:spPr>
-          <a:xfrm>
-            <a:off x="645021" y="5260461"/>
-            <a:ext cx="7856384" cy="830997"/>
-          </a:xfrm>
-          <a:prstGeom prst="rect">
-            <a:avLst/>
-          </a:prstGeom>
-          <a:noFill/>
-        </p:spPr>
-        <p:txBody>
-          <a:bodyPr wrap="square" rtlCol="0">
-            <a:spAutoFit/>
-          </a:bodyPr>
-          <a:lstStyle/>
-          <a:p>
-            <a:pPr algn="ctr"/>
-            <a:r>
-              <a:rPr lang="en-US" sz="2400" i="1" dirty="0"/>
-              <a:t>If a, b, c represent the sides of a triangle, this methods determines the type of the triangle.</a:t>
-            </a:r>
-          </a:p>
-        </p:txBody>
-      </p:sp>
-      <p:sp>
-        <p:nvSpPr>
-          <p:cNvPr id="3" name="Triangle 2">
-            <a:extLst>
-              <a:ext uri="{FF2B5EF4-FFF2-40B4-BE49-F238E27FC236}">
-                <a16:creationId xmlns:a16="http://schemas.microsoft.com/office/drawing/2014/main" id="{9B0178CC-2B6E-5341-AD59-215B4EB08D59}"/>
-              </a:ext>
-            </a:extLst>
-          </p:cNvPr>
-          <p:cNvSpPr/>
-          <p:nvPr/>
-        </p:nvSpPr>
-        <p:spPr>
-          <a:xfrm rot="20044802">
-            <a:off x="1045341" y="1516512"/>
-            <a:ext cx="1584176" cy="1224136"/>
-          </a:xfrm>
-          <a:prstGeom prst="triangle">
-            <a:avLst/>
-          </a:prstGeom>
-        </p:spPr>
-        <p:style>
-          <a:lnRef idx="2">
-            <a:schemeClr val="accent1">
-              <a:shade val="50000"/>
-            </a:schemeClr>
-          </a:lnRef>
-          <a:fillRef idx="1">
-            <a:schemeClr val="accent1"/>
-          </a:fillRef>
-          <a:effectRef idx="0">
-            <a:schemeClr val="accent1"/>
-          </a:effectRef>
-          <a:fontRef idx="minor">
-            <a:schemeClr val="lt1"/>
-          </a:fontRef>
-        </p:style>
-        <p:txBody>
-          <a:bodyPr rtlCol="0" anchor="ctr"/>
-          <a:lstStyle/>
-          <a:p>
-            <a:pPr algn="ctr"/>
-            <a:endParaRPr lang="en-NL"/>
-          </a:p>
-        </p:txBody>
-      </p:sp>
-      <p:sp>
-        <p:nvSpPr>
-          <p:cNvPr id="5" name="TextBox 4">
-            <a:extLst>
-              <a:ext uri="{FF2B5EF4-FFF2-40B4-BE49-F238E27FC236}">
-                <a16:creationId xmlns:a16="http://schemas.microsoft.com/office/drawing/2014/main" id="{B4CDFFB8-7898-0147-8775-B833CF9A152F}"/>
-              </a:ext>
-            </a:extLst>
-          </p:cNvPr>
-          <p:cNvSpPr txBox="1"/>
-          <p:nvPr/>
-        </p:nvSpPr>
-        <p:spPr>
-          <a:xfrm>
-            <a:off x="1731917" y="2647803"/>
-            <a:ext cx="1641796" cy="461665"/>
-          </a:xfrm>
-          <a:prstGeom prst="rect">
-            <a:avLst/>
-          </a:prstGeom>
-          <a:noFill/>
-        </p:spPr>
-        <p:txBody>
-          <a:bodyPr wrap="none" rtlCol="0">
-            <a:spAutoFit/>
-          </a:bodyPr>
-          <a:lstStyle/>
-          <a:p>
-            <a:r>
-              <a:rPr lang="en-NL" sz="2400" dirty="0"/>
-              <a:t>Equilateral</a:t>
-            </a:r>
-          </a:p>
-        </p:txBody>
-      </p:sp>
-      <p:sp>
-        <p:nvSpPr>
-          <p:cNvPr id="9" name="Triangle 8">
-            <a:extLst>
-              <a:ext uri="{FF2B5EF4-FFF2-40B4-BE49-F238E27FC236}">
-                <a16:creationId xmlns:a16="http://schemas.microsoft.com/office/drawing/2014/main" id="{99E04C14-265B-6844-979D-B4563C57F781}"/>
-              </a:ext>
-            </a:extLst>
-          </p:cNvPr>
-          <p:cNvSpPr/>
-          <p:nvPr/>
-        </p:nvSpPr>
-        <p:spPr>
-          <a:xfrm>
-            <a:off x="4139088" y="1570110"/>
-            <a:ext cx="834874" cy="1224136"/>
-          </a:xfrm>
-          <a:prstGeom prst="triangle">
-            <a:avLst/>
-          </a:prstGeom>
-        </p:spPr>
-        <p:style>
-          <a:lnRef idx="2">
-            <a:schemeClr val="accent1">
-              <a:shade val="50000"/>
-            </a:schemeClr>
-          </a:lnRef>
-          <a:fillRef idx="1">
-            <a:schemeClr val="accent1"/>
-          </a:fillRef>
-          <a:effectRef idx="0">
-            <a:schemeClr val="accent1"/>
-          </a:effectRef>
-          <a:fontRef idx="minor">
-            <a:schemeClr val="lt1"/>
-          </a:fontRef>
-        </p:style>
-        <p:txBody>
-          <a:bodyPr rtlCol="0" anchor="ctr"/>
-          <a:lstStyle/>
-          <a:p>
-            <a:pPr algn="ctr"/>
-            <a:endParaRPr lang="en-NL"/>
-          </a:p>
-        </p:txBody>
-      </p:sp>
-      <p:sp>
-        <p:nvSpPr>
-          <p:cNvPr id="10" name="TextBox 9">
-            <a:extLst>
-              <a:ext uri="{FF2B5EF4-FFF2-40B4-BE49-F238E27FC236}">
-                <a16:creationId xmlns:a16="http://schemas.microsoft.com/office/drawing/2014/main" id="{B4F38F47-F167-3C42-9D0B-07C8578E5464}"/>
-              </a:ext>
-            </a:extLst>
-          </p:cNvPr>
-          <p:cNvSpPr txBox="1"/>
-          <p:nvPr/>
-        </p:nvSpPr>
-        <p:spPr>
-          <a:xfrm>
-            <a:off x="3907148" y="2822835"/>
-            <a:ext cx="1468672" cy="461665"/>
-          </a:xfrm>
-          <a:prstGeom prst="rect">
-            <a:avLst/>
-          </a:prstGeom>
-          <a:noFill/>
-        </p:spPr>
-        <p:txBody>
-          <a:bodyPr wrap="none" rtlCol="0">
-            <a:spAutoFit/>
-          </a:bodyPr>
-          <a:lstStyle/>
-          <a:p>
-            <a:r>
-              <a:rPr lang="en-NL" sz="2400" dirty="0"/>
-              <a:t>Isosceles</a:t>
-            </a:r>
-          </a:p>
-        </p:txBody>
-      </p:sp>
-      <p:sp>
-        <p:nvSpPr>
-          <p:cNvPr id="11" name="Freeform 10">
-            <a:extLst>
-              <a:ext uri="{FF2B5EF4-FFF2-40B4-BE49-F238E27FC236}">
-                <a16:creationId xmlns:a16="http://schemas.microsoft.com/office/drawing/2014/main" id="{FC99E166-F515-684C-AC18-4F7A94735D5F}"/>
-              </a:ext>
-            </a:extLst>
-          </p:cNvPr>
-          <p:cNvSpPr/>
-          <p:nvPr/>
-        </p:nvSpPr>
-        <p:spPr>
-          <a:xfrm rot="18742393">
-            <a:off x="6140113" y="1796350"/>
-            <a:ext cx="2014779" cy="1430522"/>
-          </a:xfrm>
-          <a:custGeom>
-            <a:avLst/>
-            <a:gdLst>
-              <a:gd name="connsiteX0" fmla="*/ 0 w 2014779"/>
-              <a:gd name="connsiteY0" fmla="*/ 0 h 681926"/>
-              <a:gd name="connsiteX1" fmla="*/ 2014779 w 2014779"/>
-              <a:gd name="connsiteY1" fmla="*/ 681926 h 681926"/>
-              <a:gd name="connsiteX2" fmla="*/ 1828800 w 2014779"/>
-              <a:gd name="connsiteY2" fmla="*/ 170482 h 681926"/>
-              <a:gd name="connsiteX3" fmla="*/ 0 w 2014779"/>
-              <a:gd name="connsiteY3" fmla="*/ 0 h 681926"/>
-            </a:gdLst>
-            <a:ahLst/>
-            <a:cxnLst>
-              <a:cxn ang="0">
-                <a:pos x="connsiteX0" y="connsiteY0"/>
-              </a:cxn>
-              <a:cxn ang="0">
-                <a:pos x="connsiteX1" y="connsiteY1"/>
-              </a:cxn>
-              <a:cxn ang="0">
-                <a:pos x="connsiteX2" y="connsiteY2"/>
-              </a:cxn>
-              <a:cxn ang="0">
-                <a:pos x="connsiteX3" y="connsiteY3"/>
-              </a:cxn>
-            </a:cxnLst>
-            <a:rect l="l" t="t" r="r" b="b"/>
-            <a:pathLst>
-              <a:path w="2014779" h="681926">
-                <a:moveTo>
-                  <a:pt x="0" y="0"/>
-                </a:moveTo>
-                <a:lnTo>
-                  <a:pt x="2014779" y="681926"/>
-                </a:lnTo>
-                <a:lnTo>
-                  <a:pt x="1828800" y="170482"/>
-                </a:lnTo>
-                <a:lnTo>
-                  <a:pt x="0" y="0"/>
-                </a:lnTo>
-                <a:close/>
-              </a:path>
-            </a:pathLst>
-          </a:custGeom>
-        </p:spPr>
-        <p:style>
-          <a:lnRef idx="2">
-            <a:schemeClr val="accent1">
-              <a:shade val="50000"/>
-            </a:schemeClr>
-          </a:lnRef>
-          <a:fillRef idx="1">
-            <a:schemeClr val="accent1"/>
-          </a:fillRef>
-          <a:effectRef idx="0">
-            <a:schemeClr val="accent1"/>
-          </a:effectRef>
-          <a:fontRef idx="minor">
-            <a:schemeClr val="lt1"/>
-          </a:fontRef>
-        </p:style>
-        <p:txBody>
-          <a:bodyPr rtlCol="0" anchor="ctr"/>
-          <a:lstStyle/>
-          <a:p>
-            <a:pPr algn="ctr"/>
-            <a:endParaRPr lang="en-NL"/>
-          </a:p>
-        </p:txBody>
-      </p:sp>
-      <p:sp>
-        <p:nvSpPr>
-          <p:cNvPr id="12" name="TextBox 11">
-            <a:extLst>
-              <a:ext uri="{FF2B5EF4-FFF2-40B4-BE49-F238E27FC236}">
-                <a16:creationId xmlns:a16="http://schemas.microsoft.com/office/drawing/2014/main" id="{49AB0A5D-F12E-444E-8753-FCD137F05DB8}"/>
-              </a:ext>
-            </a:extLst>
-          </p:cNvPr>
-          <p:cNvSpPr txBox="1"/>
-          <p:nvPr/>
-        </p:nvSpPr>
-        <p:spPr>
-          <a:xfrm>
-            <a:off x="6479039" y="2717722"/>
-            <a:ext cx="1298753" cy="461665"/>
-          </a:xfrm>
-          <a:prstGeom prst="rect">
-            <a:avLst/>
-          </a:prstGeom>
-          <a:noFill/>
-        </p:spPr>
-        <p:txBody>
-          <a:bodyPr wrap="none" rtlCol="0">
-            <a:spAutoFit/>
-          </a:bodyPr>
-          <a:lstStyle/>
-          <a:p>
-            <a:r>
-              <a:rPr lang="en-NL" sz="2400" dirty="0"/>
-              <a:t>Scalene</a:t>
-            </a:r>
-          </a:p>
-        </p:txBody>
-      </p:sp>
-    </p:spTree>
-    <p:extLst>
-      <p:ext uri="{BB962C8B-B14F-4D97-AF65-F5344CB8AC3E}">
-        <p14:creationId xmlns:p14="http://schemas.microsoft.com/office/powerpoint/2010/main" val="452893855"/>
-      </p:ext>
-    </p:extLst>
-  </p:cSld>
-  <p:clrMapOvr>
-    <a:masterClrMapping/>
-  </p:clrMapOvr>
-</p:sld>
-</file>
-
-<file path=ppt/slides/slide40.xml><?xml version="1.0" encoding="utf-8"?>
-<p:sld xmlns:a="http://schemas.openxmlformats.org/drawingml/2006/main" xmlns:r="http://schemas.openxmlformats.org/officeDocument/2006/relationships" xmlns:p="http://schemas.openxmlformats.org/presentationml/2006/main">
-  <p:cSld>
-    <p:spTree>
-      <p:nvGrpSpPr>
-        <p:cNvPr id="1" name=""/>
-        <p:cNvGrpSpPr/>
-        <p:nvPr/>
-      </p:nvGrpSpPr>
-      <p:grpSpPr>
-        <a:xfrm>
-          <a:off x="0" y="0"/>
-          <a:ext cx="0" cy="0"/>
-          <a:chOff x="0" y="0"/>
-          <a:chExt cx="0" cy="0"/>
-        </a:xfrm>
-      </p:grpSpPr>
-      <p:sp>
-        <p:nvSpPr>
-          <p:cNvPr id="17410" name="Title 1"/>
-          <p:cNvSpPr>
-            <a:spLocks noGrp="1"/>
-          </p:cNvSpPr>
-          <p:nvPr>
-            <p:ph type="title"/>
-          </p:nvPr>
-        </p:nvSpPr>
-        <p:spPr/>
-        <p:txBody>
-          <a:bodyPr/>
-          <a:lstStyle/>
-          <a:p>
-            <a:pPr eaLnBrk="1" hangingPunct="1"/>
-            <a:r>
-              <a:rPr lang="en-US" dirty="0"/>
-              <a:t>Specifying a “class”</a:t>
-            </a:r>
-            <a:endParaRPr lang="en-US" i="1" dirty="0"/>
-          </a:p>
-        </p:txBody>
-      </p:sp>
-      <p:sp>
-        <p:nvSpPr>
-          <p:cNvPr id="17411" name="Content Placeholder 2"/>
-          <p:cNvSpPr>
-            <a:spLocks noGrp="1"/>
-          </p:cNvSpPr>
-          <p:nvPr>
-            <p:ph idx="1"/>
-          </p:nvPr>
-        </p:nvSpPr>
-        <p:spPr>
-          <a:xfrm>
-            <a:off x="457200" y="1844824"/>
-            <a:ext cx="8229600" cy="4281339"/>
-          </a:xfrm>
-        </p:spPr>
-        <p:txBody>
-          <a:bodyPr/>
-          <a:lstStyle/>
-          <a:p>
-            <a:pPr eaLnBrk="1" hangingPunct="1"/>
-            <a:r>
-              <a:rPr lang="en-US" sz="2800" dirty="0"/>
-              <a:t>Other options, which can be user either as alternatives or in conjunction with pre/post-conditions:</a:t>
-            </a:r>
-          </a:p>
-          <a:p>
-            <a:pPr lvl="1" eaLnBrk="1" hangingPunct="1"/>
-            <a:r>
-              <a:rPr lang="en-US" dirty="0">
-                <a:sym typeface="Symbol" pitchFamily="18" charset="2"/>
-              </a:rPr>
-              <a:t>class invariant</a:t>
-            </a:r>
-          </a:p>
-          <a:p>
-            <a:pPr lvl="1" eaLnBrk="1" hangingPunct="1"/>
-            <a:r>
-              <a:rPr lang="en-US" dirty="0">
-                <a:sym typeface="Symbol" pitchFamily="18" charset="2"/>
-              </a:rPr>
-              <a:t>Abstract Data Type (ADT)</a:t>
-            </a:r>
-          </a:p>
-          <a:p>
-            <a:pPr lvl="1" eaLnBrk="1" hangingPunct="1"/>
-            <a:r>
-              <a:rPr lang="en-US" dirty="0">
-                <a:sym typeface="Symbol" pitchFamily="18" charset="2"/>
-              </a:rPr>
-              <a:t>Finite State Machine (FSM)</a:t>
-            </a:r>
-          </a:p>
-          <a:p>
-            <a:pPr lvl="1" eaLnBrk="1" hangingPunct="1"/>
-            <a:endParaRPr lang="en-US" dirty="0">
-              <a:sym typeface="Symbol" pitchFamily="18" charset="2"/>
-            </a:endParaRPr>
-          </a:p>
-        </p:txBody>
-      </p:sp>
-      <p:sp>
-        <p:nvSpPr>
-          <p:cNvPr id="4" name="Slide Number Placeholder 3"/>
-          <p:cNvSpPr>
-            <a:spLocks noGrp="1"/>
-          </p:cNvSpPr>
-          <p:nvPr>
-            <p:ph type="sldNum" sz="quarter" idx="12"/>
-          </p:nvPr>
-        </p:nvSpPr>
-        <p:spPr/>
-        <p:txBody>
-          <a:bodyPr/>
-          <a:lstStyle/>
-          <a:p>
-            <a:pPr>
-              <a:defRPr/>
-            </a:pPr>
-            <a:fld id="{4D00519D-647D-4135-80EB-ECBDAE25E06C}" type="slidenum">
-              <a:rPr lang="en-US" smtClean="0"/>
-              <a:pPr>
-                <a:defRPr/>
-              </a:pPr>
-              <a:t>40</a:t>
-            </a:fld>
-            <a:endParaRPr lang="en-US"/>
-          </a:p>
-        </p:txBody>
-      </p:sp>
-    </p:spTree>
-  </p:cSld>
-  <p:clrMapOvr>
-    <a:masterClrMapping/>
-  </p:clrMapOvr>
-</p:sld>
-</file>
-
-<file path=ppt/slides/slide41.xml><?xml version="1.0" encoding="utf-8"?>
-<p:sld xmlns:a="http://schemas.openxmlformats.org/drawingml/2006/main" xmlns:r="http://schemas.openxmlformats.org/officeDocument/2006/relationships" xmlns:p="http://schemas.openxmlformats.org/presentationml/2006/main">
-  <p:cSld>
-    <p:spTree>
-      <p:nvGrpSpPr>
-        <p:cNvPr id="1" name=""/>
-        <p:cNvGrpSpPr/>
-        <p:nvPr/>
-      </p:nvGrpSpPr>
-      <p:grpSpPr>
-        <a:xfrm>
-          <a:off x="0" y="0"/>
-          <a:ext cx="0" cy="0"/>
-          <a:chOff x="0" y="0"/>
-          <a:chExt cx="0" cy="0"/>
-        </a:xfrm>
-      </p:grpSpPr>
-      <p:sp>
-        <p:nvSpPr>
-          <p:cNvPr id="18434" name="Title 1"/>
-          <p:cNvSpPr>
-            <a:spLocks noGrp="1"/>
-          </p:cNvSpPr>
-          <p:nvPr>
-            <p:ph type="title"/>
-          </p:nvPr>
-        </p:nvSpPr>
-        <p:spPr/>
-        <p:txBody>
-          <a:bodyPr/>
-          <a:lstStyle/>
-          <a:p>
-            <a:pPr eaLnBrk="1" hangingPunct="1"/>
-            <a:r>
-              <a:rPr lang="en-US"/>
-              <a:t>Specifying with class invariant</a:t>
-            </a:r>
-            <a:endParaRPr lang="en-US" i="1"/>
-          </a:p>
-        </p:txBody>
-      </p:sp>
-      <p:sp>
-        <p:nvSpPr>
-          <p:cNvPr id="18435" name="Content Placeholder 2"/>
-          <p:cNvSpPr>
-            <a:spLocks noGrp="1"/>
-          </p:cNvSpPr>
-          <p:nvPr>
-            <p:ph idx="1"/>
-          </p:nvPr>
-        </p:nvSpPr>
-        <p:spPr>
-          <a:xfrm>
-            <a:off x="457200" y="4132846"/>
-            <a:ext cx="8383960" cy="2193107"/>
-          </a:xfrm>
-        </p:spPr>
-        <p:txBody>
-          <a:bodyPr/>
-          <a:lstStyle/>
-          <a:p>
-            <a:pPr eaLnBrk="1" hangingPunct="1"/>
-            <a:r>
-              <a:rPr lang="en-US" sz="2400" dirty="0"/>
-              <a:t>A class invariant of a class C specifies valid states of instances of C. When an instance is created, it must have a valid state. All operations/methods of C are expected to restore the state of their target instance to a valid state.</a:t>
-            </a:r>
-          </a:p>
-          <a:p>
-            <a:pPr eaLnBrk="1" hangingPunct="1"/>
-            <a:r>
-              <a:rPr lang="en-US" sz="2400" dirty="0"/>
-              <a:t>Example, for Thermometer, </a:t>
-            </a:r>
-            <a:r>
-              <a:rPr lang="en-US" sz="2400" dirty="0">
-                <a:highlight>
-                  <a:srgbClr val="FFFF00"/>
-                </a:highlight>
-              </a:rPr>
-              <a:t>its class inv </a:t>
-            </a:r>
-            <a:r>
-              <a:rPr lang="en-US" sz="2400" dirty="0"/>
-              <a:t>could be:  temperature ≥ -273.15</a:t>
-            </a:r>
-          </a:p>
-        </p:txBody>
-      </p:sp>
-      <p:sp>
-        <p:nvSpPr>
-          <p:cNvPr id="4" name="Slide Number Placeholder 3"/>
-          <p:cNvSpPr>
-            <a:spLocks noGrp="1"/>
-          </p:cNvSpPr>
-          <p:nvPr>
-            <p:ph type="sldNum" sz="quarter" idx="12"/>
-          </p:nvPr>
-        </p:nvSpPr>
-        <p:spPr/>
-        <p:txBody>
-          <a:bodyPr/>
-          <a:lstStyle/>
-          <a:p>
-            <a:pPr>
-              <a:defRPr/>
-            </a:pPr>
-            <a:fld id="{2A57B2AA-917E-49FC-B415-E530F668AFC6}" type="slidenum">
-              <a:rPr lang="en-US" smtClean="0"/>
-              <a:pPr>
-                <a:defRPr/>
-              </a:pPr>
-              <a:t>41</a:t>
-            </a:fld>
-            <a:endParaRPr lang="en-US"/>
-          </a:p>
-        </p:txBody>
-      </p:sp>
-      <p:sp>
-        <p:nvSpPr>
-          <p:cNvPr id="2" name="TextBox 1">
-            <a:extLst>
-              <a:ext uri="{FF2B5EF4-FFF2-40B4-BE49-F238E27FC236}">
-                <a16:creationId xmlns:a16="http://schemas.microsoft.com/office/drawing/2014/main" id="{EC3B59C0-D1CA-6A4A-979D-F37CBD7C7320}"/>
-              </a:ext>
-            </a:extLst>
-          </p:cNvPr>
-          <p:cNvSpPr txBox="1"/>
-          <p:nvPr/>
-        </p:nvSpPr>
-        <p:spPr>
-          <a:xfrm>
-            <a:off x="2177755" y="1621080"/>
-            <a:ext cx="4788490" cy="2308324"/>
-          </a:xfrm>
-          <a:prstGeom prst="rect">
-            <a:avLst/>
-          </a:prstGeom>
-          <a:noFill/>
-          <a:ln>
-            <a:solidFill>
-              <a:schemeClr val="tx1"/>
-            </a:solidFill>
-          </a:ln>
-        </p:spPr>
-        <p:txBody>
-          <a:bodyPr wrap="none" rtlCol="0">
-            <a:spAutoFit/>
-          </a:bodyPr>
-          <a:lstStyle/>
-          <a:p>
-            <a:r>
-              <a:rPr lang="en-US" sz="2400" b="1" dirty="0"/>
-              <a:t>class</a:t>
-            </a:r>
-            <a:r>
-              <a:rPr lang="en-US" sz="2400" dirty="0"/>
-              <a:t> Thermometer {</a:t>
-            </a:r>
-            <a:br>
-              <a:rPr lang="en-US" sz="2400" dirty="0"/>
-            </a:br>
-            <a:r>
-              <a:rPr lang="en-US" sz="2400" dirty="0"/>
-              <a:t>   double temperature // in </a:t>
-            </a:r>
-            <a:r>
-              <a:rPr lang="en-US" sz="2400" dirty="0" err="1"/>
-              <a:t>Celcius</a:t>
-            </a:r>
-            <a:br>
-              <a:rPr lang="en-US" sz="2400" dirty="0"/>
-            </a:br>
-            <a:r>
-              <a:rPr lang="en-US" sz="2400" dirty="0"/>
-              <a:t>   Value()</a:t>
-            </a:r>
-            <a:br>
-              <a:rPr lang="en-US" sz="2400" dirty="0"/>
-            </a:br>
-            <a:r>
-              <a:rPr lang="en-US" sz="2400" dirty="0"/>
-              <a:t>   </a:t>
-            </a:r>
-            <a:r>
-              <a:rPr lang="en-US" sz="2400" dirty="0" err="1"/>
-              <a:t>Incr</a:t>
-            </a:r>
-            <a:r>
-              <a:rPr lang="en-US" sz="2400" dirty="0"/>
-              <a:t>(t)</a:t>
-            </a:r>
-            <a:br>
-              <a:rPr lang="en-US" sz="2400" dirty="0"/>
-            </a:br>
-            <a:r>
-              <a:rPr lang="en-US" sz="2400" dirty="0"/>
-              <a:t>   </a:t>
-            </a:r>
-            <a:r>
-              <a:rPr lang="en-US" sz="2400" dirty="0" err="1"/>
-              <a:t>Decr</a:t>
-            </a:r>
-            <a:r>
-              <a:rPr lang="en-US" sz="2400" dirty="0"/>
-              <a:t>(t)</a:t>
-            </a:r>
-            <a:br>
-              <a:rPr lang="en-US" sz="2400" dirty="0"/>
-            </a:br>
-            <a:r>
-              <a:rPr lang="en-US" sz="2400" dirty="0"/>
-              <a:t>}</a:t>
-            </a:r>
-          </a:p>
-        </p:txBody>
-      </p:sp>
-    </p:spTree>
-  </p:cSld>
-  <p:clrMapOvr>
-    <a:masterClrMapping/>
-  </p:clrMapOvr>
-</p:sld>
-</file>
-
-<file path=ppt/slides/slide42.xml><?xml version="1.0" encoding="utf-8"?>
-<p:sld xmlns:a="http://schemas.openxmlformats.org/drawingml/2006/main" xmlns:r="http://schemas.openxmlformats.org/officeDocument/2006/relationships" xmlns:p="http://schemas.openxmlformats.org/presentationml/2006/main">
-  <p:cSld>
-    <p:spTree>
-      <p:nvGrpSpPr>
-        <p:cNvPr id="1" name=""/>
-        <p:cNvGrpSpPr/>
-        <p:nvPr/>
-      </p:nvGrpSpPr>
-      <p:grpSpPr>
-        <a:xfrm>
-          <a:off x="0" y="0"/>
-          <a:ext cx="0" cy="0"/>
-          <a:chOff x="0" y="0"/>
-          <a:chExt cx="0" cy="0"/>
-        </a:xfrm>
-      </p:grpSpPr>
-      <p:sp>
-        <p:nvSpPr>
-          <p:cNvPr id="5" name="Rounded Rectangle 4">
-            <a:extLst>
-              <a:ext uri="{FF2B5EF4-FFF2-40B4-BE49-F238E27FC236}">
-                <a16:creationId xmlns:a16="http://schemas.microsoft.com/office/drawing/2014/main" id="{DF273161-B41E-644D-97E9-453CC6AE190E}"/>
-              </a:ext>
-            </a:extLst>
-          </p:cNvPr>
-          <p:cNvSpPr/>
-          <p:nvPr/>
-        </p:nvSpPr>
-        <p:spPr>
-          <a:xfrm>
-            <a:off x="457200" y="1923844"/>
-            <a:ext cx="8229600" cy="2585276"/>
-          </a:xfrm>
-          <a:prstGeom prst="roundRect">
-            <a:avLst/>
-          </a:prstGeom>
-          <a:solidFill>
-            <a:srgbClr val="FFC000">
-              <a:alpha val="25000"/>
-            </a:srgbClr>
-          </a:solidFill>
-          <a:ln>
-            <a:solidFill>
-              <a:srgbClr val="FFC000"/>
-            </a:solidFill>
-          </a:ln>
-        </p:spPr>
-        <p:style>
-          <a:lnRef idx="2">
-            <a:schemeClr val="accent1">
-              <a:shade val="50000"/>
-            </a:schemeClr>
-          </a:lnRef>
-          <a:fillRef idx="1">
-            <a:schemeClr val="accent1"/>
-          </a:fillRef>
-          <a:effectRef idx="0">
-            <a:schemeClr val="accent1"/>
-          </a:effectRef>
-          <a:fontRef idx="minor">
-            <a:schemeClr val="lt1"/>
-          </a:fontRef>
-        </p:style>
-        <p:txBody>
-          <a:bodyPr rtlCol="0" anchor="ctr"/>
-          <a:lstStyle/>
-          <a:p>
-            <a:pPr algn="ctr"/>
-            <a:endParaRPr lang="en-US"/>
-          </a:p>
-        </p:txBody>
-      </p:sp>
-      <p:sp>
-        <p:nvSpPr>
-          <p:cNvPr id="20482" name="Title 3"/>
-          <p:cNvSpPr>
-            <a:spLocks noGrp="1"/>
-          </p:cNvSpPr>
-          <p:nvPr>
-            <p:ph type="title"/>
-          </p:nvPr>
-        </p:nvSpPr>
-        <p:spPr/>
-        <p:txBody>
-          <a:bodyPr/>
-          <a:lstStyle/>
-          <a:p>
-            <a:r>
-              <a:rPr lang="en-US"/>
-              <a:t>Specifying a class as an ADT</a:t>
-            </a:r>
-          </a:p>
-        </p:txBody>
-      </p:sp>
-      <p:sp>
-        <p:nvSpPr>
-          <p:cNvPr id="20483" name="Content Placeholder 4"/>
-          <p:cNvSpPr>
-            <a:spLocks noGrp="1"/>
-          </p:cNvSpPr>
-          <p:nvPr>
-            <p:ph idx="1"/>
-          </p:nvPr>
-        </p:nvSpPr>
-        <p:spPr>
-          <a:xfrm>
-            <a:off x="755576" y="2132856"/>
-            <a:ext cx="7704856" cy="3993307"/>
-          </a:xfrm>
-        </p:spPr>
-        <p:txBody>
-          <a:bodyPr/>
-          <a:lstStyle/>
-          <a:p>
-            <a:pPr marL="0" indent="0" algn="just">
-              <a:buNone/>
-            </a:pPr>
-            <a:r>
-              <a:rPr lang="en-US" sz="2800" dirty="0"/>
-              <a:t>An </a:t>
-            </a:r>
-            <a:r>
-              <a:rPr lang="en-US" sz="2800" i="1" u="sng" dirty="0"/>
-              <a:t>Abstract Data Type </a:t>
-            </a:r>
-            <a:r>
-              <a:rPr lang="en-US" sz="2800" dirty="0"/>
-              <a:t>(ADT) is a model of a (stateful) data structure. The data structure is modeled abstractly by only describing a set of </a:t>
-            </a:r>
-            <a:r>
-              <a:rPr lang="en-US" sz="2800" i="1" dirty="0"/>
-              <a:t>operations</a:t>
-            </a:r>
-            <a:r>
-              <a:rPr lang="en-US" sz="2800" dirty="0"/>
-              <a:t> (</a:t>
-            </a:r>
-            <a:r>
-              <a:rPr lang="en-US" sz="2800" dirty="0">
-                <a:solidFill>
-                  <a:srgbClr val="C00000"/>
-                </a:solidFill>
-              </a:rPr>
-              <a:t>without exposing underlying data structure implementing the state</a:t>
-            </a:r>
-            <a:r>
-              <a:rPr lang="en-US" sz="2800" dirty="0"/>
-              <a:t>).</a:t>
-            </a:r>
-          </a:p>
-          <a:p>
-            <a:pPr algn="just"/>
-            <a:endParaRPr lang="en-US" sz="2800" dirty="0"/>
-          </a:p>
-          <a:p>
-            <a:pPr marL="0" indent="0" algn="ctr">
-              <a:buNone/>
-            </a:pPr>
-            <a:r>
-              <a:rPr lang="en-US" sz="2800" dirty="0"/>
-              <a:t>The semantic is described in terms of “logical properties” (also called the ADT’s </a:t>
-            </a:r>
-            <a:r>
-              <a:rPr lang="en-US" sz="2800" i="1" dirty="0"/>
-              <a:t>axioms</a:t>
-            </a:r>
-            <a:r>
-              <a:rPr lang="en-US" sz="2800" dirty="0"/>
-              <a:t>) over those operations. </a:t>
-            </a:r>
-          </a:p>
-          <a:p>
-            <a:pPr algn="just"/>
-            <a:endParaRPr lang="en-US" sz="2800" dirty="0"/>
-          </a:p>
-        </p:txBody>
-      </p:sp>
-      <p:sp>
-        <p:nvSpPr>
-          <p:cNvPr id="3" name="Slide Number Placeholder 2"/>
-          <p:cNvSpPr>
-            <a:spLocks noGrp="1"/>
-          </p:cNvSpPr>
-          <p:nvPr>
-            <p:ph type="sldNum" sz="quarter" idx="12"/>
-          </p:nvPr>
-        </p:nvSpPr>
-        <p:spPr/>
-        <p:txBody>
-          <a:bodyPr/>
-          <a:lstStyle/>
-          <a:p>
-            <a:pPr>
-              <a:defRPr/>
-            </a:pPr>
-            <a:fld id="{5956FD8A-12AF-4F7B-B4D1-C45409423FB7}" type="slidenum">
-              <a:rPr lang="en-US" smtClean="0"/>
-              <a:pPr>
-                <a:defRPr/>
-              </a:pPr>
-              <a:t>42</a:t>
-            </a:fld>
-            <a:endParaRPr lang="en-US"/>
-          </a:p>
-        </p:txBody>
-      </p:sp>
-    </p:spTree>
-  </p:cSld>
-  <p:clrMapOvr>
-    <a:masterClrMapping/>
-  </p:clrMapOvr>
-</p:sld>
-</file>
-
-<file path=ppt/slides/slide43.xml><?xml version="1.0" encoding="utf-8"?>
-<p:sld xmlns:a="http://schemas.openxmlformats.org/drawingml/2006/main" xmlns:r="http://schemas.openxmlformats.org/officeDocument/2006/relationships" xmlns:p="http://schemas.openxmlformats.org/presentationml/2006/main">
-  <p:cSld>
-    <p:spTree>
-      <p:nvGrpSpPr>
-        <p:cNvPr id="1" name=""/>
-        <p:cNvGrpSpPr/>
-        <p:nvPr/>
-      </p:nvGrpSpPr>
-      <p:grpSpPr>
-        <a:xfrm>
-          <a:off x="0" y="0"/>
-          <a:ext cx="0" cy="0"/>
-          <a:chOff x="0" y="0"/>
-          <a:chExt cx="0" cy="0"/>
-        </a:xfrm>
-      </p:grpSpPr>
-      <p:sp>
-        <p:nvSpPr>
-          <p:cNvPr id="9" name="Rounded Rectangle 8">
-            <a:extLst>
-              <a:ext uri="{FF2B5EF4-FFF2-40B4-BE49-F238E27FC236}">
-                <a16:creationId xmlns:a16="http://schemas.microsoft.com/office/drawing/2014/main" id="{C385E2B8-2776-024C-B0FD-3487081A7E1F}"/>
-              </a:ext>
-            </a:extLst>
-          </p:cNvPr>
-          <p:cNvSpPr/>
-          <p:nvPr/>
-        </p:nvSpPr>
-        <p:spPr>
-          <a:xfrm>
-            <a:off x="7020272" y="3676287"/>
-            <a:ext cx="1787860" cy="1008113"/>
-          </a:xfrm>
-          <a:prstGeom prst="roundRect">
-            <a:avLst/>
-          </a:prstGeom>
-          <a:solidFill>
-            <a:srgbClr val="FFC000">
-              <a:alpha val="25000"/>
-            </a:srgbClr>
-          </a:solidFill>
-          <a:ln>
-            <a:solidFill>
-              <a:srgbClr val="FFC000"/>
-            </a:solidFill>
-          </a:ln>
-        </p:spPr>
-        <p:style>
-          <a:lnRef idx="2">
-            <a:schemeClr val="accent1">
-              <a:shade val="50000"/>
-            </a:schemeClr>
-          </a:lnRef>
-          <a:fillRef idx="1">
-            <a:schemeClr val="accent1"/>
-          </a:fillRef>
-          <a:effectRef idx="0">
-            <a:schemeClr val="accent1"/>
-          </a:effectRef>
-          <a:fontRef idx="minor">
-            <a:schemeClr val="lt1"/>
-          </a:fontRef>
-        </p:style>
-        <p:txBody>
-          <a:bodyPr rtlCol="0" anchor="ctr"/>
-          <a:lstStyle/>
-          <a:p>
-            <a:pPr algn="ctr"/>
-            <a:r>
-              <a:rPr lang="en-US" dirty="0">
-                <a:solidFill>
-                  <a:schemeClr val="tx1"/>
-                </a:solidFill>
-              </a:rPr>
-              <a:t>Do these look familiar?</a:t>
-            </a:r>
-          </a:p>
-        </p:txBody>
-      </p:sp>
-      <p:sp>
-        <p:nvSpPr>
-          <p:cNvPr id="21506" name="Title 1"/>
-          <p:cNvSpPr>
-            <a:spLocks noGrp="1"/>
-          </p:cNvSpPr>
-          <p:nvPr>
-            <p:ph type="title"/>
-          </p:nvPr>
-        </p:nvSpPr>
-        <p:spPr/>
-        <p:txBody>
-          <a:bodyPr/>
-          <a:lstStyle/>
-          <a:p>
-            <a:r>
-              <a:rPr lang="en-US" dirty="0"/>
-              <a:t>Example : specifying my </a:t>
-            </a:r>
-            <a:r>
-              <a:rPr lang="en-US" dirty="0" err="1"/>
-              <a:t>ItemStore</a:t>
-            </a:r>
-            <a:endParaRPr lang="en-US" dirty="0"/>
-          </a:p>
-        </p:txBody>
-      </p:sp>
-      <p:sp>
-        <p:nvSpPr>
-          <p:cNvPr id="4" name="Slide Number Placeholder 3"/>
-          <p:cNvSpPr>
-            <a:spLocks noGrp="1"/>
-          </p:cNvSpPr>
-          <p:nvPr>
-            <p:ph type="sldNum" sz="quarter" idx="12"/>
-          </p:nvPr>
-        </p:nvSpPr>
-        <p:spPr/>
-        <p:txBody>
-          <a:bodyPr/>
-          <a:lstStyle/>
-          <a:p>
-            <a:pPr>
-              <a:defRPr/>
-            </a:pPr>
-            <a:fld id="{1098014A-8D35-4A73-A9AC-6AF2C47FFF52}" type="slidenum">
-              <a:rPr lang="en-US" smtClean="0"/>
-              <a:pPr>
-                <a:defRPr/>
-              </a:pPr>
-              <a:t>43</a:t>
-            </a:fld>
-            <a:endParaRPr lang="en-US"/>
-          </a:p>
-        </p:txBody>
-      </p:sp>
-      <p:sp>
-        <p:nvSpPr>
-          <p:cNvPr id="7" name="TextBox 6"/>
-          <p:cNvSpPr txBox="1"/>
-          <p:nvPr/>
-        </p:nvSpPr>
-        <p:spPr>
-          <a:xfrm>
-            <a:off x="457200" y="1675606"/>
-            <a:ext cx="3136500" cy="2246769"/>
-          </a:xfrm>
-          <a:prstGeom prst="rect">
-            <a:avLst/>
-          </a:prstGeom>
-          <a:noFill/>
-          <a:ln>
-            <a:solidFill>
-              <a:schemeClr val="tx1"/>
-            </a:solidFill>
-          </a:ln>
-        </p:spPr>
-        <p:txBody>
-          <a:bodyPr wrap="none">
-            <a:spAutoFit/>
-          </a:bodyPr>
-          <a:lstStyle/>
-          <a:p>
-            <a:pPr>
-              <a:defRPr/>
-            </a:pPr>
-            <a:r>
-              <a:rPr lang="en-US" sz="2800" b="1" dirty="0">
-                <a:latin typeface="+mn-lt"/>
-              </a:rPr>
-              <a:t>class </a:t>
-            </a:r>
-            <a:r>
-              <a:rPr lang="en-US" sz="2800" dirty="0" err="1">
-                <a:latin typeface="+mn-lt"/>
-              </a:rPr>
-              <a:t>ItemStore</a:t>
-            </a:r>
-            <a:r>
-              <a:rPr lang="en-US" sz="2800" dirty="0">
-                <a:latin typeface="+mn-lt"/>
-              </a:rPr>
-              <a:t>&lt;T&gt; {</a:t>
-            </a:r>
-          </a:p>
-          <a:p>
-            <a:pPr>
-              <a:defRPr/>
-            </a:pPr>
-            <a:r>
-              <a:rPr lang="en-US" sz="2800" i="1" dirty="0">
-                <a:latin typeface="+mn-lt"/>
-              </a:rPr>
-              <a:t>    Store</a:t>
-            </a:r>
-            <a:r>
-              <a:rPr lang="en-US" sz="2800" dirty="0">
-                <a:latin typeface="+mn-lt"/>
-              </a:rPr>
-              <a:t>(T  </a:t>
-            </a:r>
-            <a:r>
-              <a:rPr lang="en-US" sz="2800" i="1" dirty="0">
-                <a:latin typeface="+mn-lt"/>
-              </a:rPr>
-              <a:t>x</a:t>
-            </a:r>
-            <a:r>
-              <a:rPr lang="en-US" sz="2800" dirty="0">
-                <a:latin typeface="+mn-lt"/>
-              </a:rPr>
-              <a:t>)</a:t>
-            </a:r>
-          </a:p>
-          <a:p>
-            <a:pPr>
-              <a:defRPr/>
-            </a:pPr>
-            <a:r>
-              <a:rPr lang="en-US" sz="2800" dirty="0">
-                <a:latin typeface="+mn-lt"/>
-              </a:rPr>
-              <a:t>    T   </a:t>
-            </a:r>
-            <a:r>
-              <a:rPr lang="en-US" sz="2800" i="1" dirty="0">
-                <a:latin typeface="+mn-lt"/>
-              </a:rPr>
-              <a:t>Get</a:t>
-            </a:r>
-            <a:r>
-              <a:rPr lang="en-US" sz="2800" dirty="0">
-                <a:latin typeface="+mn-lt"/>
-              </a:rPr>
-              <a:t>()</a:t>
-            </a:r>
-            <a:br>
-              <a:rPr lang="en-US" sz="2800" dirty="0">
-                <a:latin typeface="+mn-lt"/>
-              </a:rPr>
-            </a:br>
-            <a:r>
-              <a:rPr lang="en-US" sz="2800" dirty="0">
-                <a:latin typeface="+mn-lt"/>
-              </a:rPr>
-              <a:t>     int </a:t>
-            </a:r>
-            <a:r>
-              <a:rPr lang="en-US" sz="2800" i="1" dirty="0">
-                <a:latin typeface="+mn-lt"/>
-              </a:rPr>
-              <a:t>Size</a:t>
-            </a:r>
-            <a:r>
-              <a:rPr lang="en-US" sz="2800" dirty="0">
-                <a:latin typeface="+mn-lt"/>
-              </a:rPr>
-              <a:t>()</a:t>
-            </a:r>
-            <a:br>
-              <a:rPr lang="en-US" sz="2800" dirty="0">
-                <a:latin typeface="+mn-lt"/>
-              </a:rPr>
-            </a:br>
-            <a:r>
-              <a:rPr lang="en-US" sz="2800" dirty="0">
-                <a:latin typeface="+mn-lt"/>
-              </a:rPr>
-              <a:t>}</a:t>
-            </a:r>
-          </a:p>
-        </p:txBody>
-      </p:sp>
-      <p:sp>
-        <p:nvSpPr>
-          <p:cNvPr id="8" name="TextBox 7"/>
-          <p:cNvSpPr txBox="1"/>
-          <p:nvPr/>
-        </p:nvSpPr>
-        <p:spPr>
-          <a:xfrm>
-            <a:off x="457200" y="4043819"/>
-            <a:ext cx="8494948" cy="2677656"/>
-          </a:xfrm>
-          <a:prstGeom prst="rect">
-            <a:avLst/>
-          </a:prstGeom>
-          <a:noFill/>
-        </p:spPr>
-        <p:txBody>
-          <a:bodyPr wrap="square">
-            <a:spAutoFit/>
-          </a:bodyPr>
-          <a:lstStyle/>
-          <a:p>
-            <a:pPr>
-              <a:defRPr/>
-            </a:pPr>
-            <a:r>
-              <a:rPr lang="en-US" sz="2800" b="1" dirty="0">
-                <a:latin typeface="+mj-lt"/>
-                <a:ea typeface="Arial" charset="0"/>
-                <a:sym typeface="Symbol"/>
-              </a:rPr>
-              <a:t>Axioms :</a:t>
-            </a:r>
-          </a:p>
-          <a:p>
-            <a:pPr marL="514350" indent="-514350">
-              <a:buFont typeface="+mj-lt"/>
-              <a:buAutoNum type="arabicPeriod"/>
-              <a:defRPr/>
-            </a:pPr>
-            <a:r>
-              <a:rPr lang="en-US" sz="2800" dirty="0">
-                <a:latin typeface="+mj-lt"/>
-                <a:ea typeface="Arial" charset="0"/>
-                <a:sym typeface="Symbol"/>
-              </a:rPr>
-              <a:t>The Size of a new </a:t>
-            </a:r>
-            <a:r>
-              <a:rPr lang="en-US" sz="2800" dirty="0" err="1">
-                <a:latin typeface="+mj-lt"/>
-                <a:ea typeface="Arial" charset="0"/>
-                <a:sym typeface="Symbol"/>
-              </a:rPr>
-              <a:t>ItemStore</a:t>
-            </a:r>
-            <a:r>
-              <a:rPr lang="en-US" sz="2800" dirty="0">
-                <a:latin typeface="+mj-lt"/>
-                <a:ea typeface="Arial" charset="0"/>
-                <a:sym typeface="Symbol"/>
-              </a:rPr>
-              <a:t> is 0.</a:t>
-            </a:r>
-          </a:p>
-          <a:p>
-            <a:pPr marL="514350" indent="-514350">
-              <a:buFont typeface="+mj-lt"/>
-              <a:buAutoNum type="arabicPeriod"/>
-              <a:defRPr/>
-            </a:pPr>
-            <a:r>
-              <a:rPr lang="en-US" sz="2800" dirty="0">
-                <a:latin typeface="+mj-lt"/>
-                <a:ea typeface="Arial" charset="0"/>
-                <a:sym typeface="Symbol"/>
-              </a:rPr>
-              <a:t>After </a:t>
-            </a:r>
-            <a:r>
-              <a:rPr lang="en-US" sz="2800" dirty="0" err="1">
-                <a:latin typeface="+mj-lt"/>
-                <a:ea typeface="Arial" charset="0"/>
-                <a:sym typeface="Symbol"/>
-              </a:rPr>
-              <a:t>s.Store</a:t>
-            </a:r>
-            <a:r>
-              <a:rPr lang="en-US" sz="2800" dirty="0">
-                <a:latin typeface="+mj-lt"/>
-                <a:ea typeface="Arial" charset="0"/>
-                <a:sym typeface="Symbol"/>
-              </a:rPr>
-              <a:t>(x), Size is 1 + the Size before.</a:t>
-            </a:r>
-          </a:p>
-          <a:p>
-            <a:pPr marL="514350" indent="-514350">
-              <a:buFont typeface="+mj-lt"/>
-              <a:buAutoNum type="arabicPeriod"/>
-              <a:defRPr/>
-            </a:pPr>
-            <a:r>
-              <a:rPr lang="en-US" sz="2800" dirty="0">
-                <a:latin typeface="+mj-lt"/>
-                <a:ea typeface="Arial" charset="0"/>
-                <a:sym typeface="Symbol"/>
-              </a:rPr>
-              <a:t>If Size&gt;0, after </a:t>
-            </a:r>
-            <a:r>
-              <a:rPr lang="en-US" sz="2800" dirty="0" err="1">
-                <a:latin typeface="+mj-lt"/>
-                <a:ea typeface="Arial" charset="0"/>
-                <a:sym typeface="Symbol"/>
-              </a:rPr>
-              <a:t>S.Get</a:t>
-            </a:r>
-            <a:r>
-              <a:rPr lang="en-US" sz="2800" dirty="0">
-                <a:latin typeface="+mj-lt"/>
-                <a:ea typeface="Arial" charset="0"/>
-                <a:sym typeface="Symbol"/>
-              </a:rPr>
-              <a:t>(), Size is one less than the Size before.</a:t>
-            </a:r>
-          </a:p>
-          <a:p>
-            <a:pPr marL="514350" indent="-514350">
-              <a:buFont typeface="+mj-lt"/>
-              <a:buAutoNum type="arabicPeriod"/>
-              <a:defRPr/>
-            </a:pPr>
-            <a:r>
-              <a:rPr lang="en-US" sz="2800" dirty="0">
-                <a:latin typeface="+mj-lt"/>
-                <a:ea typeface="Arial" charset="0"/>
-                <a:sym typeface="Symbol"/>
-              </a:rPr>
-              <a:t> After </a:t>
-            </a:r>
-            <a:r>
-              <a:rPr lang="en-US" sz="2800" dirty="0" err="1">
-                <a:latin typeface="+mj-lt"/>
-                <a:ea typeface="Arial" charset="0"/>
-                <a:sym typeface="Symbol"/>
-              </a:rPr>
-              <a:t>S.Store</a:t>
-            </a:r>
-            <a:r>
-              <a:rPr lang="en-US" sz="2800" dirty="0">
-                <a:latin typeface="+mj-lt"/>
-                <a:ea typeface="Arial" charset="0"/>
-                <a:sym typeface="Symbol"/>
-              </a:rPr>
-              <a:t>(x), </a:t>
-            </a:r>
-            <a:r>
-              <a:rPr lang="en-US" sz="2800" dirty="0" err="1">
-                <a:latin typeface="+mj-lt"/>
-                <a:ea typeface="Arial" charset="0"/>
-                <a:sym typeface="Symbol"/>
-              </a:rPr>
-              <a:t>s.Get</a:t>
-            </a:r>
-            <a:r>
-              <a:rPr lang="en-US" sz="2800" dirty="0">
-                <a:latin typeface="+mj-lt"/>
-                <a:ea typeface="Arial" charset="0"/>
-                <a:sym typeface="Symbol"/>
-              </a:rPr>
-              <a:t>() gives x.</a:t>
-            </a:r>
-          </a:p>
-        </p:txBody>
-      </p:sp>
-    </p:spTree>
-    <p:extLst>
-      <p:ext uri="{BB962C8B-B14F-4D97-AF65-F5344CB8AC3E}">
-        <p14:creationId xmlns:p14="http://schemas.microsoft.com/office/powerpoint/2010/main" val="2902104223"/>
-      </p:ext>
-    </p:extLst>
-  </p:cSld>
-  <p:clrMapOvr>
-    <a:masterClrMapping/>
-  </p:clrMapOvr>
-</p:sld>
-</file>
-
-<file path=ppt/slides/slide44.xml><?xml version="1.0" encoding="utf-8"?>
-<p:sld xmlns:a="http://schemas.openxmlformats.org/drawingml/2006/main" xmlns:r="http://schemas.openxmlformats.org/officeDocument/2006/relationships" xmlns:p="http://schemas.openxmlformats.org/presentationml/2006/main">
-  <p:cSld>
-    <p:spTree>
-      <p:nvGrpSpPr>
-        <p:cNvPr id="1" name=""/>
-        <p:cNvGrpSpPr/>
-        <p:nvPr/>
-      </p:nvGrpSpPr>
-      <p:grpSpPr>
-        <a:xfrm>
-          <a:off x="0" y="0"/>
-          <a:ext cx="0" cy="0"/>
-          <a:chOff x="0" y="0"/>
-          <a:chExt cx="0" cy="0"/>
-        </a:xfrm>
-      </p:grpSpPr>
-      <p:sp>
-        <p:nvSpPr>
-          <p:cNvPr id="22530" name="Title 1"/>
-          <p:cNvSpPr>
-            <a:spLocks noGrp="1"/>
-          </p:cNvSpPr>
-          <p:nvPr>
-            <p:ph type="title"/>
-          </p:nvPr>
-        </p:nvSpPr>
-        <p:spPr>
-          <a:xfrm>
-            <a:off x="457200" y="274638"/>
-            <a:ext cx="8229600" cy="850106"/>
-          </a:xfrm>
-        </p:spPr>
-        <p:txBody>
-          <a:bodyPr/>
-          <a:lstStyle/>
-          <a:p>
-            <a:r>
-              <a:rPr lang="en-US" sz="4000" dirty="0"/>
-              <a:t>Testing ADT</a:t>
-            </a:r>
-          </a:p>
-        </p:txBody>
-      </p:sp>
-      <p:sp>
-        <p:nvSpPr>
-          <p:cNvPr id="3" name="Slide Number Placeholder 2"/>
-          <p:cNvSpPr>
-            <a:spLocks noGrp="1"/>
-          </p:cNvSpPr>
-          <p:nvPr>
-            <p:ph type="sldNum" sz="quarter" idx="12"/>
-          </p:nvPr>
-        </p:nvSpPr>
-        <p:spPr/>
-        <p:txBody>
-          <a:bodyPr/>
-          <a:lstStyle/>
-          <a:p>
-            <a:pPr>
-              <a:defRPr/>
-            </a:pPr>
-            <a:fld id="{A396C40A-8632-4362-9BC0-7DC1524AF9EA}" type="slidenum">
-              <a:rPr lang="en-US" smtClean="0"/>
-              <a:pPr>
-                <a:defRPr/>
-              </a:pPr>
-              <a:t>44</a:t>
-            </a:fld>
-            <a:endParaRPr lang="en-US"/>
-          </a:p>
-        </p:txBody>
-      </p:sp>
-      <p:sp>
-        <p:nvSpPr>
-          <p:cNvPr id="4" name="TextBox 3"/>
-          <p:cNvSpPr txBox="1"/>
-          <p:nvPr/>
-        </p:nvSpPr>
-        <p:spPr>
-          <a:xfrm>
-            <a:off x="1089956" y="4035781"/>
-            <a:ext cx="7478488" cy="1077218"/>
-          </a:xfrm>
-          <a:prstGeom prst="rect">
-            <a:avLst/>
-          </a:prstGeom>
-        </p:spPr>
-        <p:style>
-          <a:lnRef idx="2">
-            <a:schemeClr val="dk1"/>
-          </a:lnRef>
-          <a:fillRef idx="1">
-            <a:schemeClr val="lt1"/>
-          </a:fillRef>
-          <a:effectRef idx="0">
-            <a:schemeClr val="dk1"/>
-          </a:effectRef>
-          <a:fontRef idx="minor">
-            <a:schemeClr val="dk1"/>
-          </a:fontRef>
-        </p:style>
-        <p:txBody>
-          <a:bodyPr wrap="square">
-            <a:spAutoFit/>
-          </a:bodyPr>
-          <a:lstStyle/>
-          <a:p>
-            <a:pPr marL="0" lvl="1">
-              <a:defRPr/>
-            </a:pPr>
-            <a:r>
-              <a:rPr lang="en-US" sz="3200" dirty="0">
-                <a:highlight>
-                  <a:srgbClr val="FFFF00"/>
-                </a:highlight>
-                <a:sym typeface="Symbol"/>
-              </a:rPr>
-              <a:t>Axiom4</a:t>
-            </a:r>
-            <a:r>
-              <a:rPr lang="en-US" sz="3200" dirty="0">
-                <a:sym typeface="Symbol"/>
-              </a:rPr>
-              <a:t>(</a:t>
-            </a:r>
-            <a:r>
-              <a:rPr lang="en-US" sz="3200" dirty="0" err="1">
-                <a:sym typeface="Symbol"/>
-              </a:rPr>
-              <a:t>ItemStore</a:t>
-            </a:r>
-            <a:r>
-              <a:rPr lang="en-US" sz="3200" dirty="0">
-                <a:sym typeface="Symbol"/>
-              </a:rPr>
-              <a:t> s, T x) {</a:t>
-            </a:r>
-            <a:br>
-              <a:rPr lang="en-US" sz="3200" dirty="0">
-                <a:sym typeface="Symbol"/>
-              </a:rPr>
-            </a:br>
-            <a:r>
-              <a:rPr lang="en-US" sz="3200" dirty="0">
-                <a:sym typeface="Symbol"/>
-              </a:rPr>
-              <a:t>   </a:t>
-            </a:r>
-            <a:r>
-              <a:rPr lang="en-US" sz="3200" dirty="0" err="1">
-                <a:sym typeface="Symbol"/>
-              </a:rPr>
-              <a:t>s.Store</a:t>
-            </a:r>
-            <a:r>
-              <a:rPr lang="en-US" sz="3200" dirty="0">
-                <a:sym typeface="Symbol"/>
-              </a:rPr>
-              <a:t>(x) ;  </a:t>
-            </a:r>
-            <a:r>
-              <a:rPr lang="en-US" sz="3200" dirty="0" err="1">
-                <a:highlight>
-                  <a:srgbClr val="FFFF00"/>
-                </a:highlight>
-                <a:sym typeface="Symbol"/>
-              </a:rPr>
-              <a:t>assertEqual</a:t>
-            </a:r>
-            <a:r>
-              <a:rPr lang="en-US" sz="3200" dirty="0">
-                <a:sym typeface="Symbol"/>
-              </a:rPr>
-              <a:t>(x, </a:t>
-            </a:r>
-            <a:r>
-              <a:rPr lang="en-US" sz="3200" dirty="0" err="1">
-                <a:sym typeface="Symbol"/>
-              </a:rPr>
-              <a:t>s.Get</a:t>
-            </a:r>
-            <a:r>
-              <a:rPr lang="en-US" sz="3200" dirty="0">
-                <a:sym typeface="Symbol"/>
-              </a:rPr>
-              <a:t>()) ; }</a:t>
-            </a:r>
-          </a:p>
-        </p:txBody>
-      </p:sp>
-      <p:sp>
-        <p:nvSpPr>
-          <p:cNvPr id="6" name="TextBox 5"/>
-          <p:cNvSpPr txBox="1"/>
-          <p:nvPr/>
-        </p:nvSpPr>
-        <p:spPr>
-          <a:xfrm>
-            <a:off x="575556" y="3281729"/>
-            <a:ext cx="7992888" cy="3662541"/>
-          </a:xfrm>
-          <a:prstGeom prst="rect">
-            <a:avLst/>
-          </a:prstGeom>
-          <a:noFill/>
-        </p:spPr>
-        <p:txBody>
-          <a:bodyPr wrap="square">
-            <a:spAutoFit/>
-          </a:bodyPr>
-          <a:lstStyle/>
-          <a:p>
-            <a:pPr>
-              <a:defRPr/>
-            </a:pPr>
-            <a:r>
-              <a:rPr lang="en-US" sz="2800" dirty="0"/>
-              <a:t>For example, to test Ax-4:</a:t>
-            </a:r>
-            <a:br>
-              <a:rPr lang="en-US" sz="2800" dirty="0"/>
-            </a:br>
-            <a:endParaRPr lang="en-US" sz="2800" dirty="0"/>
-          </a:p>
-          <a:p>
-            <a:pPr>
-              <a:defRPr/>
-            </a:pPr>
-            <a:endParaRPr lang="en-US" sz="2800" dirty="0"/>
-          </a:p>
-          <a:p>
-            <a:pPr>
-              <a:defRPr/>
-            </a:pPr>
-            <a:r>
-              <a:rPr lang="en-US" sz="2800" dirty="0"/>
-              <a:t> </a:t>
-            </a:r>
-          </a:p>
-          <a:p>
-            <a:pPr>
-              <a:defRPr/>
-            </a:pPr>
-            <a:endParaRPr lang="en-US" sz="2400" dirty="0"/>
-          </a:p>
-          <a:p>
-            <a:pPr>
-              <a:defRPr/>
-            </a:pPr>
-            <a:r>
-              <a:rPr lang="en-US" sz="2400" dirty="0"/>
-              <a:t>We can imagine e.g. these test cases :</a:t>
-            </a:r>
-          </a:p>
-          <a:p>
-            <a:pPr marL="800100" lvl="1" indent="-342900">
-              <a:buFont typeface="+mj-lt"/>
-              <a:buAutoNum type="arabicPeriod"/>
-              <a:defRPr/>
-            </a:pPr>
-            <a:r>
-              <a:rPr lang="en-US" sz="2400" dirty="0"/>
-              <a:t>  empty </a:t>
-            </a:r>
-            <a:r>
-              <a:rPr lang="en-US" sz="2400" i="1" dirty="0"/>
-              <a:t>s</a:t>
-            </a:r>
-          </a:p>
-          <a:p>
-            <a:pPr marL="800100" lvl="1" indent="-342900">
-              <a:buFont typeface="+mj-lt"/>
-              <a:buAutoNum type="arabicPeriod"/>
-              <a:defRPr/>
-            </a:pPr>
-            <a:r>
-              <a:rPr lang="en-US" sz="2400" dirty="0"/>
-              <a:t>  a non-empty </a:t>
-            </a:r>
-            <a:r>
-              <a:rPr lang="en-US" sz="2400" i="1" dirty="0"/>
-              <a:t>s </a:t>
-            </a:r>
-            <a:r>
-              <a:rPr lang="en-US" sz="2400" dirty="0"/>
-              <a:t>that does not contain </a:t>
-            </a:r>
-            <a:r>
-              <a:rPr lang="en-US" sz="2400" i="1" dirty="0"/>
-              <a:t>x</a:t>
-            </a:r>
-          </a:p>
-          <a:p>
-            <a:pPr marL="800100" lvl="1" indent="-342900">
-              <a:buFont typeface="+mj-lt"/>
-              <a:buAutoNum type="arabicPeriod"/>
-              <a:defRPr/>
-            </a:pPr>
-            <a:r>
-              <a:rPr lang="en-US" sz="2400" dirty="0"/>
-              <a:t>  an </a:t>
-            </a:r>
-            <a:r>
-              <a:rPr lang="en-US" sz="2400" i="1" dirty="0"/>
-              <a:t>s</a:t>
-            </a:r>
-            <a:r>
-              <a:rPr lang="en-US" sz="2400" dirty="0"/>
-              <a:t> that already contains x</a:t>
-            </a:r>
-          </a:p>
-        </p:txBody>
-      </p:sp>
-      <p:sp>
-        <p:nvSpPr>
-          <p:cNvPr id="2" name="TextBox 1">
-            <a:extLst>
-              <a:ext uri="{FF2B5EF4-FFF2-40B4-BE49-F238E27FC236}">
-                <a16:creationId xmlns:a16="http://schemas.microsoft.com/office/drawing/2014/main" id="{0B62E271-A623-3946-96AA-067473559C09}"/>
-              </a:ext>
-            </a:extLst>
-          </p:cNvPr>
-          <p:cNvSpPr txBox="1"/>
-          <p:nvPr/>
-        </p:nvSpPr>
-        <p:spPr>
-          <a:xfrm>
-            <a:off x="945940" y="1608430"/>
-            <a:ext cx="7488832" cy="1384995"/>
-          </a:xfrm>
-          <a:prstGeom prst="rect">
-            <a:avLst/>
-          </a:prstGeom>
-          <a:noFill/>
-        </p:spPr>
-        <p:txBody>
-          <a:bodyPr wrap="square" rtlCol="0">
-            <a:spAutoFit/>
-          </a:bodyPr>
-          <a:lstStyle/>
-          <a:p>
-            <a:pPr algn="ctr"/>
-            <a:r>
-              <a:rPr lang="en-US" sz="2800" dirty="0"/>
-              <a:t>Testing an ADT amounts to verifying each of its axioms, each can be formulated as a </a:t>
-            </a:r>
-            <a:r>
-              <a:rPr lang="en-US" sz="2800" b="1" dirty="0"/>
-              <a:t>parameterized test.</a:t>
-            </a:r>
-          </a:p>
-        </p:txBody>
-      </p:sp>
-      <p:sp>
-        <p:nvSpPr>
-          <p:cNvPr id="7" name="Rounded Rectangle 6">
-            <a:extLst>
-              <a:ext uri="{FF2B5EF4-FFF2-40B4-BE49-F238E27FC236}">
-                <a16:creationId xmlns:a16="http://schemas.microsoft.com/office/drawing/2014/main" id="{08133769-1F89-9448-B585-CEE8C2C4FF70}"/>
-              </a:ext>
-            </a:extLst>
-          </p:cNvPr>
-          <p:cNvSpPr/>
-          <p:nvPr/>
-        </p:nvSpPr>
-        <p:spPr>
-          <a:xfrm>
-            <a:off x="457200" y="1482380"/>
-            <a:ext cx="8229600" cy="1615851"/>
-          </a:xfrm>
-          <a:prstGeom prst="roundRect">
-            <a:avLst/>
-          </a:prstGeom>
-          <a:solidFill>
-            <a:srgbClr val="FFC000">
-              <a:alpha val="25000"/>
-            </a:srgbClr>
-          </a:solidFill>
-          <a:ln>
-            <a:solidFill>
-              <a:srgbClr val="FFC000"/>
-            </a:solidFill>
-          </a:ln>
-        </p:spPr>
-        <p:style>
-          <a:lnRef idx="2">
-            <a:schemeClr val="accent1">
-              <a:shade val="50000"/>
-            </a:schemeClr>
-          </a:lnRef>
-          <a:fillRef idx="1">
-            <a:schemeClr val="accent1"/>
-          </a:fillRef>
-          <a:effectRef idx="0">
-            <a:schemeClr val="accent1"/>
-          </a:effectRef>
-          <a:fontRef idx="minor">
-            <a:schemeClr val="lt1"/>
-          </a:fontRef>
-        </p:style>
-        <p:txBody>
-          <a:bodyPr rtlCol="0" anchor="ctr"/>
-          <a:lstStyle/>
-          <a:p>
-            <a:pPr algn="ctr"/>
-            <a:endParaRPr lang="en-US" dirty="0"/>
-          </a:p>
-        </p:txBody>
-      </p:sp>
-    </p:spTree>
-  </p:cSld>
-  <p:clrMapOvr>
-    <a:masterClrMapping/>
-  </p:clrMapOvr>
-</p:sld>
-</file>
-
 <file path=ppt/slides/slide5.xml><?xml version="1.0" encoding="utf-8"?>
 <p:sld xmlns:a="http://schemas.openxmlformats.org/drawingml/2006/main" xmlns:r="http://schemas.openxmlformats.org/officeDocument/2006/relationships" xmlns:p="http://schemas.openxmlformats.org/presentationml/2006/main">
   <p:cSld>
@@ -20905,7 +22128,7 @@
         </p:nvSpPr>
         <p:spPr>
           <a:xfrm>
-            <a:off x="1259632" y="1791840"/>
+            <a:off x="1259632" y="2598328"/>
             <a:ext cx="6624736" cy="2577331"/>
           </a:xfrm>
           <a:prstGeom prst="roundRect">
@@ -20977,48 +22200,6 @@
       </p:sp>
       <p:sp>
         <p:nvSpPr>
-          <p:cNvPr id="3" name="Content Placeholder 2">
-            <a:extLst>
-              <a:ext uri="{FF2B5EF4-FFF2-40B4-BE49-F238E27FC236}">
-                <a16:creationId xmlns:a16="http://schemas.microsoft.com/office/drawing/2014/main" id="{D4AB62F0-75DF-514C-A08A-FFDC8F5887B8}"/>
-              </a:ext>
-            </a:extLst>
-          </p:cNvPr>
-          <p:cNvSpPr>
-            <a:spLocks noGrp="1"/>
-          </p:cNvSpPr>
-          <p:nvPr>
-            <p:ph idx="1"/>
-          </p:nvPr>
-        </p:nvSpPr>
-        <p:spPr>
-          <a:xfrm>
-            <a:off x="457200" y="5013176"/>
-            <a:ext cx="8229600" cy="365125"/>
-          </a:xfrm>
-        </p:spPr>
-        <p:txBody>
-          <a:bodyPr/>
-          <a:lstStyle/>
-          <a:p>
-            <a:pPr marL="0" indent="0" algn="ctr">
-              <a:buNone/>
-            </a:pPr>
-            <a:r>
-              <a:rPr lang="en-US" sz="2400" dirty="0"/>
-              <a:t>Question: how shall we define what a “test” is?</a:t>
-            </a:r>
-          </a:p>
-          <a:p>
-            <a:pPr marL="0" indent="0" algn="ctr">
-              <a:buNone/>
-            </a:pPr>
-            <a:endParaRPr lang="en-US" sz="2400" dirty="0"/>
-          </a:p>
-        </p:txBody>
-      </p:sp>
-      <p:sp>
-        <p:nvSpPr>
           <p:cNvPr id="4" name="Slide Number Placeholder 3">
             <a:extLst>
               <a:ext uri="{FF2B5EF4-FFF2-40B4-BE49-F238E27FC236}">
@@ -21066,7 +22247,7 @@
         </p:nvSpPr>
         <p:spPr>
           <a:xfrm>
-            <a:off x="1547664" y="2060848"/>
+            <a:off x="1547664" y="2867336"/>
             <a:ext cx="6624736" cy="2308324"/>
           </a:xfrm>
           <a:prstGeom prst="rect">
@@ -21155,6 +22336,267 @@
           </a:p>
         </p:txBody>
       </p:sp>
+      <p:sp>
+        <p:nvSpPr>
+          <p:cNvPr id="9" name="TextBox 8">
+            <a:extLst>
+              <a:ext uri="{FF2B5EF4-FFF2-40B4-BE49-F238E27FC236}">
+                <a16:creationId xmlns:a16="http://schemas.microsoft.com/office/drawing/2014/main" id="{AAD46331-572B-EC5C-6527-C924479B65EB}"/>
+              </a:ext>
+            </a:extLst>
+          </p:cNvPr>
+          <p:cNvSpPr txBox="1"/>
+          <p:nvPr/>
+        </p:nvSpPr>
+        <p:spPr>
+          <a:xfrm>
+            <a:off x="2627784" y="1722769"/>
+            <a:ext cx="3159839" cy="400110"/>
+          </a:xfrm>
+          <a:prstGeom prst="rect">
+            <a:avLst/>
+          </a:prstGeom>
+          <a:solidFill>
+            <a:srgbClr val="92D050"/>
+          </a:solidFill>
+          <a:ln>
+            <a:solidFill>
+              <a:schemeClr val="tx1"/>
+            </a:solidFill>
+          </a:ln>
+        </p:spPr>
+        <p:txBody>
+          <a:bodyPr wrap="none" rtlCol="0">
+            <a:spAutoFit/>
+          </a:bodyPr>
+          <a:lstStyle/>
+          <a:p>
+            <a:r>
+              <a:rPr lang="en-NL" sz="2000" i="1" dirty="0"/>
+              <a:t>invoke program under test</a:t>
+            </a:r>
+          </a:p>
+        </p:txBody>
+      </p:sp>
+      <p:sp>
+        <p:nvSpPr>
+          <p:cNvPr id="12" name="TextBox 11">
+            <a:extLst>
+              <a:ext uri="{FF2B5EF4-FFF2-40B4-BE49-F238E27FC236}">
+                <a16:creationId xmlns:a16="http://schemas.microsoft.com/office/drawing/2014/main" id="{A24A45B6-55BE-6221-914E-DB1FF155645E}"/>
+              </a:ext>
+            </a:extLst>
+          </p:cNvPr>
+          <p:cNvSpPr txBox="1"/>
+          <p:nvPr/>
+        </p:nvSpPr>
+        <p:spPr>
+          <a:xfrm>
+            <a:off x="7449793" y="1761985"/>
+            <a:ext cx="869149" cy="400110"/>
+          </a:xfrm>
+          <a:prstGeom prst="rect">
+            <a:avLst/>
+          </a:prstGeom>
+          <a:solidFill>
+            <a:srgbClr val="92D050"/>
+          </a:solidFill>
+          <a:ln>
+            <a:solidFill>
+              <a:schemeClr val="tx1"/>
+            </a:solidFill>
+          </a:ln>
+        </p:spPr>
+        <p:txBody>
+          <a:bodyPr wrap="none" rtlCol="0">
+            <a:spAutoFit/>
+          </a:bodyPr>
+          <a:lstStyle/>
+          <a:p>
+            <a:r>
+              <a:rPr lang="en-NL" sz="2000" i="1" dirty="0"/>
+              <a:t>inputs</a:t>
+            </a:r>
+          </a:p>
+        </p:txBody>
+      </p:sp>
+      <p:sp>
+        <p:nvSpPr>
+          <p:cNvPr id="13" name="TextBox 12">
+            <a:extLst>
+              <a:ext uri="{FF2B5EF4-FFF2-40B4-BE49-F238E27FC236}">
+                <a16:creationId xmlns:a16="http://schemas.microsoft.com/office/drawing/2014/main" id="{0CA46869-31B2-A4AA-60EC-58C50D5895E5}"/>
+              </a:ext>
+            </a:extLst>
+          </p:cNvPr>
+          <p:cNvSpPr txBox="1"/>
+          <p:nvPr/>
+        </p:nvSpPr>
+        <p:spPr>
+          <a:xfrm>
+            <a:off x="3663387" y="5637459"/>
+            <a:ext cx="4248472" cy="1015663"/>
+          </a:xfrm>
+          <a:prstGeom prst="rect">
+            <a:avLst/>
+          </a:prstGeom>
+          <a:solidFill>
+            <a:srgbClr val="92D050"/>
+          </a:solidFill>
+          <a:ln>
+            <a:solidFill>
+              <a:schemeClr val="tx1"/>
+            </a:solidFill>
+          </a:ln>
+        </p:spPr>
+        <p:txBody>
+          <a:bodyPr wrap="square" rtlCol="0">
+            <a:spAutoFit/>
+          </a:bodyPr>
+          <a:lstStyle/>
+          <a:p>
+            <a:pPr marL="342900" indent="-342900">
+              <a:buFont typeface="Arial" panose="020B0604020202020204" pitchFamily="34" charset="0"/>
+              <a:buChar char="•"/>
+            </a:pPr>
+            <a:r>
+              <a:rPr lang="en-NL" sz="2000" i="1" dirty="0"/>
+              <a:t>asserting expectation on the program output or state</a:t>
+            </a:r>
+          </a:p>
+          <a:p>
+            <a:pPr marL="342900" indent="-342900">
+              <a:buFont typeface="Arial" panose="020B0604020202020204" pitchFamily="34" charset="0"/>
+              <a:buChar char="•"/>
+            </a:pPr>
+            <a:r>
+              <a:rPr lang="en-NL" sz="2000" i="1" dirty="0"/>
+              <a:t>also called “test oracle”</a:t>
+            </a:r>
+          </a:p>
+        </p:txBody>
+      </p:sp>
+      <p:cxnSp>
+        <p:nvCxnSpPr>
+          <p:cNvPr id="15" name="Straight Arrow Connector 14">
+            <a:extLst>
+              <a:ext uri="{FF2B5EF4-FFF2-40B4-BE49-F238E27FC236}">
+                <a16:creationId xmlns:a16="http://schemas.microsoft.com/office/drawing/2014/main" id="{E06E5E68-B0C4-CD5C-C841-EAC031C1630C}"/>
+              </a:ext>
+            </a:extLst>
+          </p:cNvPr>
+          <p:cNvCxnSpPr/>
+          <p:nvPr/>
+        </p:nvCxnSpPr>
+        <p:spPr>
+          <a:xfrm flipH="1" flipV="1">
+            <a:off x="5508104" y="2205392"/>
+            <a:ext cx="144016" cy="1007584"/>
+          </a:xfrm>
+          <a:prstGeom prst="straightConnector1">
+            <a:avLst/>
+          </a:prstGeom>
+          <a:ln w="28575">
+            <a:tailEnd type="triangle"/>
+          </a:ln>
+        </p:spPr>
+        <p:style>
+          <a:lnRef idx="1">
+            <a:schemeClr val="accent1"/>
+          </a:lnRef>
+          <a:fillRef idx="0">
+            <a:schemeClr val="accent1"/>
+          </a:fillRef>
+          <a:effectRef idx="0">
+            <a:schemeClr val="accent1"/>
+          </a:effectRef>
+          <a:fontRef idx="minor">
+            <a:schemeClr val="tx1"/>
+          </a:fontRef>
+        </p:style>
+      </p:cxnSp>
+      <p:cxnSp>
+        <p:nvCxnSpPr>
+          <p:cNvPr id="16" name="Straight Arrow Connector 15">
+            <a:extLst>
+              <a:ext uri="{FF2B5EF4-FFF2-40B4-BE49-F238E27FC236}">
+                <a16:creationId xmlns:a16="http://schemas.microsoft.com/office/drawing/2014/main" id="{B76A4B3B-1304-7BE9-2AFC-F7F2916ABFC4}"/>
+              </a:ext>
+            </a:extLst>
+          </p:cNvPr>
+          <p:cNvCxnSpPr>
+            <a:cxnSpLocks/>
+          </p:cNvCxnSpPr>
+          <p:nvPr/>
+        </p:nvCxnSpPr>
+        <p:spPr>
+          <a:xfrm flipV="1">
+            <a:off x="6876256" y="2229040"/>
+            <a:ext cx="936104" cy="1089786"/>
+          </a:xfrm>
+          <a:prstGeom prst="straightConnector1">
+            <a:avLst/>
+          </a:prstGeom>
+          <a:ln w="28575">
+            <a:tailEnd type="triangle"/>
+          </a:ln>
+        </p:spPr>
+        <p:style>
+          <a:lnRef idx="1">
+            <a:schemeClr val="accent1"/>
+          </a:lnRef>
+          <a:fillRef idx="0">
+            <a:schemeClr val="accent1"/>
+          </a:fillRef>
+          <a:effectRef idx="0">
+            <a:schemeClr val="accent1"/>
+          </a:effectRef>
+          <a:fontRef idx="minor">
+            <a:schemeClr val="tx1"/>
+          </a:fontRef>
+        </p:style>
+      </p:cxnSp>
+      <p:cxnSp>
+        <p:nvCxnSpPr>
+          <p:cNvPr id="19" name="Straight Arrow Connector 18">
+            <a:extLst>
+              <a:ext uri="{FF2B5EF4-FFF2-40B4-BE49-F238E27FC236}">
+                <a16:creationId xmlns:a16="http://schemas.microsoft.com/office/drawing/2014/main" id="{ED7384E4-5FE7-43F3-6BBE-D39EC498240F}"/>
+              </a:ext>
+            </a:extLst>
+          </p:cNvPr>
+          <p:cNvCxnSpPr>
+            <a:cxnSpLocks/>
+          </p:cNvCxnSpPr>
+          <p:nvPr/>
+        </p:nvCxnSpPr>
+        <p:spPr>
+          <a:xfrm>
+            <a:off x="5004048" y="4499516"/>
+            <a:ext cx="0" cy="1045431"/>
+          </a:xfrm>
+          <a:prstGeom prst="straightConnector1">
+            <a:avLst/>
+          </a:prstGeom>
+          <a:ln w="28575">
+            <a:tailEnd type="triangle"/>
+          </a:ln>
+        </p:spPr>
+        <p:style>
+          <a:lnRef idx="1">
+            <a:schemeClr val="accent1"/>
+          </a:lnRef>
+          <a:fillRef idx="0">
+            <a:schemeClr val="accent1"/>
+          </a:fillRef>
+          <a:effectRef idx="0">
+            <a:schemeClr val="accent1"/>
+          </a:effectRef>
+          <a:fontRef idx="minor">
+            <a:schemeClr val="tx1"/>
+          </a:fontRef>
+        </p:style>
+      </p:cxnSp>
     </p:spTree>
     <p:extLst>
       <p:ext uri="{BB962C8B-B14F-4D97-AF65-F5344CB8AC3E}">
@@ -21165,6 +22607,221 @@
   <p:clrMapOvr>
     <a:masterClrMapping/>
   </p:clrMapOvr>
+  <p:timing>
+    <p:tnLst>
+      <p:par>
+        <p:cTn id="1" dur="indefinite" restart="never" nodeType="tmRoot">
+          <p:childTnLst>
+            <p:seq concurrent="1" nextAc="seek">
+              <p:cTn id="2" dur="indefinite" nodeType="mainSeq">
+                <p:childTnLst>
+                  <p:par>
+                    <p:cTn id="3" fill="hold">
+                      <p:stCondLst>
+                        <p:cond delay="indefinite"/>
+                      </p:stCondLst>
+                      <p:childTnLst>
+                        <p:par>
+                          <p:cTn id="4" fill="hold">
+                            <p:stCondLst>
+                              <p:cond delay="0"/>
+                            </p:stCondLst>
+                            <p:childTnLst>
+                              <p:par>
+                                <p:cTn id="5" presetID="1" presetClass="entr" presetSubtype="0" fill="hold" nodeType="clickEffect">
+                                  <p:stCondLst>
+                                    <p:cond delay="0"/>
+                                  </p:stCondLst>
+                                  <p:childTnLst>
+                                    <p:set>
+                                      <p:cBhvr>
+                                        <p:cTn id="6" dur="1" fill="hold">
+                                          <p:stCondLst>
+                                            <p:cond delay="0"/>
+                                          </p:stCondLst>
+                                        </p:cTn>
+                                        <p:tgtEl>
+                                          <p:spTgt spid="15"/>
+                                        </p:tgtEl>
+                                        <p:attrNameLst>
+                                          <p:attrName>style.visibility</p:attrName>
+                                        </p:attrNameLst>
+                                      </p:cBhvr>
+                                      <p:to>
+                                        <p:strVal val="visible"/>
+                                      </p:to>
+                                    </p:set>
+                                  </p:childTnLst>
+                                </p:cTn>
+                              </p:par>
+                              <p:par>
+                                <p:cTn id="7" presetID="1" presetClass="entr" presetSubtype="0" fill="hold" grpId="0" nodeType="withEffect">
+                                  <p:stCondLst>
+                                    <p:cond delay="0"/>
+                                  </p:stCondLst>
+                                  <p:childTnLst>
+                                    <p:set>
+                                      <p:cBhvr>
+                                        <p:cTn id="8" dur="1" fill="hold">
+                                          <p:stCondLst>
+                                            <p:cond delay="0"/>
+                                          </p:stCondLst>
+                                        </p:cTn>
+                                        <p:tgtEl>
+                                          <p:spTgt spid="9"/>
+                                        </p:tgtEl>
+                                        <p:attrNameLst>
+                                          <p:attrName>style.visibility</p:attrName>
+                                        </p:attrNameLst>
+                                      </p:cBhvr>
+                                      <p:to>
+                                        <p:strVal val="visible"/>
+                                      </p:to>
+                                    </p:set>
+                                  </p:childTnLst>
+                                </p:cTn>
+                              </p:par>
+                              <p:par>
+                                <p:cTn id="9" presetID="1" presetClass="entr" presetSubtype="0" fill="hold" nodeType="withEffect">
+                                  <p:stCondLst>
+                                    <p:cond delay="0"/>
+                                  </p:stCondLst>
+                                  <p:childTnLst>
+                                    <p:set>
+                                      <p:cBhvr>
+                                        <p:cTn id="10" dur="1" fill="hold">
+                                          <p:stCondLst>
+                                            <p:cond delay="0"/>
+                                          </p:stCondLst>
+                                        </p:cTn>
+                                        <p:tgtEl>
+                                          <p:spTgt spid="16"/>
+                                        </p:tgtEl>
+                                        <p:attrNameLst>
+                                          <p:attrName>style.visibility</p:attrName>
+                                        </p:attrNameLst>
+                                      </p:cBhvr>
+                                      <p:to>
+                                        <p:strVal val="visible"/>
+                                      </p:to>
+                                    </p:set>
+                                  </p:childTnLst>
+                                </p:cTn>
+                              </p:par>
+                              <p:par>
+                                <p:cTn id="11" presetID="1" presetClass="entr" presetSubtype="0" fill="hold" grpId="0" nodeType="withEffect">
+                                  <p:stCondLst>
+                                    <p:cond delay="0"/>
+                                  </p:stCondLst>
+                                  <p:childTnLst>
+                                    <p:set>
+                                      <p:cBhvr>
+                                        <p:cTn id="12" dur="1" fill="hold">
+                                          <p:stCondLst>
+                                            <p:cond delay="0"/>
+                                          </p:stCondLst>
+                                        </p:cTn>
+                                        <p:tgtEl>
+                                          <p:spTgt spid="12"/>
+                                        </p:tgtEl>
+                                        <p:attrNameLst>
+                                          <p:attrName>style.visibility</p:attrName>
+                                        </p:attrNameLst>
+                                      </p:cBhvr>
+                                      <p:to>
+                                        <p:strVal val="visible"/>
+                                      </p:to>
+                                    </p:set>
+                                  </p:childTnLst>
+                                </p:cTn>
+                              </p:par>
+                              <p:par>
+                                <p:cTn id="13" presetID="1" presetClass="entr" presetSubtype="0" fill="hold" grpId="0" nodeType="withEffect">
+                                  <p:stCondLst>
+                                    <p:cond delay="0"/>
+                                  </p:stCondLst>
+                                  <p:childTnLst>
+                                    <p:set>
+                                      <p:cBhvr>
+                                        <p:cTn id="14" dur="1" fill="hold">
+                                          <p:stCondLst>
+                                            <p:cond delay="0"/>
+                                          </p:stCondLst>
+                                        </p:cTn>
+                                        <p:tgtEl>
+                                          <p:spTgt spid="13"/>
+                                        </p:tgtEl>
+                                        <p:attrNameLst>
+                                          <p:attrName>style.visibility</p:attrName>
+                                        </p:attrNameLst>
+                                      </p:cBhvr>
+                                      <p:to>
+                                        <p:strVal val="visible"/>
+                                      </p:to>
+                                    </p:set>
+                                  </p:childTnLst>
+                                </p:cTn>
+                              </p:par>
+                              <p:par>
+                                <p:cTn id="15" presetID="1" presetClass="entr" presetSubtype="0" fill="hold" nodeType="withEffect">
+                                  <p:stCondLst>
+                                    <p:cond delay="0"/>
+                                  </p:stCondLst>
+                                  <p:childTnLst>
+                                    <p:set>
+                                      <p:cBhvr>
+                                        <p:cTn id="16" dur="1" fill="hold">
+                                          <p:stCondLst>
+                                            <p:cond delay="0"/>
+                                          </p:stCondLst>
+                                        </p:cTn>
+                                        <p:tgtEl>
+                                          <p:spTgt spid="19"/>
+                                        </p:tgtEl>
+                                        <p:attrNameLst>
+                                          <p:attrName>style.visibility</p:attrName>
+                                        </p:attrNameLst>
+                                      </p:cBhvr>
+                                      <p:to>
+                                        <p:strVal val="visible"/>
+                                      </p:to>
+                                    </p:set>
+                                  </p:childTnLst>
+                                </p:cTn>
+                              </p:par>
+                            </p:childTnLst>
+                          </p:cTn>
+                        </p:par>
+                      </p:childTnLst>
+                    </p:cTn>
+                  </p:par>
+                </p:childTnLst>
+              </p:cTn>
+              <p:prevCondLst>
+                <p:cond evt="onPrev" delay="0">
+                  <p:tgtEl>
+                    <p:sldTgt/>
+                  </p:tgtEl>
+                </p:cond>
+              </p:prevCondLst>
+              <p:nextCondLst>
+                <p:cond evt="onNext" delay="0">
+                  <p:tgtEl>
+                    <p:sldTgt/>
+                  </p:tgtEl>
+                </p:cond>
+              </p:nextCondLst>
+            </p:seq>
+          </p:childTnLst>
+        </p:cTn>
+      </p:par>
+    </p:tnLst>
+    <p:bldLst>
+      <p:bldP spid="9" grpId="0" animBg="1"/>
+      <p:bldP spid="12" grpId="0" animBg="1"/>
+      <p:bldP spid="13" grpId="0" animBg="1"/>
+    </p:bldLst>
+  </p:timing>
 </p:sld>
 </file>
 
@@ -21220,7 +22877,7 @@
         </p:nvSpPr>
         <p:spPr>
           <a:xfrm>
-            <a:off x="457200" y="3068960"/>
+            <a:off x="457200" y="3305761"/>
             <a:ext cx="8229600" cy="3057203"/>
           </a:xfrm>
         </p:spPr>
@@ -21246,27 +22903,6 @@
             <a:r>
               <a:rPr lang="en-US" sz="2400" dirty="0"/>
               <a:t>) for a program P(x) specifies an input for P(x) and the output it expects. </a:t>
-            </a:r>
-          </a:p>
-          <a:p>
-            <a:pPr eaLnBrk="1" hangingPunct="1"/>
-            <a:r>
-              <a:rPr lang="en-US" sz="2400" dirty="0"/>
-              <a:t>Note: the formulation of the ”expectation” part is also called </a:t>
-            </a:r>
-            <a:r>
-              <a:rPr lang="en-US" sz="2400" i="1" dirty="0">
-                <a:solidFill>
-                  <a:schemeClr val="accent1">
-                    <a:lumMod val="50000"/>
-                  </a:schemeClr>
-                </a:solidFill>
-              </a:rPr>
-              <a:t>oracle</a:t>
-            </a:r>
-            <a:r>
-              <a:rPr lang="en-US" sz="2400" dirty="0"/>
-              <a:t>.</a:t>
             </a:r>
           </a:p>
           <a:p>
@@ -21336,12 +22972,14 @@
         <p:spPr>
           <a:xfrm>
             <a:off x="457200" y="2043244"/>
-            <a:ext cx="8229600" cy="400110"/>
+            <a:ext cx="8229600" cy="1015663"/>
           </a:xfrm>
           <a:prstGeom prst="rect">
             <a:avLst/>
           </a:prstGeom>
-          <a:noFill/>
+          <a:solidFill>
+            <a:srgbClr val="FFDE75"/>
+          </a:solidFill>
           <a:ln>
             <a:solidFill>
               <a:schemeClr val="accent6"/>
@@ -21355,6 +22993,9 @@
           <a:lstStyle/>
           <a:p>
             <a:pPr algn="ctr"/>
+            <a:br>
+              <a:rPr lang="en-US" sz="2000" dirty="0"/>
+            </a:br>
             <a:r>
               <a:rPr lang="en-US" sz="2000" dirty="0"/>
               <a:t>Test1() {  ty = </a:t>
@@ -21383,6 +23024,10 @@
               <a:rPr lang="en-US" sz="2000" dirty="0"/>
               <a:t>) }</a:t>
             </a:r>
+          </a:p>
+          <a:p>
+            <a:pPr algn="ctr"/>
+            <a:endParaRPr lang="en-US" sz="2000" dirty="0"/>
           </a:p>
         </p:txBody>
       </p:sp>
@@ -21701,7 +23346,7 @@
             <a:pPr eaLnBrk="1" hangingPunct="1"/>
             <a:r>
               <a:rPr lang="en-US" sz="3200" dirty="0"/>
-              <a:t>Typical V-model testing approach</a:t>
+              <a:t>Multi-level testing</a:t>
             </a:r>
           </a:p>
         </p:txBody>
@@ -21903,49 +23548,6 @@
             <a:r>
               <a:rPr lang="en-US" sz="1200" i="1" dirty="0"/>
               <a:t>By developers</a:t>
-            </a:r>
-          </a:p>
-        </p:txBody>
-      </p:sp>
-      <p:sp>
-        <p:nvSpPr>
-          <p:cNvPr id="4106" name="TextBox 9"/>
-          <p:cNvSpPr txBox="1">
-            <a:spLocks noChangeArrowheads="1"/>
-          </p:cNvSpPr>
-          <p:nvPr/>
-        </p:nvSpPr>
-        <p:spPr bwMode="auto">
-          <a:xfrm>
-            <a:off x="2342821" y="6001067"/>
-            <a:ext cx="4343500" cy="738664"/>
-          </a:xfrm>
-          <a:prstGeom prst="rect">
-            <a:avLst/>
-          </a:prstGeom>
-          <a:noFill/>
-          <a:ln w="9525">
-            <a:noFill/>
-            <a:miter lim="800000"/>
-            <a:headEnd/>
-            <a:tailEnd/>
-          </a:ln>
-        </p:spPr>
-        <p:txBody>
-          <a:bodyPr wrap="square">
-            <a:spAutoFit/>
-          </a:bodyPr>
-          <a:lstStyle/>
-          <a:p>
-            <a:r>
-              <a:rPr lang="en-US" sz="1400" dirty="0"/>
-              <a:t>Ch. 7 provides you more background on “practical aspect”, e.g. concrete work out of the V-model, outlines of “test plan” </a:t>
-            </a:r>
-            <a:r>
-              <a:rPr lang="en-US" sz="1400" dirty="0">
-                <a:sym typeface="Wingdings" pitchFamily="2" charset="2"/>
-              </a:rPr>
-              <a:t> read the chapter yourself! </a:t>
             </a:r>
           </a:p>
         </p:txBody>
@@ -22569,6 +24171,42 @@
             <a:r>
               <a:rPr lang="en-US" sz="1200" dirty="0"/>
               <a:t>Simplified version of AO Fig. 1.2.</a:t>
+            </a:r>
+          </a:p>
+        </p:txBody>
+      </p:sp>
+      <p:sp>
+        <p:nvSpPr>
+          <p:cNvPr id="3" name="TextBox 2">
+            <a:extLst>
+              <a:ext uri="{FF2B5EF4-FFF2-40B4-BE49-F238E27FC236}">
+                <a16:creationId xmlns:a16="http://schemas.microsoft.com/office/drawing/2014/main" id="{E6435614-9377-753B-E932-681D2177B61B}"/>
+              </a:ext>
+            </a:extLst>
+          </p:cNvPr>
+          <p:cNvSpPr txBox="1"/>
+          <p:nvPr/>
+        </p:nvSpPr>
+        <p:spPr>
+          <a:xfrm>
+            <a:off x="899592" y="5775828"/>
+            <a:ext cx="7571184" cy="646331"/>
+          </a:xfrm>
+          <a:prstGeom prst="rect">
+            <a:avLst/>
+          </a:prstGeom>
+          <a:noFill/>
+        </p:spPr>
+        <p:txBody>
+          <a:bodyPr wrap="square" rtlCol="0">
+            <a:spAutoFit/>
+          </a:bodyPr>
+          <a:lstStyle/>
+          <a:p>
+            <a:pPr algn="ctr"/>
+            <a:r>
+              <a:rPr lang="en-NL" dirty="0"/>
+              <a:t>The diagram above is often called the V-model of muti-level testing. In practice people do testing in multi level. </a:t>
             </a:r>
           </a:p>
         </p:txBody>

--- a/slides/ut.pptx
+++ b/slides/ut.pptx
@@ -310,7 +310,7 @@
               <a:pPr>
                 <a:defRPr/>
               </a:pPr>
-              <a:t>10-04-2026</a:t>
+              <a:t>16-04-2026</a:t>
             </a:fld>
             <a:endParaRPr lang="en-US"/>
           </a:p>
@@ -3580,7 +3580,7 @@
               <a:pPr>
                 <a:defRPr/>
               </a:pPr>
-              <a:t>10-04-2026</a:t>
+              <a:t>16-04-2026</a:t>
             </a:fld>
             <a:endParaRPr lang="en-US"/>
           </a:p>
@@ -3770,7 +3770,7 @@
               <a:pPr>
                 <a:defRPr/>
               </a:pPr>
-              <a:t>10-04-2026</a:t>
+              <a:t>16-04-2026</a:t>
             </a:fld>
             <a:endParaRPr lang="en-US"/>
           </a:p>
@@ -3970,7 +3970,7 @@
               <a:pPr>
                 <a:defRPr/>
               </a:pPr>
-              <a:t>10-04-2026</a:t>
+              <a:t>16-04-2026</a:t>
             </a:fld>
             <a:endParaRPr lang="en-US"/>
           </a:p>
@@ -4166,7 +4166,7 @@
               <a:pPr>
                 <a:defRPr/>
               </a:pPr>
-              <a:t>10-04-2026</a:t>
+              <a:t>16-04-2026</a:t>
             </a:fld>
             <a:endParaRPr lang="en-US"/>
           </a:p>
@@ -4433,7 +4433,7 @@
               <a:pPr>
                 <a:defRPr/>
               </a:pPr>
-              <a:t>10-04-2026</a:t>
+              <a:t>16-04-2026</a:t>
             </a:fld>
             <a:endParaRPr lang="en-US"/>
           </a:p>
@@ -4740,7 +4740,7 @@
               <a:pPr>
                 <a:defRPr/>
               </a:pPr>
-              <a:t>10-04-2026</a:t>
+              <a:t>16-04-2026</a:t>
             </a:fld>
             <a:endParaRPr lang="en-US"/>
           </a:p>
@@ -5181,7 +5181,7 @@
               <a:pPr>
                 <a:defRPr/>
               </a:pPr>
-              <a:t>10-04-2026</a:t>
+              <a:t>16-04-2026</a:t>
             </a:fld>
             <a:endParaRPr lang="en-US"/>
           </a:p>
@@ -5326,7 +5326,7 @@
               <a:pPr>
                 <a:defRPr/>
               </a:pPr>
-              <a:t>10-04-2026</a:t>
+              <a:t>16-04-2026</a:t>
             </a:fld>
             <a:endParaRPr lang="en-US"/>
           </a:p>
@@ -5443,7 +5443,7 @@
               <a:pPr>
                 <a:defRPr/>
               </a:pPr>
-              <a:t>10-04-2026</a:t>
+              <a:t>16-04-2026</a:t>
             </a:fld>
             <a:endParaRPr lang="en-US"/>
           </a:p>
@@ -5740,7 +5740,7 @@
               <a:pPr>
                 <a:defRPr/>
               </a:pPr>
-              <a:t>10-04-2026</a:t>
+              <a:t>16-04-2026</a:t>
             </a:fld>
             <a:endParaRPr lang="en-US"/>
           </a:p>
@@ -6020,7 +6020,7 @@
               <a:pPr>
                 <a:defRPr/>
               </a:pPr>
-              <a:t>10-04-2026</a:t>
+              <a:t>16-04-2026</a:t>
             </a:fld>
             <a:endParaRPr lang="en-US"/>
           </a:p>
@@ -6276,7 +6276,7 @@
               <a:pPr>
                 <a:defRPr/>
               </a:pPr>
-              <a:t>10-04-2026</a:t>
+              <a:t>16-04-2026</a:t>
             </a:fld>
             <a:endParaRPr lang="en-US"/>
           </a:p>
@@ -18442,7 +18442,7 @@
         <p:spPr>
           <a:xfrm>
             <a:off x="457200" y="4043819"/>
-            <a:ext cx="8494948" cy="2677656"/>
+            <a:ext cx="8494948" cy="2308324"/>
           </a:xfrm>
           <a:prstGeom prst="rect">
             <a:avLst/>
@@ -18459,7 +18459,7 @@
               <a:defRPr/>
             </a:pPr>
             <a:r>
-              <a:rPr lang="en-US" sz="2800" b="1" dirty="0">
+              <a:rPr lang="en-US" sz="2400" b="1" dirty="0">
                 <a:latin typeface="+mj-lt"/>
                 <a:ea typeface="Arial" charset="0"/>
                 <a:sym typeface="Symbol"/>
@@ -18474,7 +18474,7 @@
               <a:defRPr/>
             </a:pPr>
             <a:r>
-              <a:rPr lang="en-US" sz="2800" dirty="0">
+              <a:rPr lang="en-US" sz="2400" dirty="0">
                 <a:latin typeface="+mj-lt"/>
                 <a:ea typeface="Arial" charset="0"/>
                 <a:sym typeface="Symbol"/>
@@ -18482,7 +18482,7 @@
               <a:t>The Size of a new </a:t>
             </a:r>
             <a:r>
-              <a:rPr lang="en-US" sz="2800" dirty="0" err="1">
+              <a:rPr lang="en-US" sz="2400" dirty="0" err="1">
                 <a:latin typeface="+mj-lt"/>
                 <a:ea typeface="Arial" charset="0"/>
                 <a:sym typeface="Symbol"/>
@@ -18490,7 +18490,7 @@
               <a:t>ItemStore</a:t>
             </a:r>
             <a:r>
-              <a:rPr lang="en-US" sz="2800" dirty="0">
+              <a:rPr lang="en-US" sz="2400" dirty="0">
                 <a:latin typeface="+mj-lt"/>
                 <a:ea typeface="Arial" charset="0"/>
                 <a:sym typeface="Symbol"/>
@@ -18505,7 +18505,7 @@
               <a:defRPr/>
             </a:pPr>
             <a:r>
-              <a:rPr lang="en-US" sz="2800" dirty="0">
+              <a:rPr lang="en-US" sz="2400" dirty="0">
                 <a:latin typeface="+mj-lt"/>
                 <a:ea typeface="Arial" charset="0"/>
                 <a:sym typeface="Symbol"/>
@@ -18520,7 +18520,7 @@
               <a:defRPr/>
             </a:pPr>
             <a:r>
-              <a:rPr lang="en-US" sz="2800" dirty="0">
+              <a:rPr lang="en-US" sz="2400" dirty="0">
                 <a:latin typeface="+mj-lt"/>
                 <a:ea typeface="Arial" charset="0"/>
                 <a:sym typeface="Symbol"/>
@@ -18535,12 +18535,44 @@
               <a:defRPr/>
             </a:pPr>
             <a:r>
-              <a:rPr lang="en-US" sz="2800" dirty="0">
+              <a:rPr lang="en-US" sz="2400" dirty="0">
                 <a:latin typeface="+mj-lt"/>
                 <a:ea typeface="Arial" charset="0"/>
                 <a:sym typeface="Symbol"/>
               </a:rPr>
-              <a:t>After Store(x), followed by n-times Store(.) and Get(), in any order, Get() gives x.</a:t>
+              <a:t>After Store(x), followed by n-times Store(.) and Get(), such that k-</a:t>
+            </a:r>
+            <a:r>
+              <a:rPr lang="en-US" sz="2400" dirty="0" err="1">
+                <a:latin typeface="+mj-lt"/>
+                <a:ea typeface="Arial" charset="0"/>
+                <a:sym typeface="Symbol"/>
+              </a:rPr>
+              <a:t>th</a:t>
+            </a:r>
+            <a:r>
+              <a:rPr lang="en-US" sz="2400" dirty="0">
+                <a:latin typeface="+mj-lt"/>
+                <a:ea typeface="Arial" charset="0"/>
+                <a:sym typeface="Symbol"/>
+              </a:rPr>
+              <a:t> Get is </a:t>
+            </a:r>
+            <a:r>
+              <a:rPr lang="en-US" sz="2400" dirty="0" err="1">
+                <a:latin typeface="+mj-lt"/>
+                <a:ea typeface="Arial" charset="0"/>
+                <a:sym typeface="Symbol"/>
+              </a:rPr>
+              <a:t>preceeded</a:t>
+            </a:r>
+            <a:r>
+              <a:rPr lang="en-US" sz="2400" dirty="0">
+                <a:latin typeface="+mj-lt"/>
+                <a:ea typeface="Arial" charset="0"/>
+                <a:sym typeface="Symbol"/>
+              </a:rPr>
+              <a:t> by at least k-times Store, Get() gives x.</a:t>
             </a:r>
           </a:p>
         </p:txBody>
@@ -18717,7 +18749,7 @@
         </p:nvSpPr>
         <p:spPr>
           <a:xfrm>
-            <a:off x="863588" y="2204864"/>
+            <a:off x="1115616" y="2204864"/>
             <a:ext cx="7704856" cy="830997"/>
           </a:xfrm>
           <a:prstGeom prst="rect">
@@ -18772,7 +18804,7 @@
               <a:rPr lang="en-US" sz="2400" dirty="0">
                 <a:sym typeface="Symbol"/>
               </a:rPr>
-              <a:t> s, T x) {</a:t>
+              <a:t> s, T x, T y) {</a:t>
             </a:r>
             <a:br>
               <a:rPr lang="en-US" sz="2400" dirty="0">
@@ -18807,7 +18839,7 @@
               <a:rPr lang="en-US" sz="2400" dirty="0">
                 <a:sym typeface="Symbol"/>
               </a:rPr>
-              <a:t>(null) ; </a:t>
+              <a:t>(y) ; </a:t>
             </a:r>
             <a:r>
               <a:rPr lang="en-US" sz="2400" dirty="0" err="1">

--- a/slides/ut.pptx
+++ b/slides/ut.pptx
@@ -5,7 +5,7 @@
     <p:sldMasterId id="2147483708" r:id="rId1"/>
   </p:sldMasterIdLst>
   <p:notesMasterIdLst>
-    <p:notesMasterId r:id="rId48"/>
+    <p:notesMasterId r:id="rId49"/>
   </p:notesMasterIdLst>
   <p:sldIdLst>
     <p:sldId id="256" r:id="rId2"/>
@@ -34,26 +34,27 @@
     <p:sldId id="338" r:id="rId25"/>
     <p:sldId id="342" r:id="rId26"/>
     <p:sldId id="313" r:id="rId27"/>
-    <p:sldId id="314" r:id="rId28"/>
-    <p:sldId id="340" r:id="rId29"/>
-    <p:sldId id="341" r:id="rId30"/>
-    <p:sldId id="315" r:id="rId31"/>
-    <p:sldId id="316" r:id="rId32"/>
-    <p:sldId id="317" r:id="rId33"/>
-    <p:sldId id="318" r:id="rId34"/>
-    <p:sldId id="324" r:id="rId35"/>
-    <p:sldId id="269" r:id="rId36"/>
-    <p:sldId id="305" r:id="rId37"/>
-    <p:sldId id="274" r:id="rId38"/>
-    <p:sldId id="343" r:id="rId39"/>
-    <p:sldId id="344" r:id="rId40"/>
-    <p:sldId id="321" r:id="rId41"/>
-    <p:sldId id="306" r:id="rId42"/>
-    <p:sldId id="307" r:id="rId43"/>
-    <p:sldId id="272" r:id="rId44"/>
-    <p:sldId id="334" r:id="rId45"/>
-    <p:sldId id="335" r:id="rId46"/>
-    <p:sldId id="333" r:id="rId47"/>
+    <p:sldId id="345" r:id="rId28"/>
+    <p:sldId id="314" r:id="rId29"/>
+    <p:sldId id="340" r:id="rId30"/>
+    <p:sldId id="341" r:id="rId31"/>
+    <p:sldId id="315" r:id="rId32"/>
+    <p:sldId id="316" r:id="rId33"/>
+    <p:sldId id="317" r:id="rId34"/>
+    <p:sldId id="318" r:id="rId35"/>
+    <p:sldId id="324" r:id="rId36"/>
+    <p:sldId id="269" r:id="rId37"/>
+    <p:sldId id="305" r:id="rId38"/>
+    <p:sldId id="274" r:id="rId39"/>
+    <p:sldId id="343" r:id="rId40"/>
+    <p:sldId id="344" r:id="rId41"/>
+    <p:sldId id="321" r:id="rId42"/>
+    <p:sldId id="306" r:id="rId43"/>
+    <p:sldId id="307" r:id="rId44"/>
+    <p:sldId id="272" r:id="rId45"/>
+    <p:sldId id="334" r:id="rId46"/>
+    <p:sldId id="335" r:id="rId47"/>
+    <p:sldId id="333" r:id="rId48"/>
   </p:sldIdLst>
   <p:sldSz cx="9144000" cy="6858000" type="screen4x3"/>
   <p:notesSz cx="6858000" cy="9144000"/>
@@ -310,7 +311,7 @@
               <a:pPr>
                 <a:defRPr/>
               </a:pPr>
-              <a:t>16-04-2026</a:t>
+              <a:t>20-04-2026</a:t>
             </a:fld>
             <a:endParaRPr lang="en-US"/>
           </a:p>
@@ -771,7 +772,7 @@
           <a:bodyPr/>
           <a:lstStyle/>
           <a:p>
-            <a:endParaRPr lang="en-US" dirty="0"/>
+            <a:endParaRPr lang="en-NL" dirty="0"/>
           </a:p>
         </p:txBody>
       </p:sp>
@@ -782,7 +783,7 @@
             <a:spLocks noGrp="1"/>
           </p:cNvSpPr>
           <p:nvPr>
-            <p:ph type="sldNum" sz="quarter" idx="10"/>
+            <p:ph type="sldNum" sz="quarter" idx="5"/>
           </p:nvPr>
         </p:nvSpPr>
         <p:spPr/>
@@ -798,7 +799,7 @@
               <a:pPr>
                 <a:defRPr/>
               </a:pPr>
-              <a:t>33</a:t>
+              <a:t>32</a:t>
             </a:fld>
             <a:endParaRPr lang="en-US"/>
           </a:p>
@@ -807,7 +808,7 @@
     </p:spTree>
     <p:extLst>
       <p:ext uri="{BB962C8B-B14F-4D97-AF65-F5344CB8AC3E}">
-        <p14:creationId xmlns:p14="http://schemas.microsoft.com/office/powerpoint/2010/main" val="1375514086"/>
+        <p14:creationId xmlns:p14="http://schemas.microsoft.com/office/powerpoint/2010/main" val="1863108249"/>
       </p:ext>
     </p:extLst>
   </p:cSld>
@@ -861,7 +862,7 @@
           <a:bodyPr/>
           <a:lstStyle/>
           <a:p>
-            <a:endParaRPr lang="en-NL" dirty="0"/>
+            <a:endParaRPr lang="en-US" dirty="0"/>
           </a:p>
         </p:txBody>
       </p:sp>
@@ -872,7 +873,7 @@
             <a:spLocks noGrp="1"/>
           </p:cNvSpPr>
           <p:nvPr>
-            <p:ph type="sldNum" sz="quarter" idx="5"/>
+            <p:ph type="sldNum" sz="quarter" idx="10"/>
           </p:nvPr>
         </p:nvSpPr>
         <p:spPr/>
@@ -888,7 +889,7 @@
               <a:pPr>
                 <a:defRPr/>
               </a:pPr>
-              <a:t>36</a:t>
+              <a:t>34</a:t>
             </a:fld>
             <a:endParaRPr lang="en-US"/>
           </a:p>
@@ -897,7 +898,7 @@
     </p:spTree>
     <p:extLst>
       <p:ext uri="{BB962C8B-B14F-4D97-AF65-F5344CB8AC3E}">
-        <p14:creationId xmlns:p14="http://schemas.microsoft.com/office/powerpoint/2010/main" val="3120005148"/>
+        <p14:creationId xmlns:p14="http://schemas.microsoft.com/office/powerpoint/2010/main" val="1375514086"/>
       </p:ext>
     </p:extLst>
   </p:cSld>
@@ -987,7 +988,7 @@
     </p:spTree>
     <p:extLst>
       <p:ext uri="{BB962C8B-B14F-4D97-AF65-F5344CB8AC3E}">
-        <p14:creationId xmlns:p14="http://schemas.microsoft.com/office/powerpoint/2010/main" val="468100708"/>
+        <p14:creationId xmlns:p14="http://schemas.microsoft.com/office/powerpoint/2010/main" val="3120005148"/>
       </p:ext>
     </p:extLst>
   </p:cSld>
@@ -1068,7 +1069,7 @@
               <a:pPr>
                 <a:defRPr/>
               </a:pPr>
-              <a:t>39</a:t>
+              <a:t>38</a:t>
             </a:fld>
             <a:endParaRPr lang="en-US"/>
           </a:p>
@@ -1077,7 +1078,7 @@
     </p:spTree>
     <p:extLst>
       <p:ext uri="{BB962C8B-B14F-4D97-AF65-F5344CB8AC3E}">
-        <p14:creationId xmlns:p14="http://schemas.microsoft.com/office/powerpoint/2010/main" val="3726015562"/>
+        <p14:creationId xmlns:p14="http://schemas.microsoft.com/office/powerpoint/2010/main" val="468100708"/>
       </p:ext>
     </p:extLst>
   </p:cSld>
@@ -1131,7 +1132,7 @@
           <a:bodyPr/>
           <a:lstStyle/>
           <a:p>
-            <a:endParaRPr lang="en-US" dirty="0"/>
+            <a:endParaRPr lang="en-NL" dirty="0"/>
           </a:p>
         </p:txBody>
       </p:sp>
@@ -1142,7 +1143,7 @@
             <a:spLocks noGrp="1"/>
           </p:cNvSpPr>
           <p:nvPr>
-            <p:ph type="sldNum" sz="quarter" idx="10"/>
+            <p:ph type="sldNum" sz="quarter" idx="5"/>
           </p:nvPr>
         </p:nvSpPr>
         <p:spPr/>
@@ -1167,7 +1168,7 @@
     </p:spTree>
     <p:extLst>
       <p:ext uri="{BB962C8B-B14F-4D97-AF65-F5344CB8AC3E}">
-        <p14:creationId xmlns:p14="http://schemas.microsoft.com/office/powerpoint/2010/main" val="640978486"/>
+        <p14:creationId xmlns:p14="http://schemas.microsoft.com/office/powerpoint/2010/main" val="3726015562"/>
       </p:ext>
     </p:extLst>
   </p:cSld>
@@ -1221,30 +1222,7 @@
           <a:bodyPr/>
           <a:lstStyle/>
           <a:p>
-            <a:pPr marL="0" marR="0" lvl="0" indent="0" algn="l" defTabSz="914400" rtl="0" eaLnBrk="0" fontAlgn="base" latinLnBrk="0" hangingPunct="0">
-              <a:lnSpc>
-                <a:spcPct val="100000"/>
-              </a:lnSpc>
-              <a:spcBef>
-                <a:spcPct val="30000"/>
-              </a:spcBef>
-              <a:spcAft>
-                <a:spcPct val="0"/>
-              </a:spcAft>
-              <a:buClrTx/>
-              <a:buSzTx/>
-              <a:buFontTx/>
-              <a:buNone/>
-              <a:tabLst/>
-              <a:defRPr/>
-            </a:pPr>
-            <a:r>
-              <a:rPr lang="en-US" dirty="0"/>
-              <a:t>In the literature, testing a program by exploiting relations of multiple methods/operations like in the example above is also called “metamorphic testing”</a:t>
-            </a:r>
-          </a:p>
-          <a:p>
-            <a:endParaRPr lang="en-NL" dirty="0"/>
+            <a:endParaRPr lang="en-US" dirty="0"/>
           </a:p>
         </p:txBody>
       </p:sp>
@@ -1255,7 +1233,7 @@
             <a:spLocks noGrp="1"/>
           </p:cNvSpPr>
           <p:nvPr>
-            <p:ph type="sldNum" sz="quarter" idx="5"/>
+            <p:ph type="sldNum" sz="quarter" idx="10"/>
           </p:nvPr>
         </p:nvSpPr>
         <p:spPr/>
@@ -1280,7 +1258,7 @@
     </p:spTree>
     <p:extLst>
       <p:ext uri="{BB962C8B-B14F-4D97-AF65-F5344CB8AC3E}">
-        <p14:creationId xmlns:p14="http://schemas.microsoft.com/office/powerpoint/2010/main" val="3478692827"/>
+        <p14:creationId xmlns:p14="http://schemas.microsoft.com/office/powerpoint/2010/main" val="640978486"/>
       </p:ext>
     </p:extLst>
   </p:cSld>
@@ -1309,29 +1287,19 @@
       </p:grpSpPr>
       <p:sp>
         <p:nvSpPr>
-          <p:cNvPr id="55298" name="Slide Image Placeholder 1"/>
+          <p:cNvPr id="2" name="Slide Image Placeholder 1"/>
           <p:cNvSpPr>
-            <a:spLocks noGrp="1" noRot="1" noChangeAspect="1" noTextEdit="1"/>
+            <a:spLocks noGrp="1" noRot="1" noChangeAspect="1"/>
           </p:cNvSpPr>
           <p:nvPr>
             <p:ph type="sldImg"/>
           </p:nvPr>
         </p:nvSpPr>
-        <p:spPr bwMode="auto">
-          <a:noFill/>
-          <a:ln>
-            <a:solidFill>
-              <a:srgbClr val="000000"/>
-            </a:solidFill>
-            <a:miter lim="800000"/>
-            <a:headEnd/>
-            <a:tailEnd/>
-          </a:ln>
-        </p:spPr>
-      </p:sp>
-      <p:sp>
-        <p:nvSpPr>
-          <p:cNvPr id="55299" name="Notes Placeholder 2"/>
+        <p:spPr/>
+      </p:sp>
+      <p:sp>
+        <p:nvSpPr>
+          <p:cNvPr id="3" name="Notes Placeholder 2"/>
           <p:cNvSpPr>
             <a:spLocks noGrp="1"/>
           </p:cNvSpPr>
@@ -1339,21 +1307,35 @@
             <p:ph type="body" idx="1"/>
           </p:nvPr>
         </p:nvSpPr>
-        <p:spPr bwMode="auto">
-          <a:noFill/>
-        </p:spPr>
-        <p:txBody>
-          <a:bodyPr wrap="square" numCol="1" anchor="t" anchorCtr="0" compatLnSpc="1">
-            <a:prstTxWarp prst="textNoShape">
-              <a:avLst/>
-            </a:prstTxWarp>
-          </a:bodyPr>
-          <a:lstStyle/>
-          <a:p>
-            <a:endParaRPr lang="en-US" dirty="0"/>
-          </a:p>
-          <a:p>
-            <a:endParaRPr lang="en-US" dirty="0"/>
+        <p:spPr/>
+        <p:txBody>
+          <a:bodyPr/>
+          <a:lstStyle/>
+          <a:p>
+            <a:pPr marL="0" marR="0" lvl="0" indent="0" algn="l" defTabSz="914400" rtl="0" eaLnBrk="0" fontAlgn="base" latinLnBrk="0" hangingPunct="0">
+              <a:lnSpc>
+                <a:spcPct val="100000"/>
+              </a:lnSpc>
+              <a:spcBef>
+                <a:spcPct val="30000"/>
+              </a:spcBef>
+              <a:spcAft>
+                <a:spcPct val="0"/>
+              </a:spcAft>
+              <a:buClrTx/>
+              <a:buSzTx/>
+              <a:buFontTx/>
+              <a:buNone/>
+              <a:tabLst/>
+              <a:defRPr/>
+            </a:pPr>
+            <a:r>
+              <a:rPr lang="en-US" dirty="0"/>
+              <a:t>In the literature, testing a program by exploiting relations of multiple methods/operations like in the example above is also called “metamorphic testing”</a:t>
+            </a:r>
+          </a:p>
+          <a:p>
+            <a:endParaRPr lang="en-NL" dirty="0"/>
           </a:p>
         </p:txBody>
       </p:sp>
@@ -1375,12 +1357,12 @@
             <a:pPr>
               <a:defRPr/>
             </a:pPr>
-            <a:fld id="{EC5B1458-9BA2-4FCA-B083-2E2B2AD6D16B}" type="slidenum">
+            <a:fld id="{F84EA20E-9838-494E-B9DD-2C988F7E650A}" type="slidenum">
               <a:rPr lang="en-US" smtClean="0"/>
               <a:pPr>
                 <a:defRPr/>
               </a:pPr>
-              <a:t>43</a:t>
+              <a:t>42</a:t>
             </a:fld>
             <a:endParaRPr lang="en-US"/>
           </a:p>
@@ -1389,7 +1371,7 @@
     </p:spTree>
     <p:extLst>
       <p:ext uri="{BB962C8B-B14F-4D97-AF65-F5344CB8AC3E}">
-        <p14:creationId xmlns:p14="http://schemas.microsoft.com/office/powerpoint/2010/main" val="1763036822"/>
+        <p14:creationId xmlns:p14="http://schemas.microsoft.com/office/powerpoint/2010/main" val="3478692827"/>
       </p:ext>
     </p:extLst>
   </p:cSld>
@@ -1459,45 +1441,6 @@
           </a:bodyPr>
           <a:lstStyle/>
           <a:p>
-            <a:pPr marL="0" marR="0" lvl="0" indent="0" algn="l" defTabSz="914400" rtl="0" eaLnBrk="0" fontAlgn="base" latinLnBrk="0" hangingPunct="0">
-              <a:lnSpc>
-                <a:spcPct val="100000"/>
-              </a:lnSpc>
-              <a:spcBef>
-                <a:spcPct val="30000"/>
-              </a:spcBef>
-              <a:spcAft>
-                <a:spcPct val="0"/>
-              </a:spcAft>
-              <a:buClrTx/>
-              <a:buSzTx/>
-              <a:buFontTx/>
-              <a:buNone/>
-              <a:tabLst/>
-              <a:defRPr/>
-            </a:pPr>
-            <a:r>
-              <a:rPr lang="en-US" dirty="0"/>
-              <a:t>There are other mock framework for .NET, e.g. </a:t>
-            </a:r>
-            <a:r>
-              <a:rPr lang="en-US" dirty="0" err="1"/>
-              <a:t>Moq</a:t>
-            </a:r>
-            <a:r>
-              <a:rPr lang="en-US" dirty="0"/>
-              <a:t>, rhino, </a:t>
-            </a:r>
-            <a:r>
-              <a:rPr lang="en-US" dirty="0" err="1"/>
-              <a:t>easymock</a:t>
-            </a:r>
-            <a:r>
-              <a:rPr lang="en-US" dirty="0"/>
-              <a:t>, etc. </a:t>
-            </a:r>
-          </a:p>
-          <a:p>
             <a:endParaRPr lang="en-US" dirty="0"/>
           </a:p>
           <a:p>
@@ -1537,7 +1480,7 @@
     </p:spTree>
     <p:extLst>
       <p:ext uri="{BB962C8B-B14F-4D97-AF65-F5344CB8AC3E}">
-        <p14:creationId xmlns:p14="http://schemas.microsoft.com/office/powerpoint/2010/main" val="791692650"/>
+        <p14:creationId xmlns:p14="http://schemas.microsoft.com/office/powerpoint/2010/main" val="1763036822"/>
       </p:ext>
     </p:extLst>
   </p:cSld>
@@ -1566,19 +1509,29 @@
       </p:grpSpPr>
       <p:sp>
         <p:nvSpPr>
-          <p:cNvPr id="2" name="Slide Image Placeholder 1"/>
+          <p:cNvPr id="55298" name="Slide Image Placeholder 1"/>
           <p:cNvSpPr>
-            <a:spLocks noGrp="1" noRot="1" noChangeAspect="1"/>
+            <a:spLocks noGrp="1" noRot="1" noChangeAspect="1" noTextEdit="1"/>
           </p:cNvSpPr>
           <p:nvPr>
             <p:ph type="sldImg"/>
           </p:nvPr>
         </p:nvSpPr>
-        <p:spPr/>
-      </p:sp>
-      <p:sp>
-        <p:nvSpPr>
-          <p:cNvPr id="3" name="Notes Placeholder 2"/>
+        <p:spPr bwMode="auto">
+          <a:noFill/>
+          <a:ln>
+            <a:solidFill>
+              <a:srgbClr val="000000"/>
+            </a:solidFill>
+            <a:miter lim="800000"/>
+            <a:headEnd/>
+            <a:tailEnd/>
+          </a:ln>
+        </p:spPr>
+      </p:sp>
+      <p:sp>
+        <p:nvSpPr>
+          <p:cNvPr id="55299" name="Notes Placeholder 2"/>
           <p:cNvSpPr>
             <a:spLocks noGrp="1"/>
           </p:cNvSpPr>
@@ -1586,666 +1539,53 @@
             <p:ph type="body" idx="1"/>
           </p:nvPr>
         </p:nvSpPr>
-        <p:spPr/>
-        <p:txBody>
-          <a:bodyPr>
-            <a:normAutofit fontScale="77500" lnSpcReduction="20000"/>
+        <p:spPr bwMode="auto">
+          <a:noFill/>
+        </p:spPr>
+        <p:txBody>
+          <a:bodyPr wrap="square" numCol="1" anchor="t" anchorCtr="0" compatLnSpc="1">
+            <a:prstTxWarp prst="textNoShape">
+              <a:avLst/>
+            </a:prstTxWarp>
           </a:bodyPr>
           <a:lstStyle/>
           <a:p>
+            <a:pPr marL="0" marR="0" lvl="0" indent="0" algn="l" defTabSz="914400" rtl="0" eaLnBrk="0" fontAlgn="base" latinLnBrk="0" hangingPunct="0">
+              <a:lnSpc>
+                <a:spcPct val="100000"/>
+              </a:lnSpc>
+              <a:spcBef>
+                <a:spcPct val="30000"/>
+              </a:spcBef>
+              <a:spcAft>
+                <a:spcPct val="0"/>
+              </a:spcAft>
+              <a:buClrTx/>
+              <a:buSzTx/>
+              <a:buFontTx/>
+              <a:buNone/>
+              <a:tabLst/>
+              <a:defRPr/>
+            </a:pPr>
             <a:r>
               <a:rPr lang="en-US" dirty="0"/>
-              <a:t>Note:</a:t>
-            </a:r>
-          </a:p>
-          <a:p>
-            <a:endParaRPr lang="en-US" dirty="0"/>
-          </a:p>
-          <a:p>
+              <a:t>There are other mock framework for .NET, e.g. </a:t>
+            </a:r>
+            <a:r>
+              <a:rPr lang="en-US" dirty="0" err="1"/>
+              <a:t>Moq</a:t>
+            </a:r>
             <a:r>
               <a:rPr lang="en-US" dirty="0"/>
-              <a:t>The method “For&lt;I&gt;()” creates an instance of I. </a:t>
-            </a:r>
-          </a:p>
-          <a:p>
-            <a:endParaRPr lang="en-US" dirty="0"/>
-          </a:p>
-          <a:p>
+              <a:t>, rhino, </a:t>
+            </a:r>
+            <a:r>
+              <a:rPr lang="en-US" dirty="0" err="1"/>
+              <a:t>easymock</a:t>
+            </a:r>
             <a:r>
               <a:rPr lang="en-US" dirty="0"/>
-              <a:t>The method “Returns” is probably more magical, especially for Java programmer. E.g. in the above example the method “value(x)” of </a:t>
-            </a:r>
-            <a:r>
-              <a:rPr lang="en-US" dirty="0" err="1"/>
-              <a:t>IThremometer</a:t>
-            </a:r>
-            <a:r>
-              <a:rPr lang="en-US" dirty="0"/>
-              <a:t> returns a “double”. Now, in C# primitives like double are also objects. </a:t>
-            </a:r>
-          </a:p>
-          <a:p>
-            <a:endParaRPr lang="en-US" dirty="0"/>
-          </a:p>
-          <a:p>
-            <a:r>
-              <a:rPr lang="en-US" dirty="0"/>
-              <a:t>Furthermore C# allows a class, including primitives, to be “method-extended”. Normal class can be sub-classed. But primitives and sealed classes cannot be sub-classed. However, C# allows a syntactic sugar called “extension method”. Example with extending string:</a:t>
-            </a:r>
-          </a:p>
-          <a:p>
-            <a:endParaRPr lang="en-US" dirty="0"/>
-          </a:p>
-          <a:p>
-            <a:r>
-              <a:rPr lang="en-US" sz="1200" b="1" i="0" kern="1200" dirty="0">
-                <a:solidFill>
-                  <a:schemeClr val="tx1"/>
-                </a:solidFill>
-                <a:effectLst/>
-                <a:latin typeface="+mn-lt"/>
-                <a:ea typeface="+mn-ea"/>
-                <a:cs typeface="+mn-cs"/>
-              </a:rPr>
-              <a:t>static</a:t>
-            </a:r>
-            <a:r>
-              <a:rPr lang="en-US" sz="1200" b="0" i="0" kern="1200" dirty="0">
-                <a:solidFill>
-                  <a:schemeClr val="tx1"/>
-                </a:solidFill>
-                <a:effectLst/>
-                <a:latin typeface="+mn-lt"/>
-                <a:ea typeface="+mn-ea"/>
-                <a:cs typeface="+mn-cs"/>
-              </a:rPr>
-              <a:t> </a:t>
-            </a:r>
-            <a:r>
-              <a:rPr lang="en-US" sz="1200" b="1" i="0" kern="1200" dirty="0">
-                <a:solidFill>
-                  <a:schemeClr val="tx1"/>
-                </a:solidFill>
-                <a:effectLst/>
-                <a:latin typeface="+mn-lt"/>
-                <a:ea typeface="+mn-ea"/>
-                <a:cs typeface="+mn-cs"/>
-              </a:rPr>
-              <a:t>class</a:t>
-            </a:r>
-            <a:r>
-              <a:rPr lang="en-US" sz="1200" b="0" i="0" kern="1200" dirty="0">
-                <a:solidFill>
-                  <a:schemeClr val="tx1"/>
-                </a:solidFill>
-                <a:effectLst/>
-                <a:latin typeface="+mn-lt"/>
-                <a:ea typeface="+mn-ea"/>
-                <a:cs typeface="+mn-cs"/>
-              </a:rPr>
-              <a:t>  Extensions  </a:t>
-            </a:r>
-          </a:p>
-          <a:p>
-            <a:r>
-              <a:rPr lang="en-US" sz="1200" b="0" i="0" kern="1200" dirty="0">
-                <a:solidFill>
-                  <a:schemeClr val="tx1"/>
-                </a:solidFill>
-                <a:effectLst/>
-                <a:latin typeface="+mn-lt"/>
-                <a:ea typeface="+mn-ea"/>
-                <a:cs typeface="+mn-cs"/>
-              </a:rPr>
-              <a:t>    {  </a:t>
-            </a:r>
-          </a:p>
-          <a:p>
-            <a:r>
-              <a:rPr lang="en-US" sz="1200" b="0" i="0" kern="1200" dirty="0">
-                <a:solidFill>
-                  <a:schemeClr val="tx1"/>
-                </a:solidFill>
-                <a:effectLst/>
-                <a:latin typeface="+mn-lt"/>
-                <a:ea typeface="+mn-ea"/>
-                <a:cs typeface="+mn-cs"/>
-              </a:rPr>
-              <a:t>        </a:t>
-            </a:r>
-            <a:r>
-              <a:rPr lang="en-US" sz="1200" b="1" i="0" kern="1200" dirty="0">
-                <a:solidFill>
-                  <a:schemeClr val="tx1"/>
-                </a:solidFill>
-                <a:effectLst/>
-                <a:latin typeface="+mn-lt"/>
-                <a:ea typeface="+mn-ea"/>
-                <a:cs typeface="+mn-cs"/>
-              </a:rPr>
-              <a:t>public</a:t>
-            </a:r>
-            <a:r>
-              <a:rPr lang="en-US" sz="1200" b="0" i="0" kern="1200" dirty="0">
-                <a:solidFill>
-                  <a:schemeClr val="tx1"/>
-                </a:solidFill>
-                <a:effectLst/>
-                <a:latin typeface="+mn-lt"/>
-                <a:ea typeface="+mn-ea"/>
-                <a:cs typeface="+mn-cs"/>
-              </a:rPr>
-              <a:t> </a:t>
-            </a:r>
-            <a:r>
-              <a:rPr lang="en-US" sz="1200" b="1" i="0" kern="1200" dirty="0">
-                <a:solidFill>
-                  <a:schemeClr val="tx1"/>
-                </a:solidFill>
-                <a:effectLst/>
-                <a:latin typeface="+mn-lt"/>
-                <a:ea typeface="+mn-ea"/>
-                <a:cs typeface="+mn-cs"/>
-              </a:rPr>
-              <a:t>static</a:t>
-            </a:r>
-            <a:r>
-              <a:rPr lang="en-US" sz="1200" b="0" i="0" kern="1200" dirty="0">
-                <a:solidFill>
-                  <a:schemeClr val="tx1"/>
-                </a:solidFill>
-                <a:effectLst/>
-                <a:latin typeface="+mn-lt"/>
-                <a:ea typeface="+mn-ea"/>
-                <a:cs typeface="+mn-cs"/>
-              </a:rPr>
-              <a:t> </a:t>
-            </a:r>
-            <a:r>
-              <a:rPr lang="en-US" sz="1200" b="1" i="0" kern="1200" dirty="0">
-                <a:solidFill>
-                  <a:schemeClr val="tx1"/>
-                </a:solidFill>
-                <a:effectLst/>
-                <a:latin typeface="+mn-lt"/>
-                <a:ea typeface="+mn-ea"/>
-                <a:cs typeface="+mn-cs"/>
-              </a:rPr>
-              <a:t>string</a:t>
-            </a:r>
-            <a:r>
-              <a:rPr lang="en-US" sz="1200" b="0" i="0" kern="1200" dirty="0">
-                <a:solidFill>
-                  <a:schemeClr val="tx1"/>
-                </a:solidFill>
-                <a:effectLst/>
-                <a:latin typeface="+mn-lt"/>
-                <a:ea typeface="+mn-ea"/>
-                <a:cs typeface="+mn-cs"/>
-              </a:rPr>
-              <a:t> </a:t>
-            </a:r>
-            <a:r>
-              <a:rPr lang="en-US" sz="1200" b="0" i="0" kern="1200" dirty="0" err="1">
-                <a:solidFill>
-                  <a:schemeClr val="tx1"/>
-                </a:solidFill>
-                <a:effectLst/>
-                <a:latin typeface="+mn-lt"/>
-                <a:ea typeface="+mn-ea"/>
-                <a:cs typeface="+mn-cs"/>
-              </a:rPr>
-              <a:t>UpperFirst</a:t>
-            </a:r>
-            <a:r>
-              <a:rPr lang="en-US" sz="1200" b="0" i="0" kern="1200" dirty="0">
-                <a:solidFill>
-                  <a:schemeClr val="tx1"/>
-                </a:solidFill>
-                <a:effectLst/>
-                <a:latin typeface="+mn-lt"/>
-                <a:ea typeface="+mn-ea"/>
-                <a:cs typeface="+mn-cs"/>
-              </a:rPr>
-              <a:t>(</a:t>
-            </a:r>
-            <a:r>
-              <a:rPr lang="en-US" sz="1200" b="1" i="0" kern="1200" dirty="0">
-                <a:solidFill>
-                  <a:schemeClr val="tx1"/>
-                </a:solidFill>
-                <a:effectLst/>
-                <a:latin typeface="+mn-lt"/>
-                <a:ea typeface="+mn-ea"/>
-                <a:cs typeface="+mn-cs"/>
-              </a:rPr>
-              <a:t>this</a:t>
-            </a:r>
-            <a:r>
-              <a:rPr lang="en-US" sz="1200" b="0" i="0" kern="1200" dirty="0">
-                <a:solidFill>
-                  <a:schemeClr val="tx1"/>
-                </a:solidFill>
-                <a:effectLst/>
-                <a:latin typeface="+mn-lt"/>
-                <a:ea typeface="+mn-ea"/>
-                <a:cs typeface="+mn-cs"/>
-              </a:rPr>
-              <a:t> String </a:t>
-            </a:r>
-            <a:r>
-              <a:rPr lang="en-US" sz="1200" b="0" i="0" kern="1200" dirty="0" err="1">
-                <a:solidFill>
-                  <a:schemeClr val="tx1"/>
-                </a:solidFill>
-                <a:effectLst/>
-                <a:latin typeface="+mn-lt"/>
-                <a:ea typeface="+mn-ea"/>
-                <a:cs typeface="+mn-cs"/>
-              </a:rPr>
-              <a:t>str</a:t>
-            </a:r>
-            <a:r>
-              <a:rPr lang="en-US" sz="1200" b="0" i="0" kern="1200" dirty="0">
-                <a:solidFill>
-                  <a:schemeClr val="tx1"/>
-                </a:solidFill>
-                <a:effectLst/>
-                <a:latin typeface="+mn-lt"/>
-                <a:ea typeface="+mn-ea"/>
-                <a:cs typeface="+mn-cs"/>
-              </a:rPr>
-              <a:t>)  </a:t>
-            </a:r>
-          </a:p>
-          <a:p>
-            <a:r>
-              <a:rPr lang="en-US" sz="1200" b="0" i="0" kern="1200" dirty="0">
-                <a:solidFill>
-                  <a:schemeClr val="tx1"/>
-                </a:solidFill>
-                <a:effectLst/>
-                <a:latin typeface="+mn-lt"/>
-                <a:ea typeface="+mn-ea"/>
-                <a:cs typeface="+mn-cs"/>
-              </a:rPr>
-              <a:t>        {  </a:t>
-            </a:r>
-          </a:p>
-          <a:p>
-            <a:r>
-              <a:rPr lang="en-US" sz="1200" b="0" i="0" kern="1200" dirty="0">
-                <a:solidFill>
-                  <a:schemeClr val="tx1"/>
-                </a:solidFill>
-                <a:effectLst/>
-                <a:latin typeface="+mn-lt"/>
-                <a:ea typeface="+mn-ea"/>
-                <a:cs typeface="+mn-cs"/>
-              </a:rPr>
-              <a:t>            </a:t>
-            </a:r>
-            <a:r>
-              <a:rPr lang="en-US" sz="1200" b="1" i="0" kern="1200" dirty="0">
-                <a:solidFill>
-                  <a:schemeClr val="tx1"/>
-                </a:solidFill>
-                <a:effectLst/>
-                <a:latin typeface="+mn-lt"/>
-                <a:ea typeface="+mn-ea"/>
-                <a:cs typeface="+mn-cs"/>
-              </a:rPr>
-              <a:t>if</a:t>
-            </a:r>
-            <a:r>
-              <a:rPr lang="en-US" sz="1200" b="0" i="0" kern="1200" dirty="0">
-                <a:solidFill>
-                  <a:schemeClr val="tx1"/>
-                </a:solidFill>
-                <a:effectLst/>
-                <a:latin typeface="+mn-lt"/>
-                <a:ea typeface="+mn-ea"/>
-                <a:cs typeface="+mn-cs"/>
-              </a:rPr>
-              <a:t> (</a:t>
-            </a:r>
-            <a:r>
-              <a:rPr lang="en-US" sz="1200" b="0" i="0" kern="1200" dirty="0" err="1">
-                <a:solidFill>
-                  <a:schemeClr val="tx1"/>
-                </a:solidFill>
-                <a:effectLst/>
-                <a:latin typeface="+mn-lt"/>
-                <a:ea typeface="+mn-ea"/>
-                <a:cs typeface="+mn-cs"/>
-              </a:rPr>
-              <a:t>String.IsNullOrEmpty</a:t>
-            </a:r>
-            <a:r>
-              <a:rPr lang="en-US" sz="1200" b="0" i="0" kern="1200" dirty="0">
-                <a:solidFill>
-                  <a:schemeClr val="tx1"/>
-                </a:solidFill>
-                <a:effectLst/>
-                <a:latin typeface="+mn-lt"/>
-                <a:ea typeface="+mn-ea"/>
-                <a:cs typeface="+mn-cs"/>
-              </a:rPr>
-              <a:t>(</a:t>
-            </a:r>
-            <a:r>
-              <a:rPr lang="en-US" sz="1200" b="0" i="0" kern="1200" dirty="0" err="1">
-                <a:solidFill>
-                  <a:schemeClr val="tx1"/>
-                </a:solidFill>
-                <a:effectLst/>
-                <a:latin typeface="+mn-lt"/>
-                <a:ea typeface="+mn-ea"/>
-                <a:cs typeface="+mn-cs"/>
-              </a:rPr>
-              <a:t>str</a:t>
-            </a:r>
-            <a:r>
-              <a:rPr lang="en-US" sz="1200" b="0" i="0" kern="1200" dirty="0">
-                <a:solidFill>
-                  <a:schemeClr val="tx1"/>
-                </a:solidFill>
-                <a:effectLst/>
-                <a:latin typeface="+mn-lt"/>
-                <a:ea typeface="+mn-ea"/>
-                <a:cs typeface="+mn-cs"/>
-              </a:rPr>
-              <a:t>))  </a:t>
-            </a:r>
-          </a:p>
-          <a:p>
-            <a:r>
-              <a:rPr lang="en-US" sz="1200" b="0" i="0" kern="1200" dirty="0">
-                <a:solidFill>
-                  <a:schemeClr val="tx1"/>
-                </a:solidFill>
-                <a:effectLst/>
-                <a:latin typeface="+mn-lt"/>
-                <a:ea typeface="+mn-ea"/>
-                <a:cs typeface="+mn-cs"/>
-              </a:rPr>
-              <a:t>                </a:t>
-            </a:r>
-            <a:r>
-              <a:rPr lang="en-US" sz="1200" b="1" i="0" kern="1200" dirty="0">
-                <a:solidFill>
-                  <a:schemeClr val="tx1"/>
-                </a:solidFill>
-                <a:effectLst/>
-                <a:latin typeface="+mn-lt"/>
-                <a:ea typeface="+mn-ea"/>
-                <a:cs typeface="+mn-cs"/>
-              </a:rPr>
-              <a:t>return</a:t>
-            </a:r>
-            <a:r>
-              <a:rPr lang="en-US" sz="1200" b="0" i="0" kern="1200" dirty="0">
-                <a:solidFill>
-                  <a:schemeClr val="tx1"/>
-                </a:solidFill>
-                <a:effectLst/>
-                <a:latin typeface="+mn-lt"/>
-                <a:ea typeface="+mn-ea"/>
-                <a:cs typeface="+mn-cs"/>
-              </a:rPr>
-              <a:t> </a:t>
-            </a:r>
-            <a:r>
-              <a:rPr lang="en-US" sz="1200" b="0" i="0" kern="1200" dirty="0" err="1">
-                <a:solidFill>
-                  <a:schemeClr val="tx1"/>
-                </a:solidFill>
-                <a:effectLst/>
-                <a:latin typeface="+mn-lt"/>
-                <a:ea typeface="+mn-ea"/>
-                <a:cs typeface="+mn-cs"/>
-              </a:rPr>
-              <a:t>String.Empty</a:t>
-            </a:r>
-            <a:r>
-              <a:rPr lang="en-US" sz="1200" b="0" i="0" kern="1200" dirty="0">
-                <a:solidFill>
-                  <a:schemeClr val="tx1"/>
-                </a:solidFill>
-                <a:effectLst/>
-                <a:latin typeface="+mn-lt"/>
-                <a:ea typeface="+mn-ea"/>
-                <a:cs typeface="+mn-cs"/>
-              </a:rPr>
-              <a:t>;  </a:t>
-            </a:r>
-          </a:p>
-          <a:p>
-            <a:r>
-              <a:rPr lang="en-US" sz="1200" b="0" i="0" kern="1200" dirty="0">
-                <a:solidFill>
-                  <a:schemeClr val="tx1"/>
-                </a:solidFill>
-                <a:effectLst/>
-                <a:latin typeface="+mn-lt"/>
-                <a:ea typeface="+mn-ea"/>
-                <a:cs typeface="+mn-cs"/>
-              </a:rPr>
-              <a:t>  </a:t>
-            </a:r>
-          </a:p>
-          <a:p>
-            <a:r>
-              <a:rPr lang="en-US" sz="1200" b="0" i="0" kern="1200" dirty="0">
-                <a:solidFill>
-                  <a:schemeClr val="tx1"/>
-                </a:solidFill>
-                <a:effectLst/>
-                <a:latin typeface="+mn-lt"/>
-                <a:ea typeface="+mn-ea"/>
-                <a:cs typeface="+mn-cs"/>
-              </a:rPr>
-              <a:t>            </a:t>
-            </a:r>
-            <a:r>
-              <a:rPr lang="en-US" sz="1200" b="1" i="0" kern="1200" dirty="0">
-                <a:solidFill>
-                  <a:schemeClr val="tx1"/>
-                </a:solidFill>
-                <a:effectLst/>
-                <a:latin typeface="+mn-lt"/>
-                <a:ea typeface="+mn-ea"/>
-                <a:cs typeface="+mn-cs"/>
-              </a:rPr>
-              <a:t>return</a:t>
-            </a:r>
-            <a:r>
-              <a:rPr lang="en-US" sz="1200" b="0" i="0" kern="1200" dirty="0">
-                <a:solidFill>
-                  <a:schemeClr val="tx1"/>
-                </a:solidFill>
-                <a:effectLst/>
-                <a:latin typeface="+mn-lt"/>
-                <a:ea typeface="+mn-ea"/>
-                <a:cs typeface="+mn-cs"/>
-              </a:rPr>
-              <a:t> </a:t>
-            </a:r>
-            <a:r>
-              <a:rPr lang="en-US" sz="1200" b="0" i="0" kern="1200" dirty="0" err="1">
-                <a:solidFill>
-                  <a:schemeClr val="tx1"/>
-                </a:solidFill>
-                <a:effectLst/>
-                <a:latin typeface="+mn-lt"/>
-                <a:ea typeface="+mn-ea"/>
-                <a:cs typeface="+mn-cs"/>
-              </a:rPr>
-              <a:t>str.Substring</a:t>
-            </a:r>
-            <a:r>
-              <a:rPr lang="en-US" sz="1200" b="0" i="0" kern="1200" dirty="0">
-                <a:solidFill>
-                  <a:schemeClr val="tx1"/>
-                </a:solidFill>
-                <a:effectLst/>
-                <a:latin typeface="+mn-lt"/>
-                <a:ea typeface="+mn-ea"/>
-                <a:cs typeface="+mn-cs"/>
-              </a:rPr>
-              <a:t>(0, 1).</a:t>
-            </a:r>
-            <a:r>
-              <a:rPr lang="en-US" sz="1200" b="0" i="0" kern="1200" dirty="0" err="1">
-                <a:solidFill>
-                  <a:schemeClr val="tx1"/>
-                </a:solidFill>
-                <a:effectLst/>
-                <a:latin typeface="+mn-lt"/>
-                <a:ea typeface="+mn-ea"/>
-                <a:cs typeface="+mn-cs"/>
-              </a:rPr>
-              <a:t>ToUpper</a:t>
-            </a:r>
-            <a:r>
-              <a:rPr lang="en-US" sz="1200" b="0" i="0" kern="1200" dirty="0">
-                <a:solidFill>
-                  <a:schemeClr val="tx1"/>
-                </a:solidFill>
-                <a:effectLst/>
-                <a:latin typeface="+mn-lt"/>
-                <a:ea typeface="+mn-ea"/>
-                <a:cs typeface="+mn-cs"/>
-              </a:rPr>
-              <a:t>() + </a:t>
-            </a:r>
-            <a:r>
-              <a:rPr lang="en-US" sz="1200" b="0" i="0" kern="1200" dirty="0" err="1">
-                <a:solidFill>
-                  <a:schemeClr val="tx1"/>
-                </a:solidFill>
-                <a:effectLst/>
-                <a:latin typeface="+mn-lt"/>
-                <a:ea typeface="+mn-ea"/>
-                <a:cs typeface="+mn-cs"/>
-              </a:rPr>
-              <a:t>str.Substring</a:t>
-            </a:r>
-            <a:r>
-              <a:rPr lang="en-US" sz="1200" b="0" i="0" kern="1200" dirty="0">
-                <a:solidFill>
-                  <a:schemeClr val="tx1"/>
-                </a:solidFill>
-                <a:effectLst/>
-                <a:latin typeface="+mn-lt"/>
-                <a:ea typeface="+mn-ea"/>
-                <a:cs typeface="+mn-cs"/>
-              </a:rPr>
-              <a:t>(1, str.Length-1).</a:t>
-            </a:r>
-            <a:r>
-              <a:rPr lang="en-US" sz="1200" b="0" i="0" kern="1200" dirty="0" err="1">
-                <a:solidFill>
-                  <a:schemeClr val="tx1"/>
-                </a:solidFill>
-                <a:effectLst/>
-                <a:latin typeface="+mn-lt"/>
-                <a:ea typeface="+mn-ea"/>
-                <a:cs typeface="+mn-cs"/>
-              </a:rPr>
-              <a:t>ToLower</a:t>
-            </a:r>
-            <a:r>
-              <a:rPr lang="en-US" sz="1200" b="0" i="0" kern="1200" dirty="0">
-                <a:solidFill>
-                  <a:schemeClr val="tx1"/>
-                </a:solidFill>
-                <a:effectLst/>
-                <a:latin typeface="+mn-lt"/>
-                <a:ea typeface="+mn-ea"/>
-                <a:cs typeface="+mn-cs"/>
-              </a:rPr>
-              <a:t>();  </a:t>
-            </a:r>
-          </a:p>
-          <a:p>
-            <a:r>
-              <a:rPr lang="en-US" sz="1200" b="0" i="0" kern="1200" dirty="0">
-                <a:solidFill>
-                  <a:schemeClr val="tx1"/>
-                </a:solidFill>
-                <a:effectLst/>
-                <a:latin typeface="+mn-lt"/>
-                <a:ea typeface="+mn-ea"/>
-                <a:cs typeface="+mn-cs"/>
-              </a:rPr>
-              <a:t>        }  </a:t>
-            </a:r>
-          </a:p>
-          <a:p>
-            <a:r>
-              <a:rPr lang="en-US" sz="1200" b="0" i="0" kern="1200" dirty="0">
-                <a:solidFill>
-                  <a:schemeClr val="tx1"/>
-                </a:solidFill>
-                <a:effectLst/>
-                <a:latin typeface="+mn-lt"/>
-                <a:ea typeface="+mn-ea"/>
-                <a:cs typeface="+mn-cs"/>
-              </a:rPr>
-              <a:t>    }  </a:t>
-            </a:r>
-          </a:p>
-          <a:p>
-            <a:endParaRPr lang="en-US" dirty="0"/>
-          </a:p>
-          <a:p>
-            <a:r>
-              <a:rPr lang="en-US" dirty="0"/>
-              <a:t>Having this in the scope, we can now write:</a:t>
-            </a:r>
-            <a:br>
-              <a:rPr lang="en-US" dirty="0"/>
-            </a:br>
-            <a:br>
-              <a:rPr lang="en-US" dirty="0"/>
-            </a:br>
-            <a:r>
-              <a:rPr lang="en-US" dirty="0"/>
-              <a:t>   String z = “hello”</a:t>
-            </a:r>
-            <a:br>
-              <a:rPr lang="en-US" dirty="0"/>
-            </a:br>
-            <a:r>
-              <a:rPr lang="en-US" dirty="0"/>
-              <a:t>    z = </a:t>
-            </a:r>
-            <a:r>
-              <a:rPr lang="en-US" dirty="0" err="1"/>
-              <a:t>z.UpperFirst</a:t>
-            </a:r>
-            <a:r>
-              <a:rPr lang="en-US" dirty="0"/>
-              <a:t>()</a:t>
-            </a:r>
-            <a:br>
-              <a:rPr lang="en-US" dirty="0"/>
-            </a:br>
-            <a:br>
-              <a:rPr lang="en-US" dirty="0"/>
-            </a:br>
-            <a:r>
-              <a:rPr lang="en-US" dirty="0"/>
-              <a:t>So what </a:t>
-            </a:r>
-            <a:r>
-              <a:rPr lang="en-US" dirty="0" err="1"/>
-              <a:t>NSubstutute</a:t>
-            </a:r>
-            <a:r>
-              <a:rPr lang="en-US" dirty="0"/>
-              <a:t> does is likely to extend return types of mocked methods, including primitives, with the method “Returns”.</a:t>
+              <a:t>, etc. </a:t>
             </a:r>
           </a:p>
           <a:p>
@@ -2274,7 +1614,7 @@
             <a:pPr>
               <a:defRPr/>
             </a:pPr>
-            <a:fld id="{F84EA20E-9838-494E-B9DD-2C988F7E650A}" type="slidenum">
+            <a:fld id="{EC5B1458-9BA2-4FCA-B083-2E2B2AD6D16B}" type="slidenum">
               <a:rPr lang="en-US" smtClean="0"/>
               <a:pPr>
                 <a:defRPr/>
@@ -2288,7 +1628,7 @@
     </p:spTree>
     <p:extLst>
       <p:ext uri="{BB962C8B-B14F-4D97-AF65-F5344CB8AC3E}">
-        <p14:creationId xmlns:p14="http://schemas.microsoft.com/office/powerpoint/2010/main" val="812723745"/>
+        <p14:creationId xmlns:p14="http://schemas.microsoft.com/office/powerpoint/2010/main" val="791692650"/>
       </p:ext>
     </p:extLst>
   </p:cSld>
@@ -2317,29 +1657,19 @@
       </p:grpSpPr>
       <p:sp>
         <p:nvSpPr>
-          <p:cNvPr id="55298" name="Slide Image Placeholder 1"/>
+          <p:cNvPr id="2" name="Slide Image Placeholder 1"/>
           <p:cNvSpPr>
-            <a:spLocks noGrp="1" noRot="1" noChangeAspect="1" noTextEdit="1"/>
+            <a:spLocks noGrp="1" noRot="1" noChangeAspect="1"/>
           </p:cNvSpPr>
           <p:nvPr>
             <p:ph type="sldImg"/>
           </p:nvPr>
         </p:nvSpPr>
-        <p:spPr bwMode="auto">
-          <a:noFill/>
-          <a:ln>
-            <a:solidFill>
-              <a:srgbClr val="000000"/>
-            </a:solidFill>
-            <a:miter lim="800000"/>
-            <a:headEnd/>
-            <a:tailEnd/>
-          </a:ln>
-        </p:spPr>
-      </p:sp>
-      <p:sp>
-        <p:nvSpPr>
-          <p:cNvPr id="55299" name="Notes Placeholder 2"/>
+        <p:spPr/>
+      </p:sp>
+      <p:sp>
+        <p:nvSpPr>
+          <p:cNvPr id="3" name="Notes Placeholder 2"/>
           <p:cNvSpPr>
             <a:spLocks noGrp="1"/>
           </p:cNvSpPr>
@@ -2347,37 +1677,670 @@
             <p:ph type="body" idx="1"/>
           </p:nvPr>
         </p:nvSpPr>
-        <p:spPr bwMode="auto">
-          <a:noFill/>
-        </p:spPr>
-        <p:txBody>
-          <a:bodyPr wrap="square" numCol="1" anchor="t" anchorCtr="0" compatLnSpc="1">
-            <a:prstTxWarp prst="textNoShape">
-              <a:avLst/>
-            </a:prstTxWarp>
+        <p:spPr/>
+        <p:txBody>
+          <a:bodyPr>
+            <a:normAutofit fontScale="77500" lnSpcReduction="20000"/>
           </a:bodyPr>
           <a:lstStyle/>
           <a:p>
             <a:r>
               <a:rPr lang="en-US" dirty="0"/>
-              <a:t>There are other mock framework for .NET, e.g. </a:t>
+              <a:t>Note:</a:t>
+            </a:r>
+          </a:p>
+          <a:p>
+            <a:endParaRPr lang="en-US" dirty="0"/>
+          </a:p>
+          <a:p>
+            <a:r>
+              <a:rPr lang="en-US" dirty="0"/>
+              <a:t>The method “For&lt;I&gt;()” creates an instance of I. </a:t>
+            </a:r>
+          </a:p>
+          <a:p>
+            <a:endParaRPr lang="en-US" dirty="0"/>
+          </a:p>
+          <a:p>
+            <a:r>
+              <a:rPr lang="en-US" dirty="0"/>
+              <a:t>The method “Returns” is probably more magical, especially for Java programmer. E.g. in the above example the method “value(x)” of </a:t>
             </a:r>
             <a:r>
               <a:rPr lang="en-US" dirty="0" err="1"/>
-              <a:t>Moq</a:t>
+              <a:t>IThremometer</a:t>
             </a:r>
             <a:r>
               <a:rPr lang="en-US" dirty="0"/>
-              <a:t>, rhino, </a:t>
+              <a:t> returns a “double”. Now, in C# primitives like double are also objects. </a:t>
+            </a:r>
+          </a:p>
+          <a:p>
+            <a:endParaRPr lang="en-US" dirty="0"/>
+          </a:p>
+          <a:p>
+            <a:r>
+              <a:rPr lang="en-US" dirty="0"/>
+              <a:t>Furthermore C# allows a class, including primitives, to be “method-extended”. Normal class can be sub-classed. But primitives and sealed classes cannot be sub-classed. However, C# allows a syntactic sugar called “extension method”. Example with extending string:</a:t>
+            </a:r>
+          </a:p>
+          <a:p>
+            <a:endParaRPr lang="en-US" dirty="0"/>
+          </a:p>
+          <a:p>
+            <a:r>
+              <a:rPr lang="en-US" sz="1200" b="1" i="0" kern="1200" dirty="0">
+                <a:solidFill>
+                  <a:schemeClr val="tx1"/>
+                </a:solidFill>
+                <a:effectLst/>
+                <a:latin typeface="+mn-lt"/>
+                <a:ea typeface="+mn-ea"/>
+                <a:cs typeface="+mn-cs"/>
+              </a:rPr>
+              <a:t>static</a:t>
+            </a:r>
+            <a:r>
+              <a:rPr lang="en-US" sz="1200" b="0" i="0" kern="1200" dirty="0">
+                <a:solidFill>
+                  <a:schemeClr val="tx1"/>
+                </a:solidFill>
+                <a:effectLst/>
+                <a:latin typeface="+mn-lt"/>
+                <a:ea typeface="+mn-ea"/>
+                <a:cs typeface="+mn-cs"/>
+              </a:rPr>
+              <a:t> </a:t>
+            </a:r>
+            <a:r>
+              <a:rPr lang="en-US" sz="1200" b="1" i="0" kern="1200" dirty="0">
+                <a:solidFill>
+                  <a:schemeClr val="tx1"/>
+                </a:solidFill>
+                <a:effectLst/>
+                <a:latin typeface="+mn-lt"/>
+                <a:ea typeface="+mn-ea"/>
+                <a:cs typeface="+mn-cs"/>
+              </a:rPr>
+              <a:t>class</a:t>
+            </a:r>
+            <a:r>
+              <a:rPr lang="en-US" sz="1200" b="0" i="0" kern="1200" dirty="0">
+                <a:solidFill>
+                  <a:schemeClr val="tx1"/>
+                </a:solidFill>
+                <a:effectLst/>
+                <a:latin typeface="+mn-lt"/>
+                <a:ea typeface="+mn-ea"/>
+                <a:cs typeface="+mn-cs"/>
+              </a:rPr>
+              <a:t>  Extensions  </a:t>
+            </a:r>
+          </a:p>
+          <a:p>
+            <a:r>
+              <a:rPr lang="en-US" sz="1200" b="0" i="0" kern="1200" dirty="0">
+                <a:solidFill>
+                  <a:schemeClr val="tx1"/>
+                </a:solidFill>
+                <a:effectLst/>
+                <a:latin typeface="+mn-lt"/>
+                <a:ea typeface="+mn-ea"/>
+                <a:cs typeface="+mn-cs"/>
+              </a:rPr>
+              <a:t>    {  </a:t>
+            </a:r>
+          </a:p>
+          <a:p>
+            <a:r>
+              <a:rPr lang="en-US" sz="1200" b="0" i="0" kern="1200" dirty="0">
+                <a:solidFill>
+                  <a:schemeClr val="tx1"/>
+                </a:solidFill>
+                <a:effectLst/>
+                <a:latin typeface="+mn-lt"/>
+                <a:ea typeface="+mn-ea"/>
+                <a:cs typeface="+mn-cs"/>
+              </a:rPr>
+              <a:t>        </a:t>
+            </a:r>
+            <a:r>
+              <a:rPr lang="en-US" sz="1200" b="1" i="0" kern="1200" dirty="0">
+                <a:solidFill>
+                  <a:schemeClr val="tx1"/>
+                </a:solidFill>
+                <a:effectLst/>
+                <a:latin typeface="+mn-lt"/>
+                <a:ea typeface="+mn-ea"/>
+                <a:cs typeface="+mn-cs"/>
+              </a:rPr>
+              <a:t>public</a:t>
+            </a:r>
+            <a:r>
+              <a:rPr lang="en-US" sz="1200" b="0" i="0" kern="1200" dirty="0">
+                <a:solidFill>
+                  <a:schemeClr val="tx1"/>
+                </a:solidFill>
+                <a:effectLst/>
+                <a:latin typeface="+mn-lt"/>
+                <a:ea typeface="+mn-ea"/>
+                <a:cs typeface="+mn-cs"/>
+              </a:rPr>
+              <a:t> </a:t>
+            </a:r>
+            <a:r>
+              <a:rPr lang="en-US" sz="1200" b="1" i="0" kern="1200" dirty="0">
+                <a:solidFill>
+                  <a:schemeClr val="tx1"/>
+                </a:solidFill>
+                <a:effectLst/>
+                <a:latin typeface="+mn-lt"/>
+                <a:ea typeface="+mn-ea"/>
+                <a:cs typeface="+mn-cs"/>
+              </a:rPr>
+              <a:t>static</a:t>
+            </a:r>
+            <a:r>
+              <a:rPr lang="en-US" sz="1200" b="0" i="0" kern="1200" dirty="0">
+                <a:solidFill>
+                  <a:schemeClr val="tx1"/>
+                </a:solidFill>
+                <a:effectLst/>
+                <a:latin typeface="+mn-lt"/>
+                <a:ea typeface="+mn-ea"/>
+                <a:cs typeface="+mn-cs"/>
+              </a:rPr>
+              <a:t> </a:t>
+            </a:r>
+            <a:r>
+              <a:rPr lang="en-US" sz="1200" b="1" i="0" kern="1200" dirty="0">
+                <a:solidFill>
+                  <a:schemeClr val="tx1"/>
+                </a:solidFill>
+                <a:effectLst/>
+                <a:latin typeface="+mn-lt"/>
+                <a:ea typeface="+mn-ea"/>
+                <a:cs typeface="+mn-cs"/>
+              </a:rPr>
+              <a:t>string</a:t>
+            </a:r>
+            <a:r>
+              <a:rPr lang="en-US" sz="1200" b="0" i="0" kern="1200" dirty="0">
+                <a:solidFill>
+                  <a:schemeClr val="tx1"/>
+                </a:solidFill>
+                <a:effectLst/>
+                <a:latin typeface="+mn-lt"/>
+                <a:ea typeface="+mn-ea"/>
+                <a:cs typeface="+mn-cs"/>
+              </a:rPr>
+              <a:t> </a:t>
+            </a:r>
+            <a:r>
+              <a:rPr lang="en-US" sz="1200" b="0" i="0" kern="1200" dirty="0" err="1">
+                <a:solidFill>
+                  <a:schemeClr val="tx1"/>
+                </a:solidFill>
+                <a:effectLst/>
+                <a:latin typeface="+mn-lt"/>
+                <a:ea typeface="+mn-ea"/>
+                <a:cs typeface="+mn-cs"/>
+              </a:rPr>
+              <a:t>UpperFirst</a:t>
+            </a:r>
+            <a:r>
+              <a:rPr lang="en-US" sz="1200" b="0" i="0" kern="1200" dirty="0">
+                <a:solidFill>
+                  <a:schemeClr val="tx1"/>
+                </a:solidFill>
+                <a:effectLst/>
+                <a:latin typeface="+mn-lt"/>
+                <a:ea typeface="+mn-ea"/>
+                <a:cs typeface="+mn-cs"/>
+              </a:rPr>
+              <a:t>(</a:t>
+            </a:r>
+            <a:r>
+              <a:rPr lang="en-US" sz="1200" b="1" i="0" kern="1200" dirty="0">
+                <a:solidFill>
+                  <a:schemeClr val="tx1"/>
+                </a:solidFill>
+                <a:effectLst/>
+                <a:latin typeface="+mn-lt"/>
+                <a:ea typeface="+mn-ea"/>
+                <a:cs typeface="+mn-cs"/>
+              </a:rPr>
+              <a:t>this</a:t>
+            </a:r>
+            <a:r>
+              <a:rPr lang="en-US" sz="1200" b="0" i="0" kern="1200" dirty="0">
+                <a:solidFill>
+                  <a:schemeClr val="tx1"/>
+                </a:solidFill>
+                <a:effectLst/>
+                <a:latin typeface="+mn-lt"/>
+                <a:ea typeface="+mn-ea"/>
+                <a:cs typeface="+mn-cs"/>
+              </a:rPr>
+              <a:t> String </a:t>
+            </a:r>
+            <a:r>
+              <a:rPr lang="en-US" sz="1200" b="0" i="0" kern="1200" dirty="0" err="1">
+                <a:solidFill>
+                  <a:schemeClr val="tx1"/>
+                </a:solidFill>
+                <a:effectLst/>
+                <a:latin typeface="+mn-lt"/>
+                <a:ea typeface="+mn-ea"/>
+                <a:cs typeface="+mn-cs"/>
+              </a:rPr>
+              <a:t>str</a:t>
+            </a:r>
+            <a:r>
+              <a:rPr lang="en-US" sz="1200" b="0" i="0" kern="1200" dirty="0">
+                <a:solidFill>
+                  <a:schemeClr val="tx1"/>
+                </a:solidFill>
+                <a:effectLst/>
+                <a:latin typeface="+mn-lt"/>
+                <a:ea typeface="+mn-ea"/>
+                <a:cs typeface="+mn-cs"/>
+              </a:rPr>
+              <a:t>)  </a:t>
+            </a:r>
+          </a:p>
+          <a:p>
+            <a:r>
+              <a:rPr lang="en-US" sz="1200" b="0" i="0" kern="1200" dirty="0">
+                <a:solidFill>
+                  <a:schemeClr val="tx1"/>
+                </a:solidFill>
+                <a:effectLst/>
+                <a:latin typeface="+mn-lt"/>
+                <a:ea typeface="+mn-ea"/>
+                <a:cs typeface="+mn-cs"/>
+              </a:rPr>
+              <a:t>        {  </a:t>
+            </a:r>
+          </a:p>
+          <a:p>
+            <a:r>
+              <a:rPr lang="en-US" sz="1200" b="0" i="0" kern="1200" dirty="0">
+                <a:solidFill>
+                  <a:schemeClr val="tx1"/>
+                </a:solidFill>
+                <a:effectLst/>
+                <a:latin typeface="+mn-lt"/>
+                <a:ea typeface="+mn-ea"/>
+                <a:cs typeface="+mn-cs"/>
+              </a:rPr>
+              <a:t>            </a:t>
+            </a:r>
+            <a:r>
+              <a:rPr lang="en-US" sz="1200" b="1" i="0" kern="1200" dirty="0">
+                <a:solidFill>
+                  <a:schemeClr val="tx1"/>
+                </a:solidFill>
+                <a:effectLst/>
+                <a:latin typeface="+mn-lt"/>
+                <a:ea typeface="+mn-ea"/>
+                <a:cs typeface="+mn-cs"/>
+              </a:rPr>
+              <a:t>if</a:t>
+            </a:r>
+            <a:r>
+              <a:rPr lang="en-US" sz="1200" b="0" i="0" kern="1200" dirty="0">
+                <a:solidFill>
+                  <a:schemeClr val="tx1"/>
+                </a:solidFill>
+                <a:effectLst/>
+                <a:latin typeface="+mn-lt"/>
+                <a:ea typeface="+mn-ea"/>
+                <a:cs typeface="+mn-cs"/>
+              </a:rPr>
+              <a:t> (</a:t>
+            </a:r>
+            <a:r>
+              <a:rPr lang="en-US" sz="1200" b="0" i="0" kern="1200" dirty="0" err="1">
+                <a:solidFill>
+                  <a:schemeClr val="tx1"/>
+                </a:solidFill>
+                <a:effectLst/>
+                <a:latin typeface="+mn-lt"/>
+                <a:ea typeface="+mn-ea"/>
+                <a:cs typeface="+mn-cs"/>
+              </a:rPr>
+              <a:t>String.IsNullOrEmpty</a:t>
+            </a:r>
+            <a:r>
+              <a:rPr lang="en-US" sz="1200" b="0" i="0" kern="1200" dirty="0">
+                <a:solidFill>
+                  <a:schemeClr val="tx1"/>
+                </a:solidFill>
+                <a:effectLst/>
+                <a:latin typeface="+mn-lt"/>
+                <a:ea typeface="+mn-ea"/>
+                <a:cs typeface="+mn-cs"/>
+              </a:rPr>
+              <a:t>(</a:t>
+            </a:r>
+            <a:r>
+              <a:rPr lang="en-US" sz="1200" b="0" i="0" kern="1200" dirty="0" err="1">
+                <a:solidFill>
+                  <a:schemeClr val="tx1"/>
+                </a:solidFill>
+                <a:effectLst/>
+                <a:latin typeface="+mn-lt"/>
+                <a:ea typeface="+mn-ea"/>
+                <a:cs typeface="+mn-cs"/>
+              </a:rPr>
+              <a:t>str</a:t>
+            </a:r>
+            <a:r>
+              <a:rPr lang="en-US" sz="1200" b="0" i="0" kern="1200" dirty="0">
+                <a:solidFill>
+                  <a:schemeClr val="tx1"/>
+                </a:solidFill>
+                <a:effectLst/>
+                <a:latin typeface="+mn-lt"/>
+                <a:ea typeface="+mn-ea"/>
+                <a:cs typeface="+mn-cs"/>
+              </a:rPr>
+              <a:t>))  </a:t>
+            </a:r>
+          </a:p>
+          <a:p>
+            <a:r>
+              <a:rPr lang="en-US" sz="1200" b="0" i="0" kern="1200" dirty="0">
+                <a:solidFill>
+                  <a:schemeClr val="tx1"/>
+                </a:solidFill>
+                <a:effectLst/>
+                <a:latin typeface="+mn-lt"/>
+                <a:ea typeface="+mn-ea"/>
+                <a:cs typeface="+mn-cs"/>
+              </a:rPr>
+              <a:t>                </a:t>
+            </a:r>
+            <a:r>
+              <a:rPr lang="en-US" sz="1200" b="1" i="0" kern="1200" dirty="0">
+                <a:solidFill>
+                  <a:schemeClr val="tx1"/>
+                </a:solidFill>
+                <a:effectLst/>
+                <a:latin typeface="+mn-lt"/>
+                <a:ea typeface="+mn-ea"/>
+                <a:cs typeface="+mn-cs"/>
+              </a:rPr>
+              <a:t>return</a:t>
+            </a:r>
+            <a:r>
+              <a:rPr lang="en-US" sz="1200" b="0" i="0" kern="1200" dirty="0">
+                <a:solidFill>
+                  <a:schemeClr val="tx1"/>
+                </a:solidFill>
+                <a:effectLst/>
+                <a:latin typeface="+mn-lt"/>
+                <a:ea typeface="+mn-ea"/>
+                <a:cs typeface="+mn-cs"/>
+              </a:rPr>
+              <a:t> </a:t>
+            </a:r>
+            <a:r>
+              <a:rPr lang="en-US" sz="1200" b="0" i="0" kern="1200" dirty="0" err="1">
+                <a:solidFill>
+                  <a:schemeClr val="tx1"/>
+                </a:solidFill>
+                <a:effectLst/>
+                <a:latin typeface="+mn-lt"/>
+                <a:ea typeface="+mn-ea"/>
+                <a:cs typeface="+mn-cs"/>
+              </a:rPr>
+              <a:t>String.Empty</a:t>
+            </a:r>
+            <a:r>
+              <a:rPr lang="en-US" sz="1200" b="0" i="0" kern="1200" dirty="0">
+                <a:solidFill>
+                  <a:schemeClr val="tx1"/>
+                </a:solidFill>
+                <a:effectLst/>
+                <a:latin typeface="+mn-lt"/>
+                <a:ea typeface="+mn-ea"/>
+                <a:cs typeface="+mn-cs"/>
+              </a:rPr>
+              <a:t>;  </a:t>
+            </a:r>
+          </a:p>
+          <a:p>
+            <a:r>
+              <a:rPr lang="en-US" sz="1200" b="0" i="0" kern="1200" dirty="0">
+                <a:solidFill>
+                  <a:schemeClr val="tx1"/>
+                </a:solidFill>
+                <a:effectLst/>
+                <a:latin typeface="+mn-lt"/>
+                <a:ea typeface="+mn-ea"/>
+                <a:cs typeface="+mn-cs"/>
+              </a:rPr>
+              <a:t>  </a:t>
+            </a:r>
+          </a:p>
+          <a:p>
+            <a:r>
+              <a:rPr lang="en-US" sz="1200" b="0" i="0" kern="1200" dirty="0">
+                <a:solidFill>
+                  <a:schemeClr val="tx1"/>
+                </a:solidFill>
+                <a:effectLst/>
+                <a:latin typeface="+mn-lt"/>
+                <a:ea typeface="+mn-ea"/>
+                <a:cs typeface="+mn-cs"/>
+              </a:rPr>
+              <a:t>            </a:t>
+            </a:r>
+            <a:r>
+              <a:rPr lang="en-US" sz="1200" b="1" i="0" kern="1200" dirty="0">
+                <a:solidFill>
+                  <a:schemeClr val="tx1"/>
+                </a:solidFill>
+                <a:effectLst/>
+                <a:latin typeface="+mn-lt"/>
+                <a:ea typeface="+mn-ea"/>
+                <a:cs typeface="+mn-cs"/>
+              </a:rPr>
+              <a:t>return</a:t>
+            </a:r>
+            <a:r>
+              <a:rPr lang="en-US" sz="1200" b="0" i="0" kern="1200" dirty="0">
+                <a:solidFill>
+                  <a:schemeClr val="tx1"/>
+                </a:solidFill>
+                <a:effectLst/>
+                <a:latin typeface="+mn-lt"/>
+                <a:ea typeface="+mn-ea"/>
+                <a:cs typeface="+mn-cs"/>
+              </a:rPr>
+              <a:t> </a:t>
+            </a:r>
+            <a:r>
+              <a:rPr lang="en-US" sz="1200" b="0" i="0" kern="1200" dirty="0" err="1">
+                <a:solidFill>
+                  <a:schemeClr val="tx1"/>
+                </a:solidFill>
+                <a:effectLst/>
+                <a:latin typeface="+mn-lt"/>
+                <a:ea typeface="+mn-ea"/>
+                <a:cs typeface="+mn-cs"/>
+              </a:rPr>
+              <a:t>str.Substring</a:t>
+            </a:r>
+            <a:r>
+              <a:rPr lang="en-US" sz="1200" b="0" i="0" kern="1200" dirty="0">
+                <a:solidFill>
+                  <a:schemeClr val="tx1"/>
+                </a:solidFill>
+                <a:effectLst/>
+                <a:latin typeface="+mn-lt"/>
+                <a:ea typeface="+mn-ea"/>
+                <a:cs typeface="+mn-cs"/>
+              </a:rPr>
+              <a:t>(0, 1).</a:t>
+            </a:r>
+            <a:r>
+              <a:rPr lang="en-US" sz="1200" b="0" i="0" kern="1200" dirty="0" err="1">
+                <a:solidFill>
+                  <a:schemeClr val="tx1"/>
+                </a:solidFill>
+                <a:effectLst/>
+                <a:latin typeface="+mn-lt"/>
+                <a:ea typeface="+mn-ea"/>
+                <a:cs typeface="+mn-cs"/>
+              </a:rPr>
+              <a:t>ToUpper</a:t>
+            </a:r>
+            <a:r>
+              <a:rPr lang="en-US" sz="1200" b="0" i="0" kern="1200" dirty="0">
+                <a:solidFill>
+                  <a:schemeClr val="tx1"/>
+                </a:solidFill>
+                <a:effectLst/>
+                <a:latin typeface="+mn-lt"/>
+                <a:ea typeface="+mn-ea"/>
+                <a:cs typeface="+mn-cs"/>
+              </a:rPr>
+              <a:t>() + </a:t>
+            </a:r>
+            <a:r>
+              <a:rPr lang="en-US" sz="1200" b="0" i="0" kern="1200" dirty="0" err="1">
+                <a:solidFill>
+                  <a:schemeClr val="tx1"/>
+                </a:solidFill>
+                <a:effectLst/>
+                <a:latin typeface="+mn-lt"/>
+                <a:ea typeface="+mn-ea"/>
+                <a:cs typeface="+mn-cs"/>
+              </a:rPr>
+              <a:t>str.Substring</a:t>
+            </a:r>
+            <a:r>
+              <a:rPr lang="en-US" sz="1200" b="0" i="0" kern="1200" dirty="0">
+                <a:solidFill>
+                  <a:schemeClr val="tx1"/>
+                </a:solidFill>
+                <a:effectLst/>
+                <a:latin typeface="+mn-lt"/>
+                <a:ea typeface="+mn-ea"/>
+                <a:cs typeface="+mn-cs"/>
+              </a:rPr>
+              <a:t>(1, str.Length-1).</a:t>
+            </a:r>
+            <a:r>
+              <a:rPr lang="en-US" sz="1200" b="0" i="0" kern="1200" dirty="0" err="1">
+                <a:solidFill>
+                  <a:schemeClr val="tx1"/>
+                </a:solidFill>
+                <a:effectLst/>
+                <a:latin typeface="+mn-lt"/>
+                <a:ea typeface="+mn-ea"/>
+                <a:cs typeface="+mn-cs"/>
+              </a:rPr>
+              <a:t>ToLower</a:t>
+            </a:r>
+            <a:r>
+              <a:rPr lang="en-US" sz="1200" b="0" i="0" kern="1200" dirty="0">
+                <a:solidFill>
+                  <a:schemeClr val="tx1"/>
+                </a:solidFill>
+                <a:effectLst/>
+                <a:latin typeface="+mn-lt"/>
+                <a:ea typeface="+mn-ea"/>
+                <a:cs typeface="+mn-cs"/>
+              </a:rPr>
+              <a:t>();  </a:t>
+            </a:r>
+          </a:p>
+          <a:p>
+            <a:r>
+              <a:rPr lang="en-US" sz="1200" b="0" i="0" kern="1200" dirty="0">
+                <a:solidFill>
+                  <a:schemeClr val="tx1"/>
+                </a:solidFill>
+                <a:effectLst/>
+                <a:latin typeface="+mn-lt"/>
+                <a:ea typeface="+mn-ea"/>
+                <a:cs typeface="+mn-cs"/>
+              </a:rPr>
+              <a:t>        }  </a:t>
+            </a:r>
+          </a:p>
+          <a:p>
+            <a:r>
+              <a:rPr lang="en-US" sz="1200" b="0" i="0" kern="1200" dirty="0">
+                <a:solidFill>
+                  <a:schemeClr val="tx1"/>
+                </a:solidFill>
+                <a:effectLst/>
+                <a:latin typeface="+mn-lt"/>
+                <a:ea typeface="+mn-ea"/>
+                <a:cs typeface="+mn-cs"/>
+              </a:rPr>
+              <a:t>    }  </a:t>
+            </a:r>
+          </a:p>
+          <a:p>
+            <a:endParaRPr lang="en-US" dirty="0"/>
+          </a:p>
+          <a:p>
+            <a:r>
+              <a:rPr lang="en-US" dirty="0"/>
+              <a:t>Having this in the scope, we can now write:</a:t>
+            </a:r>
+            <a:br>
+              <a:rPr lang="en-US" dirty="0"/>
+            </a:br>
+            <a:br>
+              <a:rPr lang="en-US" dirty="0"/>
+            </a:br>
+            <a:r>
+              <a:rPr lang="en-US" dirty="0"/>
+              <a:t>   String z = “hello”</a:t>
+            </a:r>
+            <a:br>
+              <a:rPr lang="en-US" dirty="0"/>
+            </a:br>
+            <a:r>
+              <a:rPr lang="en-US" dirty="0"/>
+              <a:t>    z = </a:t>
             </a:r>
             <a:r>
               <a:rPr lang="en-US" dirty="0" err="1"/>
-              <a:t>easymock</a:t>
+              <a:t>z.UpperFirst</a:t>
             </a:r>
             <a:r>
               <a:rPr lang="en-US" dirty="0"/>
-              <a:t>, etc. </a:t>
-            </a:r>
+              <a:t>()</a:t>
+            </a:r>
+            <a:br>
+              <a:rPr lang="en-US" dirty="0"/>
+            </a:br>
+            <a:br>
+              <a:rPr lang="en-US" dirty="0"/>
+            </a:br>
+            <a:r>
+              <a:rPr lang="en-US" dirty="0"/>
+              <a:t>So what </a:t>
+            </a:r>
+            <a:r>
+              <a:rPr lang="en-US" dirty="0" err="1"/>
+              <a:t>NSubstutute</a:t>
+            </a:r>
+            <a:r>
+              <a:rPr lang="en-US" dirty="0"/>
+              <a:t> does is likely to extend return types of mocked methods, including primitives, with the method “Returns”.</a:t>
+            </a:r>
+          </a:p>
+          <a:p>
+            <a:endParaRPr lang="en-US" dirty="0"/>
           </a:p>
           <a:p>
             <a:endParaRPr lang="en-US" dirty="0"/>
@@ -2402,7 +2365,7 @@
             <a:pPr>
               <a:defRPr/>
             </a:pPr>
-            <a:fld id="{EC5B1458-9BA2-4FCA-B083-2E2B2AD6D16B}" type="slidenum">
+            <a:fld id="{F84EA20E-9838-494E-B9DD-2C988F7E650A}" type="slidenum">
               <a:rPr lang="en-US" smtClean="0"/>
               <a:pPr>
                 <a:defRPr/>
@@ -2416,7 +2379,7 @@
     </p:spTree>
     <p:extLst>
       <p:ext uri="{BB962C8B-B14F-4D97-AF65-F5344CB8AC3E}">
-        <p14:creationId xmlns:p14="http://schemas.microsoft.com/office/powerpoint/2010/main" val="4226131157"/>
+        <p14:creationId xmlns:p14="http://schemas.microsoft.com/office/powerpoint/2010/main" val="812723745"/>
       </p:ext>
     </p:extLst>
   </p:cSld>
@@ -2522,7 +2485,7 @@
             </a:r>
             <a:r>
               <a:rPr lang="en-US" dirty="0"/>
-              <a:t>; however this is not how AO defines it. Instead, it is to test that “modules” connect properly. The modules are assumed to be correct individually; we just focus on their connections.</a:t>
+              <a:t>; however this is not how AO defines it. Instead, it is to test that “modules” connect properly. The modules are assumed to be correct individually; we focus on their connections.</a:t>
             </a:r>
           </a:p>
           <a:p>
@@ -2532,6 +2495,21 @@
             <a:r>
               <a:rPr lang="en-US" dirty="0"/>
               <a:t>Module test is to test that a module behaves correctly.</a:t>
+            </a:r>
+          </a:p>
+          <a:p>
+            <a:endParaRPr lang="en-US" dirty="0"/>
+          </a:p>
+          <a:p>
+            <a:r>
+              <a:rPr lang="en-US" dirty="0"/>
+              <a:t>Arch, design: e.g. that a system follows a client-server architecture.</a:t>
+            </a:r>
+          </a:p>
+          <a:p>
+            <a:r>
+              <a:rPr lang="en-US" dirty="0"/>
+              <a:t>Detailed design could be class diagrams of the client-side and server-side.</a:t>
             </a:r>
           </a:p>
         </p:txBody>
@@ -2581,6 +2559,134 @@
     <p:extLst>
       <p:ext uri="{BB962C8B-B14F-4D97-AF65-F5344CB8AC3E}">
         <p14:creationId xmlns:p14="http://schemas.microsoft.com/office/powerpoint/2010/main" val="155889920"/>
+      </p:ext>
+    </p:extLst>
+  </p:cSld>
+  <p:clrMapOvr>
+    <a:masterClrMapping/>
+  </p:clrMapOvr>
+</p:notes>
+</file>
+
+<file path=ppt/notesSlides/notesSlide20.xml><?xml version="1.0" encoding="utf-8"?>
+<p:notes xmlns:a="http://schemas.openxmlformats.org/drawingml/2006/main" xmlns:r="http://schemas.openxmlformats.org/officeDocument/2006/relationships" xmlns:p="http://schemas.openxmlformats.org/presentationml/2006/main">
+  <p:cSld>
+    <p:spTree>
+      <p:nvGrpSpPr>
+        <p:cNvPr id="1" name=""/>
+        <p:cNvGrpSpPr/>
+        <p:nvPr/>
+      </p:nvGrpSpPr>
+      <p:grpSpPr>
+        <a:xfrm>
+          <a:off x="0" y="0"/>
+          <a:ext cx="0" cy="0"/>
+          <a:chOff x="0" y="0"/>
+          <a:chExt cx="0" cy="0"/>
+        </a:xfrm>
+      </p:grpSpPr>
+      <p:sp>
+        <p:nvSpPr>
+          <p:cNvPr id="55298" name="Slide Image Placeholder 1"/>
+          <p:cNvSpPr>
+            <a:spLocks noGrp="1" noRot="1" noChangeAspect="1" noTextEdit="1"/>
+          </p:cNvSpPr>
+          <p:nvPr>
+            <p:ph type="sldImg"/>
+          </p:nvPr>
+        </p:nvSpPr>
+        <p:spPr bwMode="auto">
+          <a:noFill/>
+          <a:ln>
+            <a:solidFill>
+              <a:srgbClr val="000000"/>
+            </a:solidFill>
+            <a:miter lim="800000"/>
+            <a:headEnd/>
+            <a:tailEnd/>
+          </a:ln>
+        </p:spPr>
+      </p:sp>
+      <p:sp>
+        <p:nvSpPr>
+          <p:cNvPr id="55299" name="Notes Placeholder 2"/>
+          <p:cNvSpPr>
+            <a:spLocks noGrp="1"/>
+          </p:cNvSpPr>
+          <p:nvPr>
+            <p:ph type="body" idx="1"/>
+          </p:nvPr>
+        </p:nvSpPr>
+        <p:spPr bwMode="auto">
+          <a:noFill/>
+        </p:spPr>
+        <p:txBody>
+          <a:bodyPr wrap="square" numCol="1" anchor="t" anchorCtr="0" compatLnSpc="1">
+            <a:prstTxWarp prst="textNoShape">
+              <a:avLst/>
+            </a:prstTxWarp>
+          </a:bodyPr>
+          <a:lstStyle/>
+          <a:p>
+            <a:r>
+              <a:rPr lang="en-US" dirty="0"/>
+              <a:t>There are other mock framework for .NET, e.g. </a:t>
+            </a:r>
+            <a:r>
+              <a:rPr lang="en-US" dirty="0" err="1"/>
+              <a:t>Moq</a:t>
+            </a:r>
+            <a:r>
+              <a:rPr lang="en-US" dirty="0"/>
+              <a:t>, rhino, </a:t>
+            </a:r>
+            <a:r>
+              <a:rPr lang="en-US" dirty="0" err="1"/>
+              <a:t>easymock</a:t>
+            </a:r>
+            <a:r>
+              <a:rPr lang="en-US" dirty="0"/>
+              <a:t>, etc. </a:t>
+            </a:r>
+          </a:p>
+          <a:p>
+            <a:endParaRPr lang="en-US" dirty="0"/>
+          </a:p>
+        </p:txBody>
+      </p:sp>
+      <p:sp>
+        <p:nvSpPr>
+          <p:cNvPr id="4" name="Slide Number Placeholder 3"/>
+          <p:cNvSpPr>
+            <a:spLocks noGrp="1"/>
+          </p:cNvSpPr>
+          <p:nvPr>
+            <p:ph type="sldNum" sz="quarter" idx="5"/>
+          </p:nvPr>
+        </p:nvSpPr>
+        <p:spPr/>
+        <p:txBody>
+          <a:bodyPr/>
+          <a:lstStyle/>
+          <a:p>
+            <a:pPr>
+              <a:defRPr/>
+            </a:pPr>
+            <a:fld id="{EC5B1458-9BA2-4FCA-B083-2E2B2AD6D16B}" type="slidenum">
+              <a:rPr lang="en-US" smtClean="0"/>
+              <a:pPr>
+                <a:defRPr/>
+              </a:pPr>
+              <a:t>47</a:t>
+            </a:fld>
+            <a:endParaRPr lang="en-US"/>
+          </a:p>
+        </p:txBody>
+      </p:sp>
+    </p:spTree>
+    <p:extLst>
+      <p:ext uri="{BB962C8B-B14F-4D97-AF65-F5344CB8AC3E}">
+        <p14:creationId xmlns:p14="http://schemas.microsoft.com/office/powerpoint/2010/main" val="4226131157"/>
       </p:ext>
     </p:extLst>
   </p:cSld>
@@ -3248,7 +3354,7 @@
           <a:bodyPr/>
           <a:lstStyle/>
           <a:p>
-            <a:endParaRPr lang="en-US" dirty="0"/>
+            <a:endParaRPr lang="en-NL" dirty="0"/>
           </a:p>
         </p:txBody>
       </p:sp>
@@ -3275,7 +3381,7 @@
               <a:pPr>
                 <a:defRPr/>
               </a:pPr>
-              <a:t>29</a:t>
+              <a:t>27</a:t>
             </a:fld>
             <a:endParaRPr lang="en-US"/>
           </a:p>
@@ -3284,7 +3390,7 @@
     </p:spTree>
     <p:extLst>
       <p:ext uri="{BB962C8B-B14F-4D97-AF65-F5344CB8AC3E}">
-        <p14:creationId xmlns:p14="http://schemas.microsoft.com/office/powerpoint/2010/main" val="208245241"/>
+        <p14:creationId xmlns:p14="http://schemas.microsoft.com/office/powerpoint/2010/main" val="3368623455"/>
       </p:ext>
     </p:extLst>
   </p:cSld>
@@ -3338,7 +3444,7 @@
           <a:bodyPr/>
           <a:lstStyle/>
           <a:p>
-            <a:endParaRPr lang="en-NL" dirty="0"/>
+            <a:endParaRPr lang="en-US" dirty="0"/>
           </a:p>
         </p:txBody>
       </p:sp>
@@ -3365,7 +3471,7 @@
               <a:pPr>
                 <a:defRPr/>
               </a:pPr>
-              <a:t>31</a:t>
+              <a:t>30</a:t>
             </a:fld>
             <a:endParaRPr lang="en-US"/>
           </a:p>
@@ -3374,7 +3480,7 @@
     </p:spTree>
     <p:extLst>
       <p:ext uri="{BB962C8B-B14F-4D97-AF65-F5344CB8AC3E}">
-        <p14:creationId xmlns:p14="http://schemas.microsoft.com/office/powerpoint/2010/main" val="1863108249"/>
+        <p14:creationId xmlns:p14="http://schemas.microsoft.com/office/powerpoint/2010/main" val="208245241"/>
       </p:ext>
     </p:extLst>
   </p:cSld>
@@ -3580,7 +3686,7 @@
               <a:pPr>
                 <a:defRPr/>
               </a:pPr>
-              <a:t>16-04-2026</a:t>
+              <a:t>20-04-2026</a:t>
             </a:fld>
             <a:endParaRPr lang="en-US"/>
           </a:p>
@@ -3770,7 +3876,7 @@
               <a:pPr>
                 <a:defRPr/>
               </a:pPr>
-              <a:t>16-04-2026</a:t>
+              <a:t>20-04-2026</a:t>
             </a:fld>
             <a:endParaRPr lang="en-US"/>
           </a:p>
@@ -3970,7 +4076,7 @@
               <a:pPr>
                 <a:defRPr/>
               </a:pPr>
-              <a:t>16-04-2026</a:t>
+              <a:t>20-04-2026</a:t>
             </a:fld>
             <a:endParaRPr lang="en-US"/>
           </a:p>
@@ -4166,7 +4272,7 @@
               <a:pPr>
                 <a:defRPr/>
               </a:pPr>
-              <a:t>16-04-2026</a:t>
+              <a:t>20-04-2026</a:t>
             </a:fld>
             <a:endParaRPr lang="en-US"/>
           </a:p>
@@ -4433,7 +4539,7 @@
               <a:pPr>
                 <a:defRPr/>
               </a:pPr>
-              <a:t>16-04-2026</a:t>
+              <a:t>20-04-2026</a:t>
             </a:fld>
             <a:endParaRPr lang="en-US"/>
           </a:p>
@@ -4740,7 +4846,7 @@
               <a:pPr>
                 <a:defRPr/>
               </a:pPr>
-              <a:t>16-04-2026</a:t>
+              <a:t>20-04-2026</a:t>
             </a:fld>
             <a:endParaRPr lang="en-US"/>
           </a:p>
@@ -5181,7 +5287,7 @@
               <a:pPr>
                 <a:defRPr/>
               </a:pPr>
-              <a:t>16-04-2026</a:t>
+              <a:t>20-04-2026</a:t>
             </a:fld>
             <a:endParaRPr lang="en-US"/>
           </a:p>
@@ -5326,7 +5432,7 @@
               <a:pPr>
                 <a:defRPr/>
               </a:pPr>
-              <a:t>16-04-2026</a:t>
+              <a:t>20-04-2026</a:t>
             </a:fld>
             <a:endParaRPr lang="en-US"/>
           </a:p>
@@ -5443,7 +5549,7 @@
               <a:pPr>
                 <a:defRPr/>
               </a:pPr>
-              <a:t>16-04-2026</a:t>
+              <a:t>20-04-2026</a:t>
             </a:fld>
             <a:endParaRPr lang="en-US"/>
           </a:p>
@@ -5740,7 +5846,7 @@
               <a:pPr>
                 <a:defRPr/>
               </a:pPr>
-              <a:t>16-04-2026</a:t>
+              <a:t>20-04-2026</a:t>
             </a:fld>
             <a:endParaRPr lang="en-US"/>
           </a:p>
@@ -6020,7 +6126,7 @@
               <a:pPr>
                 <a:defRPr/>
               </a:pPr>
-              <a:t>16-04-2026</a:t>
+              <a:t>20-04-2026</a:t>
             </a:fld>
             <a:endParaRPr lang="en-US"/>
           </a:p>
@@ -6276,7 +6382,7 @@
               <a:pPr>
                 <a:defRPr/>
               </a:pPr>
-              <a:t>16-04-2026</a:t>
+              <a:t>20-04-2026</a:t>
             </a:fld>
             <a:endParaRPr lang="en-US"/>
           </a:p>
@@ -13159,6 +13265,528 @@
       </p:grpSpPr>
       <p:sp>
         <p:nvSpPr>
+          <p:cNvPr id="8" name="Rectangle 7">
+            <a:extLst>
+              <a:ext uri="{FF2B5EF4-FFF2-40B4-BE49-F238E27FC236}">
+                <a16:creationId xmlns:a16="http://schemas.microsoft.com/office/drawing/2014/main" id="{8DD6AEDB-7CFA-2849-86E4-FA053EC58CA4}"/>
+              </a:ext>
+            </a:extLst>
+          </p:cNvPr>
+          <p:cNvSpPr/>
+          <p:nvPr/>
+        </p:nvSpPr>
+        <p:spPr>
+          <a:xfrm>
+            <a:off x="1366630" y="3337241"/>
+            <a:ext cx="6768752" cy="888421"/>
+          </a:xfrm>
+          <a:prstGeom prst="rect">
+            <a:avLst/>
+          </a:prstGeom>
+          <a:solidFill>
+            <a:schemeClr val="accent1">
+              <a:lumMod val="20000"/>
+              <a:lumOff val="80000"/>
+            </a:schemeClr>
+          </a:solidFill>
+          <a:ln>
+            <a:noFill/>
+          </a:ln>
+        </p:spPr>
+        <p:style>
+          <a:lnRef idx="2">
+            <a:schemeClr val="accent1">
+              <a:shade val="50000"/>
+            </a:schemeClr>
+          </a:lnRef>
+          <a:fillRef idx="1">
+            <a:schemeClr val="accent1"/>
+          </a:fillRef>
+          <a:effectRef idx="0">
+            <a:schemeClr val="accent1"/>
+          </a:effectRef>
+          <a:fontRef idx="minor">
+            <a:schemeClr val="lt1"/>
+          </a:fontRef>
+        </p:style>
+        <p:txBody>
+          <a:bodyPr rtlCol="0" anchor="ctr"/>
+          <a:lstStyle/>
+          <a:p>
+            <a:pPr algn="ctr"/>
+            <a:endParaRPr lang="en-US"/>
+          </a:p>
+        </p:txBody>
+      </p:sp>
+      <p:sp>
+        <p:nvSpPr>
+          <p:cNvPr id="7" name="Rectangle 6">
+            <a:extLst>
+              <a:ext uri="{FF2B5EF4-FFF2-40B4-BE49-F238E27FC236}">
+                <a16:creationId xmlns:a16="http://schemas.microsoft.com/office/drawing/2014/main" id="{865D57E9-10EA-DC48-A35F-5D328CCEEBA2}"/>
+              </a:ext>
+            </a:extLst>
+          </p:cNvPr>
+          <p:cNvSpPr/>
+          <p:nvPr/>
+        </p:nvSpPr>
+        <p:spPr>
+          <a:xfrm>
+            <a:off x="1366630" y="2169943"/>
+            <a:ext cx="6693917" cy="549786"/>
+          </a:xfrm>
+          <a:prstGeom prst="rect">
+            <a:avLst/>
+          </a:prstGeom>
+          <a:solidFill>
+            <a:schemeClr val="accent6">
+              <a:lumMod val="20000"/>
+              <a:lumOff val="80000"/>
+            </a:schemeClr>
+          </a:solidFill>
+          <a:ln>
+            <a:noFill/>
+          </a:ln>
+        </p:spPr>
+        <p:style>
+          <a:lnRef idx="2">
+            <a:schemeClr val="accent1">
+              <a:shade val="50000"/>
+            </a:schemeClr>
+          </a:lnRef>
+          <a:fillRef idx="1">
+            <a:schemeClr val="accent1"/>
+          </a:fillRef>
+          <a:effectRef idx="0">
+            <a:schemeClr val="accent1"/>
+          </a:effectRef>
+          <a:fontRef idx="minor">
+            <a:schemeClr val="lt1"/>
+          </a:fontRef>
+        </p:style>
+        <p:txBody>
+          <a:bodyPr rtlCol="0" anchor="ctr"/>
+          <a:lstStyle/>
+          <a:p>
+            <a:pPr algn="ctr"/>
+            <a:endParaRPr lang="en-US"/>
+          </a:p>
+        </p:txBody>
+      </p:sp>
+      <p:sp>
+        <p:nvSpPr>
+          <p:cNvPr id="4" name="Slide Number Placeholder 3">
+            <a:extLst>
+              <a:ext uri="{FF2B5EF4-FFF2-40B4-BE49-F238E27FC236}">
+                <a16:creationId xmlns:a16="http://schemas.microsoft.com/office/drawing/2014/main" id="{A0635836-6B09-BE46-9567-B5FC9EDDFB77}"/>
+              </a:ext>
+            </a:extLst>
+          </p:cNvPr>
+          <p:cNvSpPr>
+            <a:spLocks noGrp="1"/>
+          </p:cNvSpPr>
+          <p:nvPr>
+            <p:ph type="sldNum" sz="quarter" idx="12"/>
+          </p:nvPr>
+        </p:nvSpPr>
+        <p:spPr/>
+        <p:txBody>
+          <a:bodyPr/>
+          <a:lstStyle/>
+          <a:p>
+            <a:pPr>
+              <a:defRPr/>
+            </a:pPr>
+            <a:fld id="{F7C0A3F7-46F3-44CF-95B7-0304031AA6EA}" type="slidenum">
+              <a:rPr lang="en-US" smtClean="0"/>
+              <a:pPr>
+                <a:defRPr/>
+              </a:pPr>
+              <a:t>27</a:t>
+            </a:fld>
+            <a:endParaRPr lang="en-US"/>
+          </a:p>
+        </p:txBody>
+      </p:sp>
+      <p:sp>
+        <p:nvSpPr>
+          <p:cNvPr id="6" name="TextBox 5">
+            <a:extLst>
+              <a:ext uri="{FF2B5EF4-FFF2-40B4-BE49-F238E27FC236}">
+                <a16:creationId xmlns:a16="http://schemas.microsoft.com/office/drawing/2014/main" id="{607B612B-B4DF-7F40-B329-77F2A8728107}"/>
+              </a:ext>
+            </a:extLst>
+          </p:cNvPr>
+          <p:cNvSpPr txBox="1"/>
+          <p:nvPr/>
+        </p:nvSpPr>
+        <p:spPr>
+          <a:xfrm>
+            <a:off x="1187624" y="1700808"/>
+            <a:ext cx="7165231" cy="2862322"/>
+          </a:xfrm>
+          <a:prstGeom prst="rect">
+            <a:avLst/>
+          </a:prstGeom>
+          <a:noFill/>
+        </p:spPr>
+        <p:txBody>
+          <a:bodyPr wrap="none" rtlCol="0">
+            <a:spAutoFit/>
+          </a:bodyPr>
+          <a:lstStyle/>
+          <a:p>
+            <a:r>
+              <a:rPr lang="en-US" dirty="0"/>
+              <a:t>bool </a:t>
+            </a:r>
+            <a:r>
+              <a:rPr lang="en-US" b="1" dirty="0" err="1">
+                <a:solidFill>
+                  <a:schemeClr val="accent1">
+                    <a:lumMod val="50000"/>
+                  </a:schemeClr>
+                </a:solidFill>
+              </a:rPr>
+              <a:t>TriTypeSpec</a:t>
+            </a:r>
+            <a:r>
+              <a:rPr lang="en-US" dirty="0"/>
+              <a:t>(float a, float b, float c) {</a:t>
+            </a:r>
+            <a:br>
+              <a:rPr lang="en-US" dirty="0"/>
+            </a:br>
+            <a:endParaRPr lang="en-US" dirty="0"/>
+          </a:p>
+          <a:p>
+            <a:r>
+              <a:rPr lang="en-US" dirty="0"/>
+              <a:t>    </a:t>
+            </a:r>
+            <a:r>
+              <a:rPr lang="en-US" b="1" dirty="0"/>
+              <a:t>Assume</a:t>
+            </a:r>
+            <a:r>
+              <a:rPr lang="en-US" dirty="0"/>
+              <a:t>(a&gt;0 &amp;&amp; b&gt;0 &amp;&amp; c&gt;0 &amp;&amp; ...)  ; </a:t>
+            </a:r>
+          </a:p>
+          <a:p>
+            <a:endParaRPr lang="en-US" dirty="0"/>
+          </a:p>
+          <a:p>
+            <a:r>
+              <a:rPr lang="en-US" dirty="0"/>
+              <a:t>    var </a:t>
+            </a:r>
+            <a:r>
+              <a:rPr lang="en-US" dirty="0" err="1"/>
+              <a:t>retval</a:t>
+            </a:r>
+            <a:r>
+              <a:rPr lang="en-US" dirty="0"/>
+              <a:t> = </a:t>
+            </a:r>
+            <a:r>
+              <a:rPr lang="en-US" dirty="0" err="1"/>
+              <a:t>TriType</a:t>
+            </a:r>
+            <a:r>
+              <a:rPr lang="en-US" dirty="0"/>
+              <a:t>(</a:t>
+            </a:r>
+            <a:r>
+              <a:rPr lang="en-US" dirty="0" err="1"/>
+              <a:t>a,b,c</a:t>
+            </a:r>
+            <a:r>
+              <a:rPr lang="en-US" dirty="0"/>
+              <a:t>) </a:t>
+            </a:r>
+            <a:br>
+              <a:rPr lang="en-US" dirty="0"/>
+            </a:br>
+            <a:r>
+              <a:rPr lang="en-US" dirty="0"/>
+              <a:t>       </a:t>
+            </a:r>
+          </a:p>
+          <a:p>
+            <a:r>
+              <a:rPr lang="en-US" b="1" dirty="0"/>
+              <a:t>     </a:t>
+            </a:r>
+            <a:r>
+              <a:rPr lang="en-US" b="1" dirty="0" err="1"/>
+              <a:t>Assert.True</a:t>
+            </a:r>
+            <a:r>
+              <a:rPr lang="en-US" dirty="0"/>
+              <a:t>((</a:t>
+            </a:r>
+            <a:r>
+              <a:rPr lang="en-US" dirty="0" err="1"/>
+              <a:t>retval</a:t>
+            </a:r>
+            <a:r>
+              <a:rPr lang="en-US" dirty="0"/>
+              <a:t> == Equilateral) == (a==b &amp;&amp; b==c &amp;&amp; a==c)) </a:t>
+            </a:r>
+            <a:br>
+              <a:rPr lang="en-US" dirty="0"/>
+            </a:br>
+            <a:r>
+              <a:rPr lang="en-US" dirty="0"/>
+              <a:t>     </a:t>
+            </a:r>
+            <a:r>
+              <a:rPr lang="en-US" b="1" dirty="0" err="1"/>
+              <a:t>Assert.True</a:t>
+            </a:r>
+            <a:r>
+              <a:rPr lang="en-US" dirty="0"/>
+              <a:t>((</a:t>
+            </a:r>
+            <a:r>
+              <a:rPr lang="en-US" dirty="0" err="1"/>
+              <a:t>retval</a:t>
+            </a:r>
+            <a:r>
+              <a:rPr lang="en-US" dirty="0"/>
+              <a:t> == Scalene) == (a!=b &amp;&amp; b!=c &amp;&amp; a!=c)) </a:t>
+            </a:r>
+          </a:p>
+          <a:p>
+            <a:r>
+              <a:rPr lang="en-US" dirty="0"/>
+              <a:t>     </a:t>
+            </a:r>
+            <a:r>
+              <a:rPr lang="en-US" b="1" dirty="0" err="1"/>
+              <a:t>Assert.True</a:t>
+            </a:r>
+            <a:r>
+              <a:rPr lang="en-US" dirty="0"/>
+              <a:t>((</a:t>
+            </a:r>
+            <a:r>
+              <a:rPr lang="en-US" dirty="0" err="1"/>
+              <a:t>retval</a:t>
+            </a:r>
+            <a:r>
+              <a:rPr lang="en-US" dirty="0"/>
+              <a:t> == Isosceles) == ...) </a:t>
+            </a:r>
+          </a:p>
+          <a:p>
+            <a:r>
+              <a:rPr lang="en-US" dirty="0"/>
+              <a:t>}</a:t>
+            </a:r>
+          </a:p>
+        </p:txBody>
+      </p:sp>
+      <p:sp>
+        <p:nvSpPr>
+          <p:cNvPr id="9" name="TextBox 8">
+            <a:extLst>
+              <a:ext uri="{FF2B5EF4-FFF2-40B4-BE49-F238E27FC236}">
+                <a16:creationId xmlns:a16="http://schemas.microsoft.com/office/drawing/2014/main" id="{1CC8CD51-0FE0-CA48-827F-41B3722835CD}"/>
+              </a:ext>
+            </a:extLst>
+          </p:cNvPr>
+          <p:cNvSpPr txBox="1"/>
+          <p:nvPr/>
+        </p:nvSpPr>
+        <p:spPr>
+          <a:xfrm>
+            <a:off x="100467" y="2294711"/>
+            <a:ext cx="1087157" cy="276999"/>
+          </a:xfrm>
+          <a:prstGeom prst="rect">
+            <a:avLst/>
+          </a:prstGeom>
+          <a:noFill/>
+        </p:spPr>
+        <p:txBody>
+          <a:bodyPr wrap="none" rtlCol="0">
+            <a:spAutoFit/>
+          </a:bodyPr>
+          <a:lstStyle/>
+          <a:p>
+            <a:r>
+              <a:rPr lang="en-US" sz="1200" dirty="0"/>
+              <a:t>Pre-condition</a:t>
+            </a:r>
+          </a:p>
+        </p:txBody>
+      </p:sp>
+      <p:sp>
+        <p:nvSpPr>
+          <p:cNvPr id="10" name="TextBox 9">
+            <a:extLst>
+              <a:ext uri="{FF2B5EF4-FFF2-40B4-BE49-F238E27FC236}">
+                <a16:creationId xmlns:a16="http://schemas.microsoft.com/office/drawing/2014/main" id="{87B9D47E-01C2-F841-B51E-F06572696EC8}"/>
+              </a:ext>
+            </a:extLst>
+          </p:cNvPr>
+          <p:cNvSpPr txBox="1"/>
+          <p:nvPr/>
+        </p:nvSpPr>
+        <p:spPr>
+          <a:xfrm>
+            <a:off x="90117" y="3606035"/>
+            <a:ext cx="1156086" cy="276999"/>
+          </a:xfrm>
+          <a:prstGeom prst="rect">
+            <a:avLst/>
+          </a:prstGeom>
+          <a:noFill/>
+        </p:spPr>
+        <p:txBody>
+          <a:bodyPr wrap="none" rtlCol="0">
+            <a:spAutoFit/>
+          </a:bodyPr>
+          <a:lstStyle/>
+          <a:p>
+            <a:r>
+              <a:rPr lang="en-US" sz="1200" dirty="0"/>
+              <a:t>Post-condition</a:t>
+            </a:r>
+          </a:p>
+        </p:txBody>
+      </p:sp>
+      <p:sp>
+        <p:nvSpPr>
+          <p:cNvPr id="13" name="Title 1">
+            <a:extLst>
+              <a:ext uri="{FF2B5EF4-FFF2-40B4-BE49-F238E27FC236}">
+                <a16:creationId xmlns:a16="http://schemas.microsoft.com/office/drawing/2014/main" id="{8F021F0C-F6B7-D94A-8F7C-68B518789666}"/>
+              </a:ext>
+            </a:extLst>
+          </p:cNvPr>
+          <p:cNvSpPr>
+            <a:spLocks noGrp="1"/>
+          </p:cNvSpPr>
+          <p:nvPr>
+            <p:ph type="title"/>
+          </p:nvPr>
+        </p:nvSpPr>
+        <p:spPr>
+          <a:xfrm>
+            <a:off x="457200" y="274638"/>
+            <a:ext cx="8229600" cy="1143000"/>
+          </a:xfrm>
+        </p:spPr>
+        <p:txBody>
+          <a:bodyPr/>
+          <a:lstStyle/>
+          <a:p>
+            <a:r>
+              <a:rPr lang="en-US" sz="3600" dirty="0"/>
+              <a:t>In-code Spec v2 of </a:t>
+            </a:r>
+            <a:r>
+              <a:rPr lang="en-US" sz="3600" dirty="0" err="1"/>
+              <a:t>TriType</a:t>
+            </a:r>
+            <a:br>
+              <a:rPr lang="en-US" sz="3600" dirty="0"/>
+            </a:br>
+            <a:r>
+              <a:rPr lang="en-US" sz="2400" dirty="0"/>
+              <a:t>(encoded as a parameterized </a:t>
+            </a:r>
+            <a:r>
+              <a:rPr lang="en-US" sz="2400" dirty="0" err="1"/>
+              <a:t>NUnit</a:t>
+            </a:r>
+            <a:r>
+              <a:rPr lang="en-US" sz="2400" dirty="0"/>
+              <a:t>-test)</a:t>
+            </a:r>
+            <a:endParaRPr lang="en-US" sz="3600" dirty="0"/>
+          </a:p>
+        </p:txBody>
+      </p:sp>
+      <p:sp>
+        <p:nvSpPr>
+          <p:cNvPr id="2" name="TextBox 1">
+            <a:extLst>
+              <a:ext uri="{FF2B5EF4-FFF2-40B4-BE49-F238E27FC236}">
+                <a16:creationId xmlns:a16="http://schemas.microsoft.com/office/drawing/2014/main" id="{99A8B577-F9D1-166F-FECA-35949150556C}"/>
+              </a:ext>
+            </a:extLst>
+          </p:cNvPr>
+          <p:cNvSpPr txBox="1"/>
+          <p:nvPr/>
+        </p:nvSpPr>
+        <p:spPr>
+          <a:xfrm>
+            <a:off x="239727" y="5012679"/>
+            <a:ext cx="8652753" cy="1384995"/>
+          </a:xfrm>
+          <a:prstGeom prst="rect">
+            <a:avLst/>
+          </a:prstGeom>
+          <a:noFill/>
+        </p:spPr>
+        <p:txBody>
+          <a:bodyPr wrap="square" rtlCol="0">
+            <a:spAutoFit/>
+          </a:bodyPr>
+          <a:lstStyle/>
+          <a:p>
+            <a:r>
+              <a:rPr lang="en-NL" sz="1400" dirty="0"/>
+              <a:t>v1 (previous slide) : if the method under test commits to checking the pre-cond and is expected to throw a specific exception when the pre-cond is violated.</a:t>
+            </a:r>
+          </a:p>
+          <a:p>
+            <a:endParaRPr lang="en-NL" sz="1400" dirty="0"/>
+          </a:p>
+          <a:p>
+            <a:r>
+              <a:rPr lang="en-NL" sz="1400" dirty="0"/>
+              <a:t>v2 : if the method under test does check the pre-cond (shifting the resposibility to the caller). The Assume-construct of Nunit serves for filtering the test-input to let through only those that satisfy the assumed condition.</a:t>
+            </a:r>
+          </a:p>
+        </p:txBody>
+      </p:sp>
+    </p:spTree>
+    <p:extLst>
+      <p:ext uri="{BB962C8B-B14F-4D97-AF65-F5344CB8AC3E}">
+        <p14:creationId xmlns:p14="http://schemas.microsoft.com/office/powerpoint/2010/main" val="583818847"/>
+      </p:ext>
+    </p:extLst>
+  </p:cSld>
+  <p:clrMapOvr>
+    <a:masterClrMapping/>
+  </p:clrMapOvr>
+</p:sld>
+</file>
+
+<file path=ppt/slides/slide28.xml><?xml version="1.0" encoding="utf-8"?>
+<p:sld xmlns:a="http://schemas.openxmlformats.org/drawingml/2006/main" xmlns:r="http://schemas.openxmlformats.org/officeDocument/2006/relationships" xmlns:p="http://schemas.openxmlformats.org/presentationml/2006/main">
+  <p:cSld>
+    <p:spTree>
+      <p:nvGrpSpPr>
+        <p:cNvPr id="1" name=""/>
+        <p:cNvGrpSpPr/>
+        <p:nvPr/>
+      </p:nvGrpSpPr>
+      <p:grpSpPr>
+        <a:xfrm>
+          <a:off x="0" y="0"/>
+          <a:ext cx="0" cy="0"/>
+          <a:chOff x="0" y="0"/>
+          <a:chExt cx="0" cy="0"/>
+        </a:xfrm>
+      </p:grpSpPr>
+      <p:sp>
+        <p:nvSpPr>
           <p:cNvPr id="2" name="Title 1">
             <a:extLst>
               <a:ext uri="{FF2B5EF4-FFF2-40B4-BE49-F238E27FC236}">
@@ -13230,7 +13858,7 @@
               <a:pPr>
                 <a:defRPr/>
               </a:pPr>
-              <a:t>27</a:t>
+              <a:t>28</a:t>
             </a:fld>
             <a:endParaRPr lang="en-US"/>
           </a:p>
@@ -13531,7 +14159,7 @@
 </p:sld>
 </file>
 
-<file path=ppt/slides/slide28.xml><?xml version="1.0" encoding="utf-8"?>
+<file path=ppt/slides/slide29.xml><?xml version="1.0" encoding="utf-8"?>
 <p:sld xmlns:a="http://schemas.openxmlformats.org/drawingml/2006/main" xmlns:r="http://schemas.openxmlformats.org/officeDocument/2006/relationships" xmlns:p="http://schemas.openxmlformats.org/presentationml/2006/main">
   <p:cSld>
     <p:spTree>
@@ -13605,7 +14233,7 @@
               <a:pPr>
                 <a:defRPr/>
               </a:pPr>
-              <a:t>28</a:t>
+              <a:t>29</a:t>
             </a:fld>
             <a:endParaRPr lang="en-US"/>
           </a:p>
@@ -13771,7 +14399,311 @@
 </p:sld>
 </file>
 
-<file path=ppt/slides/slide29.xml><?xml version="1.0" encoding="utf-8"?>
+<file path=ppt/slides/slide3.xml><?xml version="1.0" encoding="utf-8"?>
+<p:sld xmlns:a="http://schemas.openxmlformats.org/drawingml/2006/main" xmlns:r="http://schemas.openxmlformats.org/officeDocument/2006/relationships" xmlns:p="http://schemas.openxmlformats.org/presentationml/2006/main">
+  <p:cSld>
+    <p:spTree>
+      <p:nvGrpSpPr>
+        <p:cNvPr id="1" name=""/>
+        <p:cNvGrpSpPr/>
+        <p:nvPr/>
+      </p:nvGrpSpPr>
+      <p:grpSpPr>
+        <a:xfrm>
+          <a:off x="0" y="0"/>
+          <a:ext cx="0" cy="0"/>
+          <a:chOff x="0" y="0"/>
+          <a:chExt cx="0" cy="0"/>
+        </a:xfrm>
+      </p:grpSpPr>
+      <p:sp>
+        <p:nvSpPr>
+          <p:cNvPr id="2" name="Title 1"/>
+          <p:cNvSpPr>
+            <a:spLocks noGrp="1"/>
+          </p:cNvSpPr>
+          <p:nvPr>
+            <p:ph type="title"/>
+          </p:nvPr>
+        </p:nvSpPr>
+        <p:spPr/>
+        <p:txBody>
+          <a:bodyPr/>
+          <a:lstStyle/>
+          <a:p>
+            <a:r>
+              <a:rPr lang="en-US" dirty="0"/>
+              <a:t>What is “testing” ?</a:t>
+            </a:r>
+          </a:p>
+        </p:txBody>
+      </p:sp>
+      <p:sp>
+        <p:nvSpPr>
+          <p:cNvPr id="3" name="Content Placeholder 2"/>
+          <p:cNvSpPr>
+            <a:spLocks noGrp="1"/>
+          </p:cNvSpPr>
+          <p:nvPr>
+            <p:ph idx="1"/>
+          </p:nvPr>
+        </p:nvSpPr>
+        <p:spPr>
+          <a:xfrm>
+            <a:off x="371227" y="4293096"/>
+            <a:ext cx="8229600" cy="1672793"/>
+          </a:xfrm>
+        </p:spPr>
+        <p:txBody>
+          <a:bodyPr/>
+          <a:lstStyle/>
+          <a:p>
+            <a:pPr marL="0" indent="0" algn="just">
+              <a:buNone/>
+            </a:pPr>
+            <a:r>
+              <a:rPr lang="en-US" sz="2400" dirty="0"/>
+              <a:t>As such, testing is a </a:t>
+            </a:r>
+            <a:r>
+              <a:rPr lang="en-US" sz="2400" dirty="0">
+                <a:solidFill>
+                  <a:schemeClr val="accent1">
+                    <a:lumMod val="50000"/>
+                  </a:schemeClr>
+                </a:solidFill>
+              </a:rPr>
+              <a:t>pragmatic</a:t>
+            </a:r>
+            <a:r>
+              <a:rPr lang="en-US" sz="2400" dirty="0"/>
+              <a:t> approach of verification (and we have to accept that it is inherently </a:t>
+            </a:r>
+            <a:r>
+              <a:rPr lang="en-US" sz="2400" dirty="0">
+                <a:solidFill>
+                  <a:schemeClr val="accent1">
+                    <a:lumMod val="50000"/>
+                  </a:schemeClr>
+                </a:solidFill>
+              </a:rPr>
+              <a:t>incomplete</a:t>
+            </a:r>
+            <a:r>
+              <a:rPr lang="en-US" sz="2400" dirty="0"/>
+              <a:t>). </a:t>
+            </a:r>
+          </a:p>
+          <a:p>
+            <a:pPr marL="0" indent="0" algn="just">
+              <a:buNone/>
+            </a:pPr>
+            <a:endParaRPr lang="en-US" sz="2400" dirty="0"/>
+          </a:p>
+        </p:txBody>
+      </p:sp>
+      <p:sp>
+        <p:nvSpPr>
+          <p:cNvPr id="4" name="Slide Number Placeholder 3"/>
+          <p:cNvSpPr>
+            <a:spLocks noGrp="1"/>
+          </p:cNvSpPr>
+          <p:nvPr>
+            <p:ph type="sldNum" sz="quarter" idx="12"/>
+          </p:nvPr>
+        </p:nvSpPr>
+        <p:spPr/>
+        <p:txBody>
+          <a:bodyPr/>
+          <a:lstStyle/>
+          <a:p>
+            <a:pPr>
+              <a:defRPr/>
+            </a:pPr>
+            <a:fld id="{F7C0A3F7-46F3-44CF-95B7-0304031AA6EA}" type="slidenum">
+              <a:rPr lang="en-US" smtClean="0"/>
+              <a:pPr>
+                <a:defRPr/>
+              </a:pPr>
+              <a:t>3</a:t>
+            </a:fld>
+            <a:endParaRPr lang="en-US"/>
+          </a:p>
+        </p:txBody>
+      </p:sp>
+      <p:sp>
+        <p:nvSpPr>
+          <p:cNvPr id="5" name="TextBox 4">
+            <a:extLst>
+              <a:ext uri="{FF2B5EF4-FFF2-40B4-BE49-F238E27FC236}">
+                <a16:creationId xmlns:a16="http://schemas.microsoft.com/office/drawing/2014/main" id="{1CEA0DEF-AFB5-E940-A155-3DFE46170E44}"/>
+              </a:ext>
+            </a:extLst>
+          </p:cNvPr>
+          <p:cNvSpPr txBox="1"/>
+          <p:nvPr/>
+        </p:nvSpPr>
+        <p:spPr>
+          <a:xfrm>
+            <a:off x="457200" y="6169580"/>
+            <a:ext cx="8057655" cy="369332"/>
+          </a:xfrm>
+          <a:prstGeom prst="rect">
+            <a:avLst/>
+          </a:prstGeom>
+          <a:noFill/>
+        </p:spPr>
+        <p:txBody>
+          <a:bodyPr wrap="none" rtlCol="0">
+            <a:spAutoFit/>
+          </a:bodyPr>
+          <a:lstStyle/>
+          <a:p>
+            <a:r>
+              <a:rPr lang="en-US" b="1" dirty="0"/>
+              <a:t>Note</a:t>
+            </a:r>
+            <a:r>
+              <a:rPr lang="en-US" dirty="0"/>
+              <a:t>: we will discuss a more complete approach in the 2</a:t>
+            </a:r>
+            <a:r>
+              <a:rPr lang="en-US" baseline="30000" dirty="0"/>
+              <a:t>nd</a:t>
+            </a:r>
+            <a:r>
+              <a:rPr lang="en-US" dirty="0"/>
+              <a:t> half of the course.</a:t>
+            </a:r>
+          </a:p>
+        </p:txBody>
+      </p:sp>
+      <p:sp>
+        <p:nvSpPr>
+          <p:cNvPr id="6" name="TextBox 5">
+            <a:extLst>
+              <a:ext uri="{FF2B5EF4-FFF2-40B4-BE49-F238E27FC236}">
+                <a16:creationId xmlns:a16="http://schemas.microsoft.com/office/drawing/2014/main" id="{25053364-4111-3F47-9791-E01D8FBEB210}"/>
+              </a:ext>
+            </a:extLst>
+          </p:cNvPr>
+          <p:cNvSpPr txBox="1"/>
+          <p:nvPr/>
+        </p:nvSpPr>
+        <p:spPr>
+          <a:xfrm>
+            <a:off x="755576" y="2420888"/>
+            <a:ext cx="7632848" cy="1384995"/>
+          </a:xfrm>
+          <a:prstGeom prst="rect">
+            <a:avLst/>
+          </a:prstGeom>
+          <a:noFill/>
+        </p:spPr>
+        <p:txBody>
+          <a:bodyPr wrap="square" rtlCol="0">
+            <a:spAutoFit/>
+          </a:bodyPr>
+          <a:lstStyle/>
+          <a:p>
+            <a:pPr algn="ctr"/>
+            <a:r>
+              <a:rPr lang="en-US" sz="2800" b="1" dirty="0"/>
+              <a:t>Testing a program</a:t>
+            </a:r>
+            <a:r>
+              <a:rPr lang="en-US" sz="2800" dirty="0"/>
+              <a:t>: verifying the correctness (or other qualities) of the program by inspecting a </a:t>
+            </a:r>
+            <a:r>
+              <a:rPr lang="en-US" sz="2800" dirty="0">
+                <a:solidFill>
+                  <a:schemeClr val="accent1">
+                    <a:lumMod val="50000"/>
+                  </a:schemeClr>
+                </a:solidFill>
+              </a:rPr>
+              <a:t>finite number</a:t>
+            </a:r>
+            <a:r>
+              <a:rPr lang="en-US" sz="2800" dirty="0"/>
+              <a:t> of executions.</a:t>
+            </a:r>
+          </a:p>
+        </p:txBody>
+      </p:sp>
+      <p:sp>
+        <p:nvSpPr>
+          <p:cNvPr id="7" name="Rounded Rectangle 6">
+            <a:extLst>
+              <a:ext uri="{FF2B5EF4-FFF2-40B4-BE49-F238E27FC236}">
+                <a16:creationId xmlns:a16="http://schemas.microsoft.com/office/drawing/2014/main" id="{470D6665-15DB-BE44-9001-368763D00C93}"/>
+              </a:ext>
+            </a:extLst>
+          </p:cNvPr>
+          <p:cNvSpPr/>
+          <p:nvPr/>
+        </p:nvSpPr>
+        <p:spPr>
+          <a:xfrm>
+            <a:off x="755576" y="2368666"/>
+            <a:ext cx="7632848" cy="1564390"/>
+          </a:xfrm>
+          <a:prstGeom prst="roundRect">
+            <a:avLst>
+              <a:gd name="adj" fmla="val 21458"/>
+            </a:avLst>
+          </a:prstGeom>
+          <a:solidFill>
+            <a:srgbClr val="FFC000">
+              <a:alpha val="25000"/>
+            </a:srgbClr>
+          </a:solidFill>
+          <a:ln>
+            <a:solidFill>
+              <a:srgbClr val="FFC000"/>
+            </a:solidFill>
+          </a:ln>
+        </p:spPr>
+        <p:style>
+          <a:lnRef idx="2">
+            <a:schemeClr val="accent1">
+              <a:shade val="50000"/>
+            </a:schemeClr>
+          </a:lnRef>
+          <a:fillRef idx="1">
+            <a:schemeClr val="accent1"/>
+          </a:fillRef>
+          <a:effectRef idx="0">
+            <a:schemeClr val="accent1"/>
+          </a:effectRef>
+          <a:fontRef idx="minor">
+            <a:schemeClr val="lt1"/>
+          </a:fontRef>
+        </p:style>
+        <p:txBody>
+          <a:bodyPr rtlCol="0" anchor="ctr"/>
+          <a:lstStyle/>
+          <a:p>
+            <a:pPr algn="ctr"/>
+            <a:endParaRPr lang="en-US"/>
+          </a:p>
+        </p:txBody>
+      </p:sp>
+    </p:spTree>
+    <p:extLst>
+      <p:ext uri="{BB962C8B-B14F-4D97-AF65-F5344CB8AC3E}">
+        <p14:creationId xmlns:p14="http://schemas.microsoft.com/office/powerpoint/2010/main" val="3215958147"/>
+      </p:ext>
+    </p:extLst>
+  </p:cSld>
+  <p:clrMapOvr>
+    <a:masterClrMapping/>
+  </p:clrMapOvr>
+</p:sld>
+</file>
+
+<file path=ppt/slides/slide30.xml><?xml version="1.0" encoding="utf-8"?>
 <p:sld xmlns:a="http://schemas.openxmlformats.org/drawingml/2006/main" xmlns:r="http://schemas.openxmlformats.org/officeDocument/2006/relationships" xmlns:p="http://schemas.openxmlformats.org/presentationml/2006/main">
   <p:cSld>
     <p:spTree>
@@ -13996,7 +14928,7 @@
               <a:pPr>
                 <a:defRPr/>
               </a:pPr>
-              <a:t>29</a:t>
+              <a:t>30</a:t>
             </a:fld>
             <a:endParaRPr lang="en-US"/>
           </a:p>
@@ -14189,7 +15121,7 @@
 </p:sld>
 </file>
 
-<file path=ppt/slides/slide3.xml><?xml version="1.0" encoding="utf-8"?>
+<file path=ppt/slides/slide31.xml><?xml version="1.0" encoding="utf-8"?>
 <p:sld xmlns:a="http://schemas.openxmlformats.org/drawingml/2006/main" xmlns:r="http://schemas.openxmlformats.org/officeDocument/2006/relationships" xmlns:p="http://schemas.openxmlformats.org/presentationml/2006/main">
   <p:cSld>
     <p:spTree>
@@ -14208,310 +15140,6 @@
       </p:grpSpPr>
       <p:sp>
         <p:nvSpPr>
-          <p:cNvPr id="2" name="Title 1"/>
-          <p:cNvSpPr>
-            <a:spLocks noGrp="1"/>
-          </p:cNvSpPr>
-          <p:nvPr>
-            <p:ph type="title"/>
-          </p:nvPr>
-        </p:nvSpPr>
-        <p:spPr/>
-        <p:txBody>
-          <a:bodyPr/>
-          <a:lstStyle/>
-          <a:p>
-            <a:r>
-              <a:rPr lang="en-US" dirty="0"/>
-              <a:t>What is “testing” ?</a:t>
-            </a:r>
-          </a:p>
-        </p:txBody>
-      </p:sp>
-      <p:sp>
-        <p:nvSpPr>
-          <p:cNvPr id="3" name="Content Placeholder 2"/>
-          <p:cNvSpPr>
-            <a:spLocks noGrp="1"/>
-          </p:cNvSpPr>
-          <p:nvPr>
-            <p:ph idx="1"/>
-          </p:nvPr>
-        </p:nvSpPr>
-        <p:spPr>
-          <a:xfrm>
-            <a:off x="371227" y="4293096"/>
-            <a:ext cx="8229600" cy="1672793"/>
-          </a:xfrm>
-        </p:spPr>
-        <p:txBody>
-          <a:bodyPr/>
-          <a:lstStyle/>
-          <a:p>
-            <a:pPr marL="0" indent="0" algn="just">
-              <a:buNone/>
-            </a:pPr>
-            <a:r>
-              <a:rPr lang="en-US" sz="2400" dirty="0"/>
-              <a:t>As such, testing is a </a:t>
-            </a:r>
-            <a:r>
-              <a:rPr lang="en-US" sz="2400" dirty="0">
-                <a:solidFill>
-                  <a:schemeClr val="accent1">
-                    <a:lumMod val="50000"/>
-                  </a:schemeClr>
-                </a:solidFill>
-              </a:rPr>
-              <a:t>pragmatic</a:t>
-            </a:r>
-            <a:r>
-              <a:rPr lang="en-US" sz="2400" dirty="0"/>
-              <a:t> approach of verification (and we have to accept that it is inherently </a:t>
-            </a:r>
-            <a:r>
-              <a:rPr lang="en-US" sz="2400" dirty="0">
-                <a:solidFill>
-                  <a:schemeClr val="accent1">
-                    <a:lumMod val="50000"/>
-                  </a:schemeClr>
-                </a:solidFill>
-              </a:rPr>
-              <a:t>incomplete</a:t>
-            </a:r>
-            <a:r>
-              <a:rPr lang="en-US" sz="2400" dirty="0"/>
-              <a:t>). </a:t>
-            </a:r>
-          </a:p>
-          <a:p>
-            <a:pPr marL="0" indent="0" algn="just">
-              <a:buNone/>
-            </a:pPr>
-            <a:endParaRPr lang="en-US" sz="2400" dirty="0"/>
-          </a:p>
-        </p:txBody>
-      </p:sp>
-      <p:sp>
-        <p:nvSpPr>
-          <p:cNvPr id="4" name="Slide Number Placeholder 3"/>
-          <p:cNvSpPr>
-            <a:spLocks noGrp="1"/>
-          </p:cNvSpPr>
-          <p:nvPr>
-            <p:ph type="sldNum" sz="quarter" idx="12"/>
-          </p:nvPr>
-        </p:nvSpPr>
-        <p:spPr/>
-        <p:txBody>
-          <a:bodyPr/>
-          <a:lstStyle/>
-          <a:p>
-            <a:pPr>
-              <a:defRPr/>
-            </a:pPr>
-            <a:fld id="{F7C0A3F7-46F3-44CF-95B7-0304031AA6EA}" type="slidenum">
-              <a:rPr lang="en-US" smtClean="0"/>
-              <a:pPr>
-                <a:defRPr/>
-              </a:pPr>
-              <a:t>3</a:t>
-            </a:fld>
-            <a:endParaRPr lang="en-US"/>
-          </a:p>
-        </p:txBody>
-      </p:sp>
-      <p:sp>
-        <p:nvSpPr>
-          <p:cNvPr id="5" name="TextBox 4">
-            <a:extLst>
-              <a:ext uri="{FF2B5EF4-FFF2-40B4-BE49-F238E27FC236}">
-                <a16:creationId xmlns:a16="http://schemas.microsoft.com/office/drawing/2014/main" id="{1CEA0DEF-AFB5-E940-A155-3DFE46170E44}"/>
-              </a:ext>
-            </a:extLst>
-          </p:cNvPr>
-          <p:cNvSpPr txBox="1"/>
-          <p:nvPr/>
-        </p:nvSpPr>
-        <p:spPr>
-          <a:xfrm>
-            <a:off x="457200" y="6169580"/>
-            <a:ext cx="8057655" cy="369332"/>
-          </a:xfrm>
-          <a:prstGeom prst="rect">
-            <a:avLst/>
-          </a:prstGeom>
-          <a:noFill/>
-        </p:spPr>
-        <p:txBody>
-          <a:bodyPr wrap="none" rtlCol="0">
-            <a:spAutoFit/>
-          </a:bodyPr>
-          <a:lstStyle/>
-          <a:p>
-            <a:r>
-              <a:rPr lang="en-US" b="1" dirty="0"/>
-              <a:t>Note</a:t>
-            </a:r>
-            <a:r>
-              <a:rPr lang="en-US" dirty="0"/>
-              <a:t>: we will discuss a more complete approach in the 2</a:t>
-            </a:r>
-            <a:r>
-              <a:rPr lang="en-US" baseline="30000" dirty="0"/>
-              <a:t>nd</a:t>
-            </a:r>
-            <a:r>
-              <a:rPr lang="en-US" dirty="0"/>
-              <a:t> half of the course.</a:t>
-            </a:r>
-          </a:p>
-        </p:txBody>
-      </p:sp>
-      <p:sp>
-        <p:nvSpPr>
-          <p:cNvPr id="6" name="TextBox 5">
-            <a:extLst>
-              <a:ext uri="{FF2B5EF4-FFF2-40B4-BE49-F238E27FC236}">
-                <a16:creationId xmlns:a16="http://schemas.microsoft.com/office/drawing/2014/main" id="{25053364-4111-3F47-9791-E01D8FBEB210}"/>
-              </a:ext>
-            </a:extLst>
-          </p:cNvPr>
-          <p:cNvSpPr txBox="1"/>
-          <p:nvPr/>
-        </p:nvSpPr>
-        <p:spPr>
-          <a:xfrm>
-            <a:off x="755576" y="2420888"/>
-            <a:ext cx="7632848" cy="1384995"/>
-          </a:xfrm>
-          <a:prstGeom prst="rect">
-            <a:avLst/>
-          </a:prstGeom>
-          <a:noFill/>
-        </p:spPr>
-        <p:txBody>
-          <a:bodyPr wrap="square" rtlCol="0">
-            <a:spAutoFit/>
-          </a:bodyPr>
-          <a:lstStyle/>
-          <a:p>
-            <a:pPr algn="ctr"/>
-            <a:r>
-              <a:rPr lang="en-US" sz="2800" b="1" dirty="0"/>
-              <a:t>Testing a program</a:t>
-            </a:r>
-            <a:r>
-              <a:rPr lang="en-US" sz="2800" dirty="0"/>
-              <a:t>: verifying the correctness (or other qualities) of the program by inspecting a </a:t>
-            </a:r>
-            <a:r>
-              <a:rPr lang="en-US" sz="2800" dirty="0">
-                <a:solidFill>
-                  <a:schemeClr val="accent1">
-                    <a:lumMod val="50000"/>
-                  </a:schemeClr>
-                </a:solidFill>
-              </a:rPr>
-              <a:t>finite number</a:t>
-            </a:r>
-            <a:r>
-              <a:rPr lang="en-US" sz="2800" dirty="0"/>
-              <a:t> of executions.</a:t>
-            </a:r>
-          </a:p>
-        </p:txBody>
-      </p:sp>
-      <p:sp>
-        <p:nvSpPr>
-          <p:cNvPr id="7" name="Rounded Rectangle 6">
-            <a:extLst>
-              <a:ext uri="{FF2B5EF4-FFF2-40B4-BE49-F238E27FC236}">
-                <a16:creationId xmlns:a16="http://schemas.microsoft.com/office/drawing/2014/main" id="{470D6665-15DB-BE44-9001-368763D00C93}"/>
-              </a:ext>
-            </a:extLst>
-          </p:cNvPr>
-          <p:cNvSpPr/>
-          <p:nvPr/>
-        </p:nvSpPr>
-        <p:spPr>
-          <a:xfrm>
-            <a:off x="755576" y="2368666"/>
-            <a:ext cx="7632848" cy="1564390"/>
-          </a:xfrm>
-          <a:prstGeom prst="roundRect">
-            <a:avLst>
-              <a:gd name="adj" fmla="val 21458"/>
-            </a:avLst>
-          </a:prstGeom>
-          <a:solidFill>
-            <a:srgbClr val="FFC000">
-              <a:alpha val="25000"/>
-            </a:srgbClr>
-          </a:solidFill>
-          <a:ln>
-            <a:solidFill>
-              <a:srgbClr val="FFC000"/>
-            </a:solidFill>
-          </a:ln>
-        </p:spPr>
-        <p:style>
-          <a:lnRef idx="2">
-            <a:schemeClr val="accent1">
-              <a:shade val="50000"/>
-            </a:schemeClr>
-          </a:lnRef>
-          <a:fillRef idx="1">
-            <a:schemeClr val="accent1"/>
-          </a:fillRef>
-          <a:effectRef idx="0">
-            <a:schemeClr val="accent1"/>
-          </a:effectRef>
-          <a:fontRef idx="minor">
-            <a:schemeClr val="lt1"/>
-          </a:fontRef>
-        </p:style>
-        <p:txBody>
-          <a:bodyPr rtlCol="0" anchor="ctr"/>
-          <a:lstStyle/>
-          <a:p>
-            <a:pPr algn="ctr"/>
-            <a:endParaRPr lang="en-US"/>
-          </a:p>
-        </p:txBody>
-      </p:sp>
-    </p:spTree>
-    <p:extLst>
-      <p:ext uri="{BB962C8B-B14F-4D97-AF65-F5344CB8AC3E}">
-        <p14:creationId xmlns:p14="http://schemas.microsoft.com/office/powerpoint/2010/main" val="3215958147"/>
-      </p:ext>
-    </p:extLst>
-  </p:cSld>
-  <p:clrMapOvr>
-    <a:masterClrMapping/>
-  </p:clrMapOvr>
-</p:sld>
-</file>
-
-<file path=ppt/slides/slide30.xml><?xml version="1.0" encoding="utf-8"?>
-<p:sld xmlns:a="http://schemas.openxmlformats.org/drawingml/2006/main" xmlns:r="http://schemas.openxmlformats.org/officeDocument/2006/relationships" xmlns:p="http://schemas.openxmlformats.org/presentationml/2006/main">
-  <p:cSld>
-    <p:spTree>
-      <p:nvGrpSpPr>
-        <p:cNvPr id="1" name=""/>
-        <p:cNvGrpSpPr/>
-        <p:nvPr/>
-      </p:nvGrpSpPr>
-      <p:grpSpPr>
-        <a:xfrm>
-          <a:off x="0" y="0"/>
-          <a:ext cx="0" cy="0"/>
-          <a:chOff x="0" y="0"/>
-          <a:chExt cx="0" cy="0"/>
-        </a:xfrm>
-      </p:grpSpPr>
-      <p:sp>
-        <p:nvSpPr>
           <p:cNvPr id="2" name="Title 1">
             <a:extLst>
               <a:ext uri="{FF2B5EF4-FFF2-40B4-BE49-F238E27FC236}">
@@ -14692,7 +15320,7 @@
               <a:pPr>
                 <a:defRPr/>
               </a:pPr>
-              <a:t>30</a:t>
+              <a:t>31</a:t>
             </a:fld>
             <a:endParaRPr lang="en-US"/>
           </a:p>
@@ -14896,7 +15524,7 @@
 </p:sld>
 </file>
 
-<file path=ppt/slides/slide31.xml><?xml version="1.0" encoding="utf-8"?>
+<file path=ppt/slides/slide32.xml><?xml version="1.0" encoding="utf-8"?>
 <p:sld xmlns:a="http://schemas.openxmlformats.org/drawingml/2006/main" xmlns:r="http://schemas.openxmlformats.org/officeDocument/2006/relationships" xmlns:p="http://schemas.openxmlformats.org/presentationml/2006/main">
   <p:cSld>
     <p:spTree>
@@ -15075,7 +15703,7 @@
               <a:pPr>
                 <a:defRPr/>
               </a:pPr>
-              <a:t>31</a:t>
+              <a:t>32</a:t>
             </a:fld>
             <a:endParaRPr lang="en-US"/>
           </a:p>
@@ -15198,7 +15826,7 @@
 </p:sld>
 </file>
 
-<file path=ppt/slides/slide32.xml><?xml version="1.0" encoding="utf-8"?>
+<file path=ppt/slides/slide33.xml><?xml version="1.0" encoding="utf-8"?>
 <p:sld xmlns:a="http://schemas.openxmlformats.org/drawingml/2006/main" xmlns:r="http://schemas.openxmlformats.org/officeDocument/2006/relationships" xmlns:p="http://schemas.openxmlformats.org/presentationml/2006/main">
   <p:cSld>
     <p:spTree>
@@ -15439,7 +16067,7 @@
               <a:pPr>
                 <a:defRPr/>
               </a:pPr>
-              <a:t>32</a:t>
+              <a:t>33</a:t>
             </a:fld>
             <a:endParaRPr lang="en-US"/>
           </a:p>
@@ -15782,224 +16410,6 @@
     <p:extLst>
       <p:ext uri="{BB962C8B-B14F-4D97-AF65-F5344CB8AC3E}">
         <p14:creationId xmlns:p14="http://schemas.microsoft.com/office/powerpoint/2010/main" val="1014134132"/>
-      </p:ext>
-    </p:extLst>
-  </p:cSld>
-  <p:clrMapOvr>
-    <a:masterClrMapping/>
-  </p:clrMapOvr>
-</p:sld>
-</file>
-
-<file path=ppt/slides/slide33.xml><?xml version="1.0" encoding="utf-8"?>
-<p:sld xmlns:a="http://schemas.openxmlformats.org/drawingml/2006/main" xmlns:r="http://schemas.openxmlformats.org/officeDocument/2006/relationships" xmlns:p="http://schemas.openxmlformats.org/presentationml/2006/main">
-  <p:cSld>
-    <p:spTree>
-      <p:nvGrpSpPr>
-        <p:cNvPr id="1" name=""/>
-        <p:cNvGrpSpPr/>
-        <p:nvPr/>
-      </p:nvGrpSpPr>
-      <p:grpSpPr>
-        <a:xfrm>
-          <a:off x="0" y="0"/>
-          <a:ext cx="0" cy="0"/>
-          <a:chOff x="0" y="0"/>
-          <a:chExt cx="0" cy="0"/>
-        </a:xfrm>
-      </p:grpSpPr>
-      <p:sp>
-        <p:nvSpPr>
-          <p:cNvPr id="2" name="Title 1"/>
-          <p:cNvSpPr>
-            <a:spLocks noGrp="1"/>
-          </p:cNvSpPr>
-          <p:nvPr>
-            <p:ph type="title"/>
-          </p:nvPr>
-        </p:nvSpPr>
-        <p:spPr>
-          <a:xfrm>
-            <a:off x="457200" y="274638"/>
-            <a:ext cx="8229600" cy="854075"/>
-          </a:xfrm>
-        </p:spPr>
-        <p:txBody>
-          <a:bodyPr/>
-          <a:lstStyle/>
-          <a:p>
-            <a:r>
-              <a:rPr lang="en-US" sz="3600" dirty="0"/>
-              <a:t>Using </a:t>
-            </a:r>
-            <a:r>
-              <a:rPr lang="en-US" sz="3600" dirty="0" err="1"/>
-              <a:t>GetIndexSpec</a:t>
-            </a:r>
-            <a:r>
-              <a:rPr lang="en-US" sz="3600" dirty="0"/>
-              <a:t> for parameterized test</a:t>
-            </a:r>
-          </a:p>
-        </p:txBody>
-      </p:sp>
-      <p:sp>
-        <p:nvSpPr>
-          <p:cNvPr id="4" name="Slide Number Placeholder 3"/>
-          <p:cNvSpPr>
-            <a:spLocks noGrp="1"/>
-          </p:cNvSpPr>
-          <p:nvPr>
-            <p:ph type="sldNum" sz="quarter" idx="12"/>
-          </p:nvPr>
-        </p:nvSpPr>
-        <p:spPr/>
-        <p:txBody>
-          <a:bodyPr/>
-          <a:lstStyle/>
-          <a:p>
-            <a:pPr>
-              <a:defRPr/>
-            </a:pPr>
-            <a:fld id="{F7E6CD0C-1625-4B59-866D-32083D4A5005}" type="slidenum">
-              <a:rPr lang="en-US" smtClean="0"/>
-              <a:pPr>
-                <a:defRPr/>
-              </a:pPr>
-              <a:t>33</a:t>
-            </a:fld>
-            <a:endParaRPr lang="en-US"/>
-          </a:p>
-        </p:txBody>
-      </p:sp>
-      <p:sp>
-        <p:nvSpPr>
-          <p:cNvPr id="5" name="TextBox 4">
-            <a:extLst>
-              <a:ext uri="{FF2B5EF4-FFF2-40B4-BE49-F238E27FC236}">
-                <a16:creationId xmlns:a16="http://schemas.microsoft.com/office/drawing/2014/main" id="{AA909054-0061-C249-9C06-B1F01647F6A6}"/>
-              </a:ext>
-            </a:extLst>
-          </p:cNvPr>
-          <p:cNvSpPr txBox="1"/>
-          <p:nvPr/>
-        </p:nvSpPr>
-        <p:spPr>
-          <a:xfrm>
-            <a:off x="1007604" y="1988840"/>
-            <a:ext cx="7128792" cy="2308324"/>
-          </a:xfrm>
-          <a:prstGeom prst="rect">
-            <a:avLst/>
-          </a:prstGeom>
-          <a:solidFill>
-            <a:schemeClr val="bg1">
-              <a:lumMod val="95000"/>
-            </a:schemeClr>
-          </a:solidFill>
-          <a:ln>
-            <a:solidFill>
-              <a:schemeClr val="accent6"/>
-            </a:solidFill>
-          </a:ln>
-        </p:spPr>
-        <p:txBody>
-          <a:bodyPr wrap="square" rtlCol="0">
-            <a:spAutoFit/>
-          </a:bodyPr>
-          <a:lstStyle/>
-          <a:p>
-            <a:r>
-              <a:rPr lang="en-US" sz="2400" dirty="0"/>
-              <a:t>[</a:t>
-            </a:r>
-            <a:r>
-              <a:rPr lang="en-US" sz="2400" b="1" dirty="0" err="1"/>
-              <a:t>TestCase</a:t>
-            </a:r>
-            <a:r>
-              <a:rPr lang="en-US" sz="2400" dirty="0"/>
-              <a:t>(0)]</a:t>
-            </a:r>
-          </a:p>
-          <a:p>
-            <a:r>
-              <a:rPr lang="en-US" sz="2400" dirty="0"/>
-              <a:t>[</a:t>
-            </a:r>
-            <a:r>
-              <a:rPr lang="en-US" sz="2400" b="1" dirty="0" err="1"/>
-              <a:t>TestCase</a:t>
-            </a:r>
-            <a:r>
-              <a:rPr lang="en-US" sz="2400" dirty="0"/>
-              <a:t>(0,1)]</a:t>
-            </a:r>
-          </a:p>
-          <a:p>
-            <a:r>
-              <a:rPr lang="en-US" sz="2400" dirty="0"/>
-              <a:t>[</a:t>
-            </a:r>
-            <a:r>
-              <a:rPr lang="en-US" sz="2400" b="1" dirty="0" err="1"/>
-              <a:t>TestCase</a:t>
-            </a:r>
-            <a:r>
-              <a:rPr lang="en-US" sz="2400" dirty="0"/>
-              <a:t>(0,0,0)]</a:t>
-            </a:r>
-          </a:p>
-          <a:p>
-            <a:r>
-              <a:rPr lang="en-US" sz="2400" dirty="0"/>
-              <a:t>[</a:t>
-            </a:r>
-            <a:r>
-              <a:rPr lang="en-US" sz="2400" b="1" dirty="0" err="1"/>
-              <a:t>TestCase</a:t>
-            </a:r>
-            <a:r>
-              <a:rPr lang="en-US" sz="2400" dirty="0"/>
-              <a:t>(0,1,1,1,0)]</a:t>
-            </a:r>
-          </a:p>
-          <a:p>
-            <a:r>
-              <a:rPr lang="en-US" sz="2400" dirty="0"/>
-              <a:t>...</a:t>
-            </a:r>
-          </a:p>
-          <a:p>
-            <a:r>
-              <a:rPr lang="en-US" sz="2400" b="1" dirty="0" err="1">
-                <a:solidFill>
-                  <a:schemeClr val="accent5">
-                    <a:lumMod val="75000"/>
-                  </a:schemeClr>
-                </a:solidFill>
-              </a:rPr>
-              <a:t>GetIndexSpec</a:t>
-            </a:r>
-            <a:r>
-              <a:rPr lang="en-US" sz="2400" dirty="0"/>
-              <a:t>(int x, </a:t>
-            </a:r>
-            <a:r>
-              <a:rPr lang="en-US" sz="2400" b="1" dirty="0"/>
-              <a:t>params</a:t>
-            </a:r>
-            <a:r>
-              <a:rPr lang="en-US" sz="2400" dirty="0"/>
-              <a:t> int[] a) { ... }</a:t>
-            </a:r>
-          </a:p>
-        </p:txBody>
-      </p:sp>
-    </p:spTree>
-    <p:extLst>
-      <p:ext uri="{BB962C8B-B14F-4D97-AF65-F5344CB8AC3E}">
-        <p14:creationId xmlns:p14="http://schemas.microsoft.com/office/powerpoint/2010/main" val="1187605672"/>
       </p:ext>
     </p:extLst>
   </p:cSld>
@@ -16028,7 +16438,7 @@
       </p:grpSpPr>
       <p:sp>
         <p:nvSpPr>
-          <p:cNvPr id="17410" name="Title 1"/>
+          <p:cNvPr id="2" name="Title 1"/>
           <p:cNvSpPr>
             <a:spLocks noGrp="1"/>
           </p:cNvSpPr>
@@ -16036,76 +16446,27 @@
             <p:ph type="title"/>
           </p:nvPr>
         </p:nvSpPr>
-        <p:spPr/>
-        <p:txBody>
-          <a:bodyPr/>
-          <a:lstStyle/>
-          <a:p>
-            <a:pPr eaLnBrk="1" hangingPunct="1"/>
-            <a:r>
-              <a:rPr lang="en-US" dirty="0"/>
-              <a:t>Specifying a “class”</a:t>
-            </a:r>
-            <a:endParaRPr lang="en-US" i="1" dirty="0"/>
-          </a:p>
-        </p:txBody>
-      </p:sp>
-      <p:sp>
-        <p:nvSpPr>
-          <p:cNvPr id="17411" name="Content Placeholder 2"/>
-          <p:cNvSpPr>
-            <a:spLocks noGrp="1"/>
-          </p:cNvSpPr>
-          <p:nvPr>
-            <p:ph idx="1"/>
-          </p:nvPr>
-        </p:nvSpPr>
         <p:spPr>
           <a:xfrm>
-            <a:off x="457200" y="1844824"/>
-            <a:ext cx="8229600" cy="4281339"/>
+            <a:off x="457200" y="274638"/>
+            <a:ext cx="8229600" cy="854075"/>
           </a:xfrm>
         </p:spPr>
         <p:txBody>
           <a:bodyPr/>
           <a:lstStyle/>
           <a:p>
-            <a:pPr eaLnBrk="1" hangingPunct="1"/>
-            <a:r>
-              <a:rPr lang="en-US" sz="2800" dirty="0"/>
-              <a:t>Many classes have methods that </a:t>
-            </a:r>
-            <a:r>
-              <a:rPr lang="en-US" sz="2800" i="1" dirty="0"/>
-              <a:t>interact with each other</a:t>
-            </a:r>
-            <a:r>
-              <a:rPr lang="en-US" sz="2800" dirty="0"/>
-              <a:t> (e.g. as in Stack).  How to specify (and test) these interactions? </a:t>
-            </a:r>
-          </a:p>
-          <a:p>
-            <a:pPr eaLnBrk="1" hangingPunct="1"/>
-            <a:r>
-              <a:rPr lang="en-US" sz="2800" dirty="0"/>
-              <a:t>Option-1: </a:t>
-            </a:r>
-            <a:r>
-              <a:rPr lang="en-US" sz="2800" dirty="0">
-                <a:sym typeface="Symbol" pitchFamily="18" charset="2"/>
-              </a:rPr>
-              <a:t>specify every method with pre- and post-conditions (we discussed this).</a:t>
-            </a:r>
-            <a:br>
-              <a:rPr lang="en-US" sz="2800" dirty="0">
-                <a:sym typeface="Symbol" pitchFamily="18" charset="2"/>
-              </a:rPr>
-            </a:br>
-            <a:r>
-              <a:rPr lang="en-US" sz="2800" dirty="0">
-                <a:sym typeface="Symbol" pitchFamily="18" charset="2"/>
-              </a:rPr>
-              <a:t>This is expressive enough, tough pre- and post-conditions do not, arguably, naturally capture inter-method interactions.</a:t>
+            <a:r>
+              <a:rPr lang="en-US" sz="3600" dirty="0"/>
+              <a:t>Using </a:t>
+            </a:r>
+            <a:r>
+              <a:rPr lang="en-US" sz="3600" dirty="0" err="1"/>
+              <a:t>GetIndexSpec</a:t>
+            </a:r>
+            <a:r>
+              <a:rPr lang="en-US" sz="3600" dirty="0"/>
+              <a:t> for parameterized test</a:t>
             </a:r>
           </a:p>
         </p:txBody>
@@ -16128,7 +16489,7 @@
             <a:pPr>
               <a:defRPr/>
             </a:pPr>
-            <a:fld id="{4D00519D-647D-4135-80EB-ECBDAE25E06C}" type="slidenum">
+            <a:fld id="{F7E6CD0C-1625-4B59-866D-32083D4A5005}" type="slidenum">
               <a:rPr lang="en-US" smtClean="0"/>
               <a:pPr>
                 <a:defRPr/>
@@ -16139,10 +16500,134 @@
           </a:p>
         </p:txBody>
       </p:sp>
+      <p:sp>
+        <p:nvSpPr>
+          <p:cNvPr id="5" name="TextBox 4">
+            <a:extLst>
+              <a:ext uri="{FF2B5EF4-FFF2-40B4-BE49-F238E27FC236}">
+                <a16:creationId xmlns:a16="http://schemas.microsoft.com/office/drawing/2014/main" id="{AA909054-0061-C249-9C06-B1F01647F6A6}"/>
+              </a:ext>
+            </a:extLst>
+          </p:cNvPr>
+          <p:cNvSpPr txBox="1"/>
+          <p:nvPr/>
+        </p:nvSpPr>
+        <p:spPr>
+          <a:xfrm>
+            <a:off x="1007604" y="1988840"/>
+            <a:ext cx="7128792" cy="2308324"/>
+          </a:xfrm>
+          <a:prstGeom prst="rect">
+            <a:avLst/>
+          </a:prstGeom>
+          <a:solidFill>
+            <a:schemeClr val="bg1">
+              <a:lumMod val="95000"/>
+            </a:schemeClr>
+          </a:solidFill>
+          <a:ln>
+            <a:solidFill>
+              <a:schemeClr val="accent6"/>
+            </a:solidFill>
+          </a:ln>
+        </p:spPr>
+        <p:txBody>
+          <a:bodyPr wrap="square" rtlCol="0">
+            <a:spAutoFit/>
+          </a:bodyPr>
+          <a:lstStyle/>
+          <a:p>
+            <a:r>
+              <a:rPr lang="en-US" sz="2400" dirty="0"/>
+              <a:t>[</a:t>
+            </a:r>
+            <a:r>
+              <a:rPr lang="en-US" sz="2400" b="1" dirty="0" err="1"/>
+              <a:t>TestCase</a:t>
+            </a:r>
+            <a:r>
+              <a:rPr lang="en-US" sz="2400" dirty="0"/>
+              <a:t>(0)]</a:t>
+            </a:r>
+          </a:p>
+          <a:p>
+            <a:r>
+              <a:rPr lang="en-US" sz="2400" dirty="0"/>
+              <a:t>[</a:t>
+            </a:r>
+            <a:r>
+              <a:rPr lang="en-US" sz="2400" b="1" dirty="0" err="1"/>
+              <a:t>TestCase</a:t>
+            </a:r>
+            <a:r>
+              <a:rPr lang="en-US" sz="2400" dirty="0"/>
+              <a:t>(0,1)]</a:t>
+            </a:r>
+          </a:p>
+          <a:p>
+            <a:r>
+              <a:rPr lang="en-US" sz="2400" dirty="0"/>
+              <a:t>[</a:t>
+            </a:r>
+            <a:r>
+              <a:rPr lang="en-US" sz="2400" b="1" dirty="0" err="1"/>
+              <a:t>TestCase</a:t>
+            </a:r>
+            <a:r>
+              <a:rPr lang="en-US" sz="2400" dirty="0"/>
+              <a:t>(0,0,0)]</a:t>
+            </a:r>
+          </a:p>
+          <a:p>
+            <a:r>
+              <a:rPr lang="en-US" sz="2400" dirty="0"/>
+              <a:t>[</a:t>
+            </a:r>
+            <a:r>
+              <a:rPr lang="en-US" sz="2400" b="1" dirty="0" err="1"/>
+              <a:t>TestCase</a:t>
+            </a:r>
+            <a:r>
+              <a:rPr lang="en-US" sz="2400" dirty="0"/>
+              <a:t>(0,1,1,1,0)]</a:t>
+            </a:r>
+          </a:p>
+          <a:p>
+            <a:r>
+              <a:rPr lang="en-US" sz="2400" dirty="0"/>
+              <a:t>...</a:t>
+            </a:r>
+          </a:p>
+          <a:p>
+            <a:r>
+              <a:rPr lang="en-US" sz="2400" b="1" dirty="0" err="1">
+                <a:solidFill>
+                  <a:schemeClr val="accent5">
+                    <a:lumMod val="75000"/>
+                  </a:schemeClr>
+                </a:solidFill>
+              </a:rPr>
+              <a:t>GetIndexSpec</a:t>
+            </a:r>
+            <a:r>
+              <a:rPr lang="en-US" sz="2400" dirty="0"/>
+              <a:t>(int x, </a:t>
+            </a:r>
+            <a:r>
+              <a:rPr lang="en-US" sz="2400" b="1" dirty="0"/>
+              <a:t>params</a:t>
+            </a:r>
+            <a:r>
+              <a:rPr lang="en-US" sz="2400" dirty="0"/>
+              <a:t> int[] a) { ... }</a:t>
+            </a:r>
+          </a:p>
+        </p:txBody>
+      </p:sp>
     </p:spTree>
     <p:extLst>
       <p:ext uri="{BB962C8B-B14F-4D97-AF65-F5344CB8AC3E}">
-        <p14:creationId xmlns:p14="http://schemas.microsoft.com/office/powerpoint/2010/main" val="2083278437"/>
+        <p14:creationId xmlns:p14="http://schemas.microsoft.com/office/powerpoint/2010/main" val="1187605672"/>
       </p:ext>
     </p:extLst>
   </p:cSld>
@@ -16215,35 +16700,41 @@
           <a:p>
             <a:pPr eaLnBrk="1" hangingPunct="1"/>
             <a:r>
-              <a:rPr lang="en-US" sz="2400" dirty="0"/>
-              <a:t>Other options, which can be user either as alternatives or in conjunction with pre/post-conditions:</a:t>
-            </a:r>
-          </a:p>
-          <a:p>
-            <a:pPr lvl="1" eaLnBrk="1" hangingPunct="1"/>
-            <a:r>
-              <a:rPr lang="en-US" sz="2400" dirty="0">
+              <a:rPr lang="en-US" sz="2800" dirty="0"/>
+              <a:t>Many classes have methods that </a:t>
+            </a:r>
+            <a:r>
+              <a:rPr lang="en-US" sz="2800" i="1" dirty="0"/>
+              <a:t>interact with each other</a:t>
+            </a:r>
+            <a:r>
+              <a:rPr lang="en-US" sz="2800" dirty="0"/>
+              <a:t> (e.g. as in Stack).  How to specify (and test) these interactions? </a:t>
+            </a:r>
+          </a:p>
+          <a:p>
+            <a:pPr eaLnBrk="1" hangingPunct="1"/>
+            <a:r>
+              <a:rPr lang="en-US" sz="2800" dirty="0"/>
+              <a:t>Option-1: </a:t>
+            </a:r>
+            <a:r>
+              <a:rPr lang="en-US" sz="2800" dirty="0">
                 <a:sym typeface="Symbol" pitchFamily="18" charset="2"/>
               </a:rPr>
-              <a:t>class invariant</a:t>
-            </a:r>
-          </a:p>
-          <a:p>
-            <a:pPr lvl="1" eaLnBrk="1" hangingPunct="1"/>
-            <a:r>
-              <a:rPr lang="en-US" sz="2400" dirty="0">
+              <a:t>specify every method with pre- and post-conditions (we discussed this).</a:t>
+            </a:r>
+            <a:br>
+              <a:rPr lang="en-US" sz="2800" dirty="0">
                 <a:sym typeface="Symbol" pitchFamily="18" charset="2"/>
               </a:rPr>
-              <a:t>Abstract Data Type (ADT)</a:t>
-            </a:r>
-          </a:p>
-          <a:p>
-            <a:pPr marL="457200" lvl="1" indent="0" eaLnBrk="1" hangingPunct="1">
-              <a:buNone/>
-            </a:pPr>
-            <a:endParaRPr lang="en-US" sz="2400" dirty="0">
-              <a:sym typeface="Symbol" pitchFamily="18" charset="2"/>
-            </a:endParaRPr>
+            </a:br>
+            <a:r>
+              <a:rPr lang="en-US" sz="2800" dirty="0">
+                <a:sym typeface="Symbol" pitchFamily="18" charset="2"/>
+              </a:rPr>
+              <a:t>This is expressive enough, tough pre- and post-conditions do not, arguably, naturally capture inter-method interactions.</a:t>
+            </a:r>
           </a:p>
         </p:txBody>
       </p:sp>
@@ -16277,6 +16768,11 @@
         </p:txBody>
       </p:sp>
     </p:spTree>
+    <p:extLst>
+      <p:ext uri="{BB962C8B-B14F-4D97-AF65-F5344CB8AC3E}">
+        <p14:creationId xmlns:p14="http://schemas.microsoft.com/office/powerpoint/2010/main" val="2083278437"/>
+      </p:ext>
+    </p:extLst>
   </p:cSld>
   <p:clrMapOvr>
     <a:masterClrMapping/>
@@ -16303,6 +16799,138 @@
       </p:grpSpPr>
       <p:sp>
         <p:nvSpPr>
+          <p:cNvPr id="17410" name="Title 1"/>
+          <p:cNvSpPr>
+            <a:spLocks noGrp="1"/>
+          </p:cNvSpPr>
+          <p:nvPr>
+            <p:ph type="title"/>
+          </p:nvPr>
+        </p:nvSpPr>
+        <p:spPr/>
+        <p:txBody>
+          <a:bodyPr/>
+          <a:lstStyle/>
+          <a:p>
+            <a:pPr eaLnBrk="1" hangingPunct="1"/>
+            <a:r>
+              <a:rPr lang="en-US" dirty="0"/>
+              <a:t>Specifying a “class”</a:t>
+            </a:r>
+            <a:endParaRPr lang="en-US" i="1" dirty="0"/>
+          </a:p>
+        </p:txBody>
+      </p:sp>
+      <p:sp>
+        <p:nvSpPr>
+          <p:cNvPr id="17411" name="Content Placeholder 2"/>
+          <p:cNvSpPr>
+            <a:spLocks noGrp="1"/>
+          </p:cNvSpPr>
+          <p:nvPr>
+            <p:ph idx="1"/>
+          </p:nvPr>
+        </p:nvSpPr>
+        <p:spPr>
+          <a:xfrm>
+            <a:off x="457200" y="1844824"/>
+            <a:ext cx="8229600" cy="4281339"/>
+          </a:xfrm>
+        </p:spPr>
+        <p:txBody>
+          <a:bodyPr/>
+          <a:lstStyle/>
+          <a:p>
+            <a:pPr eaLnBrk="1" hangingPunct="1"/>
+            <a:r>
+              <a:rPr lang="en-US" sz="2400" dirty="0"/>
+              <a:t>Other options, which can be user either as alternatives or in conjunction with pre/post-conditions:</a:t>
+            </a:r>
+          </a:p>
+          <a:p>
+            <a:pPr lvl="1" eaLnBrk="1" hangingPunct="1"/>
+            <a:r>
+              <a:rPr lang="en-US" sz="2400" dirty="0">
+                <a:sym typeface="Symbol" pitchFamily="18" charset="2"/>
+              </a:rPr>
+              <a:t>class invariant</a:t>
+            </a:r>
+          </a:p>
+          <a:p>
+            <a:pPr lvl="1" eaLnBrk="1" hangingPunct="1"/>
+            <a:r>
+              <a:rPr lang="en-US" sz="2400" dirty="0">
+                <a:sym typeface="Symbol" pitchFamily="18" charset="2"/>
+              </a:rPr>
+              <a:t>Abstract Data Type (ADT)</a:t>
+            </a:r>
+          </a:p>
+          <a:p>
+            <a:pPr marL="457200" lvl="1" indent="0" eaLnBrk="1" hangingPunct="1">
+              <a:buNone/>
+            </a:pPr>
+            <a:endParaRPr lang="en-US" sz="2400" dirty="0">
+              <a:sym typeface="Symbol" pitchFamily="18" charset="2"/>
+            </a:endParaRPr>
+          </a:p>
+        </p:txBody>
+      </p:sp>
+      <p:sp>
+        <p:nvSpPr>
+          <p:cNvPr id="4" name="Slide Number Placeholder 3"/>
+          <p:cNvSpPr>
+            <a:spLocks noGrp="1"/>
+          </p:cNvSpPr>
+          <p:nvPr>
+            <p:ph type="sldNum" sz="quarter" idx="12"/>
+          </p:nvPr>
+        </p:nvSpPr>
+        <p:spPr/>
+        <p:txBody>
+          <a:bodyPr/>
+          <a:lstStyle/>
+          <a:p>
+            <a:pPr>
+              <a:defRPr/>
+            </a:pPr>
+            <a:fld id="{4D00519D-647D-4135-80EB-ECBDAE25E06C}" type="slidenum">
+              <a:rPr lang="en-US" smtClean="0"/>
+              <a:pPr>
+                <a:defRPr/>
+              </a:pPr>
+              <a:t>36</a:t>
+            </a:fld>
+            <a:endParaRPr lang="en-US"/>
+          </a:p>
+        </p:txBody>
+      </p:sp>
+    </p:spTree>
+  </p:cSld>
+  <p:clrMapOvr>
+    <a:masterClrMapping/>
+  </p:clrMapOvr>
+</p:sld>
+</file>
+
+<file path=ppt/slides/slide37.xml><?xml version="1.0" encoding="utf-8"?>
+<p:sld xmlns:a="http://schemas.openxmlformats.org/drawingml/2006/main" xmlns:r="http://schemas.openxmlformats.org/officeDocument/2006/relationships" xmlns:p="http://schemas.openxmlformats.org/presentationml/2006/main">
+  <p:cSld>
+    <p:spTree>
+      <p:nvGrpSpPr>
+        <p:cNvPr id="1" name=""/>
+        <p:cNvGrpSpPr/>
+        <p:nvPr/>
+      </p:nvGrpSpPr>
+      <p:grpSpPr>
+        <a:xfrm>
+          <a:off x="0" y="0"/>
+          <a:ext cx="0" cy="0"/>
+          <a:chOff x="0" y="0"/>
+          <a:chExt cx="0" cy="0"/>
+        </a:xfrm>
+      </p:grpSpPr>
+      <p:sp>
+        <p:nvSpPr>
           <p:cNvPr id="18434" name="Title 1"/>
           <p:cNvSpPr>
             <a:spLocks noGrp="1"/>
@@ -16418,7 +17046,7 @@
               <a:pPr>
                 <a:defRPr/>
               </a:pPr>
-              <a:t>36</a:t>
+              <a:t>37</a:t>
             </a:fld>
             <a:endParaRPr lang="en-US"/>
           </a:p>
@@ -16587,7 +17215,7 @@
 </p:sld>
 </file>
 
-<file path=ppt/slides/slide37.xml><?xml version="1.0" encoding="utf-8"?>
+<file path=ppt/slides/slide38.xml><?xml version="1.0" encoding="utf-8"?>
 <p:sld xmlns:a="http://schemas.openxmlformats.org/drawingml/2006/main" xmlns:r="http://schemas.openxmlformats.org/officeDocument/2006/relationships" xmlns:p="http://schemas.openxmlformats.org/presentationml/2006/main">
   <p:cSld>
     <p:spTree>
@@ -16788,362 +17416,13 @@
               <a:pPr>
                 <a:defRPr/>
               </a:pPr>
-              <a:t>37</a:t>
-            </a:fld>
-            <a:endParaRPr lang="en-US"/>
-          </a:p>
-        </p:txBody>
-      </p:sp>
-    </p:spTree>
-  </p:cSld>
-  <p:clrMapOvr>
-    <a:masterClrMapping/>
-  </p:clrMapOvr>
-</p:sld>
-</file>
-
-<file path=ppt/slides/slide38.xml><?xml version="1.0" encoding="utf-8"?>
-<p:sld xmlns:a="http://schemas.openxmlformats.org/drawingml/2006/main" xmlns:r="http://schemas.openxmlformats.org/officeDocument/2006/relationships" xmlns:p="http://schemas.openxmlformats.org/presentationml/2006/main">
-  <p:cSld>
-    <p:spTree>
-      <p:nvGrpSpPr>
-        <p:cNvPr id="1" name=""/>
-        <p:cNvGrpSpPr/>
-        <p:nvPr/>
-      </p:nvGrpSpPr>
-      <p:grpSpPr>
-        <a:xfrm>
-          <a:off x="0" y="0"/>
-          <a:ext cx="0" cy="0"/>
-          <a:chOff x="0" y="0"/>
-          <a:chExt cx="0" cy="0"/>
-        </a:xfrm>
-      </p:grpSpPr>
-      <p:sp>
-        <p:nvSpPr>
-          <p:cNvPr id="18434" name="Title 1"/>
-          <p:cNvSpPr>
-            <a:spLocks noGrp="1"/>
-          </p:cNvSpPr>
-          <p:nvPr>
-            <p:ph type="title"/>
-          </p:nvPr>
-        </p:nvSpPr>
-        <p:spPr>
-          <a:xfrm>
-            <a:off x="457200" y="274638"/>
-            <a:ext cx="8229600" cy="773668"/>
-          </a:xfrm>
-        </p:spPr>
-        <p:txBody>
-          <a:bodyPr/>
-          <a:lstStyle/>
-          <a:p>
-            <a:pPr eaLnBrk="1" hangingPunct="1"/>
-            <a:r>
-              <a:rPr lang="en-US" sz="3600" dirty="0"/>
-              <a:t>ADT specification for Thermometer</a:t>
-            </a:r>
-          </a:p>
-        </p:txBody>
-      </p:sp>
-      <p:sp>
-        <p:nvSpPr>
-          <p:cNvPr id="18435" name="Content Placeholder 2"/>
-          <p:cNvSpPr>
-            <a:spLocks noGrp="1"/>
-          </p:cNvSpPr>
-          <p:nvPr>
-            <p:ph idx="1"/>
-          </p:nvPr>
-        </p:nvSpPr>
-        <p:spPr>
-          <a:xfrm>
-            <a:off x="457200" y="3429000"/>
-            <a:ext cx="8383960" cy="2773909"/>
-          </a:xfrm>
-        </p:spPr>
-        <p:txBody>
-          <a:bodyPr/>
-          <a:lstStyle/>
-          <a:p>
-            <a:pPr marL="0" indent="0" eaLnBrk="1" hangingPunct="1">
-              <a:buNone/>
-            </a:pPr>
-            <a:r>
-              <a:rPr lang="en-US" sz="2400" b="1" dirty="0"/>
-              <a:t>Axioms</a:t>
-            </a:r>
-            <a:r>
-              <a:rPr lang="en-US" sz="2400" dirty="0"/>
-              <a:t>:</a:t>
-            </a:r>
-          </a:p>
-          <a:p>
-            <a:pPr marL="457200" indent="-457200" eaLnBrk="1" hangingPunct="1">
-              <a:buFont typeface="+mj-lt"/>
-              <a:buAutoNum type="arabicPeriod"/>
-            </a:pPr>
-            <a:r>
-              <a:rPr lang="en-US" sz="2400" dirty="0"/>
-              <a:t>For any t</a:t>
-            </a:r>
-            <a:r>
-              <a:rPr lang="en-US" sz="2400" baseline="-25000" dirty="0"/>
-              <a:t>0</a:t>
-            </a:r>
-            <a:r>
-              <a:rPr lang="en-US" sz="2400" dirty="0"/>
-              <a:t> and t&gt;0: after </a:t>
-            </a:r>
-            <a:r>
-              <a:rPr lang="en-US" sz="2400" dirty="0" err="1"/>
-              <a:t>Incr</a:t>
-            </a:r>
-            <a:r>
-              <a:rPr lang="en-US" sz="2400" dirty="0"/>
-              <a:t>(t), Value() should be t</a:t>
-            </a:r>
-            <a:r>
-              <a:rPr lang="en-US" sz="2400" baseline="-25000" dirty="0"/>
-              <a:t>0</a:t>
-            </a:r>
-            <a:r>
-              <a:rPr lang="en-US" sz="2400" dirty="0"/>
-              <a:t>+t, if t</a:t>
-            </a:r>
-            <a:r>
-              <a:rPr lang="en-US" sz="2400" baseline="-25000" dirty="0"/>
-              <a:t>0</a:t>
-            </a:r>
-            <a:r>
-              <a:rPr lang="en-US" sz="2400" dirty="0"/>
-              <a:t> was Value() before.</a:t>
-            </a:r>
-          </a:p>
-          <a:p>
-            <a:pPr marL="457200" indent="-457200" eaLnBrk="1" hangingPunct="1">
-              <a:buFont typeface="+mj-lt"/>
-              <a:buAutoNum type="arabicPeriod"/>
-            </a:pPr>
-            <a:r>
-              <a:rPr lang="en-US" sz="2400" dirty="0"/>
-              <a:t>For any t</a:t>
-            </a:r>
-            <a:r>
-              <a:rPr lang="en-US" sz="2400" baseline="-25000" dirty="0"/>
-              <a:t>0</a:t>
-            </a:r>
-            <a:r>
-              <a:rPr lang="en-US" sz="2400" dirty="0"/>
-              <a:t> and t&gt;0: after </a:t>
-            </a:r>
-            <a:r>
-              <a:rPr lang="en-US" sz="2400" dirty="0" err="1"/>
-              <a:t>Decr</a:t>
-            </a:r>
-            <a:r>
-              <a:rPr lang="en-US" sz="2400" dirty="0"/>
-              <a:t>(t), Value() should be max(t</a:t>
-            </a:r>
-            <a:r>
-              <a:rPr lang="en-US" sz="2400" baseline="-25000" dirty="0"/>
-              <a:t>0</a:t>
-            </a:r>
-            <a:r>
-              <a:rPr lang="en-US" sz="2400" dirty="0"/>
-              <a:t>-t, -273.15), if t</a:t>
-            </a:r>
-            <a:r>
-              <a:rPr lang="en-US" sz="2400" baseline="-25000" dirty="0"/>
-              <a:t>0</a:t>
-            </a:r>
-            <a:r>
-              <a:rPr lang="en-US" sz="2400" dirty="0"/>
-              <a:t> was Value() before.</a:t>
-            </a:r>
-          </a:p>
-          <a:p>
-            <a:pPr eaLnBrk="1" hangingPunct="1"/>
-            <a:endParaRPr lang="en-US" sz="2400" dirty="0"/>
-          </a:p>
-        </p:txBody>
-      </p:sp>
-      <p:sp>
-        <p:nvSpPr>
-          <p:cNvPr id="4" name="Slide Number Placeholder 3"/>
-          <p:cNvSpPr>
-            <a:spLocks noGrp="1"/>
-          </p:cNvSpPr>
-          <p:nvPr>
-            <p:ph type="sldNum" sz="quarter" idx="12"/>
-          </p:nvPr>
-        </p:nvSpPr>
-        <p:spPr/>
-        <p:txBody>
-          <a:bodyPr/>
-          <a:lstStyle/>
-          <a:p>
-            <a:pPr>
-              <a:defRPr/>
-            </a:pPr>
-            <a:fld id="{2A57B2AA-917E-49FC-B415-E530F668AFC6}" type="slidenum">
-              <a:rPr lang="en-US" smtClean="0"/>
-              <a:pPr>
-                <a:defRPr/>
-              </a:pPr>
               <a:t>38</a:t>
             </a:fld>
             <a:endParaRPr lang="en-US"/>
           </a:p>
         </p:txBody>
       </p:sp>
-      <p:sp>
-        <p:nvSpPr>
-          <p:cNvPr id="2" name="TextBox 1">
-            <a:extLst>
-              <a:ext uri="{FF2B5EF4-FFF2-40B4-BE49-F238E27FC236}">
-                <a16:creationId xmlns:a16="http://schemas.microsoft.com/office/drawing/2014/main" id="{EC3B59C0-D1CA-6A4A-979D-F37CBD7C7320}"/>
-              </a:ext>
-            </a:extLst>
-          </p:cNvPr>
-          <p:cNvSpPr txBox="1"/>
-          <p:nvPr/>
-        </p:nvSpPr>
-        <p:spPr>
-          <a:xfrm>
-            <a:off x="2267744" y="1366965"/>
-            <a:ext cx="4014240" cy="1938992"/>
-          </a:xfrm>
-          <a:prstGeom prst="rect">
-            <a:avLst/>
-          </a:prstGeom>
-          <a:noFill/>
-          <a:ln>
-            <a:solidFill>
-              <a:schemeClr val="tx1"/>
-            </a:solidFill>
-          </a:ln>
-        </p:spPr>
-        <p:txBody>
-          <a:bodyPr wrap="none" rtlCol="0">
-            <a:spAutoFit/>
-          </a:bodyPr>
-          <a:lstStyle/>
-          <a:p>
-            <a:r>
-              <a:rPr lang="en-US" sz="2000" b="1" dirty="0"/>
-              <a:t>class</a:t>
-            </a:r>
-            <a:r>
-              <a:rPr lang="en-US" sz="2000" dirty="0"/>
-              <a:t> Thermometer {</a:t>
-            </a:r>
-            <a:br>
-              <a:rPr lang="en-US" sz="2000" dirty="0"/>
-            </a:br>
-            <a:r>
-              <a:rPr lang="en-US" sz="2000" dirty="0"/>
-              <a:t>   double temperature // in </a:t>
-            </a:r>
-            <a:r>
-              <a:rPr lang="en-US" sz="2000" dirty="0" err="1"/>
-              <a:t>Celcius</a:t>
-            </a:r>
-            <a:br>
-              <a:rPr lang="en-US" sz="2000" dirty="0"/>
-            </a:br>
-            <a:r>
-              <a:rPr lang="en-US" sz="2000" dirty="0"/>
-              <a:t>   Value()</a:t>
-            </a:r>
-            <a:br>
-              <a:rPr lang="en-US" sz="2000" dirty="0"/>
-            </a:br>
-            <a:r>
-              <a:rPr lang="en-US" sz="2000" dirty="0"/>
-              <a:t>   </a:t>
-            </a:r>
-            <a:r>
-              <a:rPr lang="en-US" sz="2000" dirty="0" err="1"/>
-              <a:t>Incr</a:t>
-            </a:r>
-            <a:r>
-              <a:rPr lang="en-US" sz="2000" dirty="0"/>
-              <a:t>(t)</a:t>
-            </a:r>
-            <a:br>
-              <a:rPr lang="en-US" sz="2000" dirty="0"/>
-            </a:br>
-            <a:r>
-              <a:rPr lang="en-US" sz="2000" dirty="0"/>
-              <a:t>   </a:t>
-            </a:r>
-            <a:r>
-              <a:rPr lang="en-US" sz="2000" dirty="0" err="1"/>
-              <a:t>Decr</a:t>
-            </a:r>
-            <a:r>
-              <a:rPr lang="en-US" sz="2000" dirty="0"/>
-              <a:t>(t)</a:t>
-            </a:r>
-            <a:br>
-              <a:rPr lang="en-US" sz="2000" dirty="0"/>
-            </a:br>
-            <a:r>
-              <a:rPr lang="en-US" sz="2000" dirty="0"/>
-              <a:t>}</a:t>
-            </a:r>
-          </a:p>
-        </p:txBody>
-      </p:sp>
-      <p:sp>
-        <p:nvSpPr>
-          <p:cNvPr id="3" name="TextBox 2">
-            <a:extLst>
-              <a:ext uri="{FF2B5EF4-FFF2-40B4-BE49-F238E27FC236}">
-                <a16:creationId xmlns:a16="http://schemas.microsoft.com/office/drawing/2014/main" id="{AF106253-E3D8-0E0F-4BB4-68C315B7C999}"/>
-              </a:ext>
-            </a:extLst>
-          </p:cNvPr>
-          <p:cNvSpPr txBox="1"/>
-          <p:nvPr/>
-        </p:nvSpPr>
-        <p:spPr>
-          <a:xfrm>
-            <a:off x="971600" y="5864355"/>
-            <a:ext cx="6984776" cy="338554"/>
-          </a:xfrm>
-          <a:prstGeom prst="rect">
-            <a:avLst/>
-          </a:prstGeom>
-          <a:noFill/>
-          <a:ln>
-            <a:solidFill>
-              <a:schemeClr val="accent1"/>
-            </a:solidFill>
-          </a:ln>
-        </p:spPr>
-        <p:txBody>
-          <a:bodyPr wrap="square" rtlCol="0">
-            <a:spAutoFit/>
-          </a:bodyPr>
-          <a:lstStyle/>
-          <a:p>
-            <a:pPr algn="ctr"/>
-            <a:r>
-              <a:rPr lang="en-NL" sz="1600" dirty="0"/>
-              <a:t>Notice that the ADT axioms never refer to the class state variables.</a:t>
-            </a:r>
-          </a:p>
-        </p:txBody>
-      </p:sp>
     </p:spTree>
-    <p:extLst>
-      <p:ext uri="{BB962C8B-B14F-4D97-AF65-F5344CB8AC3E}">
-        <p14:creationId xmlns:p14="http://schemas.microsoft.com/office/powerpoint/2010/main" val="1046716748"/>
-      </p:ext>
-    </p:extLst>
   </p:cSld>
   <p:clrMapOvr>
     <a:masterClrMapping/>
@@ -17170,7 +17449,7 @@
       </p:grpSpPr>
       <p:sp>
         <p:nvSpPr>
-          <p:cNvPr id="22530" name="Title 1"/>
+          <p:cNvPr id="18434" name="Title 1"/>
           <p:cNvSpPr>
             <a:spLocks noGrp="1"/>
           </p:cNvSpPr>
@@ -17181,23 +17460,146 @@
         <p:spPr>
           <a:xfrm>
             <a:off x="457200" y="274638"/>
-            <a:ext cx="8229600" cy="850106"/>
+            <a:ext cx="8229600" cy="773668"/>
           </a:xfrm>
         </p:spPr>
         <p:txBody>
           <a:bodyPr/>
           <a:lstStyle/>
           <a:p>
-            <a:r>
-              <a:rPr lang="en-US" sz="4000" dirty="0"/>
-              <a:t>Testing ADT</a:t>
-            </a:r>
-          </a:p>
-        </p:txBody>
-      </p:sp>
-      <p:sp>
-        <p:nvSpPr>
-          <p:cNvPr id="3" name="Slide Number Placeholder 2"/>
+            <a:pPr eaLnBrk="1" hangingPunct="1"/>
+            <a:r>
+              <a:rPr lang="en-US" sz="3600" dirty="0"/>
+              <a:t>ADT specification for Thermometer</a:t>
+            </a:r>
+          </a:p>
+        </p:txBody>
+      </p:sp>
+      <p:sp>
+        <p:nvSpPr>
+          <p:cNvPr id="18435" name="Content Placeholder 2"/>
+          <p:cNvSpPr>
+            <a:spLocks noGrp="1"/>
+          </p:cNvSpPr>
+          <p:nvPr>
+            <p:ph idx="1"/>
+          </p:nvPr>
+        </p:nvSpPr>
+        <p:spPr>
+          <a:xfrm>
+            <a:off x="457200" y="3429000"/>
+            <a:ext cx="8383960" cy="2773909"/>
+          </a:xfrm>
+        </p:spPr>
+        <p:txBody>
+          <a:bodyPr/>
+          <a:lstStyle/>
+          <a:p>
+            <a:pPr marL="0" indent="0" eaLnBrk="1" hangingPunct="1">
+              <a:buNone/>
+            </a:pPr>
+            <a:r>
+              <a:rPr lang="en-US" sz="2400" b="1" dirty="0"/>
+              <a:t>Axioms</a:t>
+            </a:r>
+            <a:r>
+              <a:rPr lang="en-US" sz="2400" dirty="0"/>
+              <a:t>:</a:t>
+            </a:r>
+          </a:p>
+          <a:p>
+            <a:pPr marL="457200" indent="-457200" eaLnBrk="1" hangingPunct="1">
+              <a:buFont typeface="+mj-lt"/>
+              <a:buAutoNum type="arabicPeriod"/>
+            </a:pPr>
+            <a:r>
+              <a:rPr lang="en-US" sz="2400" dirty="0"/>
+              <a:t>For any t</a:t>
+            </a:r>
+            <a:r>
+              <a:rPr lang="en-US" sz="2400" baseline="-25000" dirty="0"/>
+              <a:t>0</a:t>
+            </a:r>
+            <a:r>
+              <a:rPr lang="en-US" sz="2400" dirty="0"/>
+              <a:t> and t&gt;0: after </a:t>
+            </a:r>
+            <a:r>
+              <a:rPr lang="en-US" sz="2400" dirty="0" err="1"/>
+              <a:t>Incr</a:t>
+            </a:r>
+            <a:r>
+              <a:rPr lang="en-US" sz="2400" dirty="0"/>
+              <a:t>(t), Value() should be t</a:t>
+            </a:r>
+            <a:r>
+              <a:rPr lang="en-US" sz="2400" baseline="-25000" dirty="0"/>
+              <a:t>0</a:t>
+            </a:r>
+            <a:r>
+              <a:rPr lang="en-US" sz="2400" dirty="0"/>
+              <a:t>+t, if t</a:t>
+            </a:r>
+            <a:r>
+              <a:rPr lang="en-US" sz="2400" baseline="-25000" dirty="0"/>
+              <a:t>0</a:t>
+            </a:r>
+            <a:r>
+              <a:rPr lang="en-US" sz="2400" dirty="0"/>
+              <a:t> was Value() before.</a:t>
+            </a:r>
+          </a:p>
+          <a:p>
+            <a:pPr marL="457200" indent="-457200" eaLnBrk="1" hangingPunct="1">
+              <a:buFont typeface="+mj-lt"/>
+              <a:buAutoNum type="arabicPeriod"/>
+            </a:pPr>
+            <a:r>
+              <a:rPr lang="en-US" sz="2400" dirty="0"/>
+              <a:t>For any t</a:t>
+            </a:r>
+            <a:r>
+              <a:rPr lang="en-US" sz="2400" baseline="-25000" dirty="0"/>
+              <a:t>0</a:t>
+            </a:r>
+            <a:r>
+              <a:rPr lang="en-US" sz="2400" dirty="0"/>
+              <a:t> and t&gt;0: after </a:t>
+            </a:r>
+            <a:r>
+              <a:rPr lang="en-US" sz="2400" dirty="0" err="1"/>
+              <a:t>Decr</a:t>
+            </a:r>
+            <a:r>
+              <a:rPr lang="en-US" sz="2400" dirty="0"/>
+              <a:t>(t), Value() should be max(t</a:t>
+            </a:r>
+            <a:r>
+              <a:rPr lang="en-US" sz="2400" baseline="-25000" dirty="0"/>
+              <a:t>0</a:t>
+            </a:r>
+            <a:r>
+              <a:rPr lang="en-US" sz="2400" dirty="0"/>
+              <a:t>-t, -273.15), if t</a:t>
+            </a:r>
+            <a:r>
+              <a:rPr lang="en-US" sz="2400" baseline="-25000" dirty="0"/>
+              <a:t>0</a:t>
+            </a:r>
+            <a:r>
+              <a:rPr lang="en-US" sz="2400" dirty="0"/>
+              <a:t> was Value() before.</a:t>
+            </a:r>
+          </a:p>
+          <a:p>
+            <a:pPr eaLnBrk="1" hangingPunct="1"/>
+            <a:endParaRPr lang="en-US" sz="2400" dirty="0"/>
+          </a:p>
+        </p:txBody>
+      </p:sp>
+      <p:sp>
+        <p:nvSpPr>
+          <p:cNvPr id="4" name="Slide Number Placeholder 3"/>
           <p:cNvSpPr>
             <a:spLocks noGrp="1"/>
           </p:cNvSpPr>
@@ -17213,7 +17615,7 @@
             <a:pPr>
               <a:defRPr/>
             </a:pPr>
-            <a:fld id="{A396C40A-8632-4362-9BC0-7DC1524AF9EA}" type="slidenum">
+            <a:fld id="{2A57B2AA-917E-49FC-B415-E530F668AFC6}" type="slidenum">
               <a:rPr lang="en-US" smtClean="0"/>
               <a:pPr>
                 <a:defRPr/>
@@ -17226,308 +17628,109 @@
       </p:sp>
       <p:sp>
         <p:nvSpPr>
-          <p:cNvPr id="4" name="TextBox 3"/>
+          <p:cNvPr id="2" name="TextBox 1">
+            <a:extLst>
+              <a:ext uri="{FF2B5EF4-FFF2-40B4-BE49-F238E27FC236}">
+                <a16:creationId xmlns:a16="http://schemas.microsoft.com/office/drawing/2014/main" id="{EC3B59C0-D1CA-6A4A-979D-F37CBD7C7320}"/>
+              </a:ext>
+            </a:extLst>
+          </p:cNvPr>
           <p:cNvSpPr txBox="1"/>
           <p:nvPr/>
         </p:nvSpPr>
         <p:spPr>
           <a:xfrm>
-            <a:off x="1043608" y="3933056"/>
-            <a:ext cx="7056784" cy="1200329"/>
-          </a:xfrm>
-          <a:prstGeom prst="rect">
-            <a:avLst/>
-          </a:prstGeom>
-        </p:spPr>
-        <p:style>
-          <a:lnRef idx="2">
-            <a:schemeClr val="dk1"/>
-          </a:lnRef>
-          <a:fillRef idx="1">
-            <a:schemeClr val="lt1"/>
-          </a:fillRef>
-          <a:effectRef idx="0">
-            <a:schemeClr val="dk1"/>
-          </a:effectRef>
-          <a:fontRef idx="minor">
-            <a:schemeClr val="dk1"/>
-          </a:fontRef>
-        </p:style>
-        <p:txBody>
-          <a:bodyPr wrap="square">
-            <a:spAutoFit/>
-          </a:bodyPr>
-          <a:lstStyle/>
-          <a:p>
-            <a:pPr marL="0" lvl="1">
-              <a:defRPr/>
-            </a:pPr>
-            <a:r>
-              <a:rPr lang="en-US" sz="2400" dirty="0">
-                <a:highlight>
-                  <a:srgbClr val="FFFF00"/>
-                </a:highlight>
-                <a:sym typeface="Symbol"/>
-              </a:rPr>
-              <a:t>Axiom1</a:t>
-            </a:r>
-            <a:r>
-              <a:rPr lang="en-US" sz="2400" dirty="0">
-                <a:sym typeface="Symbol"/>
-              </a:rPr>
-              <a:t>(Thermometer s, double t) {</a:t>
-            </a:r>
-            <a:br>
-              <a:rPr lang="en-US" sz="2400" dirty="0">
-                <a:sym typeface="Symbol"/>
-              </a:rPr>
-            </a:br>
-            <a:r>
-              <a:rPr lang="en-US" sz="2400" dirty="0">
-                <a:sym typeface="Symbol"/>
-              </a:rPr>
-              <a:t>     </a:t>
-            </a:r>
-            <a:r>
-              <a:rPr lang="en-US" sz="2400" dirty="0" err="1">
-                <a:sym typeface="Symbol"/>
-              </a:rPr>
-              <a:t>assumeThat</a:t>
-            </a:r>
-            <a:r>
-              <a:rPr lang="en-US" sz="2400" dirty="0">
-                <a:sym typeface="Symbol"/>
-              </a:rPr>
-              <a:t>(t &gt; 0) ;      </a:t>
-            </a:r>
-          </a:p>
-          <a:p>
-            <a:pPr marL="0" lvl="1">
-              <a:defRPr/>
-            </a:pPr>
-            <a:r>
-              <a:rPr lang="en-US" sz="2400" dirty="0">
-                <a:sym typeface="Symbol"/>
-              </a:rPr>
-              <a:t>     t</a:t>
-            </a:r>
-            <a:r>
-              <a:rPr lang="en-US" sz="2400" baseline="-25000" dirty="0">
-                <a:sym typeface="Symbol"/>
-              </a:rPr>
-              <a:t>0</a:t>
-            </a:r>
-            <a:r>
-              <a:rPr lang="en-US" sz="2400" dirty="0">
-                <a:sym typeface="Symbol"/>
-              </a:rPr>
-              <a:t>=</a:t>
-            </a:r>
-            <a:r>
-              <a:rPr lang="en-US" sz="2400" dirty="0" err="1">
-                <a:sym typeface="Symbol"/>
-              </a:rPr>
-              <a:t>s.Value</a:t>
-            </a:r>
-            <a:r>
-              <a:rPr lang="en-US" sz="2400" dirty="0">
-                <a:sym typeface="Symbol"/>
-              </a:rPr>
-              <a:t>() ; s. </a:t>
-            </a:r>
-            <a:r>
-              <a:rPr lang="en-US" sz="2400" dirty="0" err="1">
-                <a:sym typeface="Symbol"/>
-              </a:rPr>
-              <a:t>Incr</a:t>
-            </a:r>
-            <a:r>
-              <a:rPr lang="en-US" sz="2400" dirty="0">
-                <a:sym typeface="Symbol"/>
-              </a:rPr>
-              <a:t>(t) ; </a:t>
-            </a:r>
-            <a:r>
-              <a:rPr lang="en-US" sz="2400" dirty="0" err="1">
-                <a:highlight>
-                  <a:srgbClr val="FFFF00"/>
-                </a:highlight>
-                <a:sym typeface="Symbol"/>
-              </a:rPr>
-              <a:t>assertEqual</a:t>
-            </a:r>
-            <a:r>
-              <a:rPr lang="en-US" sz="2400" dirty="0">
-                <a:sym typeface="Symbol"/>
-              </a:rPr>
-              <a:t>(t</a:t>
-            </a:r>
-            <a:r>
-              <a:rPr lang="en-US" sz="2400" baseline="-25000" dirty="0">
-                <a:sym typeface="Symbol"/>
-              </a:rPr>
-              <a:t>0</a:t>
-            </a:r>
-            <a:r>
-              <a:rPr lang="en-US" sz="2400" dirty="0">
-                <a:sym typeface="Symbol"/>
-              </a:rPr>
-              <a:t>+t, </a:t>
-            </a:r>
-            <a:r>
-              <a:rPr lang="en-US" sz="2400" dirty="0" err="1">
-                <a:sym typeface="Symbol"/>
-              </a:rPr>
-              <a:t>s.Value</a:t>
-            </a:r>
-            <a:r>
-              <a:rPr lang="en-US" sz="2400" dirty="0">
-                <a:sym typeface="Symbol"/>
-              </a:rPr>
-              <a:t>()) ; }</a:t>
-            </a:r>
-          </a:p>
-        </p:txBody>
-      </p:sp>
-      <p:sp>
-        <p:nvSpPr>
-          <p:cNvPr id="6" name="TextBox 5"/>
-          <p:cNvSpPr txBox="1"/>
-          <p:nvPr/>
-        </p:nvSpPr>
-        <p:spPr>
-          <a:xfrm>
-            <a:off x="575556" y="3281729"/>
-            <a:ext cx="7992888" cy="3539430"/>
+            <a:off x="2267744" y="1366965"/>
+            <a:ext cx="4014240" cy="1938992"/>
           </a:xfrm>
           <a:prstGeom prst="rect">
             <a:avLst/>
           </a:prstGeom>
           <a:noFill/>
+          <a:ln>
+            <a:solidFill>
+              <a:schemeClr val="tx1"/>
+            </a:solidFill>
+          </a:ln>
         </p:spPr>
         <p:txBody>
-          <a:bodyPr wrap="square">
+          <a:bodyPr wrap="none" rtlCol="0">
             <a:spAutoFit/>
           </a:bodyPr>
           <a:lstStyle/>
           <a:p>
-            <a:pPr>
-              <a:defRPr/>
-            </a:pPr>
-            <a:r>
-              <a:rPr lang="en-US" sz="2400" dirty="0"/>
-              <a:t>For example, to test Thermometer’s Axiom-1:</a:t>
+            <a:r>
+              <a:rPr lang="en-US" sz="2000" b="1" dirty="0"/>
+              <a:t>class</a:t>
+            </a:r>
+            <a:r>
+              <a:rPr lang="en-US" sz="2000" dirty="0"/>
+              <a:t> Thermometer {</a:t>
             </a:r>
             <a:br>
-              <a:rPr lang="en-US" sz="2400" dirty="0"/>
+              <a:rPr lang="en-US" sz="2000" dirty="0"/>
             </a:br>
-            <a:endParaRPr lang="en-US" sz="2400" dirty="0"/>
-          </a:p>
-          <a:p>
-            <a:pPr>
-              <a:defRPr/>
-            </a:pPr>
-            <a:endParaRPr lang="en-US" sz="2400" dirty="0"/>
-          </a:p>
-          <a:p>
-            <a:pPr>
-              <a:defRPr/>
-            </a:pPr>
-            <a:r>
-              <a:rPr lang="en-US" sz="2400" dirty="0"/>
-              <a:t> </a:t>
-            </a:r>
-          </a:p>
-          <a:p>
-            <a:pPr>
-              <a:defRPr/>
-            </a:pPr>
-            <a:endParaRPr lang="en-US" sz="2400" dirty="0"/>
-          </a:p>
-          <a:p>
-            <a:pPr>
-              <a:defRPr/>
-            </a:pPr>
-            <a:endParaRPr lang="en-US" sz="2400" dirty="0"/>
-          </a:p>
-          <a:p>
-            <a:pPr>
-              <a:defRPr/>
-            </a:pPr>
             <a:r>
               <a:rPr lang="en-US" sz="2000" dirty="0"/>
-              <a:t>We can imagine e.g. these test cases :</a:t>
-            </a:r>
-          </a:p>
-          <a:p>
-            <a:pPr marL="800100" lvl="1" indent="-342900">
-              <a:buFont typeface="+mj-lt"/>
-              <a:buAutoNum type="arabicPeriod"/>
-              <a:defRPr/>
-            </a:pPr>
-            <a:r>
-              <a:rPr lang="en-US" sz="2000" i="1" dirty="0"/>
-              <a:t>s</a:t>
-            </a:r>
-            <a:r>
+              <a:t>   double temperature // in </a:t>
+            </a:r>
+            <a:r>
+              <a:rPr lang="en-US" sz="2000" dirty="0" err="1"/>
+              <a:t>Celcius</a:t>
+            </a:r>
+            <a:br>
               <a:rPr lang="en-US" sz="2000" dirty="0"/>
-              <a:t> such that </a:t>
+            </a:br>
+            <a:r>
+              <a:rPr lang="en-US" sz="2000" dirty="0"/>
+              <a:t>   Value()</a:t>
+            </a:r>
+            <a:br>
+              <a:rPr lang="en-US" sz="2000" dirty="0"/>
+            </a:br>
+            <a:r>
+              <a:rPr lang="en-US" sz="2000" dirty="0"/>
+              <a:t>   </a:t>
             </a:r>
             <a:r>
               <a:rPr lang="en-US" sz="2000" dirty="0" err="1"/>
-              <a:t>s.temperature</a:t>
+              <a:t>Incr</a:t>
             </a:r>
             <a:r>
               <a:rPr lang="en-US" sz="2000" dirty="0"/>
-              <a:t> is -273.15</a:t>
-            </a:r>
-            <a:r>
-              <a:rPr lang="en-US" sz="2000" i="1" dirty="0"/>
-              <a:t> </a:t>
-            </a:r>
-          </a:p>
-          <a:p>
-            <a:pPr marL="800100" lvl="1" indent="-342900">
-              <a:buFont typeface="+mj-lt"/>
-              <a:buAutoNum type="arabicPeriod"/>
-              <a:defRPr/>
-            </a:pPr>
-            <a:r>
-              <a:rPr lang="en-US" sz="2000" i="1" dirty="0"/>
-              <a:t>s</a:t>
-            </a:r>
-            <a:r>
+              <a:t>(t)</a:t>
+            </a:r>
+            <a:br>
               <a:rPr lang="en-US" sz="2000" dirty="0"/>
-              <a:t> such that </a:t>
+            </a:br>
+            <a:r>
+              <a:rPr lang="en-US" sz="2000" dirty="0"/>
+              <a:t>   </a:t>
             </a:r>
             <a:r>
               <a:rPr lang="en-US" sz="2000" dirty="0" err="1"/>
-              <a:t>s.temperature</a:t>
+              <a:t>Decr</a:t>
             </a:r>
             <a:r>
               <a:rPr lang="en-US" sz="2000" dirty="0"/>
-              <a:t> &gt; -273.15</a:t>
-            </a:r>
-          </a:p>
-          <a:p>
-            <a:pPr marL="800100" lvl="1" indent="-342900">
-              <a:buFont typeface="+mj-lt"/>
-              <a:buAutoNum type="arabicPeriod"/>
-              <a:defRPr/>
-            </a:pPr>
-            <a:r>
+              <a:t>(t)</a:t>
+            </a:r>
+            <a:br>
               <a:rPr lang="en-US" sz="2000" dirty="0"/>
-              <a:t>very small t and normally large t</a:t>
-            </a:r>
-          </a:p>
-        </p:txBody>
-      </p:sp>
-      <p:sp>
-        <p:nvSpPr>
-          <p:cNvPr id="2" name="TextBox 1">
+            </a:br>
+            <a:r>
+              <a:rPr lang="en-US" sz="2000" dirty="0"/>
+              <a:t>}</a:t>
+            </a:r>
+          </a:p>
+        </p:txBody>
+      </p:sp>
+      <p:sp>
+        <p:nvSpPr>
+          <p:cNvPr id="3" name="TextBox 2">
             <a:extLst>
               <a:ext uri="{FF2B5EF4-FFF2-40B4-BE49-F238E27FC236}">
-                <a16:creationId xmlns:a16="http://schemas.microsoft.com/office/drawing/2014/main" id="{0B62E271-A623-3946-96AA-067473559C09}"/>
+                <a16:creationId xmlns:a16="http://schemas.microsoft.com/office/drawing/2014/main" id="{AF106253-E3D8-0E0F-4BB4-68C315B7C999}"/>
               </a:ext>
             </a:extLst>
           </p:cNvPr>
@@ -17536,13 +17739,18 @@
         </p:nvSpPr>
         <p:spPr>
           <a:xfrm>
-            <a:off x="945940" y="1608430"/>
-            <a:ext cx="7488832" cy="1384995"/>
+            <a:off x="971600" y="5864355"/>
+            <a:ext cx="6984776" cy="338554"/>
           </a:xfrm>
           <a:prstGeom prst="rect">
             <a:avLst/>
           </a:prstGeom>
           <a:noFill/>
+          <a:ln>
+            <a:solidFill>
+              <a:schemeClr val="accent1"/>
+            </a:solidFill>
+          </a:ln>
         </p:spPr>
         <p:txBody>
           <a:bodyPr wrap="square" rtlCol="0">
@@ -17552,76 +17760,16 @@
           <a:p>
             <a:pPr algn="ctr"/>
             <a:r>
-              <a:rPr lang="en-US" sz="2800" dirty="0"/>
-              <a:t>Testing an ADT amounts to verifying each of its axioms, each can be formulated as a </a:t>
-            </a:r>
-            <a:r>
-              <a:rPr lang="en-US" sz="2800" b="1" dirty="0"/>
-              <a:t>parameterized test.</a:t>
-            </a:r>
-          </a:p>
-        </p:txBody>
-      </p:sp>
-      <p:sp>
-        <p:nvSpPr>
-          <p:cNvPr id="7" name="Rounded Rectangle 6">
-            <a:extLst>
-              <a:ext uri="{FF2B5EF4-FFF2-40B4-BE49-F238E27FC236}">
-                <a16:creationId xmlns:a16="http://schemas.microsoft.com/office/drawing/2014/main" id="{08133769-1F89-9448-B585-CEE8C2C4FF70}"/>
-              </a:ext>
-            </a:extLst>
-          </p:cNvPr>
-          <p:cNvSpPr/>
-          <p:nvPr/>
-        </p:nvSpPr>
-        <p:spPr>
-          <a:xfrm>
-            <a:off x="457200" y="1482380"/>
-            <a:ext cx="8229600" cy="1615851"/>
-          </a:xfrm>
-          <a:prstGeom prst="roundRect">
-            <a:avLst/>
-          </a:prstGeom>
-          <a:solidFill>
-            <a:srgbClr val="FFC000">
-              <a:alpha val="25000"/>
-            </a:srgbClr>
-          </a:solidFill>
-          <a:ln>
-            <a:solidFill>
-              <a:srgbClr val="FFC000"/>
-            </a:solidFill>
-          </a:ln>
-        </p:spPr>
-        <p:style>
-          <a:lnRef idx="2">
-            <a:schemeClr val="accent1">
-              <a:shade val="50000"/>
-            </a:schemeClr>
-          </a:lnRef>
-          <a:fillRef idx="1">
-            <a:schemeClr val="accent1"/>
-          </a:fillRef>
-          <a:effectRef idx="0">
-            <a:schemeClr val="accent1"/>
-          </a:effectRef>
-          <a:fontRef idx="minor">
-            <a:schemeClr val="lt1"/>
-          </a:fontRef>
-        </p:style>
-        <p:txBody>
-          <a:bodyPr rtlCol="0" anchor="ctr"/>
-          <a:lstStyle/>
-          <a:p>
-            <a:pPr algn="ctr"/>
-            <a:endParaRPr lang="en-US" dirty="0"/>
+              <a:rPr lang="en-NL" sz="1600" dirty="0"/>
+              <a:t>Notice that the ADT axioms never refer to the class state variables.</a:t>
+            </a:r>
           </a:p>
         </p:txBody>
       </p:sp>
     </p:spTree>
     <p:extLst>
       <p:ext uri="{BB962C8B-B14F-4D97-AF65-F5344CB8AC3E}">
-        <p14:creationId xmlns:p14="http://schemas.microsoft.com/office/powerpoint/2010/main" val="2815078552"/>
+        <p14:creationId xmlns:p14="http://schemas.microsoft.com/office/powerpoint/2010/main" val="1046716748"/>
       </p:ext>
     </p:extLst>
   </p:cSld>
@@ -18179,6 +18327,486 @@
       </p:grpSpPr>
       <p:sp>
         <p:nvSpPr>
+          <p:cNvPr id="22530" name="Title 1"/>
+          <p:cNvSpPr>
+            <a:spLocks noGrp="1"/>
+          </p:cNvSpPr>
+          <p:nvPr>
+            <p:ph type="title"/>
+          </p:nvPr>
+        </p:nvSpPr>
+        <p:spPr>
+          <a:xfrm>
+            <a:off x="457200" y="274638"/>
+            <a:ext cx="8229600" cy="850106"/>
+          </a:xfrm>
+        </p:spPr>
+        <p:txBody>
+          <a:bodyPr/>
+          <a:lstStyle/>
+          <a:p>
+            <a:r>
+              <a:rPr lang="en-US" sz="4000" dirty="0"/>
+              <a:t>Testing ADT</a:t>
+            </a:r>
+          </a:p>
+        </p:txBody>
+      </p:sp>
+      <p:sp>
+        <p:nvSpPr>
+          <p:cNvPr id="3" name="Slide Number Placeholder 2"/>
+          <p:cNvSpPr>
+            <a:spLocks noGrp="1"/>
+          </p:cNvSpPr>
+          <p:nvPr>
+            <p:ph type="sldNum" sz="quarter" idx="12"/>
+          </p:nvPr>
+        </p:nvSpPr>
+        <p:spPr/>
+        <p:txBody>
+          <a:bodyPr/>
+          <a:lstStyle/>
+          <a:p>
+            <a:pPr>
+              <a:defRPr/>
+            </a:pPr>
+            <a:fld id="{A396C40A-8632-4362-9BC0-7DC1524AF9EA}" type="slidenum">
+              <a:rPr lang="en-US" smtClean="0"/>
+              <a:pPr>
+                <a:defRPr/>
+              </a:pPr>
+              <a:t>40</a:t>
+            </a:fld>
+            <a:endParaRPr lang="en-US"/>
+          </a:p>
+        </p:txBody>
+      </p:sp>
+      <p:sp>
+        <p:nvSpPr>
+          <p:cNvPr id="4" name="TextBox 3"/>
+          <p:cNvSpPr txBox="1"/>
+          <p:nvPr/>
+        </p:nvSpPr>
+        <p:spPr>
+          <a:xfrm>
+            <a:off x="1043608" y="3933056"/>
+            <a:ext cx="7056784" cy="1200329"/>
+          </a:xfrm>
+          <a:prstGeom prst="rect">
+            <a:avLst/>
+          </a:prstGeom>
+        </p:spPr>
+        <p:style>
+          <a:lnRef idx="2">
+            <a:schemeClr val="dk1"/>
+          </a:lnRef>
+          <a:fillRef idx="1">
+            <a:schemeClr val="lt1"/>
+          </a:fillRef>
+          <a:effectRef idx="0">
+            <a:schemeClr val="dk1"/>
+          </a:effectRef>
+          <a:fontRef idx="minor">
+            <a:schemeClr val="dk1"/>
+          </a:fontRef>
+        </p:style>
+        <p:txBody>
+          <a:bodyPr wrap="square">
+            <a:spAutoFit/>
+          </a:bodyPr>
+          <a:lstStyle/>
+          <a:p>
+            <a:pPr marL="0" lvl="1">
+              <a:defRPr/>
+            </a:pPr>
+            <a:r>
+              <a:rPr lang="en-US" sz="2400" dirty="0">
+                <a:highlight>
+                  <a:srgbClr val="FFFF00"/>
+                </a:highlight>
+                <a:sym typeface="Symbol"/>
+              </a:rPr>
+              <a:t>Axiom1</a:t>
+            </a:r>
+            <a:r>
+              <a:rPr lang="en-US" sz="2400" dirty="0">
+                <a:sym typeface="Symbol"/>
+              </a:rPr>
+              <a:t>(Thermometer s, double t) {</a:t>
+            </a:r>
+            <a:br>
+              <a:rPr lang="en-US" sz="2400" dirty="0">
+                <a:sym typeface="Symbol"/>
+              </a:rPr>
+            </a:br>
+            <a:r>
+              <a:rPr lang="en-US" sz="2400" dirty="0">
+                <a:sym typeface="Symbol"/>
+              </a:rPr>
+              <a:t>     </a:t>
+            </a:r>
+            <a:r>
+              <a:rPr lang="en-US" sz="2400" dirty="0" err="1">
+                <a:sym typeface="Symbol"/>
+              </a:rPr>
+              <a:t>assumeThat</a:t>
+            </a:r>
+            <a:r>
+              <a:rPr lang="en-US" sz="2400" dirty="0">
+                <a:sym typeface="Symbol"/>
+              </a:rPr>
+              <a:t>(t &gt; 0) ;      </a:t>
+            </a:r>
+          </a:p>
+          <a:p>
+            <a:pPr marL="0" lvl="1">
+              <a:defRPr/>
+            </a:pPr>
+            <a:r>
+              <a:rPr lang="en-US" sz="2400" dirty="0">
+                <a:sym typeface="Symbol"/>
+              </a:rPr>
+              <a:t>     t</a:t>
+            </a:r>
+            <a:r>
+              <a:rPr lang="en-US" sz="2400" baseline="-25000" dirty="0">
+                <a:sym typeface="Symbol"/>
+              </a:rPr>
+              <a:t>0</a:t>
+            </a:r>
+            <a:r>
+              <a:rPr lang="en-US" sz="2400" dirty="0">
+                <a:sym typeface="Symbol"/>
+              </a:rPr>
+              <a:t>=</a:t>
+            </a:r>
+            <a:r>
+              <a:rPr lang="en-US" sz="2400" dirty="0" err="1">
+                <a:sym typeface="Symbol"/>
+              </a:rPr>
+              <a:t>s.Value</a:t>
+            </a:r>
+            <a:r>
+              <a:rPr lang="en-US" sz="2400" dirty="0">
+                <a:sym typeface="Symbol"/>
+              </a:rPr>
+              <a:t>() ; s. </a:t>
+            </a:r>
+            <a:r>
+              <a:rPr lang="en-US" sz="2400" dirty="0" err="1">
+                <a:sym typeface="Symbol"/>
+              </a:rPr>
+              <a:t>Incr</a:t>
+            </a:r>
+            <a:r>
+              <a:rPr lang="en-US" sz="2400" dirty="0">
+                <a:sym typeface="Symbol"/>
+              </a:rPr>
+              <a:t>(t) ; </a:t>
+            </a:r>
+            <a:r>
+              <a:rPr lang="en-US" sz="2400" dirty="0" err="1">
+                <a:highlight>
+                  <a:srgbClr val="FFFF00"/>
+                </a:highlight>
+                <a:sym typeface="Symbol"/>
+              </a:rPr>
+              <a:t>assertEqual</a:t>
+            </a:r>
+            <a:r>
+              <a:rPr lang="en-US" sz="2400" dirty="0">
+                <a:sym typeface="Symbol"/>
+              </a:rPr>
+              <a:t>(t</a:t>
+            </a:r>
+            <a:r>
+              <a:rPr lang="en-US" sz="2400" baseline="-25000" dirty="0">
+                <a:sym typeface="Symbol"/>
+              </a:rPr>
+              <a:t>0</a:t>
+            </a:r>
+            <a:r>
+              <a:rPr lang="en-US" sz="2400" dirty="0">
+                <a:sym typeface="Symbol"/>
+              </a:rPr>
+              <a:t>+t, </a:t>
+            </a:r>
+            <a:r>
+              <a:rPr lang="en-US" sz="2400" dirty="0" err="1">
+                <a:sym typeface="Symbol"/>
+              </a:rPr>
+              <a:t>s.Value</a:t>
+            </a:r>
+            <a:r>
+              <a:rPr lang="en-US" sz="2400" dirty="0">
+                <a:sym typeface="Symbol"/>
+              </a:rPr>
+              <a:t>()) ; }</a:t>
+            </a:r>
+          </a:p>
+        </p:txBody>
+      </p:sp>
+      <p:sp>
+        <p:nvSpPr>
+          <p:cNvPr id="6" name="TextBox 5"/>
+          <p:cNvSpPr txBox="1"/>
+          <p:nvPr/>
+        </p:nvSpPr>
+        <p:spPr>
+          <a:xfrm>
+            <a:off x="575556" y="3281729"/>
+            <a:ext cx="7992888" cy="3539430"/>
+          </a:xfrm>
+          <a:prstGeom prst="rect">
+            <a:avLst/>
+          </a:prstGeom>
+          <a:noFill/>
+        </p:spPr>
+        <p:txBody>
+          <a:bodyPr wrap="square">
+            <a:spAutoFit/>
+          </a:bodyPr>
+          <a:lstStyle/>
+          <a:p>
+            <a:pPr>
+              <a:defRPr/>
+            </a:pPr>
+            <a:r>
+              <a:rPr lang="en-US" sz="2400" dirty="0"/>
+              <a:t>For example, to test Thermometer’s Axiom-1:</a:t>
+            </a:r>
+            <a:br>
+              <a:rPr lang="en-US" sz="2400" dirty="0"/>
+            </a:br>
+            <a:endParaRPr lang="en-US" sz="2400" dirty="0"/>
+          </a:p>
+          <a:p>
+            <a:pPr>
+              <a:defRPr/>
+            </a:pPr>
+            <a:endParaRPr lang="en-US" sz="2400" dirty="0"/>
+          </a:p>
+          <a:p>
+            <a:pPr>
+              <a:defRPr/>
+            </a:pPr>
+            <a:r>
+              <a:rPr lang="en-US" sz="2400" dirty="0"/>
+              <a:t> </a:t>
+            </a:r>
+          </a:p>
+          <a:p>
+            <a:pPr>
+              <a:defRPr/>
+            </a:pPr>
+            <a:endParaRPr lang="en-US" sz="2400" dirty="0"/>
+          </a:p>
+          <a:p>
+            <a:pPr>
+              <a:defRPr/>
+            </a:pPr>
+            <a:endParaRPr lang="en-US" sz="2400" dirty="0"/>
+          </a:p>
+          <a:p>
+            <a:pPr>
+              <a:defRPr/>
+            </a:pPr>
+            <a:r>
+              <a:rPr lang="en-US" sz="2000" dirty="0"/>
+              <a:t>We can imagine e.g. these test cases :</a:t>
+            </a:r>
+          </a:p>
+          <a:p>
+            <a:pPr marL="800100" lvl="1" indent="-342900">
+              <a:buFont typeface="+mj-lt"/>
+              <a:buAutoNum type="arabicPeriod"/>
+              <a:defRPr/>
+            </a:pPr>
+            <a:r>
+              <a:rPr lang="en-US" sz="2000" i="1" dirty="0"/>
+              <a:t>s</a:t>
+            </a:r>
+            <a:r>
+              <a:rPr lang="en-US" sz="2000" dirty="0"/>
+              <a:t> such that </a:t>
+            </a:r>
+            <a:r>
+              <a:rPr lang="en-US" sz="2000" dirty="0" err="1"/>
+              <a:t>s.temperature</a:t>
+            </a:r>
+            <a:r>
+              <a:rPr lang="en-US" sz="2000" dirty="0"/>
+              <a:t> is -273.15</a:t>
+            </a:r>
+            <a:r>
+              <a:rPr lang="en-US" sz="2000" i="1" dirty="0"/>
+              <a:t> </a:t>
+            </a:r>
+          </a:p>
+          <a:p>
+            <a:pPr marL="800100" lvl="1" indent="-342900">
+              <a:buFont typeface="+mj-lt"/>
+              <a:buAutoNum type="arabicPeriod"/>
+              <a:defRPr/>
+            </a:pPr>
+            <a:r>
+              <a:rPr lang="en-US" sz="2000" i="1" dirty="0"/>
+              <a:t>s</a:t>
+            </a:r>
+            <a:r>
+              <a:rPr lang="en-US" sz="2000" dirty="0"/>
+              <a:t> such that </a:t>
+            </a:r>
+            <a:r>
+              <a:rPr lang="en-US" sz="2000" dirty="0" err="1"/>
+              <a:t>s.temperature</a:t>
+            </a:r>
+            <a:r>
+              <a:rPr lang="en-US" sz="2000" dirty="0"/>
+              <a:t> &gt; -273.15</a:t>
+            </a:r>
+          </a:p>
+          <a:p>
+            <a:pPr marL="800100" lvl="1" indent="-342900">
+              <a:buFont typeface="+mj-lt"/>
+              <a:buAutoNum type="arabicPeriod"/>
+              <a:defRPr/>
+            </a:pPr>
+            <a:r>
+              <a:rPr lang="en-US" sz="2000" dirty="0"/>
+              <a:t>very small t and normally large t</a:t>
+            </a:r>
+          </a:p>
+        </p:txBody>
+      </p:sp>
+      <p:sp>
+        <p:nvSpPr>
+          <p:cNvPr id="2" name="TextBox 1">
+            <a:extLst>
+              <a:ext uri="{FF2B5EF4-FFF2-40B4-BE49-F238E27FC236}">
+                <a16:creationId xmlns:a16="http://schemas.microsoft.com/office/drawing/2014/main" id="{0B62E271-A623-3946-96AA-067473559C09}"/>
+              </a:ext>
+            </a:extLst>
+          </p:cNvPr>
+          <p:cNvSpPr txBox="1"/>
+          <p:nvPr/>
+        </p:nvSpPr>
+        <p:spPr>
+          <a:xfrm>
+            <a:off x="945940" y="1608430"/>
+            <a:ext cx="7488832" cy="1384995"/>
+          </a:xfrm>
+          <a:prstGeom prst="rect">
+            <a:avLst/>
+          </a:prstGeom>
+          <a:noFill/>
+        </p:spPr>
+        <p:txBody>
+          <a:bodyPr wrap="square" rtlCol="0">
+            <a:spAutoFit/>
+          </a:bodyPr>
+          <a:lstStyle/>
+          <a:p>
+            <a:pPr algn="ctr"/>
+            <a:r>
+              <a:rPr lang="en-US" sz="2800" dirty="0"/>
+              <a:t>Testing an ADT amounts to verifying each of its axioms, each can be formulated as a </a:t>
+            </a:r>
+            <a:r>
+              <a:rPr lang="en-US" sz="2800" b="1" dirty="0"/>
+              <a:t>parameterized test.</a:t>
+            </a:r>
+          </a:p>
+        </p:txBody>
+      </p:sp>
+      <p:sp>
+        <p:nvSpPr>
+          <p:cNvPr id="7" name="Rounded Rectangle 6">
+            <a:extLst>
+              <a:ext uri="{FF2B5EF4-FFF2-40B4-BE49-F238E27FC236}">
+                <a16:creationId xmlns:a16="http://schemas.microsoft.com/office/drawing/2014/main" id="{08133769-1F89-9448-B585-CEE8C2C4FF70}"/>
+              </a:ext>
+            </a:extLst>
+          </p:cNvPr>
+          <p:cNvSpPr/>
+          <p:nvPr/>
+        </p:nvSpPr>
+        <p:spPr>
+          <a:xfrm>
+            <a:off x="457200" y="1482380"/>
+            <a:ext cx="8229600" cy="1615851"/>
+          </a:xfrm>
+          <a:prstGeom prst="roundRect">
+            <a:avLst/>
+          </a:prstGeom>
+          <a:solidFill>
+            <a:srgbClr val="FFC000">
+              <a:alpha val="25000"/>
+            </a:srgbClr>
+          </a:solidFill>
+          <a:ln>
+            <a:solidFill>
+              <a:srgbClr val="FFC000"/>
+            </a:solidFill>
+          </a:ln>
+        </p:spPr>
+        <p:style>
+          <a:lnRef idx="2">
+            <a:schemeClr val="accent1">
+              <a:shade val="50000"/>
+            </a:schemeClr>
+          </a:lnRef>
+          <a:fillRef idx="1">
+            <a:schemeClr val="accent1"/>
+          </a:fillRef>
+          <a:effectRef idx="0">
+            <a:schemeClr val="accent1"/>
+          </a:effectRef>
+          <a:fontRef idx="minor">
+            <a:schemeClr val="lt1"/>
+          </a:fontRef>
+        </p:style>
+        <p:txBody>
+          <a:bodyPr rtlCol="0" anchor="ctr"/>
+          <a:lstStyle/>
+          <a:p>
+            <a:pPr algn="ctr"/>
+            <a:endParaRPr lang="en-US" dirty="0"/>
+          </a:p>
+        </p:txBody>
+      </p:sp>
+    </p:spTree>
+    <p:extLst>
+      <p:ext uri="{BB962C8B-B14F-4D97-AF65-F5344CB8AC3E}">
+        <p14:creationId xmlns:p14="http://schemas.microsoft.com/office/powerpoint/2010/main" val="2815078552"/>
+      </p:ext>
+    </p:extLst>
+  </p:cSld>
+  <p:clrMapOvr>
+    <a:masterClrMapping/>
+  </p:clrMapOvr>
+</p:sld>
+</file>
+
+<file path=ppt/slides/slide41.xml><?xml version="1.0" encoding="utf-8"?>
+<p:sld xmlns:a="http://schemas.openxmlformats.org/drawingml/2006/main" xmlns:r="http://schemas.openxmlformats.org/officeDocument/2006/relationships" xmlns:p="http://schemas.openxmlformats.org/presentationml/2006/main">
+  <p:cSld>
+    <p:spTree>
+      <p:nvGrpSpPr>
+        <p:cNvPr id="1" name=""/>
+        <p:cNvGrpSpPr/>
+        <p:nvPr/>
+      </p:nvGrpSpPr>
+      <p:grpSpPr>
+        <a:xfrm>
+          <a:off x="0" y="0"/>
+          <a:ext cx="0" cy="0"/>
+          <a:chOff x="0" y="0"/>
+          <a:chExt cx="0" cy="0"/>
+        </a:xfrm>
+      </p:grpSpPr>
+      <p:sp>
+        <p:nvSpPr>
           <p:cNvPr id="9" name="Rounded Rectangle 8">
             <a:extLst>
               <a:ext uri="{FF2B5EF4-FFF2-40B4-BE49-F238E27FC236}">
@@ -18290,7 +18918,7 @@
               <a:pPr>
                 <a:defRPr/>
               </a:pPr>
-              <a:t>40</a:t>
+              <a:t>41</a:t>
             </a:fld>
             <a:endParaRPr lang="en-US"/>
           </a:p>
@@ -18668,7 +19296,7 @@
 </p:sld>
 </file>
 
-<file path=ppt/slides/slide41.xml><?xml version="1.0" encoding="utf-8"?>
+<file path=ppt/slides/slide42.xml><?xml version="1.0" encoding="utf-8"?>
 <p:sld xmlns:a="http://schemas.openxmlformats.org/drawingml/2006/main" xmlns:r="http://schemas.openxmlformats.org/officeDocument/2006/relationships" xmlns:p="http://schemas.openxmlformats.org/presentationml/2006/main">
   <p:cSld>
     <p:spTree>
@@ -18735,7 +19363,7 @@
               <a:pPr>
                 <a:defRPr/>
               </a:pPr>
-              <a:t>41</a:t>
+              <a:t>42</a:t>
             </a:fld>
             <a:endParaRPr lang="en-US"/>
           </a:p>
@@ -19014,7 +19642,7 @@
 </p:sld>
 </file>
 
-<file path=ppt/slides/slide42.xml><?xml version="1.0" encoding="utf-8"?>
+<file path=ppt/slides/slide43.xml><?xml version="1.0" encoding="utf-8"?>
 <p:sld xmlns:a="http://schemas.openxmlformats.org/drawingml/2006/main" xmlns:r="http://schemas.openxmlformats.org/officeDocument/2006/relationships" xmlns:p="http://schemas.openxmlformats.org/presentationml/2006/main">
   <p:cSld>
     <p:spTree>
@@ -19239,7 +19867,7 @@
               <a:pPr>
                 <a:defRPr/>
               </a:pPr>
-              <a:t>42</a:t>
+              <a:t>43</a:t>
             </a:fld>
             <a:endParaRPr lang="en-US" dirty="0"/>
           </a:p>
@@ -19253,7 +19881,7 @@
 </p:sld>
 </file>
 
-<file path=ppt/slides/slide43.xml><?xml version="1.0" encoding="utf-8"?>
+<file path=ppt/slides/slide44.xml><?xml version="1.0" encoding="utf-8"?>
 <p:sld xmlns:a="http://schemas.openxmlformats.org/drawingml/2006/main" xmlns:r="http://schemas.openxmlformats.org/officeDocument/2006/relationships" xmlns:p="http://schemas.openxmlformats.org/presentationml/2006/main">
   <p:cSld>
     <p:spTree>
@@ -19429,7 +20057,7 @@
               <a:pPr>
                 <a:defRPr/>
               </a:pPr>
-              <a:t>43</a:t>
+              <a:t>44</a:t>
             </a:fld>
             <a:endParaRPr lang="en-US"/>
           </a:p>
@@ -20189,7 +20817,7 @@
 </p:sld>
 </file>
 
-<file path=ppt/slides/slide44.xml><?xml version="1.0" encoding="utf-8"?>
+<file path=ppt/slides/slide45.xml><?xml version="1.0" encoding="utf-8"?>
 <p:sld xmlns:a="http://schemas.openxmlformats.org/drawingml/2006/main" xmlns:r="http://schemas.openxmlformats.org/officeDocument/2006/relationships" xmlns:p="http://schemas.openxmlformats.org/presentationml/2006/main">
   <p:cSld>
     <p:spTree>
@@ -20252,7 +20880,7 @@
               <a:pPr>
                 <a:defRPr/>
               </a:pPr>
-              <a:t>44</a:t>
+              <a:t>45</a:t>
             </a:fld>
             <a:endParaRPr lang="en-US"/>
           </a:p>
@@ -20894,7 +21522,7 @@
 </p:sld>
 </file>
 
-<file path=ppt/slides/slide45.xml><?xml version="1.0" encoding="utf-8"?>
+<file path=ppt/slides/slide46.xml><?xml version="1.0" encoding="utf-8"?>
 <p:sld xmlns:a="http://schemas.openxmlformats.org/drawingml/2006/main" xmlns:r="http://schemas.openxmlformats.org/officeDocument/2006/relationships" xmlns:p="http://schemas.openxmlformats.org/presentationml/2006/main">
   <p:cSld>
     <p:spTree>
@@ -21236,7 +21864,7 @@
               <a:pPr>
                 <a:defRPr/>
               </a:pPr>
-              <a:t>45</a:t>
+              <a:t>46</a:t>
             </a:fld>
             <a:endParaRPr lang="en-US"/>
           </a:p>
@@ -21255,7 +21883,7 @@
 </p:sld>
 </file>
 
-<file path=ppt/slides/slide46.xml><?xml version="1.0" encoding="utf-8"?>
+<file path=ppt/slides/slide47.xml><?xml version="1.0" encoding="utf-8"?>
 <p:sld xmlns:a="http://schemas.openxmlformats.org/drawingml/2006/main" xmlns:r="http://schemas.openxmlformats.org/officeDocument/2006/relationships" xmlns:p="http://schemas.openxmlformats.org/presentationml/2006/main">
   <p:cSld>
     <p:spTree>
@@ -21483,7 +22111,7 @@
               <a:pPr>
                 <a:defRPr/>
               </a:pPr>
-              <a:t>46</a:t>
+              <a:t>47</a:t>
             </a:fld>
             <a:endParaRPr lang="en-US"/>
           </a:p>

--- a/slides/ut.pptx
+++ b/slides/ut.pptx
@@ -311,7 +311,7 @@
               <a:pPr>
                 <a:defRPr/>
               </a:pPr>
-              <a:t>20-04-2026</a:t>
+              <a:t>23-04-2026</a:t>
             </a:fld>
             <a:endParaRPr lang="en-US"/>
           </a:p>
@@ -979,7 +979,7 @@
               <a:pPr>
                 <a:defRPr/>
               </a:pPr>
-              <a:t>37</a:t>
+              <a:t>35</a:t>
             </a:fld>
             <a:endParaRPr lang="en-US"/>
           </a:p>
@@ -988,7 +988,7 @@
     </p:spTree>
     <p:extLst>
       <p:ext uri="{BB962C8B-B14F-4D97-AF65-F5344CB8AC3E}">
-        <p14:creationId xmlns:p14="http://schemas.microsoft.com/office/powerpoint/2010/main" val="3120005148"/>
+        <p14:creationId xmlns:p14="http://schemas.microsoft.com/office/powerpoint/2010/main" val="1065686508"/>
       </p:ext>
     </p:extLst>
   </p:cSld>
@@ -1069,7 +1069,7 @@
               <a:pPr>
                 <a:defRPr/>
               </a:pPr>
-              <a:t>38</a:t>
+              <a:t>37</a:t>
             </a:fld>
             <a:endParaRPr lang="en-US"/>
           </a:p>
@@ -1078,7 +1078,7 @@
     </p:spTree>
     <p:extLst>
       <p:ext uri="{BB962C8B-B14F-4D97-AF65-F5344CB8AC3E}">
-        <p14:creationId xmlns:p14="http://schemas.microsoft.com/office/powerpoint/2010/main" val="468100708"/>
+        <p14:creationId xmlns:p14="http://schemas.microsoft.com/office/powerpoint/2010/main" val="3120005148"/>
       </p:ext>
     </p:extLst>
   </p:cSld>
@@ -1159,7 +1159,7 @@
               <a:pPr>
                 <a:defRPr/>
               </a:pPr>
-              <a:t>40</a:t>
+              <a:t>38</a:t>
             </a:fld>
             <a:endParaRPr lang="en-US"/>
           </a:p>
@@ -1168,7 +1168,7 @@
     </p:spTree>
     <p:extLst>
       <p:ext uri="{BB962C8B-B14F-4D97-AF65-F5344CB8AC3E}">
-        <p14:creationId xmlns:p14="http://schemas.microsoft.com/office/powerpoint/2010/main" val="3726015562"/>
+        <p14:creationId xmlns:p14="http://schemas.microsoft.com/office/powerpoint/2010/main" val="468100708"/>
       </p:ext>
     </p:extLst>
   </p:cSld>
@@ -1222,7 +1222,7 @@
           <a:bodyPr/>
           <a:lstStyle/>
           <a:p>
-            <a:endParaRPr lang="en-US" dirty="0"/>
+            <a:endParaRPr lang="en-NL" dirty="0"/>
           </a:p>
         </p:txBody>
       </p:sp>
@@ -1233,7 +1233,7 @@
             <a:spLocks noGrp="1"/>
           </p:cNvSpPr>
           <p:nvPr>
-            <p:ph type="sldNum" sz="quarter" idx="10"/>
+            <p:ph type="sldNum" sz="quarter" idx="5"/>
           </p:nvPr>
         </p:nvSpPr>
         <p:spPr/>
@@ -1249,7 +1249,7 @@
               <a:pPr>
                 <a:defRPr/>
               </a:pPr>
-              <a:t>41</a:t>
+              <a:t>40</a:t>
             </a:fld>
             <a:endParaRPr lang="en-US"/>
           </a:p>
@@ -1258,7 +1258,7 @@
     </p:spTree>
     <p:extLst>
       <p:ext uri="{BB962C8B-B14F-4D97-AF65-F5344CB8AC3E}">
-        <p14:creationId xmlns:p14="http://schemas.microsoft.com/office/powerpoint/2010/main" val="640978486"/>
+        <p14:creationId xmlns:p14="http://schemas.microsoft.com/office/powerpoint/2010/main" val="3726015562"/>
       </p:ext>
     </p:extLst>
   </p:cSld>
@@ -1312,30 +1312,7 @@
           <a:bodyPr/>
           <a:lstStyle/>
           <a:p>
-            <a:pPr marL="0" marR="0" lvl="0" indent="0" algn="l" defTabSz="914400" rtl="0" eaLnBrk="0" fontAlgn="base" latinLnBrk="0" hangingPunct="0">
-              <a:lnSpc>
-                <a:spcPct val="100000"/>
-              </a:lnSpc>
-              <a:spcBef>
-                <a:spcPct val="30000"/>
-              </a:spcBef>
-              <a:spcAft>
-                <a:spcPct val="0"/>
-              </a:spcAft>
-              <a:buClrTx/>
-              <a:buSzTx/>
-              <a:buFontTx/>
-              <a:buNone/>
-              <a:tabLst/>
-              <a:defRPr/>
-            </a:pPr>
-            <a:r>
-              <a:rPr lang="en-US" dirty="0"/>
-              <a:t>In the literature, testing a program by exploiting relations of multiple methods/operations like in the example above is also called “metamorphic testing”</a:t>
-            </a:r>
-          </a:p>
-          <a:p>
-            <a:endParaRPr lang="en-NL" dirty="0"/>
+            <a:endParaRPr lang="en-US" dirty="0"/>
           </a:p>
         </p:txBody>
       </p:sp>
@@ -1346,7 +1323,7 @@
             <a:spLocks noGrp="1"/>
           </p:cNvSpPr>
           <p:nvPr>
-            <p:ph type="sldNum" sz="quarter" idx="5"/>
+            <p:ph type="sldNum" sz="quarter" idx="10"/>
           </p:nvPr>
         </p:nvSpPr>
         <p:spPr/>
@@ -1362,7 +1339,7 @@
               <a:pPr>
                 <a:defRPr/>
               </a:pPr>
-              <a:t>42</a:t>
+              <a:t>41</a:t>
             </a:fld>
             <a:endParaRPr lang="en-US"/>
           </a:p>
@@ -1371,7 +1348,7 @@
     </p:spTree>
     <p:extLst>
       <p:ext uri="{BB962C8B-B14F-4D97-AF65-F5344CB8AC3E}">
-        <p14:creationId xmlns:p14="http://schemas.microsoft.com/office/powerpoint/2010/main" val="3478692827"/>
+        <p14:creationId xmlns:p14="http://schemas.microsoft.com/office/powerpoint/2010/main" val="640978486"/>
       </p:ext>
     </p:extLst>
   </p:cSld>
@@ -1400,29 +1377,19 @@
       </p:grpSpPr>
       <p:sp>
         <p:nvSpPr>
-          <p:cNvPr id="55298" name="Slide Image Placeholder 1"/>
+          <p:cNvPr id="2" name="Slide Image Placeholder 1"/>
           <p:cNvSpPr>
-            <a:spLocks noGrp="1" noRot="1" noChangeAspect="1" noTextEdit="1"/>
+            <a:spLocks noGrp="1" noRot="1" noChangeAspect="1"/>
           </p:cNvSpPr>
           <p:nvPr>
             <p:ph type="sldImg"/>
           </p:nvPr>
         </p:nvSpPr>
-        <p:spPr bwMode="auto">
-          <a:noFill/>
-          <a:ln>
-            <a:solidFill>
-              <a:srgbClr val="000000"/>
-            </a:solidFill>
-            <a:miter lim="800000"/>
-            <a:headEnd/>
-            <a:tailEnd/>
-          </a:ln>
-        </p:spPr>
-      </p:sp>
-      <p:sp>
-        <p:nvSpPr>
-          <p:cNvPr id="55299" name="Notes Placeholder 2"/>
+        <p:spPr/>
+      </p:sp>
+      <p:sp>
+        <p:nvSpPr>
+          <p:cNvPr id="3" name="Notes Placeholder 2"/>
           <p:cNvSpPr>
             <a:spLocks noGrp="1"/>
           </p:cNvSpPr>
@@ -1430,21 +1397,35 @@
             <p:ph type="body" idx="1"/>
           </p:nvPr>
         </p:nvSpPr>
-        <p:spPr bwMode="auto">
-          <a:noFill/>
-        </p:spPr>
-        <p:txBody>
-          <a:bodyPr wrap="square" numCol="1" anchor="t" anchorCtr="0" compatLnSpc="1">
-            <a:prstTxWarp prst="textNoShape">
-              <a:avLst/>
-            </a:prstTxWarp>
-          </a:bodyPr>
-          <a:lstStyle/>
-          <a:p>
-            <a:endParaRPr lang="en-US" dirty="0"/>
-          </a:p>
-          <a:p>
-            <a:endParaRPr lang="en-US" dirty="0"/>
+        <p:spPr/>
+        <p:txBody>
+          <a:bodyPr/>
+          <a:lstStyle/>
+          <a:p>
+            <a:pPr marL="0" marR="0" lvl="0" indent="0" algn="l" defTabSz="914400" rtl="0" eaLnBrk="0" fontAlgn="base" latinLnBrk="0" hangingPunct="0">
+              <a:lnSpc>
+                <a:spcPct val="100000"/>
+              </a:lnSpc>
+              <a:spcBef>
+                <a:spcPct val="30000"/>
+              </a:spcBef>
+              <a:spcAft>
+                <a:spcPct val="0"/>
+              </a:spcAft>
+              <a:buClrTx/>
+              <a:buSzTx/>
+              <a:buFontTx/>
+              <a:buNone/>
+              <a:tabLst/>
+              <a:defRPr/>
+            </a:pPr>
+            <a:r>
+              <a:rPr lang="en-US" dirty="0"/>
+              <a:t>In the literature, testing a program by exploiting relations of multiple methods/operations like in the example above is also called “metamorphic testing”</a:t>
+            </a:r>
+          </a:p>
+          <a:p>
+            <a:endParaRPr lang="en-NL" dirty="0"/>
           </a:p>
         </p:txBody>
       </p:sp>
@@ -1466,12 +1447,12 @@
             <a:pPr>
               <a:defRPr/>
             </a:pPr>
-            <a:fld id="{EC5B1458-9BA2-4FCA-B083-2E2B2AD6D16B}" type="slidenum">
+            <a:fld id="{F84EA20E-9838-494E-B9DD-2C988F7E650A}" type="slidenum">
               <a:rPr lang="en-US" smtClean="0"/>
               <a:pPr>
                 <a:defRPr/>
               </a:pPr>
-              <a:t>44</a:t>
+              <a:t>42</a:t>
             </a:fld>
             <a:endParaRPr lang="en-US"/>
           </a:p>
@@ -1480,7 +1461,7 @@
     </p:spTree>
     <p:extLst>
       <p:ext uri="{BB962C8B-B14F-4D97-AF65-F5344CB8AC3E}">
-        <p14:creationId xmlns:p14="http://schemas.microsoft.com/office/powerpoint/2010/main" val="1763036822"/>
+        <p14:creationId xmlns:p14="http://schemas.microsoft.com/office/powerpoint/2010/main" val="3478692827"/>
       </p:ext>
     </p:extLst>
   </p:cSld>
@@ -1550,45 +1531,6 @@
           </a:bodyPr>
           <a:lstStyle/>
           <a:p>
-            <a:pPr marL="0" marR="0" lvl="0" indent="0" algn="l" defTabSz="914400" rtl="0" eaLnBrk="0" fontAlgn="base" latinLnBrk="0" hangingPunct="0">
-              <a:lnSpc>
-                <a:spcPct val="100000"/>
-              </a:lnSpc>
-              <a:spcBef>
-                <a:spcPct val="30000"/>
-              </a:spcBef>
-              <a:spcAft>
-                <a:spcPct val="0"/>
-              </a:spcAft>
-              <a:buClrTx/>
-              <a:buSzTx/>
-              <a:buFontTx/>
-              <a:buNone/>
-              <a:tabLst/>
-              <a:defRPr/>
-            </a:pPr>
-            <a:r>
-              <a:rPr lang="en-US" dirty="0"/>
-              <a:t>There are other mock framework for .NET, e.g. </a:t>
-            </a:r>
-            <a:r>
-              <a:rPr lang="en-US" dirty="0" err="1"/>
-              <a:t>Moq</a:t>
-            </a:r>
-            <a:r>
-              <a:rPr lang="en-US" dirty="0"/>
-              <a:t>, rhino, </a:t>
-            </a:r>
-            <a:r>
-              <a:rPr lang="en-US" dirty="0" err="1"/>
-              <a:t>easymock</a:t>
-            </a:r>
-            <a:r>
-              <a:rPr lang="en-US" dirty="0"/>
-              <a:t>, etc. </a:t>
-            </a:r>
-          </a:p>
-          <a:p>
             <a:endParaRPr lang="en-US" dirty="0"/>
           </a:p>
           <a:p>
@@ -1619,7 +1561,7 @@
               <a:pPr>
                 <a:defRPr/>
               </a:pPr>
-              <a:t>45</a:t>
+              <a:t>44</a:t>
             </a:fld>
             <a:endParaRPr lang="en-US"/>
           </a:p>
@@ -1628,7 +1570,7 @@
     </p:spTree>
     <p:extLst>
       <p:ext uri="{BB962C8B-B14F-4D97-AF65-F5344CB8AC3E}">
-        <p14:creationId xmlns:p14="http://schemas.microsoft.com/office/powerpoint/2010/main" val="791692650"/>
+        <p14:creationId xmlns:p14="http://schemas.microsoft.com/office/powerpoint/2010/main" val="1763036822"/>
       </p:ext>
     </p:extLst>
   </p:cSld>
@@ -1657,19 +1599,29 @@
       </p:grpSpPr>
       <p:sp>
         <p:nvSpPr>
-          <p:cNvPr id="2" name="Slide Image Placeholder 1"/>
+          <p:cNvPr id="55298" name="Slide Image Placeholder 1"/>
           <p:cNvSpPr>
-            <a:spLocks noGrp="1" noRot="1" noChangeAspect="1"/>
+            <a:spLocks noGrp="1" noRot="1" noChangeAspect="1" noTextEdit="1"/>
           </p:cNvSpPr>
           <p:nvPr>
             <p:ph type="sldImg"/>
           </p:nvPr>
         </p:nvSpPr>
-        <p:spPr/>
-      </p:sp>
-      <p:sp>
-        <p:nvSpPr>
-          <p:cNvPr id="3" name="Notes Placeholder 2"/>
+        <p:spPr bwMode="auto">
+          <a:noFill/>
+          <a:ln>
+            <a:solidFill>
+              <a:srgbClr val="000000"/>
+            </a:solidFill>
+            <a:miter lim="800000"/>
+            <a:headEnd/>
+            <a:tailEnd/>
+          </a:ln>
+        </p:spPr>
+      </p:sp>
+      <p:sp>
+        <p:nvSpPr>
+          <p:cNvPr id="55299" name="Notes Placeholder 2"/>
           <p:cNvSpPr>
             <a:spLocks noGrp="1"/>
           </p:cNvSpPr>
@@ -1677,666 +1629,53 @@
             <p:ph type="body" idx="1"/>
           </p:nvPr>
         </p:nvSpPr>
-        <p:spPr/>
-        <p:txBody>
-          <a:bodyPr>
-            <a:normAutofit fontScale="77500" lnSpcReduction="20000"/>
+        <p:spPr bwMode="auto">
+          <a:noFill/>
+        </p:spPr>
+        <p:txBody>
+          <a:bodyPr wrap="square" numCol="1" anchor="t" anchorCtr="0" compatLnSpc="1">
+            <a:prstTxWarp prst="textNoShape">
+              <a:avLst/>
+            </a:prstTxWarp>
           </a:bodyPr>
           <a:lstStyle/>
           <a:p>
+            <a:pPr marL="0" marR="0" lvl="0" indent="0" algn="l" defTabSz="914400" rtl="0" eaLnBrk="0" fontAlgn="base" latinLnBrk="0" hangingPunct="0">
+              <a:lnSpc>
+                <a:spcPct val="100000"/>
+              </a:lnSpc>
+              <a:spcBef>
+                <a:spcPct val="30000"/>
+              </a:spcBef>
+              <a:spcAft>
+                <a:spcPct val="0"/>
+              </a:spcAft>
+              <a:buClrTx/>
+              <a:buSzTx/>
+              <a:buFontTx/>
+              <a:buNone/>
+              <a:tabLst/>
+              <a:defRPr/>
+            </a:pPr>
             <a:r>
               <a:rPr lang="en-US" dirty="0"/>
-              <a:t>Note:</a:t>
-            </a:r>
-          </a:p>
-          <a:p>
-            <a:endParaRPr lang="en-US" dirty="0"/>
-          </a:p>
-          <a:p>
+              <a:t>There are other mock framework for .NET, e.g. </a:t>
+            </a:r>
+            <a:r>
+              <a:rPr lang="en-US" dirty="0" err="1"/>
+              <a:t>Moq</a:t>
+            </a:r>
             <a:r>
               <a:rPr lang="en-US" dirty="0"/>
-              <a:t>The method “For&lt;I&gt;()” creates an instance of I. </a:t>
-            </a:r>
-          </a:p>
-          <a:p>
-            <a:endParaRPr lang="en-US" dirty="0"/>
-          </a:p>
-          <a:p>
+              <a:t>, rhino, </a:t>
+            </a:r>
+            <a:r>
+              <a:rPr lang="en-US" dirty="0" err="1"/>
+              <a:t>easymock</a:t>
+            </a:r>
             <a:r>
               <a:rPr lang="en-US" dirty="0"/>
-              <a:t>The method “Returns” is probably more magical, especially for Java programmer. E.g. in the above example the method “value(x)” of </a:t>
-            </a:r>
-            <a:r>
-              <a:rPr lang="en-US" dirty="0" err="1"/>
-              <a:t>IThremometer</a:t>
-            </a:r>
-            <a:r>
-              <a:rPr lang="en-US" dirty="0"/>
-              <a:t> returns a “double”. Now, in C# primitives like double are also objects. </a:t>
-            </a:r>
-          </a:p>
-          <a:p>
-            <a:endParaRPr lang="en-US" dirty="0"/>
-          </a:p>
-          <a:p>
-            <a:r>
-              <a:rPr lang="en-US" dirty="0"/>
-              <a:t>Furthermore C# allows a class, including primitives, to be “method-extended”. Normal class can be sub-classed. But primitives and sealed classes cannot be sub-classed. However, C# allows a syntactic sugar called “extension method”. Example with extending string:</a:t>
-            </a:r>
-          </a:p>
-          <a:p>
-            <a:endParaRPr lang="en-US" dirty="0"/>
-          </a:p>
-          <a:p>
-            <a:r>
-              <a:rPr lang="en-US" sz="1200" b="1" i="0" kern="1200" dirty="0">
-                <a:solidFill>
-                  <a:schemeClr val="tx1"/>
-                </a:solidFill>
-                <a:effectLst/>
-                <a:latin typeface="+mn-lt"/>
-                <a:ea typeface="+mn-ea"/>
-                <a:cs typeface="+mn-cs"/>
-              </a:rPr>
-              <a:t>static</a:t>
-            </a:r>
-            <a:r>
-              <a:rPr lang="en-US" sz="1200" b="0" i="0" kern="1200" dirty="0">
-                <a:solidFill>
-                  <a:schemeClr val="tx1"/>
-                </a:solidFill>
-                <a:effectLst/>
-                <a:latin typeface="+mn-lt"/>
-                <a:ea typeface="+mn-ea"/>
-                <a:cs typeface="+mn-cs"/>
-              </a:rPr>
-              <a:t> </a:t>
-            </a:r>
-            <a:r>
-              <a:rPr lang="en-US" sz="1200" b="1" i="0" kern="1200" dirty="0">
-                <a:solidFill>
-                  <a:schemeClr val="tx1"/>
-                </a:solidFill>
-                <a:effectLst/>
-                <a:latin typeface="+mn-lt"/>
-                <a:ea typeface="+mn-ea"/>
-                <a:cs typeface="+mn-cs"/>
-              </a:rPr>
-              <a:t>class</a:t>
-            </a:r>
-            <a:r>
-              <a:rPr lang="en-US" sz="1200" b="0" i="0" kern="1200" dirty="0">
-                <a:solidFill>
-                  <a:schemeClr val="tx1"/>
-                </a:solidFill>
-                <a:effectLst/>
-                <a:latin typeface="+mn-lt"/>
-                <a:ea typeface="+mn-ea"/>
-                <a:cs typeface="+mn-cs"/>
-              </a:rPr>
-              <a:t>  Extensions  </a:t>
-            </a:r>
-          </a:p>
-          <a:p>
-            <a:r>
-              <a:rPr lang="en-US" sz="1200" b="0" i="0" kern="1200" dirty="0">
-                <a:solidFill>
-                  <a:schemeClr val="tx1"/>
-                </a:solidFill>
-                <a:effectLst/>
-                <a:latin typeface="+mn-lt"/>
-                <a:ea typeface="+mn-ea"/>
-                <a:cs typeface="+mn-cs"/>
-              </a:rPr>
-              <a:t>    {  </a:t>
-            </a:r>
-          </a:p>
-          <a:p>
-            <a:r>
-              <a:rPr lang="en-US" sz="1200" b="0" i="0" kern="1200" dirty="0">
-                <a:solidFill>
-                  <a:schemeClr val="tx1"/>
-                </a:solidFill>
-                <a:effectLst/>
-                <a:latin typeface="+mn-lt"/>
-                <a:ea typeface="+mn-ea"/>
-                <a:cs typeface="+mn-cs"/>
-              </a:rPr>
-              <a:t>        </a:t>
-            </a:r>
-            <a:r>
-              <a:rPr lang="en-US" sz="1200" b="1" i="0" kern="1200" dirty="0">
-                <a:solidFill>
-                  <a:schemeClr val="tx1"/>
-                </a:solidFill>
-                <a:effectLst/>
-                <a:latin typeface="+mn-lt"/>
-                <a:ea typeface="+mn-ea"/>
-                <a:cs typeface="+mn-cs"/>
-              </a:rPr>
-              <a:t>public</a:t>
-            </a:r>
-            <a:r>
-              <a:rPr lang="en-US" sz="1200" b="0" i="0" kern="1200" dirty="0">
-                <a:solidFill>
-                  <a:schemeClr val="tx1"/>
-                </a:solidFill>
-                <a:effectLst/>
-                <a:latin typeface="+mn-lt"/>
-                <a:ea typeface="+mn-ea"/>
-                <a:cs typeface="+mn-cs"/>
-              </a:rPr>
-              <a:t> </a:t>
-            </a:r>
-            <a:r>
-              <a:rPr lang="en-US" sz="1200" b="1" i="0" kern="1200" dirty="0">
-                <a:solidFill>
-                  <a:schemeClr val="tx1"/>
-                </a:solidFill>
-                <a:effectLst/>
-                <a:latin typeface="+mn-lt"/>
-                <a:ea typeface="+mn-ea"/>
-                <a:cs typeface="+mn-cs"/>
-              </a:rPr>
-              <a:t>static</a:t>
-            </a:r>
-            <a:r>
-              <a:rPr lang="en-US" sz="1200" b="0" i="0" kern="1200" dirty="0">
-                <a:solidFill>
-                  <a:schemeClr val="tx1"/>
-                </a:solidFill>
-                <a:effectLst/>
-                <a:latin typeface="+mn-lt"/>
-                <a:ea typeface="+mn-ea"/>
-                <a:cs typeface="+mn-cs"/>
-              </a:rPr>
-              <a:t> </a:t>
-            </a:r>
-            <a:r>
-              <a:rPr lang="en-US" sz="1200" b="1" i="0" kern="1200" dirty="0">
-                <a:solidFill>
-                  <a:schemeClr val="tx1"/>
-                </a:solidFill>
-                <a:effectLst/>
-                <a:latin typeface="+mn-lt"/>
-                <a:ea typeface="+mn-ea"/>
-                <a:cs typeface="+mn-cs"/>
-              </a:rPr>
-              <a:t>string</a:t>
-            </a:r>
-            <a:r>
-              <a:rPr lang="en-US" sz="1200" b="0" i="0" kern="1200" dirty="0">
-                <a:solidFill>
-                  <a:schemeClr val="tx1"/>
-                </a:solidFill>
-                <a:effectLst/>
-                <a:latin typeface="+mn-lt"/>
-                <a:ea typeface="+mn-ea"/>
-                <a:cs typeface="+mn-cs"/>
-              </a:rPr>
-              <a:t> </a:t>
-            </a:r>
-            <a:r>
-              <a:rPr lang="en-US" sz="1200" b="0" i="0" kern="1200" dirty="0" err="1">
-                <a:solidFill>
-                  <a:schemeClr val="tx1"/>
-                </a:solidFill>
-                <a:effectLst/>
-                <a:latin typeface="+mn-lt"/>
-                <a:ea typeface="+mn-ea"/>
-                <a:cs typeface="+mn-cs"/>
-              </a:rPr>
-              <a:t>UpperFirst</a:t>
-            </a:r>
-            <a:r>
-              <a:rPr lang="en-US" sz="1200" b="0" i="0" kern="1200" dirty="0">
-                <a:solidFill>
-                  <a:schemeClr val="tx1"/>
-                </a:solidFill>
-                <a:effectLst/>
-                <a:latin typeface="+mn-lt"/>
-                <a:ea typeface="+mn-ea"/>
-                <a:cs typeface="+mn-cs"/>
-              </a:rPr>
-              <a:t>(</a:t>
-            </a:r>
-            <a:r>
-              <a:rPr lang="en-US" sz="1200" b="1" i="0" kern="1200" dirty="0">
-                <a:solidFill>
-                  <a:schemeClr val="tx1"/>
-                </a:solidFill>
-                <a:effectLst/>
-                <a:latin typeface="+mn-lt"/>
-                <a:ea typeface="+mn-ea"/>
-                <a:cs typeface="+mn-cs"/>
-              </a:rPr>
-              <a:t>this</a:t>
-            </a:r>
-            <a:r>
-              <a:rPr lang="en-US" sz="1200" b="0" i="0" kern="1200" dirty="0">
-                <a:solidFill>
-                  <a:schemeClr val="tx1"/>
-                </a:solidFill>
-                <a:effectLst/>
-                <a:latin typeface="+mn-lt"/>
-                <a:ea typeface="+mn-ea"/>
-                <a:cs typeface="+mn-cs"/>
-              </a:rPr>
-              <a:t> String </a:t>
-            </a:r>
-            <a:r>
-              <a:rPr lang="en-US" sz="1200" b="0" i="0" kern="1200" dirty="0" err="1">
-                <a:solidFill>
-                  <a:schemeClr val="tx1"/>
-                </a:solidFill>
-                <a:effectLst/>
-                <a:latin typeface="+mn-lt"/>
-                <a:ea typeface="+mn-ea"/>
-                <a:cs typeface="+mn-cs"/>
-              </a:rPr>
-              <a:t>str</a:t>
-            </a:r>
-            <a:r>
-              <a:rPr lang="en-US" sz="1200" b="0" i="0" kern="1200" dirty="0">
-                <a:solidFill>
-                  <a:schemeClr val="tx1"/>
-                </a:solidFill>
-                <a:effectLst/>
-                <a:latin typeface="+mn-lt"/>
-                <a:ea typeface="+mn-ea"/>
-                <a:cs typeface="+mn-cs"/>
-              </a:rPr>
-              <a:t>)  </a:t>
-            </a:r>
-          </a:p>
-          <a:p>
-            <a:r>
-              <a:rPr lang="en-US" sz="1200" b="0" i="0" kern="1200" dirty="0">
-                <a:solidFill>
-                  <a:schemeClr val="tx1"/>
-                </a:solidFill>
-                <a:effectLst/>
-                <a:latin typeface="+mn-lt"/>
-                <a:ea typeface="+mn-ea"/>
-                <a:cs typeface="+mn-cs"/>
-              </a:rPr>
-              <a:t>        {  </a:t>
-            </a:r>
-          </a:p>
-          <a:p>
-            <a:r>
-              <a:rPr lang="en-US" sz="1200" b="0" i="0" kern="1200" dirty="0">
-                <a:solidFill>
-                  <a:schemeClr val="tx1"/>
-                </a:solidFill>
-                <a:effectLst/>
-                <a:latin typeface="+mn-lt"/>
-                <a:ea typeface="+mn-ea"/>
-                <a:cs typeface="+mn-cs"/>
-              </a:rPr>
-              <a:t>            </a:t>
-            </a:r>
-            <a:r>
-              <a:rPr lang="en-US" sz="1200" b="1" i="0" kern="1200" dirty="0">
-                <a:solidFill>
-                  <a:schemeClr val="tx1"/>
-                </a:solidFill>
-                <a:effectLst/>
-                <a:latin typeface="+mn-lt"/>
-                <a:ea typeface="+mn-ea"/>
-                <a:cs typeface="+mn-cs"/>
-              </a:rPr>
-              <a:t>if</a:t>
-            </a:r>
-            <a:r>
-              <a:rPr lang="en-US" sz="1200" b="0" i="0" kern="1200" dirty="0">
-                <a:solidFill>
-                  <a:schemeClr val="tx1"/>
-                </a:solidFill>
-                <a:effectLst/>
-                <a:latin typeface="+mn-lt"/>
-                <a:ea typeface="+mn-ea"/>
-                <a:cs typeface="+mn-cs"/>
-              </a:rPr>
-              <a:t> (</a:t>
-            </a:r>
-            <a:r>
-              <a:rPr lang="en-US" sz="1200" b="0" i="0" kern="1200" dirty="0" err="1">
-                <a:solidFill>
-                  <a:schemeClr val="tx1"/>
-                </a:solidFill>
-                <a:effectLst/>
-                <a:latin typeface="+mn-lt"/>
-                <a:ea typeface="+mn-ea"/>
-                <a:cs typeface="+mn-cs"/>
-              </a:rPr>
-              <a:t>String.IsNullOrEmpty</a:t>
-            </a:r>
-            <a:r>
-              <a:rPr lang="en-US" sz="1200" b="0" i="0" kern="1200" dirty="0">
-                <a:solidFill>
-                  <a:schemeClr val="tx1"/>
-                </a:solidFill>
-                <a:effectLst/>
-                <a:latin typeface="+mn-lt"/>
-                <a:ea typeface="+mn-ea"/>
-                <a:cs typeface="+mn-cs"/>
-              </a:rPr>
-              <a:t>(</a:t>
-            </a:r>
-            <a:r>
-              <a:rPr lang="en-US" sz="1200" b="0" i="0" kern="1200" dirty="0" err="1">
-                <a:solidFill>
-                  <a:schemeClr val="tx1"/>
-                </a:solidFill>
-                <a:effectLst/>
-                <a:latin typeface="+mn-lt"/>
-                <a:ea typeface="+mn-ea"/>
-                <a:cs typeface="+mn-cs"/>
-              </a:rPr>
-              <a:t>str</a:t>
-            </a:r>
-            <a:r>
-              <a:rPr lang="en-US" sz="1200" b="0" i="0" kern="1200" dirty="0">
-                <a:solidFill>
-                  <a:schemeClr val="tx1"/>
-                </a:solidFill>
-                <a:effectLst/>
-                <a:latin typeface="+mn-lt"/>
-                <a:ea typeface="+mn-ea"/>
-                <a:cs typeface="+mn-cs"/>
-              </a:rPr>
-              <a:t>))  </a:t>
-            </a:r>
-          </a:p>
-          <a:p>
-            <a:r>
-              <a:rPr lang="en-US" sz="1200" b="0" i="0" kern="1200" dirty="0">
-                <a:solidFill>
-                  <a:schemeClr val="tx1"/>
-                </a:solidFill>
-                <a:effectLst/>
-                <a:latin typeface="+mn-lt"/>
-                <a:ea typeface="+mn-ea"/>
-                <a:cs typeface="+mn-cs"/>
-              </a:rPr>
-              <a:t>                </a:t>
-            </a:r>
-            <a:r>
-              <a:rPr lang="en-US" sz="1200" b="1" i="0" kern="1200" dirty="0">
-                <a:solidFill>
-                  <a:schemeClr val="tx1"/>
-                </a:solidFill>
-                <a:effectLst/>
-                <a:latin typeface="+mn-lt"/>
-                <a:ea typeface="+mn-ea"/>
-                <a:cs typeface="+mn-cs"/>
-              </a:rPr>
-              <a:t>return</a:t>
-            </a:r>
-            <a:r>
-              <a:rPr lang="en-US" sz="1200" b="0" i="0" kern="1200" dirty="0">
-                <a:solidFill>
-                  <a:schemeClr val="tx1"/>
-                </a:solidFill>
-                <a:effectLst/>
-                <a:latin typeface="+mn-lt"/>
-                <a:ea typeface="+mn-ea"/>
-                <a:cs typeface="+mn-cs"/>
-              </a:rPr>
-              <a:t> </a:t>
-            </a:r>
-            <a:r>
-              <a:rPr lang="en-US" sz="1200" b="0" i="0" kern="1200" dirty="0" err="1">
-                <a:solidFill>
-                  <a:schemeClr val="tx1"/>
-                </a:solidFill>
-                <a:effectLst/>
-                <a:latin typeface="+mn-lt"/>
-                <a:ea typeface="+mn-ea"/>
-                <a:cs typeface="+mn-cs"/>
-              </a:rPr>
-              <a:t>String.Empty</a:t>
-            </a:r>
-            <a:r>
-              <a:rPr lang="en-US" sz="1200" b="0" i="0" kern="1200" dirty="0">
-                <a:solidFill>
-                  <a:schemeClr val="tx1"/>
-                </a:solidFill>
-                <a:effectLst/>
-                <a:latin typeface="+mn-lt"/>
-                <a:ea typeface="+mn-ea"/>
-                <a:cs typeface="+mn-cs"/>
-              </a:rPr>
-              <a:t>;  </a:t>
-            </a:r>
-          </a:p>
-          <a:p>
-            <a:r>
-              <a:rPr lang="en-US" sz="1200" b="0" i="0" kern="1200" dirty="0">
-                <a:solidFill>
-                  <a:schemeClr val="tx1"/>
-                </a:solidFill>
-                <a:effectLst/>
-                <a:latin typeface="+mn-lt"/>
-                <a:ea typeface="+mn-ea"/>
-                <a:cs typeface="+mn-cs"/>
-              </a:rPr>
-              <a:t>  </a:t>
-            </a:r>
-          </a:p>
-          <a:p>
-            <a:r>
-              <a:rPr lang="en-US" sz="1200" b="0" i="0" kern="1200" dirty="0">
-                <a:solidFill>
-                  <a:schemeClr val="tx1"/>
-                </a:solidFill>
-                <a:effectLst/>
-                <a:latin typeface="+mn-lt"/>
-                <a:ea typeface="+mn-ea"/>
-                <a:cs typeface="+mn-cs"/>
-              </a:rPr>
-              <a:t>            </a:t>
-            </a:r>
-            <a:r>
-              <a:rPr lang="en-US" sz="1200" b="1" i="0" kern="1200" dirty="0">
-                <a:solidFill>
-                  <a:schemeClr val="tx1"/>
-                </a:solidFill>
-                <a:effectLst/>
-                <a:latin typeface="+mn-lt"/>
-                <a:ea typeface="+mn-ea"/>
-                <a:cs typeface="+mn-cs"/>
-              </a:rPr>
-              <a:t>return</a:t>
-            </a:r>
-            <a:r>
-              <a:rPr lang="en-US" sz="1200" b="0" i="0" kern="1200" dirty="0">
-                <a:solidFill>
-                  <a:schemeClr val="tx1"/>
-                </a:solidFill>
-                <a:effectLst/>
-                <a:latin typeface="+mn-lt"/>
-                <a:ea typeface="+mn-ea"/>
-                <a:cs typeface="+mn-cs"/>
-              </a:rPr>
-              <a:t> </a:t>
-            </a:r>
-            <a:r>
-              <a:rPr lang="en-US" sz="1200" b="0" i="0" kern="1200" dirty="0" err="1">
-                <a:solidFill>
-                  <a:schemeClr val="tx1"/>
-                </a:solidFill>
-                <a:effectLst/>
-                <a:latin typeface="+mn-lt"/>
-                <a:ea typeface="+mn-ea"/>
-                <a:cs typeface="+mn-cs"/>
-              </a:rPr>
-              <a:t>str.Substring</a:t>
-            </a:r>
-            <a:r>
-              <a:rPr lang="en-US" sz="1200" b="0" i="0" kern="1200" dirty="0">
-                <a:solidFill>
-                  <a:schemeClr val="tx1"/>
-                </a:solidFill>
-                <a:effectLst/>
-                <a:latin typeface="+mn-lt"/>
-                <a:ea typeface="+mn-ea"/>
-                <a:cs typeface="+mn-cs"/>
-              </a:rPr>
-              <a:t>(0, 1).</a:t>
-            </a:r>
-            <a:r>
-              <a:rPr lang="en-US" sz="1200" b="0" i="0" kern="1200" dirty="0" err="1">
-                <a:solidFill>
-                  <a:schemeClr val="tx1"/>
-                </a:solidFill>
-                <a:effectLst/>
-                <a:latin typeface="+mn-lt"/>
-                <a:ea typeface="+mn-ea"/>
-                <a:cs typeface="+mn-cs"/>
-              </a:rPr>
-              <a:t>ToUpper</a:t>
-            </a:r>
-            <a:r>
-              <a:rPr lang="en-US" sz="1200" b="0" i="0" kern="1200" dirty="0">
-                <a:solidFill>
-                  <a:schemeClr val="tx1"/>
-                </a:solidFill>
-                <a:effectLst/>
-                <a:latin typeface="+mn-lt"/>
-                <a:ea typeface="+mn-ea"/>
-                <a:cs typeface="+mn-cs"/>
-              </a:rPr>
-              <a:t>() + </a:t>
-            </a:r>
-            <a:r>
-              <a:rPr lang="en-US" sz="1200" b="0" i="0" kern="1200" dirty="0" err="1">
-                <a:solidFill>
-                  <a:schemeClr val="tx1"/>
-                </a:solidFill>
-                <a:effectLst/>
-                <a:latin typeface="+mn-lt"/>
-                <a:ea typeface="+mn-ea"/>
-                <a:cs typeface="+mn-cs"/>
-              </a:rPr>
-              <a:t>str.Substring</a:t>
-            </a:r>
-            <a:r>
-              <a:rPr lang="en-US" sz="1200" b="0" i="0" kern="1200" dirty="0">
-                <a:solidFill>
-                  <a:schemeClr val="tx1"/>
-                </a:solidFill>
-                <a:effectLst/>
-                <a:latin typeface="+mn-lt"/>
-                <a:ea typeface="+mn-ea"/>
-                <a:cs typeface="+mn-cs"/>
-              </a:rPr>
-              <a:t>(1, str.Length-1).</a:t>
-            </a:r>
-            <a:r>
-              <a:rPr lang="en-US" sz="1200" b="0" i="0" kern="1200" dirty="0" err="1">
-                <a:solidFill>
-                  <a:schemeClr val="tx1"/>
-                </a:solidFill>
-                <a:effectLst/>
-                <a:latin typeface="+mn-lt"/>
-                <a:ea typeface="+mn-ea"/>
-                <a:cs typeface="+mn-cs"/>
-              </a:rPr>
-              <a:t>ToLower</a:t>
-            </a:r>
-            <a:r>
-              <a:rPr lang="en-US" sz="1200" b="0" i="0" kern="1200" dirty="0">
-                <a:solidFill>
-                  <a:schemeClr val="tx1"/>
-                </a:solidFill>
-                <a:effectLst/>
-                <a:latin typeface="+mn-lt"/>
-                <a:ea typeface="+mn-ea"/>
-                <a:cs typeface="+mn-cs"/>
-              </a:rPr>
-              <a:t>();  </a:t>
-            </a:r>
-          </a:p>
-          <a:p>
-            <a:r>
-              <a:rPr lang="en-US" sz="1200" b="0" i="0" kern="1200" dirty="0">
-                <a:solidFill>
-                  <a:schemeClr val="tx1"/>
-                </a:solidFill>
-                <a:effectLst/>
-                <a:latin typeface="+mn-lt"/>
-                <a:ea typeface="+mn-ea"/>
-                <a:cs typeface="+mn-cs"/>
-              </a:rPr>
-              <a:t>        }  </a:t>
-            </a:r>
-          </a:p>
-          <a:p>
-            <a:r>
-              <a:rPr lang="en-US" sz="1200" b="0" i="0" kern="1200" dirty="0">
-                <a:solidFill>
-                  <a:schemeClr val="tx1"/>
-                </a:solidFill>
-                <a:effectLst/>
-                <a:latin typeface="+mn-lt"/>
-                <a:ea typeface="+mn-ea"/>
-                <a:cs typeface="+mn-cs"/>
-              </a:rPr>
-              <a:t>    }  </a:t>
-            </a:r>
-          </a:p>
-          <a:p>
-            <a:endParaRPr lang="en-US" dirty="0"/>
-          </a:p>
-          <a:p>
-            <a:r>
-              <a:rPr lang="en-US" dirty="0"/>
-              <a:t>Having this in the scope, we can now write:</a:t>
-            </a:r>
-            <a:br>
-              <a:rPr lang="en-US" dirty="0"/>
-            </a:br>
-            <a:br>
-              <a:rPr lang="en-US" dirty="0"/>
-            </a:br>
-            <a:r>
-              <a:rPr lang="en-US" dirty="0"/>
-              <a:t>   String z = “hello”</a:t>
-            </a:r>
-            <a:br>
-              <a:rPr lang="en-US" dirty="0"/>
-            </a:br>
-            <a:r>
-              <a:rPr lang="en-US" dirty="0"/>
-              <a:t>    z = </a:t>
-            </a:r>
-            <a:r>
-              <a:rPr lang="en-US" dirty="0" err="1"/>
-              <a:t>z.UpperFirst</a:t>
-            </a:r>
-            <a:r>
-              <a:rPr lang="en-US" dirty="0"/>
-              <a:t>()</a:t>
-            </a:r>
-            <a:br>
-              <a:rPr lang="en-US" dirty="0"/>
-            </a:br>
-            <a:br>
-              <a:rPr lang="en-US" dirty="0"/>
-            </a:br>
-            <a:r>
-              <a:rPr lang="en-US" dirty="0"/>
-              <a:t>So what </a:t>
-            </a:r>
-            <a:r>
-              <a:rPr lang="en-US" dirty="0" err="1"/>
-              <a:t>NSubstutute</a:t>
-            </a:r>
-            <a:r>
-              <a:rPr lang="en-US" dirty="0"/>
-              <a:t> does is likely to extend return types of mocked methods, including primitives, with the method “Returns”.</a:t>
+              <a:t>, etc. </a:t>
             </a:r>
           </a:p>
           <a:p>
@@ -2365,12 +1704,12 @@
             <a:pPr>
               <a:defRPr/>
             </a:pPr>
-            <a:fld id="{F84EA20E-9838-494E-B9DD-2C988F7E650A}" type="slidenum">
+            <a:fld id="{EC5B1458-9BA2-4FCA-B083-2E2B2AD6D16B}" type="slidenum">
               <a:rPr lang="en-US" smtClean="0"/>
               <a:pPr>
                 <a:defRPr/>
               </a:pPr>
-              <a:t>46</a:t>
+              <a:t>45</a:t>
             </a:fld>
             <a:endParaRPr lang="en-US"/>
           </a:p>
@@ -2379,7 +1718,7 @@
     </p:spTree>
     <p:extLst>
       <p:ext uri="{BB962C8B-B14F-4D97-AF65-F5344CB8AC3E}">
-        <p14:creationId xmlns:p14="http://schemas.microsoft.com/office/powerpoint/2010/main" val="812723745"/>
+        <p14:creationId xmlns:p14="http://schemas.microsoft.com/office/powerpoint/2010/main" val="791692650"/>
       </p:ext>
     </p:extLst>
   </p:cSld>
@@ -2569,6 +1908,757 @@
 </file>
 
 <file path=ppt/notesSlides/notesSlide20.xml><?xml version="1.0" encoding="utf-8"?>
+<p:notes xmlns:a="http://schemas.openxmlformats.org/drawingml/2006/main" xmlns:r="http://schemas.openxmlformats.org/officeDocument/2006/relationships" xmlns:p="http://schemas.openxmlformats.org/presentationml/2006/main">
+  <p:cSld>
+    <p:spTree>
+      <p:nvGrpSpPr>
+        <p:cNvPr id="1" name=""/>
+        <p:cNvGrpSpPr/>
+        <p:nvPr/>
+      </p:nvGrpSpPr>
+      <p:grpSpPr>
+        <a:xfrm>
+          <a:off x="0" y="0"/>
+          <a:ext cx="0" cy="0"/>
+          <a:chOff x="0" y="0"/>
+          <a:chExt cx="0" cy="0"/>
+        </a:xfrm>
+      </p:grpSpPr>
+      <p:sp>
+        <p:nvSpPr>
+          <p:cNvPr id="2" name="Slide Image Placeholder 1"/>
+          <p:cNvSpPr>
+            <a:spLocks noGrp="1" noRot="1" noChangeAspect="1"/>
+          </p:cNvSpPr>
+          <p:nvPr>
+            <p:ph type="sldImg"/>
+          </p:nvPr>
+        </p:nvSpPr>
+        <p:spPr/>
+      </p:sp>
+      <p:sp>
+        <p:nvSpPr>
+          <p:cNvPr id="3" name="Notes Placeholder 2"/>
+          <p:cNvSpPr>
+            <a:spLocks noGrp="1"/>
+          </p:cNvSpPr>
+          <p:nvPr>
+            <p:ph type="body" idx="1"/>
+          </p:nvPr>
+        </p:nvSpPr>
+        <p:spPr/>
+        <p:txBody>
+          <a:bodyPr>
+            <a:normAutofit fontScale="77500" lnSpcReduction="20000"/>
+          </a:bodyPr>
+          <a:lstStyle/>
+          <a:p>
+            <a:r>
+              <a:rPr lang="en-US" dirty="0"/>
+              <a:t>Note:</a:t>
+            </a:r>
+          </a:p>
+          <a:p>
+            <a:endParaRPr lang="en-US" dirty="0"/>
+          </a:p>
+          <a:p>
+            <a:r>
+              <a:rPr lang="en-US" dirty="0"/>
+              <a:t>The method “For&lt;I&gt;()” creates an instance of I. </a:t>
+            </a:r>
+          </a:p>
+          <a:p>
+            <a:endParaRPr lang="en-US" dirty="0"/>
+          </a:p>
+          <a:p>
+            <a:r>
+              <a:rPr lang="en-US" dirty="0"/>
+              <a:t>The method “Returns” is probably more magical, especially for Java programmer. E.g. in the above example the method “value(x)” of </a:t>
+            </a:r>
+            <a:r>
+              <a:rPr lang="en-US" dirty="0" err="1"/>
+              <a:t>IThremometer</a:t>
+            </a:r>
+            <a:r>
+              <a:rPr lang="en-US" dirty="0"/>
+              <a:t> returns a “double”. Now, in C# primitives like double are also objects. </a:t>
+            </a:r>
+          </a:p>
+          <a:p>
+            <a:endParaRPr lang="en-US" dirty="0"/>
+          </a:p>
+          <a:p>
+            <a:r>
+              <a:rPr lang="en-US" dirty="0"/>
+              <a:t>Furthermore C# allows a class, including primitives, to be “method-extended”. Normal class can be sub-classed. But primitives and sealed classes cannot be sub-classed. However, C# allows a syntactic sugar called “extension method”. Example with extending string:</a:t>
+            </a:r>
+          </a:p>
+          <a:p>
+            <a:endParaRPr lang="en-US" dirty="0"/>
+          </a:p>
+          <a:p>
+            <a:r>
+              <a:rPr lang="en-US" sz="1200" b="1" i="0" kern="1200" dirty="0">
+                <a:solidFill>
+                  <a:schemeClr val="tx1"/>
+                </a:solidFill>
+                <a:effectLst/>
+                <a:latin typeface="+mn-lt"/>
+                <a:ea typeface="+mn-ea"/>
+                <a:cs typeface="+mn-cs"/>
+              </a:rPr>
+              <a:t>static</a:t>
+            </a:r>
+            <a:r>
+              <a:rPr lang="en-US" sz="1200" b="0" i="0" kern="1200" dirty="0">
+                <a:solidFill>
+                  <a:schemeClr val="tx1"/>
+                </a:solidFill>
+                <a:effectLst/>
+                <a:latin typeface="+mn-lt"/>
+                <a:ea typeface="+mn-ea"/>
+                <a:cs typeface="+mn-cs"/>
+              </a:rPr>
+              <a:t> </a:t>
+            </a:r>
+            <a:r>
+              <a:rPr lang="en-US" sz="1200" b="1" i="0" kern="1200" dirty="0">
+                <a:solidFill>
+                  <a:schemeClr val="tx1"/>
+                </a:solidFill>
+                <a:effectLst/>
+                <a:latin typeface="+mn-lt"/>
+                <a:ea typeface="+mn-ea"/>
+                <a:cs typeface="+mn-cs"/>
+              </a:rPr>
+              <a:t>class</a:t>
+            </a:r>
+            <a:r>
+              <a:rPr lang="en-US" sz="1200" b="0" i="0" kern="1200" dirty="0">
+                <a:solidFill>
+                  <a:schemeClr val="tx1"/>
+                </a:solidFill>
+                <a:effectLst/>
+                <a:latin typeface="+mn-lt"/>
+                <a:ea typeface="+mn-ea"/>
+                <a:cs typeface="+mn-cs"/>
+              </a:rPr>
+              <a:t>  Extensions  </a:t>
+            </a:r>
+          </a:p>
+          <a:p>
+            <a:r>
+              <a:rPr lang="en-US" sz="1200" b="0" i="0" kern="1200" dirty="0">
+                <a:solidFill>
+                  <a:schemeClr val="tx1"/>
+                </a:solidFill>
+                <a:effectLst/>
+                <a:latin typeface="+mn-lt"/>
+                <a:ea typeface="+mn-ea"/>
+                <a:cs typeface="+mn-cs"/>
+              </a:rPr>
+              <a:t>    {  </a:t>
+            </a:r>
+          </a:p>
+          <a:p>
+            <a:r>
+              <a:rPr lang="en-US" sz="1200" b="0" i="0" kern="1200" dirty="0">
+                <a:solidFill>
+                  <a:schemeClr val="tx1"/>
+                </a:solidFill>
+                <a:effectLst/>
+                <a:latin typeface="+mn-lt"/>
+                <a:ea typeface="+mn-ea"/>
+                <a:cs typeface="+mn-cs"/>
+              </a:rPr>
+              <a:t>        </a:t>
+            </a:r>
+            <a:r>
+              <a:rPr lang="en-US" sz="1200" b="1" i="0" kern="1200" dirty="0">
+                <a:solidFill>
+                  <a:schemeClr val="tx1"/>
+                </a:solidFill>
+                <a:effectLst/>
+                <a:latin typeface="+mn-lt"/>
+                <a:ea typeface="+mn-ea"/>
+                <a:cs typeface="+mn-cs"/>
+              </a:rPr>
+              <a:t>public</a:t>
+            </a:r>
+            <a:r>
+              <a:rPr lang="en-US" sz="1200" b="0" i="0" kern="1200" dirty="0">
+                <a:solidFill>
+                  <a:schemeClr val="tx1"/>
+                </a:solidFill>
+                <a:effectLst/>
+                <a:latin typeface="+mn-lt"/>
+                <a:ea typeface="+mn-ea"/>
+                <a:cs typeface="+mn-cs"/>
+              </a:rPr>
+              <a:t> </a:t>
+            </a:r>
+            <a:r>
+              <a:rPr lang="en-US" sz="1200" b="1" i="0" kern="1200" dirty="0">
+                <a:solidFill>
+                  <a:schemeClr val="tx1"/>
+                </a:solidFill>
+                <a:effectLst/>
+                <a:latin typeface="+mn-lt"/>
+                <a:ea typeface="+mn-ea"/>
+                <a:cs typeface="+mn-cs"/>
+              </a:rPr>
+              <a:t>static</a:t>
+            </a:r>
+            <a:r>
+              <a:rPr lang="en-US" sz="1200" b="0" i="0" kern="1200" dirty="0">
+                <a:solidFill>
+                  <a:schemeClr val="tx1"/>
+                </a:solidFill>
+                <a:effectLst/>
+                <a:latin typeface="+mn-lt"/>
+                <a:ea typeface="+mn-ea"/>
+                <a:cs typeface="+mn-cs"/>
+              </a:rPr>
+              <a:t> </a:t>
+            </a:r>
+            <a:r>
+              <a:rPr lang="en-US" sz="1200" b="1" i="0" kern="1200" dirty="0">
+                <a:solidFill>
+                  <a:schemeClr val="tx1"/>
+                </a:solidFill>
+                <a:effectLst/>
+                <a:latin typeface="+mn-lt"/>
+                <a:ea typeface="+mn-ea"/>
+                <a:cs typeface="+mn-cs"/>
+              </a:rPr>
+              <a:t>string</a:t>
+            </a:r>
+            <a:r>
+              <a:rPr lang="en-US" sz="1200" b="0" i="0" kern="1200" dirty="0">
+                <a:solidFill>
+                  <a:schemeClr val="tx1"/>
+                </a:solidFill>
+                <a:effectLst/>
+                <a:latin typeface="+mn-lt"/>
+                <a:ea typeface="+mn-ea"/>
+                <a:cs typeface="+mn-cs"/>
+              </a:rPr>
+              <a:t> </a:t>
+            </a:r>
+            <a:r>
+              <a:rPr lang="en-US" sz="1200" b="0" i="0" kern="1200" dirty="0" err="1">
+                <a:solidFill>
+                  <a:schemeClr val="tx1"/>
+                </a:solidFill>
+                <a:effectLst/>
+                <a:latin typeface="+mn-lt"/>
+                <a:ea typeface="+mn-ea"/>
+                <a:cs typeface="+mn-cs"/>
+              </a:rPr>
+              <a:t>UpperFirst</a:t>
+            </a:r>
+            <a:r>
+              <a:rPr lang="en-US" sz="1200" b="0" i="0" kern="1200" dirty="0">
+                <a:solidFill>
+                  <a:schemeClr val="tx1"/>
+                </a:solidFill>
+                <a:effectLst/>
+                <a:latin typeface="+mn-lt"/>
+                <a:ea typeface="+mn-ea"/>
+                <a:cs typeface="+mn-cs"/>
+              </a:rPr>
+              <a:t>(</a:t>
+            </a:r>
+            <a:r>
+              <a:rPr lang="en-US" sz="1200" b="1" i="0" kern="1200" dirty="0">
+                <a:solidFill>
+                  <a:schemeClr val="tx1"/>
+                </a:solidFill>
+                <a:effectLst/>
+                <a:latin typeface="+mn-lt"/>
+                <a:ea typeface="+mn-ea"/>
+                <a:cs typeface="+mn-cs"/>
+              </a:rPr>
+              <a:t>this</a:t>
+            </a:r>
+            <a:r>
+              <a:rPr lang="en-US" sz="1200" b="0" i="0" kern="1200" dirty="0">
+                <a:solidFill>
+                  <a:schemeClr val="tx1"/>
+                </a:solidFill>
+                <a:effectLst/>
+                <a:latin typeface="+mn-lt"/>
+                <a:ea typeface="+mn-ea"/>
+                <a:cs typeface="+mn-cs"/>
+              </a:rPr>
+              <a:t> String </a:t>
+            </a:r>
+            <a:r>
+              <a:rPr lang="en-US" sz="1200" b="0" i="0" kern="1200" dirty="0" err="1">
+                <a:solidFill>
+                  <a:schemeClr val="tx1"/>
+                </a:solidFill>
+                <a:effectLst/>
+                <a:latin typeface="+mn-lt"/>
+                <a:ea typeface="+mn-ea"/>
+                <a:cs typeface="+mn-cs"/>
+              </a:rPr>
+              <a:t>str</a:t>
+            </a:r>
+            <a:r>
+              <a:rPr lang="en-US" sz="1200" b="0" i="0" kern="1200" dirty="0">
+                <a:solidFill>
+                  <a:schemeClr val="tx1"/>
+                </a:solidFill>
+                <a:effectLst/>
+                <a:latin typeface="+mn-lt"/>
+                <a:ea typeface="+mn-ea"/>
+                <a:cs typeface="+mn-cs"/>
+              </a:rPr>
+              <a:t>)  </a:t>
+            </a:r>
+          </a:p>
+          <a:p>
+            <a:r>
+              <a:rPr lang="en-US" sz="1200" b="0" i="0" kern="1200" dirty="0">
+                <a:solidFill>
+                  <a:schemeClr val="tx1"/>
+                </a:solidFill>
+                <a:effectLst/>
+                <a:latin typeface="+mn-lt"/>
+                <a:ea typeface="+mn-ea"/>
+                <a:cs typeface="+mn-cs"/>
+              </a:rPr>
+              <a:t>        {  </a:t>
+            </a:r>
+          </a:p>
+          <a:p>
+            <a:r>
+              <a:rPr lang="en-US" sz="1200" b="0" i="0" kern="1200" dirty="0">
+                <a:solidFill>
+                  <a:schemeClr val="tx1"/>
+                </a:solidFill>
+                <a:effectLst/>
+                <a:latin typeface="+mn-lt"/>
+                <a:ea typeface="+mn-ea"/>
+                <a:cs typeface="+mn-cs"/>
+              </a:rPr>
+              <a:t>            </a:t>
+            </a:r>
+            <a:r>
+              <a:rPr lang="en-US" sz="1200" b="1" i="0" kern="1200" dirty="0">
+                <a:solidFill>
+                  <a:schemeClr val="tx1"/>
+                </a:solidFill>
+                <a:effectLst/>
+                <a:latin typeface="+mn-lt"/>
+                <a:ea typeface="+mn-ea"/>
+                <a:cs typeface="+mn-cs"/>
+              </a:rPr>
+              <a:t>if</a:t>
+            </a:r>
+            <a:r>
+              <a:rPr lang="en-US" sz="1200" b="0" i="0" kern="1200" dirty="0">
+                <a:solidFill>
+                  <a:schemeClr val="tx1"/>
+                </a:solidFill>
+                <a:effectLst/>
+                <a:latin typeface="+mn-lt"/>
+                <a:ea typeface="+mn-ea"/>
+                <a:cs typeface="+mn-cs"/>
+              </a:rPr>
+              <a:t> (</a:t>
+            </a:r>
+            <a:r>
+              <a:rPr lang="en-US" sz="1200" b="0" i="0" kern="1200" dirty="0" err="1">
+                <a:solidFill>
+                  <a:schemeClr val="tx1"/>
+                </a:solidFill>
+                <a:effectLst/>
+                <a:latin typeface="+mn-lt"/>
+                <a:ea typeface="+mn-ea"/>
+                <a:cs typeface="+mn-cs"/>
+              </a:rPr>
+              <a:t>String.IsNullOrEmpty</a:t>
+            </a:r>
+            <a:r>
+              <a:rPr lang="en-US" sz="1200" b="0" i="0" kern="1200" dirty="0">
+                <a:solidFill>
+                  <a:schemeClr val="tx1"/>
+                </a:solidFill>
+                <a:effectLst/>
+                <a:latin typeface="+mn-lt"/>
+                <a:ea typeface="+mn-ea"/>
+                <a:cs typeface="+mn-cs"/>
+              </a:rPr>
+              <a:t>(</a:t>
+            </a:r>
+            <a:r>
+              <a:rPr lang="en-US" sz="1200" b="0" i="0" kern="1200" dirty="0" err="1">
+                <a:solidFill>
+                  <a:schemeClr val="tx1"/>
+                </a:solidFill>
+                <a:effectLst/>
+                <a:latin typeface="+mn-lt"/>
+                <a:ea typeface="+mn-ea"/>
+                <a:cs typeface="+mn-cs"/>
+              </a:rPr>
+              <a:t>str</a:t>
+            </a:r>
+            <a:r>
+              <a:rPr lang="en-US" sz="1200" b="0" i="0" kern="1200" dirty="0">
+                <a:solidFill>
+                  <a:schemeClr val="tx1"/>
+                </a:solidFill>
+                <a:effectLst/>
+                <a:latin typeface="+mn-lt"/>
+                <a:ea typeface="+mn-ea"/>
+                <a:cs typeface="+mn-cs"/>
+              </a:rPr>
+              <a:t>))  </a:t>
+            </a:r>
+          </a:p>
+          <a:p>
+            <a:r>
+              <a:rPr lang="en-US" sz="1200" b="0" i="0" kern="1200" dirty="0">
+                <a:solidFill>
+                  <a:schemeClr val="tx1"/>
+                </a:solidFill>
+                <a:effectLst/>
+                <a:latin typeface="+mn-lt"/>
+                <a:ea typeface="+mn-ea"/>
+                <a:cs typeface="+mn-cs"/>
+              </a:rPr>
+              <a:t>                </a:t>
+            </a:r>
+            <a:r>
+              <a:rPr lang="en-US" sz="1200" b="1" i="0" kern="1200" dirty="0">
+                <a:solidFill>
+                  <a:schemeClr val="tx1"/>
+                </a:solidFill>
+                <a:effectLst/>
+                <a:latin typeface="+mn-lt"/>
+                <a:ea typeface="+mn-ea"/>
+                <a:cs typeface="+mn-cs"/>
+              </a:rPr>
+              <a:t>return</a:t>
+            </a:r>
+            <a:r>
+              <a:rPr lang="en-US" sz="1200" b="0" i="0" kern="1200" dirty="0">
+                <a:solidFill>
+                  <a:schemeClr val="tx1"/>
+                </a:solidFill>
+                <a:effectLst/>
+                <a:latin typeface="+mn-lt"/>
+                <a:ea typeface="+mn-ea"/>
+                <a:cs typeface="+mn-cs"/>
+              </a:rPr>
+              <a:t> </a:t>
+            </a:r>
+            <a:r>
+              <a:rPr lang="en-US" sz="1200" b="0" i="0" kern="1200" dirty="0" err="1">
+                <a:solidFill>
+                  <a:schemeClr val="tx1"/>
+                </a:solidFill>
+                <a:effectLst/>
+                <a:latin typeface="+mn-lt"/>
+                <a:ea typeface="+mn-ea"/>
+                <a:cs typeface="+mn-cs"/>
+              </a:rPr>
+              <a:t>String.Empty</a:t>
+            </a:r>
+            <a:r>
+              <a:rPr lang="en-US" sz="1200" b="0" i="0" kern="1200" dirty="0">
+                <a:solidFill>
+                  <a:schemeClr val="tx1"/>
+                </a:solidFill>
+                <a:effectLst/>
+                <a:latin typeface="+mn-lt"/>
+                <a:ea typeface="+mn-ea"/>
+                <a:cs typeface="+mn-cs"/>
+              </a:rPr>
+              <a:t>;  </a:t>
+            </a:r>
+          </a:p>
+          <a:p>
+            <a:r>
+              <a:rPr lang="en-US" sz="1200" b="0" i="0" kern="1200" dirty="0">
+                <a:solidFill>
+                  <a:schemeClr val="tx1"/>
+                </a:solidFill>
+                <a:effectLst/>
+                <a:latin typeface="+mn-lt"/>
+                <a:ea typeface="+mn-ea"/>
+                <a:cs typeface="+mn-cs"/>
+              </a:rPr>
+              <a:t>  </a:t>
+            </a:r>
+          </a:p>
+          <a:p>
+            <a:r>
+              <a:rPr lang="en-US" sz="1200" b="0" i="0" kern="1200" dirty="0">
+                <a:solidFill>
+                  <a:schemeClr val="tx1"/>
+                </a:solidFill>
+                <a:effectLst/>
+                <a:latin typeface="+mn-lt"/>
+                <a:ea typeface="+mn-ea"/>
+                <a:cs typeface="+mn-cs"/>
+              </a:rPr>
+              <a:t>            </a:t>
+            </a:r>
+            <a:r>
+              <a:rPr lang="en-US" sz="1200" b="1" i="0" kern="1200" dirty="0">
+                <a:solidFill>
+                  <a:schemeClr val="tx1"/>
+                </a:solidFill>
+                <a:effectLst/>
+                <a:latin typeface="+mn-lt"/>
+                <a:ea typeface="+mn-ea"/>
+                <a:cs typeface="+mn-cs"/>
+              </a:rPr>
+              <a:t>return</a:t>
+            </a:r>
+            <a:r>
+              <a:rPr lang="en-US" sz="1200" b="0" i="0" kern="1200" dirty="0">
+                <a:solidFill>
+                  <a:schemeClr val="tx1"/>
+                </a:solidFill>
+                <a:effectLst/>
+                <a:latin typeface="+mn-lt"/>
+                <a:ea typeface="+mn-ea"/>
+                <a:cs typeface="+mn-cs"/>
+              </a:rPr>
+              <a:t> </a:t>
+            </a:r>
+            <a:r>
+              <a:rPr lang="en-US" sz="1200" b="0" i="0" kern="1200" dirty="0" err="1">
+                <a:solidFill>
+                  <a:schemeClr val="tx1"/>
+                </a:solidFill>
+                <a:effectLst/>
+                <a:latin typeface="+mn-lt"/>
+                <a:ea typeface="+mn-ea"/>
+                <a:cs typeface="+mn-cs"/>
+              </a:rPr>
+              <a:t>str.Substring</a:t>
+            </a:r>
+            <a:r>
+              <a:rPr lang="en-US" sz="1200" b="0" i="0" kern="1200" dirty="0">
+                <a:solidFill>
+                  <a:schemeClr val="tx1"/>
+                </a:solidFill>
+                <a:effectLst/>
+                <a:latin typeface="+mn-lt"/>
+                <a:ea typeface="+mn-ea"/>
+                <a:cs typeface="+mn-cs"/>
+              </a:rPr>
+              <a:t>(0, 1).</a:t>
+            </a:r>
+            <a:r>
+              <a:rPr lang="en-US" sz="1200" b="0" i="0" kern="1200" dirty="0" err="1">
+                <a:solidFill>
+                  <a:schemeClr val="tx1"/>
+                </a:solidFill>
+                <a:effectLst/>
+                <a:latin typeface="+mn-lt"/>
+                <a:ea typeface="+mn-ea"/>
+                <a:cs typeface="+mn-cs"/>
+              </a:rPr>
+              <a:t>ToUpper</a:t>
+            </a:r>
+            <a:r>
+              <a:rPr lang="en-US" sz="1200" b="0" i="0" kern="1200" dirty="0">
+                <a:solidFill>
+                  <a:schemeClr val="tx1"/>
+                </a:solidFill>
+                <a:effectLst/>
+                <a:latin typeface="+mn-lt"/>
+                <a:ea typeface="+mn-ea"/>
+                <a:cs typeface="+mn-cs"/>
+              </a:rPr>
+              <a:t>() + </a:t>
+            </a:r>
+            <a:r>
+              <a:rPr lang="en-US" sz="1200" b="0" i="0" kern="1200" dirty="0" err="1">
+                <a:solidFill>
+                  <a:schemeClr val="tx1"/>
+                </a:solidFill>
+                <a:effectLst/>
+                <a:latin typeface="+mn-lt"/>
+                <a:ea typeface="+mn-ea"/>
+                <a:cs typeface="+mn-cs"/>
+              </a:rPr>
+              <a:t>str.Substring</a:t>
+            </a:r>
+            <a:r>
+              <a:rPr lang="en-US" sz="1200" b="0" i="0" kern="1200" dirty="0">
+                <a:solidFill>
+                  <a:schemeClr val="tx1"/>
+                </a:solidFill>
+                <a:effectLst/>
+                <a:latin typeface="+mn-lt"/>
+                <a:ea typeface="+mn-ea"/>
+                <a:cs typeface="+mn-cs"/>
+              </a:rPr>
+              <a:t>(1, str.Length-1).</a:t>
+            </a:r>
+            <a:r>
+              <a:rPr lang="en-US" sz="1200" b="0" i="0" kern="1200" dirty="0" err="1">
+                <a:solidFill>
+                  <a:schemeClr val="tx1"/>
+                </a:solidFill>
+                <a:effectLst/>
+                <a:latin typeface="+mn-lt"/>
+                <a:ea typeface="+mn-ea"/>
+                <a:cs typeface="+mn-cs"/>
+              </a:rPr>
+              <a:t>ToLower</a:t>
+            </a:r>
+            <a:r>
+              <a:rPr lang="en-US" sz="1200" b="0" i="0" kern="1200" dirty="0">
+                <a:solidFill>
+                  <a:schemeClr val="tx1"/>
+                </a:solidFill>
+                <a:effectLst/>
+                <a:latin typeface="+mn-lt"/>
+                <a:ea typeface="+mn-ea"/>
+                <a:cs typeface="+mn-cs"/>
+              </a:rPr>
+              <a:t>();  </a:t>
+            </a:r>
+          </a:p>
+          <a:p>
+            <a:r>
+              <a:rPr lang="en-US" sz="1200" b="0" i="0" kern="1200" dirty="0">
+                <a:solidFill>
+                  <a:schemeClr val="tx1"/>
+                </a:solidFill>
+                <a:effectLst/>
+                <a:latin typeface="+mn-lt"/>
+                <a:ea typeface="+mn-ea"/>
+                <a:cs typeface="+mn-cs"/>
+              </a:rPr>
+              <a:t>        }  </a:t>
+            </a:r>
+          </a:p>
+          <a:p>
+            <a:r>
+              <a:rPr lang="en-US" sz="1200" b="0" i="0" kern="1200" dirty="0">
+                <a:solidFill>
+                  <a:schemeClr val="tx1"/>
+                </a:solidFill>
+                <a:effectLst/>
+                <a:latin typeface="+mn-lt"/>
+                <a:ea typeface="+mn-ea"/>
+                <a:cs typeface="+mn-cs"/>
+              </a:rPr>
+              <a:t>    }  </a:t>
+            </a:r>
+          </a:p>
+          <a:p>
+            <a:endParaRPr lang="en-US" dirty="0"/>
+          </a:p>
+          <a:p>
+            <a:r>
+              <a:rPr lang="en-US" dirty="0"/>
+              <a:t>Having this in the scope, we can now write:</a:t>
+            </a:r>
+            <a:br>
+              <a:rPr lang="en-US" dirty="0"/>
+            </a:br>
+            <a:br>
+              <a:rPr lang="en-US" dirty="0"/>
+            </a:br>
+            <a:r>
+              <a:rPr lang="en-US" dirty="0"/>
+              <a:t>   String z = “hello”</a:t>
+            </a:r>
+            <a:br>
+              <a:rPr lang="en-US" dirty="0"/>
+            </a:br>
+            <a:r>
+              <a:rPr lang="en-US" dirty="0"/>
+              <a:t>    z = </a:t>
+            </a:r>
+            <a:r>
+              <a:rPr lang="en-US" dirty="0" err="1"/>
+              <a:t>z.UpperFirst</a:t>
+            </a:r>
+            <a:r>
+              <a:rPr lang="en-US" dirty="0"/>
+              <a:t>()</a:t>
+            </a:r>
+            <a:br>
+              <a:rPr lang="en-US" dirty="0"/>
+            </a:br>
+            <a:br>
+              <a:rPr lang="en-US" dirty="0"/>
+            </a:br>
+            <a:r>
+              <a:rPr lang="en-US" dirty="0"/>
+              <a:t>So what </a:t>
+            </a:r>
+            <a:r>
+              <a:rPr lang="en-US" dirty="0" err="1"/>
+              <a:t>NSubstutute</a:t>
+            </a:r>
+            <a:r>
+              <a:rPr lang="en-US" dirty="0"/>
+              <a:t> does is likely to extend return types of mocked methods, including primitives, with the method “Returns”.</a:t>
+            </a:r>
+          </a:p>
+          <a:p>
+            <a:endParaRPr lang="en-US" dirty="0"/>
+          </a:p>
+          <a:p>
+            <a:endParaRPr lang="en-US" dirty="0"/>
+          </a:p>
+        </p:txBody>
+      </p:sp>
+      <p:sp>
+        <p:nvSpPr>
+          <p:cNvPr id="4" name="Slide Number Placeholder 3"/>
+          <p:cNvSpPr>
+            <a:spLocks noGrp="1"/>
+          </p:cNvSpPr>
+          <p:nvPr>
+            <p:ph type="sldNum" sz="quarter" idx="5"/>
+          </p:nvPr>
+        </p:nvSpPr>
+        <p:spPr/>
+        <p:txBody>
+          <a:bodyPr/>
+          <a:lstStyle/>
+          <a:p>
+            <a:pPr>
+              <a:defRPr/>
+            </a:pPr>
+            <a:fld id="{F84EA20E-9838-494E-B9DD-2C988F7E650A}" type="slidenum">
+              <a:rPr lang="en-US" smtClean="0"/>
+              <a:pPr>
+                <a:defRPr/>
+              </a:pPr>
+              <a:t>46</a:t>
+            </a:fld>
+            <a:endParaRPr lang="en-US"/>
+          </a:p>
+        </p:txBody>
+      </p:sp>
+    </p:spTree>
+    <p:extLst>
+      <p:ext uri="{BB962C8B-B14F-4D97-AF65-F5344CB8AC3E}">
+        <p14:creationId xmlns:p14="http://schemas.microsoft.com/office/powerpoint/2010/main" val="812723745"/>
+      </p:ext>
+    </p:extLst>
+  </p:cSld>
+  <p:clrMapOvr>
+    <a:masterClrMapping/>
+  </p:clrMapOvr>
+</p:notes>
+</file>
+
+<file path=ppt/notesSlides/notesSlide21.xml><?xml version="1.0" encoding="utf-8"?>
 <p:notes xmlns:a="http://schemas.openxmlformats.org/drawingml/2006/main" xmlns:r="http://schemas.openxmlformats.org/officeDocument/2006/relationships" xmlns:p="http://schemas.openxmlformats.org/presentationml/2006/main">
   <p:cSld>
     <p:spTree>
@@ -3686,7 +3776,7 @@
               <a:pPr>
                 <a:defRPr/>
               </a:pPr>
-              <a:t>20-04-2026</a:t>
+              <a:t>23-04-2026</a:t>
             </a:fld>
             <a:endParaRPr lang="en-US"/>
           </a:p>
@@ -3876,7 +3966,7 @@
               <a:pPr>
                 <a:defRPr/>
               </a:pPr>
-              <a:t>20-04-2026</a:t>
+              <a:t>23-04-2026</a:t>
             </a:fld>
             <a:endParaRPr lang="en-US"/>
           </a:p>
@@ -4076,7 +4166,7 @@
               <a:pPr>
                 <a:defRPr/>
               </a:pPr>
-              <a:t>20-04-2026</a:t>
+              <a:t>23-04-2026</a:t>
             </a:fld>
             <a:endParaRPr lang="en-US"/>
           </a:p>
@@ -4272,7 +4362,7 @@
               <a:pPr>
                 <a:defRPr/>
               </a:pPr>
-              <a:t>20-04-2026</a:t>
+              <a:t>23-04-2026</a:t>
             </a:fld>
             <a:endParaRPr lang="en-US"/>
           </a:p>
@@ -4539,7 +4629,7 @@
               <a:pPr>
                 <a:defRPr/>
               </a:pPr>
-              <a:t>20-04-2026</a:t>
+              <a:t>23-04-2026</a:t>
             </a:fld>
             <a:endParaRPr lang="en-US"/>
           </a:p>
@@ -4846,7 +4936,7 @@
               <a:pPr>
                 <a:defRPr/>
               </a:pPr>
-              <a:t>20-04-2026</a:t>
+              <a:t>23-04-2026</a:t>
             </a:fld>
             <a:endParaRPr lang="en-US"/>
           </a:p>
@@ -5287,7 +5377,7 @@
               <a:pPr>
                 <a:defRPr/>
               </a:pPr>
-              <a:t>20-04-2026</a:t>
+              <a:t>23-04-2026</a:t>
             </a:fld>
             <a:endParaRPr lang="en-US"/>
           </a:p>
@@ -5432,7 +5522,7 @@
               <a:pPr>
                 <a:defRPr/>
               </a:pPr>
-              <a:t>20-04-2026</a:t>
+              <a:t>23-04-2026</a:t>
             </a:fld>
             <a:endParaRPr lang="en-US"/>
           </a:p>
@@ -5549,7 +5639,7 @@
               <a:pPr>
                 <a:defRPr/>
               </a:pPr>
-              <a:t>20-04-2026</a:t>
+              <a:t>23-04-2026</a:t>
             </a:fld>
             <a:endParaRPr lang="en-US"/>
           </a:p>
@@ -5846,7 +5936,7 @@
               <a:pPr>
                 <a:defRPr/>
               </a:pPr>
-              <a:t>20-04-2026</a:t>
+              <a:t>23-04-2026</a:t>
             </a:fld>
             <a:endParaRPr lang="en-US"/>
           </a:p>
@@ -6126,7 +6216,7 @@
               <a:pPr>
                 <a:defRPr/>
               </a:pPr>
-              <a:t>20-04-2026</a:t>
+              <a:t>23-04-2026</a:t>
             </a:fld>
             <a:endParaRPr lang="en-US"/>
           </a:p>
@@ -6382,7 +6472,7 @@
               <a:pPr>
                 <a:defRPr/>
               </a:pPr>
-              <a:t>20-04-2026</a:t>
+              <a:t>23-04-2026</a:t>
             </a:fld>
             <a:endParaRPr lang="en-US"/>
           </a:p>
@@ -16724,16 +16814,23 @@
               </a:rPr>
               <a:t>specify every method with pre- and post-conditions (we discussed this).</a:t>
             </a:r>
-            <a:br>
-              <a:rPr lang="en-US" sz="2800" dirty="0">
+          </a:p>
+          <a:p>
+            <a:pPr lvl="1" eaLnBrk="1" hangingPunct="1"/>
+            <a:r>
+              <a:rPr lang="en-US" sz="2400" dirty="0">
                 <a:sym typeface="Symbol" pitchFamily="18" charset="2"/>
               </a:rPr>
-            </a:br>
-            <a:r>
-              <a:rPr lang="en-US" sz="2800" dirty="0">
+              <a:t>This is expressive enough, tough pre- and post-conditions may not, arguably, naturally capture inter-method interactions.</a:t>
+            </a:r>
+          </a:p>
+          <a:p>
+            <a:pPr lvl="1" eaLnBrk="1" hangingPunct="1"/>
+            <a:r>
+              <a:rPr lang="en-US" sz="2400" dirty="0">
                 <a:sym typeface="Symbol" pitchFamily="18" charset="2"/>
               </a:rPr>
-              <a:t>This is expressive enough, tough pre- and post-conditions do not, arguably, naturally capture inter-method interactions.</a:t>
+              <a:t>May need to access private fields. Also, directly testing private methods via their pre-/post is an issue.</a:t>
             </a:r>
           </a:p>
         </p:txBody>

--- a/slides/ut.pptx
+++ b/slides/ut.pptx
@@ -311,7 +311,7 @@
               <a:pPr>
                 <a:defRPr/>
               </a:pPr>
-              <a:t>23-04-2026</a:t>
+              <a:t>27-04-2026</a:t>
             </a:fld>
             <a:endParaRPr lang="en-US"/>
           </a:p>
@@ -2605,7 +2605,7 @@
             </a:r>
             <a:r>
               <a:rPr lang="en-US" dirty="0"/>
-              <a:t> does is likely to extend return types of mocked methods, including primitives, with the method “Returns”.</a:t>
+              <a:t> does is likely to extend return types of mocked methods with the method “Returns”.</a:t>
             </a:r>
           </a:p>
           <a:p>
@@ -3776,7 +3776,7 @@
               <a:pPr>
                 <a:defRPr/>
               </a:pPr>
-              <a:t>23-04-2026</a:t>
+              <a:t>27-04-2026</a:t>
             </a:fld>
             <a:endParaRPr lang="en-US"/>
           </a:p>
@@ -3966,7 +3966,7 @@
               <a:pPr>
                 <a:defRPr/>
               </a:pPr>
-              <a:t>23-04-2026</a:t>
+              <a:t>27-04-2026</a:t>
             </a:fld>
             <a:endParaRPr lang="en-US"/>
           </a:p>
@@ -4166,7 +4166,7 @@
               <a:pPr>
                 <a:defRPr/>
               </a:pPr>
-              <a:t>23-04-2026</a:t>
+              <a:t>27-04-2026</a:t>
             </a:fld>
             <a:endParaRPr lang="en-US"/>
           </a:p>
@@ -4362,7 +4362,7 @@
               <a:pPr>
                 <a:defRPr/>
               </a:pPr>
-              <a:t>23-04-2026</a:t>
+              <a:t>27-04-2026</a:t>
             </a:fld>
             <a:endParaRPr lang="en-US"/>
           </a:p>
@@ -4629,7 +4629,7 @@
               <a:pPr>
                 <a:defRPr/>
               </a:pPr>
-              <a:t>23-04-2026</a:t>
+              <a:t>27-04-2026</a:t>
             </a:fld>
             <a:endParaRPr lang="en-US"/>
           </a:p>
@@ -4936,7 +4936,7 @@
               <a:pPr>
                 <a:defRPr/>
               </a:pPr>
-              <a:t>23-04-2026</a:t>
+              <a:t>27-04-2026</a:t>
             </a:fld>
             <a:endParaRPr lang="en-US"/>
           </a:p>
@@ -5377,7 +5377,7 @@
               <a:pPr>
                 <a:defRPr/>
               </a:pPr>
-              <a:t>23-04-2026</a:t>
+              <a:t>27-04-2026</a:t>
             </a:fld>
             <a:endParaRPr lang="en-US"/>
           </a:p>
@@ -5522,7 +5522,7 @@
               <a:pPr>
                 <a:defRPr/>
               </a:pPr>
-              <a:t>23-04-2026</a:t>
+              <a:t>27-04-2026</a:t>
             </a:fld>
             <a:endParaRPr lang="en-US"/>
           </a:p>
@@ -5639,7 +5639,7 @@
               <a:pPr>
                 <a:defRPr/>
               </a:pPr>
-              <a:t>23-04-2026</a:t>
+              <a:t>27-04-2026</a:t>
             </a:fld>
             <a:endParaRPr lang="en-US"/>
           </a:p>
@@ -5936,7 +5936,7 @@
               <a:pPr>
                 <a:defRPr/>
               </a:pPr>
-              <a:t>23-04-2026</a:t>
+              <a:t>27-04-2026</a:t>
             </a:fld>
             <a:endParaRPr lang="en-US"/>
           </a:p>
@@ -6216,7 +6216,7 @@
               <a:pPr>
                 <a:defRPr/>
               </a:pPr>
-              <a:t>23-04-2026</a:t>
+              <a:t>27-04-2026</a:t>
             </a:fld>
             <a:endParaRPr lang="en-US"/>
           </a:p>
@@ -6472,7 +6472,7 @@
               <a:pPr>
                 <a:defRPr/>
               </a:pPr>
-              <a:t>23-04-2026</a:t>
+              <a:t>27-04-2026</a:t>
             </a:fld>
             <a:endParaRPr lang="en-US"/>
           </a:p>
@@ -18739,13 +18739,10 @@
               <a:rPr lang="en-US" sz="2000" i="1" dirty="0"/>
               <a:t> </a:t>
             </a:r>
-          </a:p>
-          <a:p>
-            <a:pPr marL="800100" lvl="1" indent="-342900">
-              <a:buFont typeface="+mj-lt"/>
-              <a:buAutoNum type="arabicPeriod"/>
-              <a:defRPr/>
-            </a:pPr>
+            <a:r>
+              <a:rPr lang="en-US" sz="2000" dirty="0"/>
+              <a:t>and </a:t>
+            </a:r>
             <a:r>
               <a:rPr lang="en-US" sz="2000" i="1" dirty="0"/>
               <a:t>s</a:t>
@@ -19078,7 +19075,7 @@
               <a:rPr lang="en-US" sz="2800" i="1" dirty="0">
                 <a:latin typeface="+mn-lt"/>
               </a:rPr>
-              <a:t>    Store</a:t>
+              <a:t>    Put</a:t>
             </a:r>
             <a:r>
               <a:rPr lang="en-US" sz="2800" dirty="0">
@@ -19235,7 +19232,7 @@
                 <a:ea typeface="Arial" charset="0"/>
                 <a:sym typeface="Symbol"/>
               </a:rPr>
-              <a:t>After Store(x), Size is 1 + the Size before.</a:t>
+              <a:t>After Put(x), Size is 1 + the Size before.</a:t>
             </a:r>
           </a:p>
           <a:p>
@@ -19265,7 +19262,7 @@
                 <a:ea typeface="Arial" charset="0"/>
                 <a:sym typeface="Symbol"/>
               </a:rPr>
-              <a:t>After Store(x), followed by n-times Store(.) and Get(), such that k-</a:t>
+              <a:t>After Put(x), followed by n-times Put(.) and Get(), such that k-</a:t>
             </a:r>
             <a:r>
               <a:rPr lang="en-US" sz="2400" dirty="0" err="1">
@@ -19297,7 +19294,7 @@
                 <a:ea typeface="Arial" charset="0"/>
                 <a:sym typeface="Symbol"/>
               </a:rPr>
-              <a:t> by at least k-times Store, Get() gives x.</a:t>
+              <a:t> by at least k-times Put, Get() gives x.</a:t>
             </a:r>
           </a:p>
         </p:txBody>
@@ -19474,7 +19471,7 @@
         </p:nvSpPr>
         <p:spPr>
           <a:xfrm>
-            <a:off x="1115616" y="2204864"/>
+            <a:off x="981944" y="2204864"/>
             <a:ext cx="7704856" cy="830997"/>
           </a:xfrm>
           <a:prstGeom prst="rect">
@@ -19546,7 +19543,7 @@
               <a:rPr lang="en-US" sz="2400" dirty="0" err="1">
                 <a:sym typeface="Symbol"/>
               </a:rPr>
-              <a:t>s.Store</a:t>
+              <a:t>s.Put</a:t>
             </a:r>
             <a:r>
               <a:rPr lang="en-US" sz="2400" dirty="0">
@@ -19558,7 +19555,7 @@
               <a:rPr lang="en-US" sz="2400" dirty="0" err="1">
                 <a:sym typeface="Symbol"/>
               </a:rPr>
-              <a:t>s.Store</a:t>
+              <a:t>s.Put</a:t>
             </a:r>
             <a:r>
               <a:rPr lang="en-US" sz="2400" dirty="0">
